--- a/apresentacao/SEMICA_Fumaca_Cirurgica_Baccaro.pptx
+++ b/apresentacao/SEMICA_Fumaca_Cirurgica_Baccaro.pptx
@@ -245,6 +245,258 @@
               <a:srgbClr val="002060"/>
             </a:solidFill>
           </c:spPr>
+          <c:dLbls>
+            <c:dLbl>
+              <c:idx val="0"/>
+              <c:tx>
+                <c:rich>
+                  <a:bodyPr/>
+                  <a:lstStyle/>
+                  <a:p>
+                    <a:r>
+                      <a:rPr sz="1300">
+                        <a:solidFill>
+                          <a:srgbClr val="1F2433"/>
+                        </a:solidFill>
+                        <a:latin typeface="Arial"/>
+                      </a:rPr>
+                      <a:t>4.522</a:t>
+                    </a:r>
+                  </a:p>
+                </c:rich>
+              </c:tx>
+              <c:dLblPos val="outEnd"/>
+              <c:showLegendKey val="0"/>
+              <c:showVal val="1"/>
+              <c:showCatName val="0"/>
+              <c:showSerName val="0"/>
+              <c:showPercent val="0"/>
+              <c:showBubbleSize val="0"/>
+            </c:dLbl>
+            <c:dLbl>
+              <c:idx val="1"/>
+              <c:tx>
+                <c:rich>
+                  <a:bodyPr/>
+                  <a:lstStyle/>
+                  <a:p>
+                    <a:r>
+                      <a:rPr sz="1300">
+                        <a:solidFill>
+                          <a:srgbClr val="1F2433"/>
+                        </a:solidFill>
+                        <a:latin typeface="Arial"/>
+                      </a:rPr>
+                      <a:t>4.660</a:t>
+                    </a:r>
+                  </a:p>
+                </c:rich>
+              </c:tx>
+              <c:dLblPos val="outEnd"/>
+              <c:showLegendKey val="0"/>
+              <c:showVal val="1"/>
+              <c:showCatName val="0"/>
+              <c:showSerName val="0"/>
+              <c:showPercent val="0"/>
+              <c:showBubbleSize val="0"/>
+            </c:dLbl>
+            <c:dLbl>
+              <c:idx val="2"/>
+              <c:tx>
+                <c:rich>
+                  <a:bodyPr/>
+                  <a:lstStyle/>
+                  <a:p>
+                    <a:r>
+                      <a:rPr sz="1300">
+                        <a:solidFill>
+                          <a:srgbClr val="1F2433"/>
+                        </a:solidFill>
+                        <a:latin typeface="Arial"/>
+                      </a:rPr>
+                      <a:t>3.629</a:t>
+                    </a:r>
+                  </a:p>
+                </c:rich>
+              </c:tx>
+              <c:dLblPos val="outEnd"/>
+              <c:showLegendKey val="0"/>
+              <c:showVal val="1"/>
+              <c:showCatName val="0"/>
+              <c:showSerName val="0"/>
+              <c:showPercent val="0"/>
+              <c:showBubbleSize val="0"/>
+            </c:dLbl>
+            <c:dLbl>
+              <c:idx val="3"/>
+              <c:tx>
+                <c:rich>
+                  <a:bodyPr/>
+                  <a:lstStyle/>
+                  <a:p>
+                    <a:r>
+                      <a:rPr sz="1300">
+                        <a:solidFill>
+                          <a:srgbClr val="1F2433"/>
+                        </a:solidFill>
+                        <a:latin typeface="Arial"/>
+                      </a:rPr>
+                      <a:t>2.639</a:t>
+                    </a:r>
+                  </a:p>
+                </c:rich>
+              </c:tx>
+              <c:dLblPos val="outEnd"/>
+              <c:showLegendKey val="0"/>
+              <c:showVal val="1"/>
+              <c:showCatName val="0"/>
+              <c:showSerName val="0"/>
+              <c:showPercent val="0"/>
+              <c:showBubbleSize val="0"/>
+            </c:dLbl>
+            <c:dLbl>
+              <c:idx val="4"/>
+              <c:tx>
+                <c:rich>
+                  <a:bodyPr/>
+                  <a:lstStyle/>
+                  <a:p>
+                    <a:r>
+                      <a:rPr sz="1300">
+                        <a:solidFill>
+                          <a:srgbClr val="1F2433"/>
+                        </a:solidFill>
+                        <a:latin typeface="Arial"/>
+                      </a:rPr>
+                      <a:t>1.229</a:t>
+                    </a:r>
+                  </a:p>
+                </c:rich>
+              </c:tx>
+              <c:dLblPos val="outEnd"/>
+              <c:showLegendKey val="0"/>
+              <c:showVal val="1"/>
+              <c:showCatName val="0"/>
+              <c:showSerName val="0"/>
+              <c:showPercent val="0"/>
+              <c:showBubbleSize val="0"/>
+            </c:dLbl>
+            <c:dLbl>
+              <c:idx val="5"/>
+              <c:tx>
+                <c:rich>
+                  <a:bodyPr/>
+                  <a:lstStyle/>
+                  <a:p>
+                    <a:r>
+                      <a:rPr sz="1300">
+                        <a:solidFill>
+                          <a:srgbClr val="1F2433"/>
+                        </a:solidFill>
+                        <a:latin typeface="Arial"/>
+                      </a:rPr>
+                      <a:t>50</a:t>
+                    </a:r>
+                  </a:p>
+                </c:rich>
+              </c:tx>
+              <c:dLblPos val="outEnd"/>
+              <c:showLegendKey val="0"/>
+              <c:showVal val="1"/>
+              <c:showCatName val="0"/>
+              <c:showSerName val="0"/>
+              <c:showPercent val="0"/>
+              <c:showBubbleSize val="0"/>
+            </c:dLbl>
+            <c:dLbl>
+              <c:idx val="6"/>
+              <c:tx>
+                <c:rich>
+                  <a:bodyPr/>
+                  <a:lstStyle/>
+                  <a:p>
+                    <a:r>
+                      <a:rPr sz="1300">
+                        <a:solidFill>
+                          <a:srgbClr val="1F2433"/>
+                        </a:solidFill>
+                        <a:latin typeface="Arial"/>
+                      </a:rPr>
+                      <a:t>28</a:t>
+                    </a:r>
+                  </a:p>
+                </c:rich>
+              </c:tx>
+              <c:dLblPos val="outEnd"/>
+              <c:showLegendKey val="0"/>
+              <c:showVal val="1"/>
+              <c:showCatName val="0"/>
+              <c:showSerName val="0"/>
+              <c:showPercent val="0"/>
+              <c:showBubbleSize val="0"/>
+            </c:dLbl>
+            <c:dLbl>
+              <c:idx val="7"/>
+              <c:tx>
+                <c:rich>
+                  <a:bodyPr/>
+                  <a:lstStyle/>
+                  <a:p>
+                    <a:r>
+                      <a:rPr sz="1300">
+                        <a:solidFill>
+                          <a:srgbClr val="1F2433"/>
+                        </a:solidFill>
+                        <a:latin typeface="Arial"/>
+                      </a:rPr>
+                      <a:t>0</a:t>
+                    </a:r>
+                  </a:p>
+                </c:rich>
+              </c:tx>
+              <c:dLblPos val="outEnd"/>
+              <c:showLegendKey val="0"/>
+              <c:showVal val="1"/>
+              <c:showCatName val="0"/>
+              <c:showSerName val="0"/>
+              <c:showPercent val="0"/>
+              <c:showBubbleSize val="0"/>
+            </c:dLbl>
+            <c:dLbl>
+              <c:idx val="8"/>
+              <c:tx>
+                <c:rich>
+                  <a:bodyPr/>
+                  <a:lstStyle/>
+                  <a:p>
+                    <a:r>
+                      <a:rPr sz="1300">
+                        <a:solidFill>
+                          <a:srgbClr val="1F2433"/>
+                        </a:solidFill>
+                        <a:latin typeface="Arial"/>
+                      </a:rPr>
+                      <a:t>0</a:t>
+                    </a:r>
+                  </a:p>
+                </c:rich>
+              </c:tx>
+              <c:dLblPos val="outEnd"/>
+              <c:showLegendKey val="0"/>
+              <c:showVal val="1"/>
+              <c:showCatName val="0"/>
+              <c:showSerName val="0"/>
+              <c:showPercent val="0"/>
+              <c:showBubbleSize val="0"/>
+            </c:dLbl>
+            <c:showLegendKey val="0"/>
+            <c:showVal val="0"/>
+            <c:showCatName val="0"/>
+            <c:showSerName val="0"/>
+            <c:showPercent val="0"/>
+            <c:showBubbleSize val="0"/>
+            <c:showLeaderLines val="1"/>
+          </c:dLbls>
           <c:cat>
             <c:strRef>
               <c:f>Sheet1!$A$2:$A$10</c:f>
@@ -5979,7 +6231,7 @@
         </p:nvCxnSpPr>
         <p:spPr>
           <a:xfrm>
-            <a:off x="2410097" y="9601200"/>
+            <a:off x="2410097" y="9454896"/>
             <a:ext cx="14107885" cy="0"/>
           </a:xfrm>
           <a:prstGeom prst="line">
@@ -6000,7 +6252,7 @@
         </p:nvSpPr>
         <p:spPr>
           <a:xfrm>
-            <a:off x="2245505" y="9436608"/>
+            <a:off x="2245505" y="9290304"/>
             <a:ext cx="329184" cy="329184"/>
           </a:xfrm>
           <a:prstGeom prst="ellipse">
@@ -6049,7 +6301,7 @@
         </p:nvSpPr>
         <p:spPr>
           <a:xfrm>
-            <a:off x="1234439" y="9857232"/>
+            <a:off x="1234439" y="9710928"/>
             <a:ext cx="2351314" cy="365760"/>
           </a:xfrm>
           <a:prstGeom prst="rect">
@@ -6092,7 +6344,7 @@
         </p:nvSpPr>
         <p:spPr>
           <a:xfrm>
-            <a:off x="4596819" y="9436608"/>
+            <a:off x="4596819" y="9290304"/>
             <a:ext cx="329184" cy="329184"/>
           </a:xfrm>
           <a:prstGeom prst="ellipse">
@@ -6141,7 +6393,7 @@
         </p:nvSpPr>
         <p:spPr>
           <a:xfrm>
-            <a:off x="3585754" y="9857232"/>
+            <a:off x="3585754" y="9710928"/>
             <a:ext cx="2351314" cy="365760"/>
           </a:xfrm>
           <a:prstGeom prst="rect">
@@ -6184,7 +6436,7 @@
         </p:nvSpPr>
         <p:spPr>
           <a:xfrm>
-            <a:off x="6948133" y="9436608"/>
+            <a:off x="6948133" y="9290304"/>
             <a:ext cx="329184" cy="329184"/>
           </a:xfrm>
           <a:prstGeom prst="ellipse">
@@ -6233,7 +6485,7 @@
         </p:nvSpPr>
         <p:spPr>
           <a:xfrm>
-            <a:off x="5937068" y="9857232"/>
+            <a:off x="5937068" y="9710928"/>
             <a:ext cx="2351314" cy="365760"/>
           </a:xfrm>
           <a:prstGeom prst="rect">
@@ -6276,7 +6528,7 @@
         </p:nvSpPr>
         <p:spPr>
           <a:xfrm>
-            <a:off x="9299447" y="9436608"/>
+            <a:off x="9299447" y="9290304"/>
             <a:ext cx="329184" cy="329184"/>
           </a:xfrm>
           <a:prstGeom prst="ellipse">
@@ -6325,7 +6577,7 @@
         </p:nvSpPr>
         <p:spPr>
           <a:xfrm>
-            <a:off x="8288382" y="9857232"/>
+            <a:off x="8288382" y="9710928"/>
             <a:ext cx="2351314" cy="365760"/>
           </a:xfrm>
           <a:prstGeom prst="rect">
@@ -6368,7 +6620,7 @@
         </p:nvSpPr>
         <p:spPr>
           <a:xfrm>
-            <a:off x="11650762" y="9436608"/>
+            <a:off x="11650762" y="9290304"/>
             <a:ext cx="329184" cy="329184"/>
           </a:xfrm>
           <a:prstGeom prst="ellipse">
@@ -6417,7 +6669,7 @@
         </p:nvSpPr>
         <p:spPr>
           <a:xfrm>
-            <a:off x="10639697" y="9857232"/>
+            <a:off x="10639697" y="9710928"/>
             <a:ext cx="2351314" cy="365760"/>
           </a:xfrm>
           <a:prstGeom prst="rect">
@@ -6460,7 +6712,7 @@
         </p:nvSpPr>
         <p:spPr>
           <a:xfrm>
-            <a:off x="14002076" y="9436608"/>
+            <a:off x="14002076" y="9290304"/>
             <a:ext cx="329184" cy="329184"/>
           </a:xfrm>
           <a:prstGeom prst="ellipse">
@@ -6509,7 +6761,7 @@
         </p:nvSpPr>
         <p:spPr>
           <a:xfrm>
-            <a:off x="12991011" y="9857232"/>
+            <a:off x="12991011" y="9710928"/>
             <a:ext cx="2351314" cy="365760"/>
           </a:xfrm>
           <a:prstGeom prst="rect">
@@ -6552,7 +6804,7 @@
         </p:nvSpPr>
         <p:spPr>
           <a:xfrm>
-            <a:off x="16316814" y="9400032"/>
+            <a:off x="16316814" y="9253728"/>
             <a:ext cx="402336" cy="402336"/>
           </a:xfrm>
           <a:prstGeom prst="ellipse">
@@ -6601,7 +6853,7 @@
         </p:nvSpPr>
         <p:spPr>
           <a:xfrm>
-            <a:off x="15342325" y="9857232"/>
+            <a:off x="15342325" y="9710928"/>
             <a:ext cx="2351314" cy="365760"/>
           </a:xfrm>
           <a:prstGeom prst="rect">
@@ -7553,7 +7805,7 @@
                 <a:spcPct val="100000"/>
               </a:lnSpc>
               <a:spcAft>
-                <a:spcPts val="500"/>
+                <a:spcPts val="700"/>
               </a:spcAft>
               <a:buClr>
                 <a:srgbClr val="002060"/>
@@ -7562,7 +7814,7 @@
               <a:buChar char="•"/>
             </a:pPr>
             <a:r>
-              <a:rPr sz="1500" b="1" i="0">
+              <a:rPr sz="1600" b="1" i="0">
                 <a:solidFill>
                   <a:srgbClr val="1F2433"/>
                 </a:solidFill>
@@ -7571,7 +7823,7 @@
               <a:t>Ponto de partida: certeza BAIXA </a:t>
             </a:r>
             <a:r>
-              <a:rPr sz="1500" b="0" i="0">
+              <a:rPr sz="1600" b="0" i="0">
                 <a:solidFill>
                   <a:srgbClr val="1F2433"/>
                 </a:solidFill>
@@ -7586,7 +7838,7 @@
                 <a:spcPct val="100000"/>
               </a:lnSpc>
               <a:spcAft>
-                <a:spcPts val="500"/>
+                <a:spcPts val="700"/>
               </a:spcAft>
               <a:buClr>
                 <a:srgbClr val="002060"/>
@@ -7595,7 +7847,7 @@
               <a:buChar char="•"/>
             </a:pPr>
             <a:r>
-              <a:rPr sz="1500" b="1" i="0">
+              <a:rPr sz="1600" b="1" i="0">
                 <a:solidFill>
                   <a:srgbClr val="1F2433"/>
                 </a:solidFill>
@@ -7604,7 +7856,7 @@
               <a:t>Regra: </a:t>
             </a:r>
             <a:r>
-              <a:rPr sz="1500" b="0" i="0">
+              <a:rPr sz="1600" b="0" i="0">
                 <a:solidFill>
                   <a:srgbClr val="1F2433"/>
                 </a:solidFill>
@@ -7619,7 +7871,7 @@
                 <a:spcPct val="100000"/>
               </a:lnSpc>
               <a:spcAft>
-                <a:spcPts val="500"/>
+                <a:spcPts val="700"/>
               </a:spcAft>
               <a:buClr>
                 <a:srgbClr val="002060"/>
@@ -7628,7 +7880,7 @@
               <a:buChar char="•"/>
             </a:pPr>
             <a:r>
-              <a:rPr sz="1500" b="1" i="0">
+              <a:rPr sz="1600" b="1" i="0">
                 <a:solidFill>
                   <a:srgbClr val="1F2433"/>
                 </a:solidFill>
@@ -7637,7 +7889,7 @@
               <a:t>Sem dupla contagem: </a:t>
             </a:r>
             <a:r>
-              <a:rPr sz="1500" b="0" i="0">
+              <a:rPr sz="1600" b="0" i="0">
                 <a:solidFill>
                   <a:srgbClr val="1F2433"/>
                 </a:solidFill>
@@ -7652,7 +7904,7 @@
                 <a:spcPct val="100000"/>
               </a:lnSpc>
               <a:spcAft>
-                <a:spcPts val="500"/>
+                <a:spcPts val="700"/>
               </a:spcAft>
               <a:buClr>
                 <a:srgbClr val="002060"/>
@@ -7661,7 +7913,7 @@
               <a:buChar char="•"/>
             </a:pPr>
             <a:r>
-              <a:rPr sz="1500" b="1" i="0">
+              <a:rPr sz="1600" b="1" i="0">
                 <a:solidFill>
                   <a:srgbClr val="1F2433"/>
                 </a:solidFill>
@@ -7670,7 +7922,7 @@
               <a:t>Desfechos com um único estudo: </a:t>
             </a:r>
             <a:r>
-              <a:rPr sz="1500" b="0" i="0">
+              <a:rPr sz="1600" b="0" i="0">
                 <a:solidFill>
                   <a:srgbClr val="1F2433"/>
                 </a:solidFill>
@@ -7688,12 +7940,12 @@
                 <a:spcPts val="600"/>
               </a:spcBef>
               <a:spcAft>
-                <a:spcPts val="500"/>
-              </a:spcAft>
-              <a:buNone/>
-            </a:pPr>
-            <a:r>
-              <a:rPr sz="1500" b="1" i="0">
+                <a:spcPts val="700"/>
+              </a:spcAft>
+              <a:buNone/>
+            </a:pPr>
+            <a:r>
+              <a:rPr sz="1600" b="1" i="0">
                 <a:solidFill>
                   <a:srgbClr val="002060"/>
                 </a:solidFill>
@@ -7828,7 +8080,7 @@
                 <a:spcPct val="100000"/>
               </a:lnSpc>
               <a:spcAft>
-                <a:spcPts val="400"/>
+                <a:spcPts val="600"/>
               </a:spcAft>
               <a:buClr>
                 <a:srgbClr val="C8A951"/>
@@ -7837,7 +8089,7 @@
               <a:buChar char="•"/>
             </a:pPr>
             <a:r>
-              <a:rPr sz="1400" b="0" i="0">
+              <a:rPr sz="1500" b="0" i="0">
                 <a:solidFill>
                   <a:srgbClr val="1F2433"/>
                 </a:solidFill>
@@ -7852,7 +8104,7 @@
                 <a:spcPct val="100000"/>
               </a:lnSpc>
               <a:spcAft>
-                <a:spcPts val="400"/>
+                <a:spcPts val="600"/>
               </a:spcAft>
               <a:buClr>
                 <a:srgbClr val="C8A951"/>
@@ -7861,7 +8113,7 @@
               <a:buChar char="•"/>
             </a:pPr>
             <a:r>
-              <a:rPr sz="1400" b="0" i="0">
+              <a:rPr sz="1500" b="0" i="0">
                 <a:solidFill>
                   <a:srgbClr val="1F2433"/>
                 </a:solidFill>
@@ -7876,7 +8128,7 @@
                 <a:spcPct val="100000"/>
               </a:lnSpc>
               <a:spcAft>
-                <a:spcPts val="400"/>
+                <a:spcPts val="600"/>
               </a:spcAft>
               <a:buClr>
                 <a:srgbClr val="C8A951"/>
@@ -7885,7 +8137,7 @@
               <a:buChar char="•"/>
             </a:pPr>
             <a:r>
-              <a:rPr sz="1400" b="0" i="0">
+              <a:rPr sz="1500" b="0" i="0">
                 <a:solidFill>
                   <a:srgbClr val="1F2433"/>
                 </a:solidFill>
@@ -7900,7 +8152,7 @@
                 <a:spcPct val="100000"/>
               </a:lnSpc>
               <a:spcAft>
-                <a:spcPts val="400"/>
+                <a:spcPts val="600"/>
               </a:spcAft>
               <a:buClr>
                 <a:srgbClr val="C8A951"/>
@@ -7909,7 +8161,7 @@
               <a:buChar char="•"/>
             </a:pPr>
             <a:r>
-              <a:rPr sz="1400" b="0" i="0">
+              <a:rPr sz="1500" b="0" i="0">
                 <a:solidFill>
                   <a:srgbClr val="1F2433"/>
                 </a:solidFill>
@@ -7924,7 +8176,7 @@
                 <a:spcPct val="100000"/>
               </a:lnSpc>
               <a:spcAft>
-                <a:spcPts val="400"/>
+                <a:spcPts val="600"/>
               </a:spcAft>
               <a:buClr>
                 <a:srgbClr val="C8A951"/>
@@ -7933,7 +8185,7 @@
               <a:buChar char="•"/>
             </a:pPr>
             <a:r>
-              <a:rPr sz="1400" b="0" i="0">
+              <a:rPr sz="1500" b="0" i="0">
                 <a:solidFill>
                   <a:srgbClr val="1F2433"/>
                 </a:solidFill>
@@ -8125,9 +8377,1874 @@
           </a:p>
         </p:txBody>
       </p:sp>
+      <p:sp>
+        <p:nvSpPr>
+          <p:cNvPr id="7" name="Rounded Rectangle 6"/>
+          <p:cNvSpPr/>
+          <p:nvPr/>
+        </p:nvSpPr>
+        <p:spPr>
+          <a:xfrm>
+            <a:off x="2103120" y="1783080"/>
+            <a:ext cx="4572000" cy="1051560"/>
+          </a:xfrm>
+          <a:prstGeom prst="roundRect">
+            <a:avLst>
+              <a:gd name="adj" fmla="val 8000"/>
+            </a:avLst>
+          </a:prstGeom>
+          <a:solidFill>
+            <a:srgbClr val="F2F4F8"/>
+          </a:solidFill>
+          <a:ln>
+            <a:noFill/>
+          </a:ln>
+          <a:effectLst/>
+        </p:spPr>
+        <p:txBody>
+          <a:bodyPr rtlCol="0" anchor="ctr"/>
+          <a:lstStyle/>
+          <a:p/>
+        </p:txBody>
+      </p:sp>
+      <p:sp>
+        <p:nvSpPr>
+          <p:cNvPr id="8" name="TextBox 7"/>
+          <p:cNvSpPr txBox="1"/>
+          <p:nvPr/>
+        </p:nvSpPr>
+        <p:spPr>
+          <a:xfrm>
+            <a:off x="2286000" y="1828800"/>
+            <a:ext cx="4206240" cy="960119"/>
+          </a:xfrm>
+          <a:prstGeom prst="rect">
+            <a:avLst/>
+          </a:prstGeom>
+          <a:noFill/>
+        </p:spPr>
+        <p:txBody>
+          <a:bodyPr wrap="square" lIns="0" rIns="0" tIns="0" bIns="0" anchor="ctr">
+            <a:noAutofit/>
+          </a:bodyPr>
+          <a:lstStyle/>
+          <a:p>
+            <a:pPr algn="l">
+              <a:lnSpc>
+                <a:spcPct val="100000"/>
+              </a:lnSpc>
+              <a:spcAft>
+                <a:spcPts val="200"/>
+              </a:spcAft>
+              <a:buNone/>
+            </a:pPr>
+            <a:r>
+              <a:rPr sz="1400" b="1" i="0">
+                <a:solidFill>
+                  <a:srgbClr val="1F2433"/>
+                </a:solidFill>
+                <a:latin typeface="Arial"/>
+              </a:rPr>
+              <a:t>Registros identificados (n = 16.757)</a:t>
+            </a:r>
+          </a:p>
+          <a:p>
+            <a:pPr algn="l">
+              <a:lnSpc>
+                <a:spcPct val="100000"/>
+              </a:lnSpc>
+              <a:spcAft>
+                <a:spcPts val="200"/>
+              </a:spcAft>
+              <a:buNone/>
+            </a:pPr>
+            <a:r>
+              <a:rPr sz="1400" b="0" i="0">
+                <a:solidFill>
+                  <a:srgbClr val="1F2433"/>
+                </a:solidFill>
+                <a:latin typeface="Arial"/>
+              </a:rPr>
+              <a:t>Bases eletrônicas: 16.707 · Literatura cinzenta: 50</a:t>
+            </a:r>
+          </a:p>
+        </p:txBody>
+      </p:sp>
+      <p:sp>
+        <p:nvSpPr>
+          <p:cNvPr id="9" name="Rounded Rectangle 8"/>
+          <p:cNvSpPr/>
+          <p:nvPr/>
+        </p:nvSpPr>
+        <p:spPr>
+          <a:xfrm>
+            <a:off x="6949440" y="1783080"/>
+            <a:ext cx="2697480" cy="1051560"/>
+          </a:xfrm>
+          <a:prstGeom prst="roundRect">
+            <a:avLst>
+              <a:gd name="adj" fmla="val 8000"/>
+            </a:avLst>
+          </a:prstGeom>
+          <a:solidFill>
+            <a:srgbClr val="FBF5E3"/>
+          </a:solidFill>
+          <a:ln>
+            <a:noFill/>
+          </a:ln>
+          <a:effectLst/>
+        </p:spPr>
+        <p:txBody>
+          <a:bodyPr rtlCol="0" anchor="ctr"/>
+          <a:lstStyle/>
+          <a:p/>
+        </p:txBody>
+      </p:sp>
+      <p:sp>
+        <p:nvSpPr>
+          <p:cNvPr id="10" name="TextBox 9"/>
+          <p:cNvSpPr txBox="1"/>
+          <p:nvPr/>
+        </p:nvSpPr>
+        <p:spPr>
+          <a:xfrm>
+            <a:off x="7086600" y="1828800"/>
+            <a:ext cx="2423160" cy="960119"/>
+          </a:xfrm>
+          <a:prstGeom prst="rect">
+            <a:avLst/>
+          </a:prstGeom>
+          <a:noFill/>
+        </p:spPr>
+        <p:txBody>
+          <a:bodyPr wrap="square" lIns="0" rIns="0" tIns="0" bIns="0" anchor="ctr">
+            <a:noAutofit/>
+          </a:bodyPr>
+          <a:lstStyle/>
+          <a:p>
+            <a:pPr algn="l">
+              <a:lnSpc>
+                <a:spcPct val="100000"/>
+              </a:lnSpc>
+              <a:spcAft>
+                <a:spcPts val="0"/>
+              </a:spcAft>
+              <a:buNone/>
+            </a:pPr>
+            <a:r>
+              <a:rPr sz="1300" b="1" i="0">
+                <a:solidFill>
+                  <a:srgbClr val="1F2433"/>
+                </a:solidFill>
+                <a:latin typeface="Arial"/>
+              </a:rPr>
+              <a:t>Busca por citação (OpenAlex)</a:t>
+            </a:r>
+          </a:p>
+          <a:p>
+            <a:pPr algn="l">
+              <a:lnSpc>
+                <a:spcPct val="100000"/>
+              </a:lnSpc>
+              <a:spcAft>
+                <a:spcPts val="0"/>
+              </a:spcAft>
+              <a:buNone/>
+            </a:pPr>
+            <a:r>
+              <a:rPr sz="1300" b="0" i="0">
+                <a:solidFill>
+                  <a:srgbClr val="1F2433"/>
+                </a:solidFill>
+                <a:latin typeface="Arial"/>
+              </a:rPr>
+              <a:t>443 referências avaliadas → 4 relatórios para texto completo</a:t>
+            </a:r>
+          </a:p>
+        </p:txBody>
+      </p:sp>
+      <p:cxnSp>
+        <p:nvCxnSpPr>
+          <p:cNvPr id="11" name="Connector 10"/>
+          <p:cNvCxnSpPr/>
+          <p:nvPr/>
+        </p:nvCxnSpPr>
+        <p:spPr>
+          <a:xfrm flipH="1">
+            <a:off x="6693407" y="2308860"/>
+            <a:ext cx="256033" cy="0"/>
+          </a:xfrm>
+          <a:prstGeom prst="line">
+            <a:avLst/>
+          </a:prstGeom>
+          <a:ln w="25400">
+            <a:solidFill>
+              <a:srgbClr val="8A6D1F"/>
+            </a:solidFill>
+            <a:tailEnd type="triangle" w="med" len="med"/>
+          </a:ln>
+        </p:spPr>
+      </p:cxnSp>
+      <p:cxnSp>
+        <p:nvCxnSpPr>
+          <p:cNvPr id="12" name="Connector 11"/>
+          <p:cNvCxnSpPr/>
+          <p:nvPr/>
+        </p:nvCxnSpPr>
+        <p:spPr>
+          <a:xfrm>
+            <a:off x="4389120" y="2834639"/>
+            <a:ext cx="0" cy="210313"/>
+          </a:xfrm>
+          <a:prstGeom prst="line">
+            <a:avLst/>
+          </a:prstGeom>
+          <a:ln w="25400">
+            <a:solidFill>
+              <a:srgbClr val="002060"/>
+            </a:solidFill>
+            <a:tailEnd type="triangle" w="med" len="med"/>
+          </a:ln>
+        </p:spPr>
+      </p:cxnSp>
+      <p:sp>
+        <p:nvSpPr>
+          <p:cNvPr id="13" name="Rounded Rectangle 12"/>
+          <p:cNvSpPr/>
+          <p:nvPr/>
+        </p:nvSpPr>
+        <p:spPr>
+          <a:xfrm>
+            <a:off x="2103120" y="3063240"/>
+            <a:ext cx="4572000" cy="868680"/>
+          </a:xfrm>
+          <a:prstGeom prst="roundRect">
+            <a:avLst>
+              <a:gd name="adj" fmla="val 8000"/>
+            </a:avLst>
+          </a:prstGeom>
+          <a:solidFill>
+            <a:srgbClr val="F2F4F8"/>
+          </a:solidFill>
+          <a:ln>
+            <a:noFill/>
+          </a:ln>
+          <a:effectLst/>
+        </p:spPr>
+        <p:txBody>
+          <a:bodyPr rtlCol="0" anchor="ctr"/>
+          <a:lstStyle/>
+          <a:p/>
+        </p:txBody>
+      </p:sp>
+      <p:sp>
+        <p:nvSpPr>
+          <p:cNvPr id="14" name="TextBox 13"/>
+          <p:cNvSpPr txBox="1"/>
+          <p:nvPr/>
+        </p:nvSpPr>
+        <p:spPr>
+          <a:xfrm>
+            <a:off x="2286000" y="3108960"/>
+            <a:ext cx="4206240" cy="777240"/>
+          </a:xfrm>
+          <a:prstGeom prst="rect">
+            <a:avLst/>
+          </a:prstGeom>
+          <a:noFill/>
+        </p:spPr>
+        <p:txBody>
+          <a:bodyPr wrap="square" lIns="0" rIns="0" tIns="0" bIns="0" anchor="ctr">
+            <a:noAutofit/>
+          </a:bodyPr>
+          <a:lstStyle/>
+          <a:p>
+            <a:pPr algn="l">
+              <a:lnSpc>
+                <a:spcPct val="100000"/>
+              </a:lnSpc>
+              <a:spcAft>
+                <a:spcPts val="200"/>
+              </a:spcAft>
+              <a:buNone/>
+            </a:pPr>
+            <a:r>
+              <a:rPr sz="1400" b="0" i="0">
+                <a:solidFill>
+                  <a:srgbClr val="1F2433"/>
+                </a:solidFill>
+                <a:latin typeface="Arial"/>
+              </a:rPr>
+              <a:t>Importados: 16.749 (8 não exportados)</a:t>
+            </a:r>
+          </a:p>
+          <a:p>
+            <a:pPr algn="l">
+              <a:lnSpc>
+                <a:spcPct val="100000"/>
+              </a:lnSpc>
+              <a:spcAft>
+                <a:spcPts val="200"/>
+              </a:spcAft>
+              <a:buNone/>
+            </a:pPr>
+            <a:r>
+              <a:rPr sz="1400" b="1" i="0">
+                <a:solidFill>
+                  <a:srgbClr val="1F2433"/>
+                </a:solidFill>
+                <a:latin typeface="Arial"/>
+              </a:rPr>
+              <a:t>Duplicatas removidas: 5.839</a:t>
+            </a:r>
+          </a:p>
+        </p:txBody>
+      </p:sp>
+      <p:cxnSp>
+        <p:nvCxnSpPr>
+          <p:cNvPr id="15" name="Connector 14"/>
+          <p:cNvCxnSpPr/>
+          <p:nvPr/>
+        </p:nvCxnSpPr>
+        <p:spPr>
+          <a:xfrm>
+            <a:off x="4389120" y="3931920"/>
+            <a:ext cx="0" cy="210312"/>
+          </a:xfrm>
+          <a:prstGeom prst="line">
+            <a:avLst/>
+          </a:prstGeom>
+          <a:ln w="25400">
+            <a:solidFill>
+              <a:srgbClr val="002060"/>
+            </a:solidFill>
+            <a:tailEnd type="triangle" w="med" len="med"/>
+          </a:ln>
+        </p:spPr>
+      </p:cxnSp>
+      <p:sp>
+        <p:nvSpPr>
+          <p:cNvPr id="16" name="Rounded Rectangle 15"/>
+          <p:cNvSpPr/>
+          <p:nvPr/>
+        </p:nvSpPr>
+        <p:spPr>
+          <a:xfrm>
+            <a:off x="2103120" y="4160520"/>
+            <a:ext cx="4572000" cy="868680"/>
+          </a:xfrm>
+          <a:prstGeom prst="roundRect">
+            <a:avLst>
+              <a:gd name="adj" fmla="val 8000"/>
+            </a:avLst>
+          </a:prstGeom>
+          <a:solidFill>
+            <a:srgbClr val="F2F4F8"/>
+          </a:solidFill>
+          <a:ln>
+            <a:noFill/>
+          </a:ln>
+          <a:effectLst/>
+        </p:spPr>
+        <p:txBody>
+          <a:bodyPr rtlCol="0" anchor="ctr"/>
+          <a:lstStyle/>
+          <a:p/>
+        </p:txBody>
+      </p:sp>
+      <p:sp>
+        <p:nvSpPr>
+          <p:cNvPr id="17" name="TextBox 16"/>
+          <p:cNvSpPr txBox="1"/>
+          <p:nvPr/>
+        </p:nvSpPr>
+        <p:spPr>
+          <a:xfrm>
+            <a:off x="2286000" y="4206240"/>
+            <a:ext cx="4206240" cy="777240"/>
+          </a:xfrm>
+          <a:prstGeom prst="rect">
+            <a:avLst/>
+          </a:prstGeom>
+          <a:noFill/>
+        </p:spPr>
+        <p:txBody>
+          <a:bodyPr wrap="square" lIns="0" rIns="0" tIns="0" bIns="0" anchor="ctr">
+            <a:noAutofit/>
+          </a:bodyPr>
+          <a:lstStyle/>
+          <a:p>
+            <a:pPr algn="l">
+              <a:lnSpc>
+                <a:spcPct val="100000"/>
+              </a:lnSpc>
+              <a:spcAft>
+                <a:spcPts val="200"/>
+              </a:spcAft>
+              <a:buNone/>
+            </a:pPr>
+            <a:r>
+              <a:rPr sz="1400" b="1" i="0">
+                <a:solidFill>
+                  <a:srgbClr val="1F2433"/>
+                </a:solidFill>
+                <a:latin typeface="Arial"/>
+              </a:rPr>
+              <a:t>Triados por título e resumo (n = 10.910)</a:t>
+            </a:r>
+          </a:p>
+          <a:p>
+            <a:pPr algn="l">
+              <a:lnSpc>
+                <a:spcPct val="100000"/>
+              </a:lnSpc>
+              <a:spcAft>
+                <a:spcPts val="200"/>
+              </a:spcAft>
+              <a:buNone/>
+            </a:pPr>
+            <a:r>
+              <a:rPr sz="1400" b="0" i="0">
+                <a:solidFill>
+                  <a:srgbClr val="1F2433"/>
+                </a:solidFill>
+                <a:latin typeface="Arial"/>
+              </a:rPr>
+              <a:t>revisor único; IA só ordenou a leitura</a:t>
+            </a:r>
+          </a:p>
+        </p:txBody>
+      </p:sp>
+      <p:sp>
+        <p:nvSpPr>
+          <p:cNvPr id="18" name="Rounded Rectangle 17"/>
+          <p:cNvSpPr/>
+          <p:nvPr/>
+        </p:nvSpPr>
+        <p:spPr>
+          <a:xfrm>
+            <a:off x="6949440" y="4160520"/>
+            <a:ext cx="2697480" cy="868680"/>
+          </a:xfrm>
+          <a:prstGeom prst="roundRect">
+            <a:avLst>
+              <a:gd name="adj" fmla="val 8000"/>
+            </a:avLst>
+          </a:prstGeom>
+          <a:solidFill>
+            <a:srgbClr val="F2F4F8"/>
+          </a:solidFill>
+          <a:ln>
+            <a:noFill/>
+          </a:ln>
+          <a:effectLst/>
+        </p:spPr>
+        <p:txBody>
+          <a:bodyPr rtlCol="0" anchor="ctr"/>
+          <a:lstStyle/>
+          <a:p/>
+        </p:txBody>
+      </p:sp>
+      <p:sp>
+        <p:nvSpPr>
+          <p:cNvPr id="19" name="TextBox 18"/>
+          <p:cNvSpPr txBox="1"/>
+          <p:nvPr/>
+        </p:nvSpPr>
+        <p:spPr>
+          <a:xfrm>
+            <a:off x="7086600" y="4206240"/>
+            <a:ext cx="2423160" cy="777240"/>
+          </a:xfrm>
+          <a:prstGeom prst="rect">
+            <a:avLst/>
+          </a:prstGeom>
+          <a:noFill/>
+        </p:spPr>
+        <p:txBody>
+          <a:bodyPr wrap="square" lIns="0" rIns="0" tIns="0" bIns="0" anchor="ctr">
+            <a:noAutofit/>
+          </a:bodyPr>
+          <a:lstStyle/>
+          <a:p>
+            <a:pPr algn="l">
+              <a:lnSpc>
+                <a:spcPct val="100000"/>
+              </a:lnSpc>
+              <a:spcAft>
+                <a:spcPts val="0"/>
+              </a:spcAft>
+              <a:buNone/>
+            </a:pPr>
+            <a:r>
+              <a:rPr sz="1300" b="1" i="0">
+                <a:solidFill>
+                  <a:srgbClr val="1F2433"/>
+                </a:solidFill>
+                <a:latin typeface="Arial"/>
+              </a:rPr>
+              <a:t>Excluídos na triagem</a:t>
+            </a:r>
+          </a:p>
+          <a:p>
+            <a:pPr algn="l">
+              <a:lnSpc>
+                <a:spcPct val="100000"/>
+              </a:lnSpc>
+              <a:spcAft>
+                <a:spcPts val="0"/>
+              </a:spcAft>
+              <a:buNone/>
+            </a:pPr>
+            <a:r>
+              <a:rPr sz="1300" b="0" i="0">
+                <a:solidFill>
+                  <a:srgbClr val="1F2433"/>
+                </a:solidFill>
+                <a:latin typeface="Arial"/>
+              </a:rPr>
+              <a:t>n = 10.882</a:t>
+            </a:r>
+          </a:p>
+        </p:txBody>
+      </p:sp>
+      <p:cxnSp>
+        <p:nvCxnSpPr>
+          <p:cNvPr id="20" name="Connector 19"/>
+          <p:cNvCxnSpPr/>
+          <p:nvPr/>
+        </p:nvCxnSpPr>
+        <p:spPr>
+          <a:xfrm>
+            <a:off x="6675120" y="4594859"/>
+            <a:ext cx="256032" cy="0"/>
+          </a:xfrm>
+          <a:prstGeom prst="line">
+            <a:avLst/>
+          </a:prstGeom>
+          <a:ln w="25400">
+            <a:solidFill>
+              <a:srgbClr val="002060"/>
+            </a:solidFill>
+            <a:tailEnd type="triangle" w="med" len="med"/>
+          </a:ln>
+        </p:spPr>
+      </p:cxnSp>
+      <p:cxnSp>
+        <p:nvCxnSpPr>
+          <p:cNvPr id="21" name="Connector 20"/>
+          <p:cNvCxnSpPr/>
+          <p:nvPr/>
+        </p:nvCxnSpPr>
+        <p:spPr>
+          <a:xfrm>
+            <a:off x="4389120" y="5029200"/>
+            <a:ext cx="0" cy="210312"/>
+          </a:xfrm>
+          <a:prstGeom prst="line">
+            <a:avLst/>
+          </a:prstGeom>
+          <a:ln w="25400">
+            <a:solidFill>
+              <a:srgbClr val="002060"/>
+            </a:solidFill>
+            <a:tailEnd type="triangle" w="med" len="med"/>
+          </a:ln>
+        </p:spPr>
+      </p:cxnSp>
+      <p:sp>
+        <p:nvSpPr>
+          <p:cNvPr id="22" name="Rounded Rectangle 21"/>
+          <p:cNvSpPr/>
+          <p:nvPr/>
+        </p:nvSpPr>
+        <p:spPr>
+          <a:xfrm>
+            <a:off x="2103120" y="5257800"/>
+            <a:ext cx="4572000" cy="868680"/>
+          </a:xfrm>
+          <a:prstGeom prst="roundRect">
+            <a:avLst>
+              <a:gd name="adj" fmla="val 8000"/>
+            </a:avLst>
+          </a:prstGeom>
+          <a:solidFill>
+            <a:srgbClr val="F2F4F8"/>
+          </a:solidFill>
+          <a:ln>
+            <a:noFill/>
+          </a:ln>
+          <a:effectLst/>
+        </p:spPr>
+        <p:txBody>
+          <a:bodyPr rtlCol="0" anchor="ctr"/>
+          <a:lstStyle/>
+          <a:p/>
+        </p:txBody>
+      </p:sp>
+      <p:sp>
+        <p:nvSpPr>
+          <p:cNvPr id="23" name="TextBox 22"/>
+          <p:cNvSpPr txBox="1"/>
+          <p:nvPr/>
+        </p:nvSpPr>
+        <p:spPr>
+          <a:xfrm>
+            <a:off x="2286000" y="5303520"/>
+            <a:ext cx="4206240" cy="777240"/>
+          </a:xfrm>
+          <a:prstGeom prst="rect">
+            <a:avLst/>
+          </a:prstGeom>
+          <a:noFill/>
+        </p:spPr>
+        <p:txBody>
+          <a:bodyPr wrap="square" lIns="0" rIns="0" tIns="0" bIns="0" anchor="ctr">
+            <a:noAutofit/>
+          </a:bodyPr>
+          <a:lstStyle/>
+          <a:p>
+            <a:pPr algn="l">
+              <a:lnSpc>
+                <a:spcPct val="100000"/>
+              </a:lnSpc>
+              <a:spcAft>
+                <a:spcPts val="200"/>
+              </a:spcAft>
+              <a:buNone/>
+            </a:pPr>
+            <a:r>
+              <a:rPr sz="1400" b="1" i="0">
+                <a:solidFill>
+                  <a:srgbClr val="1F2433"/>
+                </a:solidFill>
+                <a:latin typeface="Arial"/>
+              </a:rPr>
+              <a:t>Buscados para texto completo (n = 32)</a:t>
+            </a:r>
+          </a:p>
+          <a:p>
+            <a:pPr algn="l">
+              <a:lnSpc>
+                <a:spcPct val="100000"/>
+              </a:lnSpc>
+              <a:spcAft>
+                <a:spcPts val="200"/>
+              </a:spcAft>
+              <a:buNone/>
+            </a:pPr>
+            <a:r>
+              <a:rPr sz="1400" b="0" i="0">
+                <a:solidFill>
+                  <a:srgbClr val="1F2433"/>
+                </a:solidFill>
+                <a:latin typeface="Arial"/>
+              </a:rPr>
+              <a:t>28 da triagem + 4 por citação</a:t>
+            </a:r>
+          </a:p>
+        </p:txBody>
+      </p:sp>
+      <p:sp>
+        <p:nvSpPr>
+          <p:cNvPr id="24" name="Rounded Rectangle 23"/>
+          <p:cNvSpPr/>
+          <p:nvPr/>
+        </p:nvSpPr>
+        <p:spPr>
+          <a:xfrm>
+            <a:off x="6949440" y="5257800"/>
+            <a:ext cx="2697480" cy="868680"/>
+          </a:xfrm>
+          <a:prstGeom prst="roundRect">
+            <a:avLst>
+              <a:gd name="adj" fmla="val 8000"/>
+            </a:avLst>
+          </a:prstGeom>
+          <a:solidFill>
+            <a:srgbClr val="F2F4F8"/>
+          </a:solidFill>
+          <a:ln>
+            <a:noFill/>
+          </a:ln>
+          <a:effectLst/>
+        </p:spPr>
+        <p:txBody>
+          <a:bodyPr rtlCol="0" anchor="ctr"/>
+          <a:lstStyle/>
+          <a:p/>
+        </p:txBody>
+      </p:sp>
+      <p:sp>
+        <p:nvSpPr>
+          <p:cNvPr id="25" name="TextBox 24"/>
+          <p:cNvSpPr txBox="1"/>
+          <p:nvPr/>
+        </p:nvSpPr>
+        <p:spPr>
+          <a:xfrm>
+            <a:off x="7086600" y="5303520"/>
+            <a:ext cx="2423160" cy="777240"/>
+          </a:xfrm>
+          <a:prstGeom prst="rect">
+            <a:avLst/>
+          </a:prstGeom>
+          <a:noFill/>
+        </p:spPr>
+        <p:txBody>
+          <a:bodyPr wrap="square" lIns="0" rIns="0" tIns="0" bIns="0" anchor="ctr">
+            <a:noAutofit/>
+          </a:bodyPr>
+          <a:lstStyle/>
+          <a:p>
+            <a:pPr algn="l">
+              <a:lnSpc>
+                <a:spcPct val="100000"/>
+              </a:lnSpc>
+              <a:spcAft>
+                <a:spcPts val="0"/>
+              </a:spcAft>
+              <a:buNone/>
+            </a:pPr>
+            <a:r>
+              <a:rPr sz="1300" b="1" i="0">
+                <a:solidFill>
+                  <a:srgbClr val="1F2433"/>
+                </a:solidFill>
+                <a:latin typeface="Arial"/>
+              </a:rPr>
+              <a:t>Não recuperados</a:t>
+            </a:r>
+          </a:p>
+          <a:p>
+            <a:pPr algn="l">
+              <a:lnSpc>
+                <a:spcPct val="100000"/>
+              </a:lnSpc>
+              <a:spcAft>
+                <a:spcPts val="0"/>
+              </a:spcAft>
+              <a:buNone/>
+            </a:pPr>
+            <a:r>
+              <a:rPr sz="1300" b="0" i="0">
+                <a:solidFill>
+                  <a:srgbClr val="1F2433"/>
+                </a:solidFill>
+                <a:latin typeface="Arial"/>
+              </a:rPr>
+              <a:t>n = 6</a:t>
+            </a:r>
+          </a:p>
+        </p:txBody>
+      </p:sp>
+      <p:cxnSp>
+        <p:nvCxnSpPr>
+          <p:cNvPr id="26" name="Connector 25"/>
+          <p:cNvCxnSpPr/>
+          <p:nvPr/>
+        </p:nvCxnSpPr>
+        <p:spPr>
+          <a:xfrm>
+            <a:off x="6675120" y="5692140"/>
+            <a:ext cx="256032" cy="0"/>
+          </a:xfrm>
+          <a:prstGeom prst="line">
+            <a:avLst/>
+          </a:prstGeom>
+          <a:ln w="25400">
+            <a:solidFill>
+              <a:srgbClr val="002060"/>
+            </a:solidFill>
+            <a:tailEnd type="triangle" w="med" len="med"/>
+          </a:ln>
+        </p:spPr>
+      </p:cxnSp>
+      <p:cxnSp>
+        <p:nvCxnSpPr>
+          <p:cNvPr id="27" name="Connector 26"/>
+          <p:cNvCxnSpPr/>
+          <p:nvPr/>
+        </p:nvCxnSpPr>
+        <p:spPr>
+          <a:xfrm>
+            <a:off x="4389120" y="6126480"/>
+            <a:ext cx="0" cy="210312"/>
+          </a:xfrm>
+          <a:prstGeom prst="line">
+            <a:avLst/>
+          </a:prstGeom>
+          <a:ln w="25400">
+            <a:solidFill>
+              <a:srgbClr val="002060"/>
+            </a:solidFill>
+            <a:tailEnd type="triangle" w="med" len="med"/>
+          </a:ln>
+        </p:spPr>
+      </p:cxnSp>
+      <p:sp>
+        <p:nvSpPr>
+          <p:cNvPr id="28" name="Rounded Rectangle 27"/>
+          <p:cNvSpPr/>
+          <p:nvPr/>
+        </p:nvSpPr>
+        <p:spPr>
+          <a:xfrm>
+            <a:off x="2103120" y="6355080"/>
+            <a:ext cx="4572000" cy="868680"/>
+          </a:xfrm>
+          <a:prstGeom prst="roundRect">
+            <a:avLst>
+              <a:gd name="adj" fmla="val 8000"/>
+            </a:avLst>
+          </a:prstGeom>
+          <a:solidFill>
+            <a:srgbClr val="F2F4F8"/>
+          </a:solidFill>
+          <a:ln>
+            <a:noFill/>
+          </a:ln>
+          <a:effectLst/>
+        </p:spPr>
+        <p:txBody>
+          <a:bodyPr rtlCol="0" anchor="ctr"/>
+          <a:lstStyle/>
+          <a:p/>
+        </p:txBody>
+      </p:sp>
+      <p:sp>
+        <p:nvSpPr>
+          <p:cNvPr id="29" name="TextBox 28"/>
+          <p:cNvSpPr txBox="1"/>
+          <p:nvPr/>
+        </p:nvSpPr>
+        <p:spPr>
+          <a:xfrm>
+            <a:off x="2286000" y="6400800"/>
+            <a:ext cx="4206240" cy="777240"/>
+          </a:xfrm>
+          <a:prstGeom prst="rect">
+            <a:avLst/>
+          </a:prstGeom>
+          <a:noFill/>
+        </p:spPr>
+        <p:txBody>
+          <a:bodyPr wrap="square" lIns="0" rIns="0" tIns="0" bIns="0" anchor="ctr">
+            <a:noAutofit/>
+          </a:bodyPr>
+          <a:lstStyle/>
+          <a:p>
+            <a:pPr algn="l">
+              <a:lnSpc>
+                <a:spcPct val="100000"/>
+              </a:lnSpc>
+              <a:spcAft>
+                <a:spcPts val="200"/>
+              </a:spcAft>
+              <a:buNone/>
+            </a:pPr>
+            <a:r>
+              <a:rPr sz="1400" b="1" i="0">
+                <a:solidFill>
+                  <a:srgbClr val="1F2433"/>
+                </a:solidFill>
+                <a:latin typeface="Arial"/>
+              </a:rPr>
+              <a:t>Avaliados para elegibilidade (n = 26)</a:t>
+            </a:r>
+          </a:p>
+        </p:txBody>
+      </p:sp>
+      <p:sp>
+        <p:nvSpPr>
+          <p:cNvPr id="30" name="Rounded Rectangle 29"/>
+          <p:cNvSpPr/>
+          <p:nvPr/>
+        </p:nvSpPr>
+        <p:spPr>
+          <a:xfrm>
+            <a:off x="6949440" y="6355080"/>
+            <a:ext cx="2697480" cy="868680"/>
+          </a:xfrm>
+          <a:prstGeom prst="roundRect">
+            <a:avLst>
+              <a:gd name="adj" fmla="val 8000"/>
+            </a:avLst>
+          </a:prstGeom>
+          <a:solidFill>
+            <a:srgbClr val="F2F4F8"/>
+          </a:solidFill>
+          <a:ln>
+            <a:noFill/>
+          </a:ln>
+          <a:effectLst/>
+        </p:spPr>
+        <p:txBody>
+          <a:bodyPr rtlCol="0" anchor="ctr"/>
+          <a:lstStyle/>
+          <a:p/>
+        </p:txBody>
+      </p:sp>
+      <p:sp>
+        <p:nvSpPr>
+          <p:cNvPr id="31" name="TextBox 30"/>
+          <p:cNvSpPr txBox="1"/>
+          <p:nvPr/>
+        </p:nvSpPr>
+        <p:spPr>
+          <a:xfrm>
+            <a:off x="7086600" y="6400800"/>
+            <a:ext cx="2423160" cy="777240"/>
+          </a:xfrm>
+          <a:prstGeom prst="rect">
+            <a:avLst/>
+          </a:prstGeom>
+          <a:noFill/>
+        </p:spPr>
+        <p:txBody>
+          <a:bodyPr wrap="square" lIns="0" rIns="0" tIns="0" bIns="0" anchor="ctr">
+            <a:noAutofit/>
+          </a:bodyPr>
+          <a:lstStyle/>
+          <a:p>
+            <a:pPr algn="l">
+              <a:lnSpc>
+                <a:spcPct val="100000"/>
+              </a:lnSpc>
+              <a:spcAft>
+                <a:spcPts val="0"/>
+              </a:spcAft>
+              <a:buNone/>
+            </a:pPr>
+            <a:r>
+              <a:rPr sz="1300" b="1" i="0">
+                <a:solidFill>
+                  <a:srgbClr val="1F2433"/>
+                </a:solidFill>
+                <a:latin typeface="Arial"/>
+              </a:rPr>
+              <a:t>Excluídos na íntegra (n = 4)</a:t>
+            </a:r>
+          </a:p>
+          <a:p>
+            <a:pPr algn="l">
+              <a:lnSpc>
+                <a:spcPct val="100000"/>
+              </a:lnSpc>
+              <a:spcAft>
+                <a:spcPts val="0"/>
+              </a:spcAft>
+              <a:buNone/>
+            </a:pPr>
+            <a:r>
+              <a:rPr sz="1300" b="0" i="0">
+                <a:solidFill>
+                  <a:srgbClr val="1F2433"/>
+                </a:solidFill>
+                <a:latin typeface="Arial"/>
+              </a:rPr>
+              <a:t>1 resumo sem dados; 3 população ou contexto inelegível</a:t>
+            </a:r>
+          </a:p>
+        </p:txBody>
+      </p:sp>
+      <p:cxnSp>
+        <p:nvCxnSpPr>
+          <p:cNvPr id="32" name="Connector 31"/>
+          <p:cNvCxnSpPr/>
+          <p:nvPr/>
+        </p:nvCxnSpPr>
+        <p:spPr>
+          <a:xfrm>
+            <a:off x="6675120" y="6789420"/>
+            <a:ext cx="256032" cy="0"/>
+          </a:xfrm>
+          <a:prstGeom prst="line">
+            <a:avLst/>
+          </a:prstGeom>
+          <a:ln w="25400">
+            <a:solidFill>
+              <a:srgbClr val="002060"/>
+            </a:solidFill>
+            <a:tailEnd type="triangle" w="med" len="med"/>
+          </a:ln>
+        </p:spPr>
+      </p:cxnSp>
+      <p:cxnSp>
+        <p:nvCxnSpPr>
+          <p:cNvPr id="33" name="Connector 32"/>
+          <p:cNvCxnSpPr/>
+          <p:nvPr/>
+        </p:nvCxnSpPr>
+        <p:spPr>
+          <a:xfrm>
+            <a:off x="4389120" y="7223760"/>
+            <a:ext cx="0" cy="210312"/>
+          </a:xfrm>
+          <a:prstGeom prst="line">
+            <a:avLst/>
+          </a:prstGeom>
+          <a:ln w="25400">
+            <a:solidFill>
+              <a:srgbClr val="002060"/>
+            </a:solidFill>
+            <a:tailEnd type="triangle" w="med" len="med"/>
+          </a:ln>
+        </p:spPr>
+      </p:cxnSp>
+      <p:sp>
+        <p:nvSpPr>
+          <p:cNvPr id="34" name="Rounded Rectangle 33"/>
+          <p:cNvSpPr/>
+          <p:nvPr/>
+        </p:nvSpPr>
+        <p:spPr>
+          <a:xfrm>
+            <a:off x="2103120" y="7452360"/>
+            <a:ext cx="4572000" cy="1463040"/>
+          </a:xfrm>
+          <a:prstGeom prst="roundRect">
+            <a:avLst>
+              <a:gd name="adj" fmla="val 8000"/>
+            </a:avLst>
+          </a:prstGeom>
+          <a:solidFill>
+            <a:srgbClr val="E7F3E8"/>
+          </a:solidFill>
+          <a:ln>
+            <a:noFill/>
+          </a:ln>
+          <a:effectLst/>
+        </p:spPr>
+        <p:txBody>
+          <a:bodyPr rtlCol="0" anchor="ctr"/>
+          <a:lstStyle/>
+          <a:p/>
+        </p:txBody>
+      </p:sp>
+      <p:sp>
+        <p:nvSpPr>
+          <p:cNvPr id="35" name="TextBox 34"/>
+          <p:cNvSpPr txBox="1"/>
+          <p:nvPr/>
+        </p:nvSpPr>
+        <p:spPr>
+          <a:xfrm>
+            <a:off x="2286000" y="7498080"/>
+            <a:ext cx="4206240" cy="1371600"/>
+          </a:xfrm>
+          <a:prstGeom prst="rect">
+            <a:avLst/>
+          </a:prstGeom>
+          <a:noFill/>
+        </p:spPr>
+        <p:txBody>
+          <a:bodyPr wrap="square" lIns="0" rIns="0" tIns="0" bIns="0" anchor="ctr">
+            <a:noAutofit/>
+          </a:bodyPr>
+          <a:lstStyle/>
+          <a:p>
+            <a:pPr algn="l">
+              <a:lnSpc>
+                <a:spcPct val="100000"/>
+              </a:lnSpc>
+              <a:spcAft>
+                <a:spcPts val="200"/>
+              </a:spcAft>
+              <a:buNone/>
+            </a:pPr>
+            <a:r>
+              <a:rPr sz="1700" b="1" i="0">
+                <a:solidFill>
+                  <a:srgbClr val="2E7D32"/>
+                </a:solidFill>
+                <a:latin typeface="Arial"/>
+              </a:rPr>
+              <a:t>Relatórios incluídos (n = 22)</a:t>
+            </a:r>
+          </a:p>
+          <a:p>
+            <a:pPr algn="l">
+              <a:lnSpc>
+                <a:spcPct val="100000"/>
+              </a:lnSpc>
+              <a:spcAft>
+                <a:spcPts val="200"/>
+              </a:spcAft>
+              <a:buNone/>
+            </a:pPr>
+            <a:r>
+              <a:rPr sz="1400" b="0" i="0">
+                <a:solidFill>
+                  <a:srgbClr val="1F2433"/>
+                </a:solidFill>
+                <a:latin typeface="Arial"/>
+              </a:rPr>
+              <a:t>Metanálise de prevalência: 6 (ocular) e 7 (respiratório) amostras independentes</a:t>
+            </a:r>
+          </a:p>
+          <a:p>
+            <a:pPr algn="l">
+              <a:lnSpc>
+                <a:spcPct val="100000"/>
+              </a:lnSpc>
+              <a:spcAft>
+                <a:spcPts val="200"/>
+              </a:spcAft>
+              <a:buNone/>
+            </a:pPr>
+            <a:r>
+              <a:rPr sz="1400" b="0" i="0">
+                <a:solidFill>
+                  <a:srgbClr val="1F2433"/>
+                </a:solidFill>
+                <a:latin typeface="Arial"/>
+              </a:rPr>
+              <a:t>Síntese narrativa + GRADE: desfechos objetivos e biomarcadores</a:t>
+            </a:r>
+          </a:p>
+        </p:txBody>
+      </p:sp>
+      <p:sp>
+        <p:nvSpPr>
+          <p:cNvPr id="36" name="TextBox 35"/>
+          <p:cNvSpPr txBox="1"/>
+          <p:nvPr/>
+        </p:nvSpPr>
+        <p:spPr>
+          <a:xfrm rot="16200000">
+            <a:off x="548639" y="2674620"/>
+            <a:ext cx="2011680" cy="365760"/>
+          </a:xfrm>
+          <a:prstGeom prst="rect">
+            <a:avLst/>
+          </a:prstGeom>
+          <a:noFill/>
+        </p:spPr>
+        <p:txBody>
+          <a:bodyPr wrap="square" lIns="0" rIns="0" tIns="0" bIns="0" anchor="ctr">
+            <a:noAutofit/>
+          </a:bodyPr>
+          <a:lstStyle/>
+          <a:p>
+            <a:pPr algn="ctr">
+              <a:lnSpc>
+                <a:spcPct val="100000"/>
+              </a:lnSpc>
+              <a:spcAft>
+                <a:spcPts val="0"/>
+              </a:spcAft>
+              <a:buNone/>
+            </a:pPr>
+            <a:r>
+              <a:rPr sz="1300" b="1" i="0">
+                <a:solidFill>
+                  <a:srgbClr val="002060"/>
+                </a:solidFill>
+                <a:latin typeface="Arial"/>
+              </a:rPr>
+              <a:t>Identificação</a:t>
+            </a:r>
+          </a:p>
+        </p:txBody>
+      </p:sp>
+      <p:sp>
+        <p:nvSpPr>
+          <p:cNvPr id="37" name="TextBox 36"/>
+          <p:cNvSpPr txBox="1"/>
+          <p:nvPr/>
+        </p:nvSpPr>
+        <p:spPr>
+          <a:xfrm rot="16200000">
+            <a:off x="548639" y="4960620"/>
+            <a:ext cx="2011680" cy="365760"/>
+          </a:xfrm>
+          <a:prstGeom prst="rect">
+            <a:avLst/>
+          </a:prstGeom>
+          <a:noFill/>
+        </p:spPr>
+        <p:txBody>
+          <a:bodyPr wrap="square" lIns="0" rIns="0" tIns="0" bIns="0" anchor="ctr">
+            <a:noAutofit/>
+          </a:bodyPr>
+          <a:lstStyle/>
+          <a:p>
+            <a:pPr algn="ctr">
+              <a:lnSpc>
+                <a:spcPct val="100000"/>
+              </a:lnSpc>
+              <a:spcAft>
+                <a:spcPts val="0"/>
+              </a:spcAft>
+              <a:buNone/>
+            </a:pPr>
+            <a:r>
+              <a:rPr sz="1300" b="1" i="0">
+                <a:solidFill>
+                  <a:srgbClr val="002060"/>
+                </a:solidFill>
+                <a:latin typeface="Arial"/>
+              </a:rPr>
+              <a:t>Triagem</a:t>
+            </a:r>
+          </a:p>
+        </p:txBody>
+      </p:sp>
+      <p:sp>
+        <p:nvSpPr>
+          <p:cNvPr id="38" name="TextBox 37"/>
+          <p:cNvSpPr txBox="1"/>
+          <p:nvPr/>
+        </p:nvSpPr>
+        <p:spPr>
+          <a:xfrm rot="16200000">
+            <a:off x="548639" y="6606540"/>
+            <a:ext cx="2011680" cy="365760"/>
+          </a:xfrm>
+          <a:prstGeom prst="rect">
+            <a:avLst/>
+          </a:prstGeom>
+          <a:noFill/>
+        </p:spPr>
+        <p:txBody>
+          <a:bodyPr wrap="square" lIns="0" rIns="0" tIns="0" bIns="0" anchor="ctr">
+            <a:noAutofit/>
+          </a:bodyPr>
+          <a:lstStyle/>
+          <a:p>
+            <a:pPr algn="ctr">
+              <a:lnSpc>
+                <a:spcPct val="100000"/>
+              </a:lnSpc>
+              <a:spcAft>
+                <a:spcPts val="0"/>
+              </a:spcAft>
+              <a:buNone/>
+            </a:pPr>
+            <a:r>
+              <a:rPr sz="1300" b="1" i="0">
+                <a:solidFill>
+                  <a:srgbClr val="002060"/>
+                </a:solidFill>
+                <a:latin typeface="Arial"/>
+              </a:rPr>
+              <a:t>Elegibilidade</a:t>
+            </a:r>
+          </a:p>
+        </p:txBody>
+      </p:sp>
+      <p:sp>
+        <p:nvSpPr>
+          <p:cNvPr id="39" name="TextBox 38"/>
+          <p:cNvSpPr txBox="1"/>
+          <p:nvPr/>
+        </p:nvSpPr>
+        <p:spPr>
+          <a:xfrm rot="16200000">
+            <a:off x="548639" y="8001000"/>
+            <a:ext cx="2011680" cy="365760"/>
+          </a:xfrm>
+          <a:prstGeom prst="rect">
+            <a:avLst/>
+          </a:prstGeom>
+          <a:noFill/>
+        </p:spPr>
+        <p:txBody>
+          <a:bodyPr wrap="square" lIns="0" rIns="0" tIns="0" bIns="0" anchor="ctr">
+            <a:noAutofit/>
+          </a:bodyPr>
+          <a:lstStyle/>
+          <a:p>
+            <a:pPr algn="ctr">
+              <a:lnSpc>
+                <a:spcPct val="100000"/>
+              </a:lnSpc>
+              <a:spcAft>
+                <a:spcPts val="0"/>
+              </a:spcAft>
+              <a:buNone/>
+            </a:pPr>
+            <a:r>
+              <a:rPr sz="1300" b="1" i="0">
+                <a:solidFill>
+                  <a:srgbClr val="002060"/>
+                </a:solidFill>
+                <a:latin typeface="Arial"/>
+              </a:rPr>
+              <a:t>Incluídos</a:t>
+            </a:r>
+          </a:p>
+        </p:txBody>
+      </p:sp>
+      <p:sp>
+        <p:nvSpPr>
+          <p:cNvPr id="40" name="TextBox 39"/>
+          <p:cNvSpPr txBox="1"/>
+          <p:nvPr/>
+        </p:nvSpPr>
+        <p:spPr>
+          <a:xfrm>
+            <a:off x="2103120" y="9006840"/>
+            <a:ext cx="7543800" cy="365760"/>
+          </a:xfrm>
+          <a:prstGeom prst="rect">
+            <a:avLst/>
+          </a:prstGeom>
+          <a:noFill/>
+        </p:spPr>
+        <p:txBody>
+          <a:bodyPr wrap="square" lIns="0" rIns="0" tIns="0" bIns="0" anchor="t">
+            <a:noAutofit/>
+          </a:bodyPr>
+          <a:lstStyle/>
+          <a:p>
+            <a:pPr algn="l">
+              <a:lnSpc>
+                <a:spcPct val="100000"/>
+              </a:lnSpc>
+              <a:spcAft>
+                <a:spcPts val="0"/>
+              </a:spcAft>
+              <a:buNone/>
+            </a:pPr>
+            <a:r>
+              <a:rPr sz="1200" b="0" i="0">
+                <a:solidFill>
+                  <a:srgbClr val="5A6270"/>
+                </a:solidFill>
+                <a:latin typeface="Arial"/>
+              </a:rPr>
+              <a:t>Fluxograma PRISMA 2020 (Figura 1 do manuscrito); lista dos não recuperados e dos excluídos no Anexo C.</a:t>
+            </a:r>
+          </a:p>
+        </p:txBody>
+      </p:sp>
+      <p:sp>
+        <p:nvSpPr>
+          <p:cNvPr id="41" name="Rounded Rectangle 40"/>
+          <p:cNvSpPr/>
+          <p:nvPr/>
+        </p:nvSpPr>
+        <p:spPr>
+          <a:xfrm>
+            <a:off x="9921240" y="1783080"/>
+            <a:ext cx="3794760" cy="1600200"/>
+          </a:xfrm>
+          <a:prstGeom prst="roundRect">
+            <a:avLst>
+              <a:gd name="adj" fmla="val 6000"/>
+            </a:avLst>
+          </a:prstGeom>
+          <a:solidFill>
+            <a:srgbClr val="F2F4F8"/>
+          </a:solidFill>
+          <a:ln>
+            <a:noFill/>
+          </a:ln>
+          <a:effectLst/>
+        </p:spPr>
+        <p:txBody>
+          <a:bodyPr rtlCol="0" anchor="ctr"/>
+          <a:lstStyle/>
+          <a:p/>
+        </p:txBody>
+      </p:sp>
+      <p:sp>
+        <p:nvSpPr>
+          <p:cNvPr id="42" name="TextBox 41"/>
+          <p:cNvSpPr txBox="1"/>
+          <p:nvPr/>
+        </p:nvSpPr>
+        <p:spPr>
+          <a:xfrm>
+            <a:off x="10104119" y="1892807"/>
+            <a:ext cx="3429000" cy="698500"/>
+          </a:xfrm>
+          <a:prstGeom prst="rect">
+            <a:avLst/>
+          </a:prstGeom>
+          <a:noFill/>
+        </p:spPr>
+        <p:txBody>
+          <a:bodyPr wrap="square" lIns="0" rIns="0" tIns="0" bIns="0" anchor="t">
+            <a:noAutofit/>
+          </a:bodyPr>
+          <a:lstStyle/>
+          <a:p>
+            <a:pPr algn="l">
+              <a:lnSpc>
+                <a:spcPct val="95000"/>
+              </a:lnSpc>
+              <a:spcAft>
+                <a:spcPts val="0"/>
+              </a:spcAft>
+              <a:buNone/>
+            </a:pPr>
+            <a:r>
+              <a:rPr sz="4400" b="1" i="0">
+                <a:solidFill>
+                  <a:srgbClr val="002060"/>
+                </a:solidFill>
+                <a:latin typeface="Arial"/>
+              </a:rPr>
+              <a:t>22</a:t>
+            </a:r>
+          </a:p>
+        </p:txBody>
+      </p:sp>
+      <p:sp>
+        <p:nvSpPr>
+          <p:cNvPr id="43" name="TextBox 42"/>
+          <p:cNvSpPr txBox="1"/>
+          <p:nvPr/>
+        </p:nvSpPr>
+        <p:spPr>
+          <a:xfrm>
+            <a:off x="10104119" y="2609596"/>
+            <a:ext cx="3429000" cy="718819"/>
+          </a:xfrm>
+          <a:prstGeom prst="rect">
+            <a:avLst/>
+          </a:prstGeom>
+          <a:noFill/>
+        </p:spPr>
+        <p:txBody>
+          <a:bodyPr wrap="square" lIns="0" rIns="0" tIns="0" bIns="0" anchor="t">
+            <a:noAutofit/>
+          </a:bodyPr>
+          <a:lstStyle/>
+          <a:p>
+            <a:pPr algn="l">
+              <a:lnSpc>
+                <a:spcPct val="105000"/>
+              </a:lnSpc>
+              <a:spcAft>
+                <a:spcPts val="0"/>
+              </a:spcAft>
+              <a:buNone/>
+            </a:pPr>
+            <a:r>
+              <a:rPr sz="1400" b="0" i="0">
+                <a:solidFill>
+                  <a:srgbClr val="5A6270"/>
+                </a:solidFill>
+                <a:latin typeface="Arial"/>
+              </a:rPr>
+              <a:t>relatórios de estudos observacionais incluídos</a:t>
+            </a:r>
+          </a:p>
+        </p:txBody>
+      </p:sp>
+      <p:sp>
+        <p:nvSpPr>
+          <p:cNvPr id="44" name="Rounded Rectangle 43"/>
+          <p:cNvSpPr/>
+          <p:nvPr/>
+        </p:nvSpPr>
+        <p:spPr>
+          <a:xfrm>
+            <a:off x="13990320" y="1783080"/>
+            <a:ext cx="3794760" cy="1600200"/>
+          </a:xfrm>
+          <a:prstGeom prst="roundRect">
+            <a:avLst>
+              <a:gd name="adj" fmla="val 6000"/>
+            </a:avLst>
+          </a:prstGeom>
+          <a:solidFill>
+            <a:srgbClr val="F2F4F8"/>
+          </a:solidFill>
+          <a:ln>
+            <a:noFill/>
+          </a:ln>
+          <a:effectLst/>
+        </p:spPr>
+        <p:txBody>
+          <a:bodyPr rtlCol="0" anchor="ctr"/>
+          <a:lstStyle/>
+          <a:p/>
+        </p:txBody>
+      </p:sp>
+      <p:sp>
+        <p:nvSpPr>
+          <p:cNvPr id="45" name="TextBox 44"/>
+          <p:cNvSpPr txBox="1"/>
+          <p:nvPr/>
+        </p:nvSpPr>
+        <p:spPr>
+          <a:xfrm>
+            <a:off x="14173200" y="1892807"/>
+            <a:ext cx="3429000" cy="698500"/>
+          </a:xfrm>
+          <a:prstGeom prst="rect">
+            <a:avLst/>
+          </a:prstGeom>
+          <a:noFill/>
+        </p:spPr>
+        <p:txBody>
+          <a:bodyPr wrap="square" lIns="0" rIns="0" tIns="0" bIns="0" anchor="t">
+            <a:noAutofit/>
+          </a:bodyPr>
+          <a:lstStyle/>
+          <a:p>
+            <a:pPr algn="l">
+              <a:lnSpc>
+                <a:spcPct val="95000"/>
+              </a:lnSpc>
+              <a:spcAft>
+                <a:spcPts val="0"/>
+              </a:spcAft>
+              <a:buNone/>
+            </a:pPr>
+            <a:r>
+              <a:rPr sz="4400" b="1" i="0">
+                <a:solidFill>
+                  <a:srgbClr val="002060"/>
+                </a:solidFill>
+                <a:latin typeface="Arial"/>
+              </a:rPr>
+              <a:t>9</a:t>
+            </a:r>
+          </a:p>
+        </p:txBody>
+      </p:sp>
+      <p:sp>
+        <p:nvSpPr>
+          <p:cNvPr id="46" name="TextBox 45"/>
+          <p:cNvSpPr txBox="1"/>
+          <p:nvPr/>
+        </p:nvSpPr>
+        <p:spPr>
+          <a:xfrm>
+            <a:off x="14173200" y="2609596"/>
+            <a:ext cx="3429000" cy="718819"/>
+          </a:xfrm>
+          <a:prstGeom prst="rect">
+            <a:avLst/>
+          </a:prstGeom>
+          <a:noFill/>
+        </p:spPr>
+        <p:txBody>
+          <a:bodyPr wrap="square" lIns="0" rIns="0" tIns="0" bIns="0" anchor="t">
+            <a:noAutofit/>
+          </a:bodyPr>
+          <a:lstStyle/>
+          <a:p>
+            <a:pPr algn="l">
+              <a:lnSpc>
+                <a:spcPct val="105000"/>
+              </a:lnSpc>
+              <a:spcAft>
+                <a:spcPts val="0"/>
+              </a:spcAft>
+              <a:buNone/>
+            </a:pPr>
+            <a:r>
+              <a:rPr sz="1300" b="0" i="0">
+                <a:solidFill>
+                  <a:srgbClr val="5A6270"/>
+                </a:solidFill>
+                <a:latin typeface="Arial"/>
+              </a:rPr>
+              <a:t>países: Turquia, Malásia, Brasil, Paquistão, China, México, EUA, Sudão e Tailândia</a:t>
+            </a:r>
+          </a:p>
+        </p:txBody>
+      </p:sp>
+      <p:sp>
+        <p:nvSpPr>
+          <p:cNvPr id="47" name="Rounded Rectangle 46"/>
+          <p:cNvSpPr/>
+          <p:nvPr/>
+        </p:nvSpPr>
+        <p:spPr>
+          <a:xfrm>
+            <a:off x="9921240" y="3657600"/>
+            <a:ext cx="3794760" cy="1600200"/>
+          </a:xfrm>
+          <a:prstGeom prst="roundRect">
+            <a:avLst>
+              <a:gd name="adj" fmla="val 6000"/>
+            </a:avLst>
+          </a:prstGeom>
+          <a:solidFill>
+            <a:srgbClr val="F2F4F8"/>
+          </a:solidFill>
+          <a:ln>
+            <a:noFill/>
+          </a:ln>
+          <a:effectLst/>
+        </p:spPr>
+        <p:txBody>
+          <a:bodyPr rtlCol="0" anchor="ctr"/>
+          <a:lstStyle/>
+          <a:p/>
+        </p:txBody>
+      </p:sp>
+      <p:sp>
+        <p:nvSpPr>
+          <p:cNvPr id="48" name="TextBox 47"/>
+          <p:cNvSpPr txBox="1"/>
+          <p:nvPr/>
+        </p:nvSpPr>
+        <p:spPr>
+          <a:xfrm>
+            <a:off x="10104119" y="3767328"/>
+            <a:ext cx="3429000" cy="571500"/>
+          </a:xfrm>
+          <a:prstGeom prst="rect">
+            <a:avLst/>
+          </a:prstGeom>
+          <a:noFill/>
+        </p:spPr>
+        <p:txBody>
+          <a:bodyPr wrap="square" lIns="0" rIns="0" tIns="0" bIns="0" anchor="t">
+            <a:noAutofit/>
+          </a:bodyPr>
+          <a:lstStyle/>
+          <a:p>
+            <a:pPr algn="l">
+              <a:lnSpc>
+                <a:spcPct val="95000"/>
+              </a:lnSpc>
+              <a:spcAft>
+                <a:spcPts val="0"/>
+              </a:spcAft>
+              <a:buNone/>
+            </a:pPr>
+            <a:r>
+              <a:rPr sz="3600" b="1" i="0">
+                <a:solidFill>
+                  <a:srgbClr val="002060"/>
+                </a:solidFill>
+                <a:latin typeface="Arial"/>
+              </a:rPr>
+              <a:t>19 + 3</a:t>
+            </a:r>
+          </a:p>
+        </p:txBody>
+      </p:sp>
+      <p:sp>
+        <p:nvSpPr>
+          <p:cNvPr id="49" name="TextBox 48"/>
+          <p:cNvSpPr txBox="1"/>
+          <p:nvPr/>
+        </p:nvSpPr>
+        <p:spPr>
+          <a:xfrm>
+            <a:off x="10104119" y="4357116"/>
+            <a:ext cx="3429000" cy="845820"/>
+          </a:xfrm>
+          <a:prstGeom prst="rect">
+            <a:avLst/>
+          </a:prstGeom>
+          <a:noFill/>
+        </p:spPr>
+        <p:txBody>
+          <a:bodyPr wrap="square" lIns="0" rIns="0" tIns="0" bIns="0" anchor="t">
+            <a:noAutofit/>
+          </a:bodyPr>
+          <a:lstStyle/>
+          <a:p>
+            <a:pPr algn="l">
+              <a:lnSpc>
+                <a:spcPct val="105000"/>
+              </a:lnSpc>
+              <a:spcAft>
+                <a:spcPts val="0"/>
+              </a:spcAft>
+              <a:buNone/>
+            </a:pPr>
+            <a:r>
+              <a:rPr sz="1300" b="0" i="0">
+                <a:solidFill>
+                  <a:srgbClr val="5A6270"/>
+                </a:solidFill>
+                <a:latin typeface="Arial"/>
+              </a:rPr>
+              <a:t>transversais + coortes prospectivas (Navarro 2016; Stanganelli 2019; Stanganelli Caus 2025)</a:t>
+            </a:r>
+          </a:p>
+        </p:txBody>
+      </p:sp>
+      <p:sp>
+        <p:nvSpPr>
+          <p:cNvPr id="50" name="Rounded Rectangle 49"/>
+          <p:cNvSpPr/>
+          <p:nvPr/>
+        </p:nvSpPr>
+        <p:spPr>
+          <a:xfrm>
+            <a:off x="13990320" y="3657600"/>
+            <a:ext cx="3794760" cy="1600200"/>
+          </a:xfrm>
+          <a:prstGeom prst="roundRect">
+            <a:avLst>
+              <a:gd name="adj" fmla="val 6000"/>
+            </a:avLst>
+          </a:prstGeom>
+          <a:solidFill>
+            <a:srgbClr val="F9E9E9"/>
+          </a:solidFill>
+          <a:ln>
+            <a:noFill/>
+          </a:ln>
+          <a:effectLst/>
+        </p:spPr>
+        <p:txBody>
+          <a:bodyPr rtlCol="0" anchor="ctr"/>
+          <a:lstStyle/>
+          <a:p/>
+        </p:txBody>
+      </p:sp>
+      <p:sp>
+        <p:nvSpPr>
+          <p:cNvPr id="51" name="TextBox 50"/>
+          <p:cNvSpPr txBox="1"/>
+          <p:nvPr/>
+        </p:nvSpPr>
+        <p:spPr>
+          <a:xfrm>
+            <a:off x="14173200" y="3767328"/>
+            <a:ext cx="3429000" cy="571500"/>
+          </a:xfrm>
+          <a:prstGeom prst="rect">
+            <a:avLst/>
+          </a:prstGeom>
+          <a:noFill/>
+        </p:spPr>
+        <p:txBody>
+          <a:bodyPr wrap="square" lIns="0" rIns="0" tIns="0" bIns="0" anchor="t">
+            <a:noAutofit/>
+          </a:bodyPr>
+          <a:lstStyle/>
+          <a:p>
+            <a:pPr algn="l">
+              <a:lnSpc>
+                <a:spcPct val="95000"/>
+              </a:lnSpc>
+              <a:spcAft>
+                <a:spcPts val="0"/>
+              </a:spcAft>
+              <a:buNone/>
+            </a:pPr>
+            <a:r>
+              <a:rPr sz="3600" b="1" i="0">
+                <a:solidFill>
+                  <a:srgbClr val="8B0000"/>
+                </a:solidFill>
+                <a:latin typeface="Arial"/>
+              </a:rPr>
+              <a:t>6 | 7</a:t>
+            </a:r>
+          </a:p>
+        </p:txBody>
+      </p:sp>
+      <p:sp>
+        <p:nvSpPr>
+          <p:cNvPr id="52" name="TextBox 51"/>
+          <p:cNvSpPr txBox="1"/>
+          <p:nvPr/>
+        </p:nvSpPr>
+        <p:spPr>
+          <a:xfrm>
+            <a:off x="14173200" y="4357116"/>
+            <a:ext cx="3429000" cy="845820"/>
+          </a:xfrm>
+          <a:prstGeom prst="rect">
+            <a:avLst/>
+          </a:prstGeom>
+          <a:noFill/>
+        </p:spPr>
+        <p:txBody>
+          <a:bodyPr wrap="square" lIns="0" rIns="0" tIns="0" bIns="0" anchor="t">
+            <a:noAutofit/>
+          </a:bodyPr>
+          <a:lstStyle/>
+          <a:p>
+            <a:pPr algn="l">
+              <a:lnSpc>
+                <a:spcPct val="105000"/>
+              </a:lnSpc>
+              <a:spcAft>
+                <a:spcPts val="0"/>
+              </a:spcAft>
+              <a:buNone/>
+            </a:pPr>
+            <a:r>
+              <a:rPr sz="1300" b="0" i="0">
+                <a:solidFill>
+                  <a:srgbClr val="5A6270"/>
+                </a:solidFill>
+                <a:latin typeface="Arial"/>
+              </a:rPr>
+              <a:t>amostras independentes na metanálise ocular (n = 756) | respiratória (n = 1.428)</a:t>
+            </a:r>
+          </a:p>
+        </p:txBody>
+      </p:sp>
+      <p:sp>
+        <p:nvSpPr>
+          <p:cNvPr id="53" name="Rounded Rectangle 52"/>
+          <p:cNvSpPr/>
+          <p:nvPr/>
+        </p:nvSpPr>
+        <p:spPr>
+          <a:xfrm>
+            <a:off x="9921240" y="5532120"/>
+            <a:ext cx="7863840" cy="4206240"/>
+          </a:xfrm>
+          <a:prstGeom prst="roundRect">
+            <a:avLst>
+              <a:gd name="adj" fmla="val 6000"/>
+            </a:avLst>
+          </a:prstGeom>
+          <a:solidFill>
+            <a:srgbClr val="F2F4F8"/>
+          </a:solidFill>
+          <a:ln>
+            <a:noFill/>
+          </a:ln>
+          <a:effectLst/>
+        </p:spPr>
+        <p:txBody>
+          <a:bodyPr rtlCol="0" anchor="ctr"/>
+          <a:lstStyle/>
+          <a:p/>
+        </p:txBody>
+      </p:sp>
+      <p:sp>
+        <p:nvSpPr>
+          <p:cNvPr id="54" name="Oval 53"/>
+          <p:cNvSpPr/>
+          <p:nvPr/>
+        </p:nvSpPr>
+        <p:spPr>
+          <a:xfrm>
+            <a:off x="10195560" y="5806440"/>
+            <a:ext cx="731520" cy="731520"/>
+          </a:xfrm>
+          <a:prstGeom prst="ellipse">
+            <a:avLst/>
+          </a:prstGeom>
+          <a:solidFill>
+            <a:srgbClr val="002060"/>
+          </a:solidFill>
+          <a:ln>
+            <a:noFill/>
+          </a:ln>
+          <a:effectLst/>
+        </p:spPr>
+        <p:txBody>
+          <a:bodyPr rtlCol="0" anchor="ctr" lIns="0" rIns="0" tIns="0" bIns="0"/>
+          <a:lstStyle/>
+          <a:p/>
+        </p:txBody>
+      </p:sp>
       <p:pic>
         <p:nvPicPr>
-          <p:cNvPr id="7" name="Figura 1 PRISMA" descr="fig1_prisma.png"/>
+          <p:cNvPr id="55" name="icone balance" descr="balance_white.png"/>
           <p:cNvPicPr>
             <a:picLocks noChangeAspect="1"/>
           </p:cNvPicPr>
@@ -8141,552 +10258,6 @@
         </p:blipFill>
         <p:spPr>
           <a:xfrm>
-            <a:off x="1201571" y="1737360"/>
-            <a:ext cx="8386776" cy="8001000"/>
-          </a:xfrm>
-          <a:prstGeom prst="rect">
-            <a:avLst/>
-          </a:prstGeom>
-        </p:spPr>
-      </p:pic>
-      <p:sp>
-        <p:nvSpPr>
-          <p:cNvPr id="8" name="Rounded Rectangle 7"/>
-          <p:cNvSpPr/>
-          <p:nvPr/>
-        </p:nvSpPr>
-        <p:spPr>
-          <a:xfrm>
-            <a:off x="9921240" y="1783080"/>
-            <a:ext cx="3794760" cy="1600200"/>
-          </a:xfrm>
-          <a:prstGeom prst="roundRect">
-            <a:avLst>
-              <a:gd name="adj" fmla="val 6000"/>
-            </a:avLst>
-          </a:prstGeom>
-          <a:solidFill>
-            <a:srgbClr val="F2F4F8"/>
-          </a:solidFill>
-          <a:ln>
-            <a:noFill/>
-          </a:ln>
-          <a:effectLst/>
-        </p:spPr>
-        <p:txBody>
-          <a:bodyPr rtlCol="0" anchor="ctr"/>
-          <a:lstStyle/>
-          <a:p/>
-        </p:txBody>
-      </p:sp>
-      <p:sp>
-        <p:nvSpPr>
-          <p:cNvPr id="9" name="TextBox 8"/>
-          <p:cNvSpPr txBox="1"/>
-          <p:nvPr/>
-        </p:nvSpPr>
-        <p:spPr>
-          <a:xfrm>
-            <a:off x="10104119" y="1892807"/>
-            <a:ext cx="3429000" cy="698500"/>
-          </a:xfrm>
-          <a:prstGeom prst="rect">
-            <a:avLst/>
-          </a:prstGeom>
-          <a:noFill/>
-        </p:spPr>
-        <p:txBody>
-          <a:bodyPr wrap="square" lIns="0" rIns="0" tIns="0" bIns="0" anchor="t">
-            <a:noAutofit/>
-          </a:bodyPr>
-          <a:lstStyle/>
-          <a:p>
-            <a:pPr algn="l">
-              <a:lnSpc>
-                <a:spcPct val="95000"/>
-              </a:lnSpc>
-              <a:spcAft>
-                <a:spcPts val="0"/>
-              </a:spcAft>
-              <a:buNone/>
-            </a:pPr>
-            <a:r>
-              <a:rPr sz="4400" b="1" i="0">
-                <a:solidFill>
-                  <a:srgbClr val="002060"/>
-                </a:solidFill>
-                <a:latin typeface="Arial"/>
-              </a:rPr>
-              <a:t>22</a:t>
-            </a:r>
-          </a:p>
-        </p:txBody>
-      </p:sp>
-      <p:sp>
-        <p:nvSpPr>
-          <p:cNvPr id="10" name="TextBox 9"/>
-          <p:cNvSpPr txBox="1"/>
-          <p:nvPr/>
-        </p:nvSpPr>
-        <p:spPr>
-          <a:xfrm>
-            <a:off x="10104119" y="2609596"/>
-            <a:ext cx="3429000" cy="718819"/>
-          </a:xfrm>
-          <a:prstGeom prst="rect">
-            <a:avLst/>
-          </a:prstGeom>
-          <a:noFill/>
-        </p:spPr>
-        <p:txBody>
-          <a:bodyPr wrap="square" lIns="0" rIns="0" tIns="0" bIns="0" anchor="t">
-            <a:noAutofit/>
-          </a:bodyPr>
-          <a:lstStyle/>
-          <a:p>
-            <a:pPr algn="l">
-              <a:lnSpc>
-                <a:spcPct val="105000"/>
-              </a:lnSpc>
-              <a:spcAft>
-                <a:spcPts val="0"/>
-              </a:spcAft>
-              <a:buNone/>
-            </a:pPr>
-            <a:r>
-              <a:rPr sz="1400" b="0" i="0">
-                <a:solidFill>
-                  <a:srgbClr val="5A6270"/>
-                </a:solidFill>
-                <a:latin typeface="Arial"/>
-              </a:rPr>
-              <a:t>relatórios de estudos observacionais incluídos</a:t>
-            </a:r>
-          </a:p>
-        </p:txBody>
-      </p:sp>
-      <p:sp>
-        <p:nvSpPr>
-          <p:cNvPr id="11" name="Rounded Rectangle 10"/>
-          <p:cNvSpPr/>
-          <p:nvPr/>
-        </p:nvSpPr>
-        <p:spPr>
-          <a:xfrm>
-            <a:off x="13990320" y="1783080"/>
-            <a:ext cx="3794760" cy="1600200"/>
-          </a:xfrm>
-          <a:prstGeom prst="roundRect">
-            <a:avLst>
-              <a:gd name="adj" fmla="val 6000"/>
-            </a:avLst>
-          </a:prstGeom>
-          <a:solidFill>
-            <a:srgbClr val="F2F4F8"/>
-          </a:solidFill>
-          <a:ln>
-            <a:noFill/>
-          </a:ln>
-          <a:effectLst/>
-        </p:spPr>
-        <p:txBody>
-          <a:bodyPr rtlCol="0" anchor="ctr"/>
-          <a:lstStyle/>
-          <a:p/>
-        </p:txBody>
-      </p:sp>
-      <p:sp>
-        <p:nvSpPr>
-          <p:cNvPr id="12" name="TextBox 11"/>
-          <p:cNvSpPr txBox="1"/>
-          <p:nvPr/>
-        </p:nvSpPr>
-        <p:spPr>
-          <a:xfrm>
-            <a:off x="14173200" y="1892807"/>
-            <a:ext cx="3429000" cy="698500"/>
-          </a:xfrm>
-          <a:prstGeom prst="rect">
-            <a:avLst/>
-          </a:prstGeom>
-          <a:noFill/>
-        </p:spPr>
-        <p:txBody>
-          <a:bodyPr wrap="square" lIns="0" rIns="0" tIns="0" bIns="0" anchor="t">
-            <a:noAutofit/>
-          </a:bodyPr>
-          <a:lstStyle/>
-          <a:p>
-            <a:pPr algn="l">
-              <a:lnSpc>
-                <a:spcPct val="95000"/>
-              </a:lnSpc>
-              <a:spcAft>
-                <a:spcPts val="0"/>
-              </a:spcAft>
-              <a:buNone/>
-            </a:pPr>
-            <a:r>
-              <a:rPr sz="4400" b="1" i="0">
-                <a:solidFill>
-                  <a:srgbClr val="002060"/>
-                </a:solidFill>
-                <a:latin typeface="Arial"/>
-              </a:rPr>
-              <a:t>9</a:t>
-            </a:r>
-          </a:p>
-        </p:txBody>
-      </p:sp>
-      <p:sp>
-        <p:nvSpPr>
-          <p:cNvPr id="13" name="TextBox 12"/>
-          <p:cNvSpPr txBox="1"/>
-          <p:nvPr/>
-        </p:nvSpPr>
-        <p:spPr>
-          <a:xfrm>
-            <a:off x="14173200" y="2609596"/>
-            <a:ext cx="3429000" cy="718819"/>
-          </a:xfrm>
-          <a:prstGeom prst="rect">
-            <a:avLst/>
-          </a:prstGeom>
-          <a:noFill/>
-        </p:spPr>
-        <p:txBody>
-          <a:bodyPr wrap="square" lIns="0" rIns="0" tIns="0" bIns="0" anchor="t">
-            <a:noAutofit/>
-          </a:bodyPr>
-          <a:lstStyle/>
-          <a:p>
-            <a:pPr algn="l">
-              <a:lnSpc>
-                <a:spcPct val="105000"/>
-              </a:lnSpc>
-              <a:spcAft>
-                <a:spcPts val="0"/>
-              </a:spcAft>
-              <a:buNone/>
-            </a:pPr>
-            <a:r>
-              <a:rPr sz="1300" b="0" i="0">
-                <a:solidFill>
-                  <a:srgbClr val="5A6270"/>
-                </a:solidFill>
-                <a:latin typeface="Arial"/>
-              </a:rPr>
-              <a:t>países: Turquia, Malásia, Brasil, Paquistão, China, México, EUA, Sudão e Tailândia</a:t>
-            </a:r>
-          </a:p>
-        </p:txBody>
-      </p:sp>
-      <p:sp>
-        <p:nvSpPr>
-          <p:cNvPr id="14" name="Rounded Rectangle 13"/>
-          <p:cNvSpPr/>
-          <p:nvPr/>
-        </p:nvSpPr>
-        <p:spPr>
-          <a:xfrm>
-            <a:off x="9921240" y="3657600"/>
-            <a:ext cx="3794760" cy="1600200"/>
-          </a:xfrm>
-          <a:prstGeom prst="roundRect">
-            <a:avLst>
-              <a:gd name="adj" fmla="val 6000"/>
-            </a:avLst>
-          </a:prstGeom>
-          <a:solidFill>
-            <a:srgbClr val="F2F4F8"/>
-          </a:solidFill>
-          <a:ln>
-            <a:noFill/>
-          </a:ln>
-          <a:effectLst/>
-        </p:spPr>
-        <p:txBody>
-          <a:bodyPr rtlCol="0" anchor="ctr"/>
-          <a:lstStyle/>
-          <a:p/>
-        </p:txBody>
-      </p:sp>
-      <p:sp>
-        <p:nvSpPr>
-          <p:cNvPr id="15" name="TextBox 14"/>
-          <p:cNvSpPr txBox="1"/>
-          <p:nvPr/>
-        </p:nvSpPr>
-        <p:spPr>
-          <a:xfrm>
-            <a:off x="10104119" y="3767328"/>
-            <a:ext cx="3429000" cy="571500"/>
-          </a:xfrm>
-          <a:prstGeom prst="rect">
-            <a:avLst/>
-          </a:prstGeom>
-          <a:noFill/>
-        </p:spPr>
-        <p:txBody>
-          <a:bodyPr wrap="square" lIns="0" rIns="0" tIns="0" bIns="0" anchor="t">
-            <a:noAutofit/>
-          </a:bodyPr>
-          <a:lstStyle/>
-          <a:p>
-            <a:pPr algn="l">
-              <a:lnSpc>
-                <a:spcPct val="95000"/>
-              </a:lnSpc>
-              <a:spcAft>
-                <a:spcPts val="0"/>
-              </a:spcAft>
-              <a:buNone/>
-            </a:pPr>
-            <a:r>
-              <a:rPr sz="3600" b="1" i="0">
-                <a:solidFill>
-                  <a:srgbClr val="002060"/>
-                </a:solidFill>
-                <a:latin typeface="Arial"/>
-              </a:rPr>
-              <a:t>19 + 3</a:t>
-            </a:r>
-          </a:p>
-        </p:txBody>
-      </p:sp>
-      <p:sp>
-        <p:nvSpPr>
-          <p:cNvPr id="16" name="TextBox 15"/>
-          <p:cNvSpPr txBox="1"/>
-          <p:nvPr/>
-        </p:nvSpPr>
-        <p:spPr>
-          <a:xfrm>
-            <a:off x="10104119" y="4357116"/>
-            <a:ext cx="3429000" cy="845820"/>
-          </a:xfrm>
-          <a:prstGeom prst="rect">
-            <a:avLst/>
-          </a:prstGeom>
-          <a:noFill/>
-        </p:spPr>
-        <p:txBody>
-          <a:bodyPr wrap="square" lIns="0" rIns="0" tIns="0" bIns="0" anchor="t">
-            <a:noAutofit/>
-          </a:bodyPr>
-          <a:lstStyle/>
-          <a:p>
-            <a:pPr algn="l">
-              <a:lnSpc>
-                <a:spcPct val="105000"/>
-              </a:lnSpc>
-              <a:spcAft>
-                <a:spcPts val="0"/>
-              </a:spcAft>
-              <a:buNone/>
-            </a:pPr>
-            <a:r>
-              <a:rPr sz="1300" b="0" i="0">
-                <a:solidFill>
-                  <a:srgbClr val="5A6270"/>
-                </a:solidFill>
-                <a:latin typeface="Arial"/>
-              </a:rPr>
-              <a:t>transversais + coortes prospectivas (Navarro 2016; Stanganelli 2019; Stanganelli Caus 2025)</a:t>
-            </a:r>
-          </a:p>
-        </p:txBody>
-      </p:sp>
-      <p:sp>
-        <p:nvSpPr>
-          <p:cNvPr id="17" name="Rounded Rectangle 16"/>
-          <p:cNvSpPr/>
-          <p:nvPr/>
-        </p:nvSpPr>
-        <p:spPr>
-          <a:xfrm>
-            <a:off x="13990320" y="3657600"/>
-            <a:ext cx="3794760" cy="1600200"/>
-          </a:xfrm>
-          <a:prstGeom prst="roundRect">
-            <a:avLst>
-              <a:gd name="adj" fmla="val 6000"/>
-            </a:avLst>
-          </a:prstGeom>
-          <a:solidFill>
-            <a:srgbClr val="F9E9E9"/>
-          </a:solidFill>
-          <a:ln>
-            <a:noFill/>
-          </a:ln>
-          <a:effectLst/>
-        </p:spPr>
-        <p:txBody>
-          <a:bodyPr rtlCol="0" anchor="ctr"/>
-          <a:lstStyle/>
-          <a:p/>
-        </p:txBody>
-      </p:sp>
-      <p:sp>
-        <p:nvSpPr>
-          <p:cNvPr id="18" name="TextBox 17"/>
-          <p:cNvSpPr txBox="1"/>
-          <p:nvPr/>
-        </p:nvSpPr>
-        <p:spPr>
-          <a:xfrm>
-            <a:off x="14173200" y="3767328"/>
-            <a:ext cx="3429000" cy="571500"/>
-          </a:xfrm>
-          <a:prstGeom prst="rect">
-            <a:avLst/>
-          </a:prstGeom>
-          <a:noFill/>
-        </p:spPr>
-        <p:txBody>
-          <a:bodyPr wrap="square" lIns="0" rIns="0" tIns="0" bIns="0" anchor="t">
-            <a:noAutofit/>
-          </a:bodyPr>
-          <a:lstStyle/>
-          <a:p>
-            <a:pPr algn="l">
-              <a:lnSpc>
-                <a:spcPct val="95000"/>
-              </a:lnSpc>
-              <a:spcAft>
-                <a:spcPts val="0"/>
-              </a:spcAft>
-              <a:buNone/>
-            </a:pPr>
-            <a:r>
-              <a:rPr sz="3600" b="1" i="0">
-                <a:solidFill>
-                  <a:srgbClr val="8B0000"/>
-                </a:solidFill>
-                <a:latin typeface="Arial"/>
-              </a:rPr>
-              <a:t>6 | 7</a:t>
-            </a:r>
-          </a:p>
-        </p:txBody>
-      </p:sp>
-      <p:sp>
-        <p:nvSpPr>
-          <p:cNvPr id="19" name="TextBox 18"/>
-          <p:cNvSpPr txBox="1"/>
-          <p:nvPr/>
-        </p:nvSpPr>
-        <p:spPr>
-          <a:xfrm>
-            <a:off x="14173200" y="4357116"/>
-            <a:ext cx="3429000" cy="845820"/>
-          </a:xfrm>
-          <a:prstGeom prst="rect">
-            <a:avLst/>
-          </a:prstGeom>
-          <a:noFill/>
-        </p:spPr>
-        <p:txBody>
-          <a:bodyPr wrap="square" lIns="0" rIns="0" tIns="0" bIns="0" anchor="t">
-            <a:noAutofit/>
-          </a:bodyPr>
-          <a:lstStyle/>
-          <a:p>
-            <a:pPr algn="l">
-              <a:lnSpc>
-                <a:spcPct val="105000"/>
-              </a:lnSpc>
-              <a:spcAft>
-                <a:spcPts val="0"/>
-              </a:spcAft>
-              <a:buNone/>
-            </a:pPr>
-            <a:r>
-              <a:rPr sz="1300" b="0" i="0">
-                <a:solidFill>
-                  <a:srgbClr val="5A6270"/>
-                </a:solidFill>
-                <a:latin typeface="Arial"/>
-              </a:rPr>
-              <a:t>amostras independentes na metanálise ocular (n = 756) | respiratória (n = 1.428)</a:t>
-            </a:r>
-          </a:p>
-        </p:txBody>
-      </p:sp>
-      <p:sp>
-        <p:nvSpPr>
-          <p:cNvPr id="20" name="Rounded Rectangle 19"/>
-          <p:cNvSpPr/>
-          <p:nvPr/>
-        </p:nvSpPr>
-        <p:spPr>
-          <a:xfrm>
-            <a:off x="9921240" y="5532120"/>
-            <a:ext cx="7863840" cy="4206240"/>
-          </a:xfrm>
-          <a:prstGeom prst="roundRect">
-            <a:avLst>
-              <a:gd name="adj" fmla="val 6000"/>
-            </a:avLst>
-          </a:prstGeom>
-          <a:solidFill>
-            <a:srgbClr val="F2F4F8"/>
-          </a:solidFill>
-          <a:ln>
-            <a:noFill/>
-          </a:ln>
-          <a:effectLst/>
-        </p:spPr>
-        <p:txBody>
-          <a:bodyPr rtlCol="0" anchor="ctr"/>
-          <a:lstStyle/>
-          <a:p/>
-        </p:txBody>
-      </p:sp>
-      <p:sp>
-        <p:nvSpPr>
-          <p:cNvPr id="21" name="Oval 20"/>
-          <p:cNvSpPr/>
-          <p:nvPr/>
-        </p:nvSpPr>
-        <p:spPr>
-          <a:xfrm>
-            <a:off x="10195560" y="5806440"/>
-            <a:ext cx="731520" cy="731520"/>
-          </a:xfrm>
-          <a:prstGeom prst="ellipse">
-            <a:avLst/>
-          </a:prstGeom>
-          <a:solidFill>
-            <a:srgbClr val="002060"/>
-          </a:solidFill>
-          <a:ln>
-            <a:noFill/>
-          </a:ln>
-          <a:effectLst/>
-        </p:spPr>
-        <p:txBody>
-          <a:bodyPr rtlCol="0" anchor="ctr" lIns="0" rIns="0" tIns="0" bIns="0"/>
-          <a:lstStyle/>
-          <a:p/>
-        </p:txBody>
-      </p:sp>
-      <p:pic>
-        <p:nvPicPr>
-          <p:cNvPr id="22" name="icone balance" descr="balance_white.png"/>
-          <p:cNvPicPr>
-            <a:picLocks noChangeAspect="1"/>
-          </p:cNvPicPr>
-          <p:nvPr/>
-        </p:nvPicPr>
-        <p:blipFill>
-          <a:blip r:embed="rId5"/>
-          <a:stretch>
-            <a:fillRect/>
-          </a:stretch>
-        </p:blipFill>
-        <p:spPr>
-          <a:xfrm>
             <a:off x="10378440" y="5989320"/>
             <a:ext cx="365760" cy="365760"/>
           </a:xfrm>
@@ -8697,7 +10268,7 @@
       </p:pic>
       <p:sp>
         <p:nvSpPr>
-          <p:cNvPr id="23" name="TextBox 22"/>
+          <p:cNvPr id="56" name="TextBox 55"/>
           <p:cNvSpPr txBox="1"/>
           <p:nvPr/>
         </p:nvSpPr>
@@ -8740,7 +10311,7 @@
       </p:sp>
       <p:sp>
         <p:nvSpPr>
-          <p:cNvPr id="24" name="TextBox 23"/>
+          <p:cNvPr id="57" name="TextBox 56"/>
           <p:cNvSpPr txBox="1"/>
           <p:nvPr/>
         </p:nvSpPr>
@@ -9980,7 +11551,7 @@
                 </a:solidFill>
                 <a:latin typeface="Arial"/>
               </a:rPr>
-              <a:t>(k = 3; n = 268; I² = 57%)   </a:t>
+              <a:t>(k = 3; n = 268; I² = 57%)   ·   </a:t>
             </a:r>
             <a:r>
               <a:rPr sz="1400" b="1" i="0">
@@ -9998,8 +11569,19 @@
                 </a:solidFill>
                 <a:latin typeface="Arial"/>
               </a:rPr>
-              <a:t>(k = 2; n = 333; I² = 0%)   </a:t>
-            </a:r>
+              <a:t>(k = 2; n = 333; I² = 0%)</a:t>
+            </a:r>
+          </a:p>
+          <a:p>
+            <a:pPr algn="l">
+              <a:lnSpc>
+                <a:spcPct val="100000"/>
+              </a:lnSpc>
+              <a:spcAft>
+                <a:spcPts val="300"/>
+              </a:spcAft>
+              <a:buNone/>
+            </a:pPr>
             <a:r>
               <a:rPr sz="1400" b="1" i="0">
                 <a:solidFill>
@@ -10016,7 +11598,7 @@
                 </a:solidFill>
                 <a:latin typeface="Arial"/>
               </a:rPr>
-              <a:t>(k = 1, descritivo)</a:t>
+              <a:t>(k = 1; estrato descritivo)</a:t>
             </a:r>
           </a:p>
           <a:p>
@@ -10059,7 +11641,7 @@
         <p:spPr>
           <a:xfrm>
             <a:off x="10835640" y="1783080"/>
-            <a:ext cx="6949440" cy="1600200"/>
+            <a:ext cx="6949440" cy="2148840"/>
           </a:xfrm>
           <a:prstGeom prst="roundRect">
             <a:avLst>
@@ -10089,7 +11671,7 @@
         <p:spPr>
           <a:xfrm>
             <a:off x="11064240" y="1828800"/>
-            <a:ext cx="2651760" cy="1005840"/>
+            <a:ext cx="6492240" cy="822960"/>
           </a:xfrm>
           <a:prstGeom prst="rect">
             <a:avLst/>
@@ -10097,14 +11679,14 @@
           <a:noFill/>
         </p:spPr>
         <p:txBody>
-          <a:bodyPr wrap="square" lIns="0" rIns="0" tIns="0" bIns="0" anchor="ctr">
+          <a:bodyPr wrap="square" lIns="0" rIns="0" tIns="0" bIns="0" anchor="t">
             <a:noAutofit/>
           </a:bodyPr>
           <a:lstStyle/>
           <a:p>
             <a:pPr algn="l">
               <a:lnSpc>
-                <a:spcPct val="100000"/>
+                <a:spcPct val="95000"/>
               </a:lnSpc>
               <a:spcAft>
                 <a:spcPts val="0"/>
@@ -10131,8 +11713,8 @@
         </p:nvSpPr>
         <p:spPr>
           <a:xfrm>
-            <a:off x="13716000" y="1874519"/>
-            <a:ext cx="3931920" cy="1463040"/>
+            <a:off x="11064240" y="2670048"/>
+            <a:ext cx="6492240" cy="457199"/>
           </a:xfrm>
           <a:prstGeom prst="rect">
             <a:avLst/>
@@ -10140,68 +11722,28 @@
           <a:noFill/>
         </p:spPr>
         <p:txBody>
-          <a:bodyPr wrap="square" lIns="0" rIns="0" tIns="0" bIns="0" anchor="ctr">
+          <a:bodyPr wrap="square" lIns="0" rIns="0" tIns="0" bIns="0" anchor="t">
             <a:noAutofit/>
           </a:bodyPr>
           <a:lstStyle/>
           <a:p>
             <a:pPr algn="l">
               <a:lnSpc>
-                <a:spcPct val="100000"/>
-              </a:lnSpc>
-              <a:spcAft>
-                <a:spcPts val="200"/>
-              </a:spcAft>
-              <a:buNone/>
-            </a:pPr>
-            <a:r>
-              <a:rPr sz="1400" b="1" i="0">
-                <a:solidFill>
-                  <a:srgbClr val="1F2433"/>
+                <a:spcPct val="105000"/>
+              </a:lnSpc>
+              <a:spcAft>
+                <a:spcPts val="0"/>
+              </a:spcAft>
+              <a:buNone/>
+            </a:pPr>
+            <a:r>
+              <a:rPr sz="1600" b="0" i="0">
+                <a:solidFill>
+                  <a:srgbClr val="5A6270"/>
                 </a:solidFill>
                 <a:latin typeface="Arial"/>
               </a:rPr>
               <a:t>prevalência combinada de sintoma respiratório</a:t>
-            </a:r>
-          </a:p>
-          <a:p>
-            <a:pPr algn="l">
-              <a:lnSpc>
-                <a:spcPct val="100000"/>
-              </a:lnSpc>
-              <a:spcAft>
-                <a:spcPts val="200"/>
-              </a:spcAft>
-              <a:buNone/>
-            </a:pPr>
-            <a:r>
-              <a:rPr sz="1400" b="0" i="0">
-                <a:solidFill>
-                  <a:srgbClr val="1F2433"/>
-                </a:solidFill>
-                <a:latin typeface="Arial"/>
-              </a:rPr>
-              <a:t>IC95% 30,4 – 53,9 · IP 15 – 74%</a:t>
-            </a:r>
-          </a:p>
-          <a:p>
-            <a:pPr algn="l">
-              <a:lnSpc>
-                <a:spcPct val="100000"/>
-              </a:lnSpc>
-              <a:spcAft>
-                <a:spcPts val="200"/>
-              </a:spcAft>
-              <a:buNone/>
-            </a:pPr>
-            <a:r>
-              <a:rPr sz="1400" b="0" i="0">
-                <a:solidFill>
-                  <a:srgbClr val="1F2433"/>
-                </a:solidFill>
-                <a:latin typeface="Arial"/>
-              </a:rPr>
-              <a:t>I² = 91% · k = 7 · n = 1.428</a:t>
             </a:r>
           </a:p>
         </p:txBody>
@@ -10214,7 +11756,97 @@
         </p:nvSpPr>
         <p:spPr>
           <a:xfrm>
-            <a:off x="10835640" y="3566160"/>
+            <a:off x="11064240" y="3154680"/>
+            <a:ext cx="6492240" cy="731520"/>
+          </a:xfrm>
+          <a:prstGeom prst="rect">
+            <a:avLst/>
+          </a:prstGeom>
+          <a:noFill/>
+        </p:spPr>
+        <p:txBody>
+          <a:bodyPr wrap="square" lIns="0" rIns="0" tIns="0" bIns="0" anchor="t">
+            <a:noAutofit/>
+          </a:bodyPr>
+          <a:lstStyle/>
+          <a:p>
+            <a:pPr algn="l">
+              <a:lnSpc>
+                <a:spcPct val="100000"/>
+              </a:lnSpc>
+              <a:spcAft>
+                <a:spcPts val="200"/>
+              </a:spcAft>
+              <a:buNone/>
+            </a:pPr>
+            <a:r>
+              <a:rPr sz="1500" b="1" i="0">
+                <a:solidFill>
+                  <a:srgbClr val="1F2433"/>
+                </a:solidFill>
+                <a:latin typeface="Arial"/>
+              </a:rPr>
+              <a:t>IC95% </a:t>
+            </a:r>
+            <a:r>
+              <a:rPr sz="1500" b="0" i="0">
+                <a:solidFill>
+                  <a:srgbClr val="1F2433"/>
+                </a:solidFill>
+                <a:latin typeface="Arial"/>
+              </a:rPr>
+              <a:t>30,4 – 53,9   ·   </a:t>
+            </a:r>
+            <a:r>
+              <a:rPr sz="1500" b="1" i="0">
+                <a:solidFill>
+                  <a:srgbClr val="1F2433"/>
+                </a:solidFill>
+                <a:latin typeface="Arial"/>
+              </a:rPr>
+              <a:t>Intervalo de predição </a:t>
+            </a:r>
+            <a:r>
+              <a:rPr sz="1500" b="0" i="0">
+                <a:solidFill>
+                  <a:srgbClr val="1F2433"/>
+                </a:solidFill>
+                <a:latin typeface="Arial"/>
+              </a:rPr>
+              <a:t>15 – 74%</a:t>
+            </a:r>
+          </a:p>
+          <a:p>
+            <a:pPr algn="l">
+              <a:lnSpc>
+                <a:spcPct val="100000"/>
+              </a:lnSpc>
+              <a:spcAft>
+                <a:spcPts val="200"/>
+              </a:spcAft>
+              <a:buNone/>
+            </a:pPr>
+            <a:r>
+              <a:rPr sz="1500" b="1" i="0">
+                <a:solidFill>
+                  <a:srgbClr val="1F2433"/>
+                </a:solidFill>
+                <a:latin typeface="Arial"/>
+              </a:rPr>
+              <a:t>I² = 91% · k = 7 · n = 1.428</a:t>
+            </a:r>
+          </a:p>
+        </p:txBody>
+      </p:sp>
+      <p:sp>
+        <p:nvSpPr>
+          <p:cNvPr id="15" name="TextBox 14"/>
+          <p:cNvSpPr txBox="1"/>
+          <p:nvPr/>
+        </p:nvSpPr>
+        <p:spPr>
+          <a:xfrm>
+            <a:off x="10835640" y="4114800"/>
             <a:ext cx="6949440" cy="365760"/>
           </a:xfrm>
           <a:prstGeom prst="rect">
@@ -10251,14 +11883,14 @@
       </p:sp>
       <p:graphicFrame>
         <p:nvGraphicFramePr>
-          <p:cNvPr id="15" name="Table 14"/>
+          <p:cNvPr id="16" name="Table 15"/>
           <p:cNvGraphicFramePr>
             <a:graphicFrameLocks noGrp="1"/>
           </p:cNvGraphicFramePr>
           <p:nvPr/>
         </p:nvGraphicFramePr>
         <p:xfrm>
-          <a:off x="10835640" y="3977639"/>
+          <a:off x="10835640" y="4526280"/>
           <a:ext cx="6949440" cy="2688336"/>
         </p:xfrm>
         <a:graphic>
@@ -10983,13 +12615,13 @@
       </p:graphicFrame>
       <p:sp>
         <p:nvSpPr>
-          <p:cNvPr id="16" name="TextBox 15"/>
+          <p:cNvPr id="17" name="TextBox 16"/>
           <p:cNvSpPr txBox="1"/>
           <p:nvPr/>
         </p:nvSpPr>
         <p:spPr>
           <a:xfrm>
-            <a:off x="10835640" y="6766560"/>
+            <a:off x="10835640" y="7269480"/>
             <a:ext cx="6949440" cy="457200"/>
           </a:xfrm>
           <a:prstGeom prst="rect">
@@ -11035,14 +12667,14 @@
       </p:sp>
       <p:sp>
         <p:nvSpPr>
-          <p:cNvPr id="17" name="Rounded Rectangle 16"/>
+          <p:cNvPr id="18" name="Rounded Rectangle 17"/>
           <p:cNvSpPr/>
           <p:nvPr/>
         </p:nvSpPr>
         <p:spPr>
           <a:xfrm>
-            <a:off x="10835640" y="7315200"/>
-            <a:ext cx="6949440" cy="2423160"/>
+            <a:off x="10835640" y="7772400"/>
+            <a:ext cx="6949440" cy="1965960"/>
           </a:xfrm>
           <a:prstGeom prst="roundRect">
             <a:avLst>
@@ -11065,13 +12697,13 @@
       </p:sp>
       <p:sp>
         <p:nvSpPr>
-          <p:cNvPr id="18" name="Oval 17"/>
+          <p:cNvPr id="19" name="Oval 18"/>
           <p:cNvSpPr/>
           <p:nvPr/>
         </p:nvSpPr>
         <p:spPr>
           <a:xfrm>
-            <a:off x="11064240" y="7543800"/>
+            <a:off x="11018519" y="7955279"/>
             <a:ext cx="731520" cy="731520"/>
           </a:xfrm>
           <a:prstGeom prst="ellipse">
@@ -11093,7 +12725,7 @@
       </p:sp>
       <p:pic>
         <p:nvPicPr>
-          <p:cNvPr id="19" name="icone lightbulb" descr="lightbulb_white.png"/>
+          <p:cNvPr id="20" name="icone lightbulb" descr="lightbulb_white.png"/>
           <p:cNvPicPr>
             <a:picLocks noChangeAspect="1"/>
           </p:cNvPicPr>
@@ -11107,7 +12739,7 @@
         </p:blipFill>
         <p:spPr>
           <a:xfrm>
-            <a:off x="11247120" y="7726680"/>
+            <a:off x="11201400" y="8138160"/>
             <a:ext cx="365760" cy="365760"/>
           </a:xfrm>
           <a:prstGeom prst="rect">
@@ -11115,49 +12747,6 @@
           </a:prstGeom>
         </p:spPr>
       </p:pic>
-      <p:sp>
-        <p:nvSpPr>
-          <p:cNvPr id="20" name="TextBox 19"/>
-          <p:cNvSpPr txBox="1"/>
-          <p:nvPr/>
-        </p:nvSpPr>
-        <p:spPr>
-          <a:xfrm>
-            <a:off x="12024360" y="7543800"/>
-            <a:ext cx="5532119" cy="731520"/>
-          </a:xfrm>
-          <a:prstGeom prst="rect">
-            <a:avLst/>
-          </a:prstGeom>
-          <a:noFill/>
-        </p:spPr>
-        <p:txBody>
-          <a:bodyPr wrap="square" lIns="0" rIns="0" tIns="0" bIns="0" anchor="ctr">
-            <a:noAutofit/>
-          </a:bodyPr>
-          <a:lstStyle/>
-          <a:p>
-            <a:pPr algn="l">
-              <a:lnSpc>
-                <a:spcPct val="100000"/>
-              </a:lnSpc>
-              <a:spcAft>
-                <a:spcPts val="0"/>
-              </a:spcAft>
-              <a:buNone/>
-            </a:pPr>
-            <a:r>
-              <a:rPr sz="2200" b="1" i="0">
-                <a:solidFill>
-                  <a:srgbClr val="002060"/>
-                </a:solidFill>
-                <a:latin typeface="Arial"/>
-              </a:rPr>
-              <a:t>O que a sensibilidade ensina</a:t>
-            </a:r>
-          </a:p>
-        </p:txBody>
-      </p:sp>
       <p:sp>
         <p:nvSpPr>
           <p:cNvPr id="21" name="TextBox 20"/>
@@ -11166,8 +12755,51 @@
         </p:nvSpPr>
         <p:spPr>
           <a:xfrm>
-            <a:off x="11064240" y="8412480"/>
-            <a:ext cx="6492240" cy="1143000"/>
+            <a:off x="11978640" y="7955279"/>
+            <a:ext cx="5623559" cy="731520"/>
+          </a:xfrm>
+          <a:prstGeom prst="rect">
+            <a:avLst/>
+          </a:prstGeom>
+          <a:noFill/>
+        </p:spPr>
+        <p:txBody>
+          <a:bodyPr wrap="square" lIns="0" rIns="0" tIns="0" bIns="0" anchor="ctr">
+            <a:noAutofit/>
+          </a:bodyPr>
+          <a:lstStyle/>
+          <a:p>
+            <a:pPr algn="l">
+              <a:lnSpc>
+                <a:spcPct val="100000"/>
+              </a:lnSpc>
+              <a:spcAft>
+                <a:spcPts val="0"/>
+              </a:spcAft>
+              <a:buNone/>
+            </a:pPr>
+            <a:r>
+              <a:rPr sz="2200" b="1" i="0">
+                <a:solidFill>
+                  <a:srgbClr val="002060"/>
+                </a:solidFill>
+                <a:latin typeface="Arial"/>
+              </a:rPr>
+              <a:t>O que a sensibilidade ensina</a:t>
+            </a:r>
+          </a:p>
+        </p:txBody>
+      </p:sp>
+      <p:sp>
+        <p:nvSpPr>
+          <p:cNvPr id="22" name="TextBox 21"/>
+          <p:cNvSpPr txBox="1"/>
+          <p:nvPr/>
+        </p:nvSpPr>
+        <p:spPr>
+          <a:xfrm>
+            <a:off x="11018519" y="8823959"/>
+            <a:ext cx="6583679" cy="768096"/>
           </a:xfrm>
           <a:prstGeom prst="rect">
             <a:avLst/>
@@ -12564,7 +14196,7 @@
         <p:spPr>
           <a:xfrm>
             <a:off x="1143000" y="7680960"/>
-            <a:ext cx="16642080" cy="1645920"/>
+            <a:ext cx="16642080" cy="1691640"/>
           </a:xfrm>
           <a:prstGeom prst="roundRect">
             <a:avLst>
@@ -12593,8 +14225,8 @@
         </p:nvSpPr>
         <p:spPr>
           <a:xfrm>
-            <a:off x="1417320" y="7726679"/>
-            <a:ext cx="5120640" cy="1554480"/>
+            <a:off x="1417320" y="7818120"/>
+            <a:ext cx="5120640" cy="411480"/>
           </a:xfrm>
           <a:prstGeom prst="rect">
             <a:avLst/>
@@ -12602,7 +14234,7 @@
           <a:noFill/>
         </p:spPr>
         <p:txBody>
-          <a:bodyPr wrap="square" lIns="0" rIns="0" tIns="0" bIns="0" anchor="ctr">
+          <a:bodyPr wrap="square" lIns="0" rIns="0" tIns="0" bIns="0" anchor="t">
             <a:noAutofit/>
           </a:bodyPr>
           <a:lstStyle/>
@@ -12612,7 +14244,7 @@
                 <a:spcPct val="100000"/>
               </a:lnSpc>
               <a:spcAft>
-                <a:spcPts val="200"/>
+                <a:spcPts val="0"/>
               </a:spcAft>
               <a:buNone/>
             </a:pPr>
@@ -12624,26 +14256,6 @@
                 <a:latin typeface="Arial"/>
               </a:rPr>
               <a:t>●○○○  Certeza MUITO BAIXA</a:t>
-            </a:r>
-          </a:p>
-          <a:p>
-            <a:pPr algn="l">
-              <a:lnSpc>
-                <a:spcPct val="100000"/>
-              </a:lnSpc>
-              <a:spcAft>
-                <a:spcPts val="200"/>
-              </a:spcAft>
-              <a:buNone/>
-            </a:pPr>
-            <a:r>
-              <a:rPr sz="1400" b="0" i="0">
-                <a:solidFill>
-                  <a:srgbClr val="FFFFFF"/>
-                </a:solidFill>
-                <a:latin typeface="Arial"/>
-              </a:rPr>
-              <a:t>em todos os desfechos (GRADE); medidas comparativas não combinadas (desenhos e desfechos heterogêneos).</a:t>
             </a:r>
           </a:p>
         </p:txBody>
@@ -12656,8 +14268,8 @@
         </p:nvSpPr>
         <p:spPr>
           <a:xfrm>
-            <a:off x="6583680" y="7726679"/>
-            <a:ext cx="5120640" cy="1554480"/>
+            <a:off x="1417320" y="8275320"/>
+            <a:ext cx="5120640" cy="1005840"/>
           </a:xfrm>
           <a:prstGeom prst="rect">
             <a:avLst/>
@@ -12665,7 +14277,7 @@
           <a:noFill/>
         </p:spPr>
         <p:txBody>
-          <a:bodyPr wrap="square" lIns="0" rIns="0" tIns="0" bIns="0" anchor="ctr">
+          <a:bodyPr wrap="square" lIns="0" rIns="0" tIns="0" bIns="0" anchor="t">
             <a:noAutofit/>
           </a:bodyPr>
           <a:lstStyle/>
@@ -12675,38 +14287,18 @@
                 <a:spcPct val="100000"/>
               </a:lnSpc>
               <a:spcAft>
-                <a:spcPts val="200"/>
-              </a:spcAft>
-              <a:buNone/>
-            </a:pPr>
-            <a:r>
-              <a:rPr sz="2000" b="1" i="0">
-                <a:solidFill>
-                  <a:srgbClr val="C8A951"/>
-                </a:solidFill>
-                <a:latin typeface="Arial"/>
-              </a:rPr>
-              <a:t>0 estudos sobre câncer ou DPOC</a:t>
-            </a:r>
-          </a:p>
-          <a:p>
-            <a:pPr algn="l">
-              <a:lnSpc>
-                <a:spcPct val="100000"/>
-              </a:lnSpc>
-              <a:spcAft>
-                <a:spcPts val="200"/>
-              </a:spcAft>
-              <a:buNone/>
-            </a:pPr>
-            <a:r>
-              <a:rPr sz="1400" b="0" i="0">
+                <a:spcPts val="0"/>
+              </a:spcAft>
+              <a:buNone/>
+            </a:pPr>
+            <a:r>
+              <a:rPr sz="1500" b="0" i="0">
                 <a:solidFill>
                   <a:srgbClr val="FFFFFF"/>
                 </a:solidFill>
                 <a:latin typeface="Arial"/>
               </a:rPr>
-              <a:t>vazio de evidência: ausência de estudos ≠ ausência de risco.</a:t>
+              <a:t>em todos os desfechos (GRADE); medidas comparativas não combinadas (desenhos e desfechos heterogêneos).</a:t>
             </a:r>
           </a:p>
         </p:txBody>
@@ -12719,8 +14311,8 @@
         </p:nvSpPr>
         <p:spPr>
           <a:xfrm>
-            <a:off x="11978640" y="7726679"/>
-            <a:ext cx="5669280" cy="1554480"/>
+            <a:off x="6583680" y="7818120"/>
+            <a:ext cx="5120640" cy="411480"/>
           </a:xfrm>
           <a:prstGeom prst="rect">
             <a:avLst/>
@@ -12728,7 +14320,7 @@
           <a:noFill/>
         </p:spPr>
         <p:txBody>
-          <a:bodyPr wrap="square" lIns="0" rIns="0" tIns="0" bIns="0" anchor="ctr">
+          <a:bodyPr wrap="square" lIns="0" rIns="0" tIns="0" bIns="0" anchor="t">
             <a:noAutofit/>
           </a:bodyPr>
           <a:lstStyle/>
@@ -12738,7 +14330,7 @@
                 <a:spcPct val="100000"/>
               </a:lnSpc>
               <a:spcAft>
-                <a:spcPts val="200"/>
+                <a:spcPts val="0"/>
               </a:spcAft>
               <a:buNone/>
             </a:pPr>
@@ -12749,21 +14341,130 @@
                 </a:solidFill>
                 <a:latin typeface="Arial"/>
               </a:rPr>
+              <a:t>0 estudos sobre câncer ou DPOC</a:t>
+            </a:r>
+          </a:p>
+        </p:txBody>
+      </p:sp>
+      <p:sp>
+        <p:nvSpPr>
+          <p:cNvPr id="35" name="TextBox 34"/>
+          <p:cNvSpPr txBox="1"/>
+          <p:nvPr/>
+        </p:nvSpPr>
+        <p:spPr>
+          <a:xfrm>
+            <a:off x="6583680" y="8275320"/>
+            <a:ext cx="5120640" cy="1005840"/>
+          </a:xfrm>
+          <a:prstGeom prst="rect">
+            <a:avLst/>
+          </a:prstGeom>
+          <a:noFill/>
+        </p:spPr>
+        <p:txBody>
+          <a:bodyPr wrap="square" lIns="0" rIns="0" tIns="0" bIns="0" anchor="t">
+            <a:noAutofit/>
+          </a:bodyPr>
+          <a:lstStyle/>
+          <a:p>
+            <a:pPr algn="l">
+              <a:lnSpc>
+                <a:spcPct val="100000"/>
+              </a:lnSpc>
+              <a:spcAft>
+                <a:spcPts val="0"/>
+              </a:spcAft>
+              <a:buNone/>
+            </a:pPr>
+            <a:r>
+              <a:rPr sz="1500" b="0" i="0">
+                <a:solidFill>
+                  <a:srgbClr val="FFFFFF"/>
+                </a:solidFill>
+                <a:latin typeface="Arial"/>
+              </a:rPr>
+              <a:t>vazio de evidência: ausência de estudos ≠ ausência de risco.</a:t>
+            </a:r>
+          </a:p>
+        </p:txBody>
+      </p:sp>
+      <p:sp>
+        <p:nvSpPr>
+          <p:cNvPr id="36" name="TextBox 35"/>
+          <p:cNvSpPr txBox="1"/>
+          <p:nvPr/>
+        </p:nvSpPr>
+        <p:spPr>
+          <a:xfrm>
+            <a:off x="11978640" y="7818120"/>
+            <a:ext cx="5669280" cy="411480"/>
+          </a:xfrm>
+          <a:prstGeom prst="rect">
+            <a:avLst/>
+          </a:prstGeom>
+          <a:noFill/>
+        </p:spPr>
+        <p:txBody>
+          <a:bodyPr wrap="square" lIns="0" rIns="0" tIns="0" bIns="0" anchor="t">
+            <a:noAutofit/>
+          </a:bodyPr>
+          <a:lstStyle/>
+          <a:p>
+            <a:pPr algn="l">
+              <a:lnSpc>
+                <a:spcPct val="100000"/>
+              </a:lnSpc>
+              <a:spcAft>
+                <a:spcPts val="0"/>
+              </a:spcAft>
+              <a:buNone/>
+            </a:pPr>
+            <a:r>
+              <a:rPr sz="2000" b="1" i="0">
+                <a:solidFill>
+                  <a:srgbClr val="C8A951"/>
+                </a:solidFill>
+                <a:latin typeface="Arial"/>
+              </a:rPr>
               <a:t>Direção consistente, mas…</a:t>
             </a:r>
           </a:p>
+        </p:txBody>
+      </p:sp>
+      <p:sp>
+        <p:nvSpPr>
+          <p:cNvPr id="37" name="TextBox 36"/>
+          <p:cNvSpPr txBox="1"/>
+          <p:nvPr/>
+        </p:nvSpPr>
+        <p:spPr>
+          <a:xfrm>
+            <a:off x="11978640" y="8275320"/>
+            <a:ext cx="5669280" cy="1005840"/>
+          </a:xfrm>
+          <a:prstGeom prst="rect">
+            <a:avLst/>
+          </a:prstGeom>
+          <a:noFill/>
+        </p:spPr>
+        <p:txBody>
+          <a:bodyPr wrap="square" lIns="0" rIns="0" tIns="0" bIns="0" anchor="t">
+            <a:noAutofit/>
+          </a:bodyPr>
+          <a:lstStyle/>
           <a:p>
             <a:pPr algn="l">
               <a:lnSpc>
                 <a:spcPct val="100000"/>
               </a:lnSpc>
               <a:spcAft>
-                <a:spcPts val="200"/>
-              </a:spcAft>
-              <a:buNone/>
-            </a:pPr>
-            <a:r>
-              <a:rPr sz="1400" b="0" i="0">
+                <a:spcPts val="0"/>
+              </a:spcAft>
+              <a:buNone/>
+            </a:pPr>
+            <a:r>
+              <a:rPr sz="1500" b="0" i="0">
                 <a:solidFill>
                   <a:srgbClr val="FFFFFF"/>
                 </a:solidFill>
@@ -13119,7 +14820,7 @@
                 </a:solidFill>
                 <a:latin typeface="Arial"/>
               </a:rPr>
-              <a:t>Sintomas frequentes: ocular 37,6%, respiratório 41,7%, qualquer sintoma 55,6–73,2%.</a:t>
+              <a:t>Sintomas frequentes: ocular 37,6%, respiratório 41,7%, qualquer sintoma entre 55,6% e 73,2%.</a:t>
             </a:r>
           </a:p>
           <a:p>
@@ -14171,6 +15872,27 @@
                 </a:solidFill>
                 <a:latin typeface="Arial"/>
               </a:rPr>
+              <a:t>Tratamento explícito da sobreposição amostral e do uso de IA (apenas operacional).</a:t>
+            </a:r>
+          </a:p>
+          <a:p>
+            <a:pPr algn="l" marL="274320" indent="-274320">
+              <a:lnSpc>
+                <a:spcPct val="100000"/>
+              </a:lnSpc>
+              <a:spcAft>
+                <a:spcPts val="1200"/>
+              </a:spcAft>
+              <a:buFont typeface="Arial"/>
+              <a:buChar char="•"/>
+            </a:pPr>
+            <a:r>
+              <a:rPr sz="1800" b="0" i="0">
+                <a:solidFill>
+                  <a:srgbClr val="1F2433"/>
+                </a:solidFill>
+                <a:latin typeface="Arial"/>
+              </a:rPr>
               <a:t>Reprodutibilidade: código em Python, planilhas e figuras abertos no OSF.</a:t>
             </a:r>
           </a:p>
@@ -14500,6 +16222,36 @@
                 <a:latin typeface="Arial"/>
               </a:rPr>
               <a:t>na triagem, extração, JBI e GRADE; 6 relatórios não recuperados; elegibilidade em 3 idiomas.</a:t>
+            </a:r>
+          </a:p>
+          <a:p>
+            <a:pPr algn="l" marL="274320" indent="-274320">
+              <a:lnSpc>
+                <a:spcPct val="100000"/>
+              </a:lnSpc>
+              <a:spcAft>
+                <a:spcPts val="1000"/>
+              </a:spcAft>
+              <a:buFont typeface="Arial"/>
+              <a:buChar char="•"/>
+            </a:pPr>
+            <a:r>
+              <a:rPr sz="1700" b="1" i="0">
+                <a:solidFill>
+                  <a:srgbClr val="1F2433"/>
+                </a:solidFill>
+                <a:latin typeface="Arial"/>
+              </a:rPr>
+              <a:t>Instrumentos sem validação relatada </a:t>
+            </a:r>
+            <a:r>
+              <a:rPr sz="1700" b="0" i="0">
+                <a:solidFill>
+                  <a:srgbClr val="1F2433"/>
+                </a:solidFill>
+                <a:latin typeface="Arial"/>
+              </a:rPr>
+              <a:t>e período de recordatório quase nunca informado; taxa de resposta raramente relatada.</a:t>
             </a:r>
           </a:p>
           <a:p>
@@ -14835,7 +16587,7 @@
               <a:buNone/>
             </a:pPr>
             <a:r>
-              <a:rPr sz="1400" b="1" i="0">
+              <a:rPr sz="1500" b="1" i="0">
                 <a:solidFill>
                   <a:srgbClr val="002060"/>
                 </a:solidFill>
@@ -14859,7 +16611,7 @@
               <a:buChar char="•"/>
             </a:pPr>
             <a:r>
-              <a:rPr sz="1400" b="0" i="0">
+              <a:rPr sz="1500" b="0" i="0">
                 <a:solidFill>
                   <a:srgbClr val="1F2433"/>
                 </a:solidFill>
@@ -14883,7 +16635,7 @@
               <a:buChar char="•"/>
             </a:pPr>
             <a:r>
-              <a:rPr sz="1400" b="0" i="0">
+              <a:rPr sz="1500" b="0" i="0">
                 <a:solidFill>
                   <a:srgbClr val="1F2433"/>
                 </a:solidFill>
@@ -14907,7 +16659,7 @@
               <a:buChar char="•"/>
             </a:pPr>
             <a:r>
-              <a:rPr sz="1400" b="0" i="0">
+              <a:rPr sz="1500" b="0" i="0">
                 <a:solidFill>
                   <a:srgbClr val="1F2433"/>
                 </a:solidFill>
@@ -15075,7 +16827,7 @@
               <a:buNone/>
             </a:pPr>
             <a:r>
-              <a:rPr sz="1400" b="0" i="0">
+              <a:rPr sz="1500" b="0" i="0">
                 <a:solidFill>
                   <a:srgbClr val="1F2433"/>
                 </a:solidFill>
@@ -15243,7 +16995,7 @@
               <a:buNone/>
             </a:pPr>
             <a:r>
-              <a:rPr sz="1400" b="0" i="0">
+              <a:rPr sz="1500" b="0" i="0">
                 <a:solidFill>
                   <a:srgbClr val="1F2433"/>
                 </a:solidFill>
@@ -15411,7 +17163,7 @@
               <a:buNone/>
             </a:pPr>
             <a:r>
-              <a:rPr sz="1400" b="0" i="0">
+              <a:rPr sz="1500" b="0" i="0">
                 <a:solidFill>
                   <a:srgbClr val="1F2433"/>
                 </a:solidFill>
@@ -15862,7 +17614,7 @@
         <p:spPr>
           <a:xfrm>
             <a:off x="2514600" y="2926080"/>
-            <a:ext cx="8686800" cy="1280160"/>
+            <a:ext cx="8412480" cy="1280160"/>
           </a:xfrm>
           <a:prstGeom prst="rect">
             <a:avLst/>
@@ -16000,7 +17752,7 @@
         <p:spPr>
           <a:xfrm>
             <a:off x="2514600" y="4709160"/>
-            <a:ext cx="8686800" cy="1280160"/>
+            <a:ext cx="8412480" cy="1280160"/>
           </a:xfrm>
           <a:prstGeom prst="rect">
             <a:avLst/>
@@ -16138,7 +17890,7 @@
         <p:spPr>
           <a:xfrm>
             <a:off x="2514600" y="6492240"/>
-            <a:ext cx="8686800" cy="1280160"/>
+            <a:ext cx="8412480" cy="1280160"/>
           </a:xfrm>
           <a:prstGeom prst="rect">
             <a:avLst/>
@@ -16276,7 +18028,7 @@
         <p:spPr>
           <a:xfrm>
             <a:off x="2514600" y="8275319"/>
-            <a:ext cx="8686800" cy="1280160"/>
+            <a:ext cx="8412480" cy="1280160"/>
           </a:xfrm>
           <a:prstGeom prst="rect">
             <a:avLst/>
@@ -16926,12 +18678,12 @@
                 <a:spcPct val="100000"/>
               </a:lnSpc>
               <a:spcAft>
-                <a:spcPts val="900"/>
-              </a:spcAft>
-              <a:buNone/>
-            </a:pPr>
-            <a:r>
-              <a:rPr sz="1500" b="0" i="0">
+                <a:spcPts val="1200"/>
+              </a:spcAft>
+              <a:buNone/>
+            </a:pPr>
+            <a:r>
+              <a:rPr sz="1700" b="0" i="0">
                 <a:solidFill>
                   <a:srgbClr val="1F2433"/>
                 </a:solidFill>
@@ -16946,12 +18698,12 @@
                 <a:spcPct val="100000"/>
               </a:lnSpc>
               <a:spcAft>
-                <a:spcPts val="900"/>
-              </a:spcAft>
-              <a:buNone/>
-            </a:pPr>
-            <a:r>
-              <a:rPr sz="1500" b="0" i="0">
+                <a:spcPts val="1200"/>
+              </a:spcAft>
+              <a:buNone/>
+            </a:pPr>
+            <a:r>
+              <a:rPr sz="1700" b="0" i="0">
                 <a:solidFill>
                   <a:srgbClr val="1F2433"/>
                 </a:solidFill>
@@ -16966,12 +18718,12 @@
                 <a:spcPct val="100000"/>
               </a:lnSpc>
               <a:spcAft>
-                <a:spcPts val="900"/>
-              </a:spcAft>
-              <a:buNone/>
-            </a:pPr>
-            <a:r>
-              <a:rPr sz="1500" b="0" i="0">
+                <a:spcPts val="1200"/>
+              </a:spcAft>
+              <a:buNone/>
+            </a:pPr>
+            <a:r>
+              <a:rPr sz="1700" b="0" i="0">
                 <a:solidFill>
                   <a:srgbClr val="1F2433"/>
                 </a:solidFill>
@@ -16986,12 +18738,12 @@
                 <a:spcPct val="100000"/>
               </a:lnSpc>
               <a:spcAft>
-                <a:spcPts val="900"/>
-              </a:spcAft>
-              <a:buNone/>
-            </a:pPr>
-            <a:r>
-              <a:rPr sz="1500" b="0" i="0">
+                <a:spcPts val="1200"/>
+              </a:spcAft>
+              <a:buNone/>
+            </a:pPr>
+            <a:r>
+              <a:rPr sz="1700" b="0" i="0">
                 <a:solidFill>
                   <a:srgbClr val="1F2433"/>
                 </a:solidFill>
@@ -17006,12 +18758,12 @@
                 <a:spcPct val="100000"/>
               </a:lnSpc>
               <a:spcAft>
-                <a:spcPts val="900"/>
-              </a:spcAft>
-              <a:buNone/>
-            </a:pPr>
-            <a:r>
-              <a:rPr sz="1500" b="0" i="0">
+                <a:spcPts val="1200"/>
+              </a:spcAft>
+              <a:buNone/>
+            </a:pPr>
+            <a:r>
+              <a:rPr sz="1700" b="0" i="0">
                 <a:solidFill>
                   <a:srgbClr val="1F2433"/>
                 </a:solidFill>
@@ -17026,12 +18778,12 @@
                 <a:spcPct val="100000"/>
               </a:lnSpc>
               <a:spcAft>
-                <a:spcPts val="900"/>
-              </a:spcAft>
-              <a:buNone/>
-            </a:pPr>
-            <a:r>
-              <a:rPr sz="1500" b="0" i="0">
+                <a:spcPts val="1200"/>
+              </a:spcAft>
+              <a:buNone/>
+            </a:pPr>
+            <a:r>
+              <a:rPr sz="1700" b="0" i="0">
                 <a:solidFill>
                   <a:srgbClr val="1F2433"/>
                 </a:solidFill>
@@ -17046,12 +18798,12 @@
                 <a:spcPct val="100000"/>
               </a:lnSpc>
               <a:spcAft>
-                <a:spcPts val="900"/>
-              </a:spcAft>
-              <a:buNone/>
-            </a:pPr>
-            <a:r>
-              <a:rPr sz="1500" b="0" i="0">
+                <a:spcPts val="1200"/>
+              </a:spcAft>
+              <a:buNone/>
+            </a:pPr>
+            <a:r>
+              <a:rPr sz="1700" b="0" i="0">
                 <a:solidFill>
                   <a:srgbClr val="1F2433"/>
                 </a:solidFill>
@@ -17066,12 +18818,12 @@
                 <a:spcPct val="100000"/>
               </a:lnSpc>
               <a:spcAft>
-                <a:spcPts val="900"/>
-              </a:spcAft>
-              <a:buNone/>
-            </a:pPr>
-            <a:r>
-              <a:rPr sz="1500" b="0" i="0">
+                <a:spcPts val="1200"/>
+              </a:spcAft>
+              <a:buNone/>
+            </a:pPr>
+            <a:r>
+              <a:rPr sz="1700" b="0" i="0">
                 <a:solidFill>
                   <a:srgbClr val="1F2433"/>
                 </a:solidFill>
@@ -17109,12 +18861,12 @@
                 <a:spcPct val="100000"/>
               </a:lnSpc>
               <a:spcAft>
-                <a:spcPts val="900"/>
-              </a:spcAft>
-              <a:buNone/>
-            </a:pPr>
-            <a:r>
-              <a:rPr sz="1500" b="0" i="0">
+                <a:spcPts val="1200"/>
+              </a:spcAft>
+              <a:buNone/>
+            </a:pPr>
+            <a:r>
+              <a:rPr sz="1700" b="0" i="0">
                 <a:solidFill>
                   <a:srgbClr val="1F2433"/>
                 </a:solidFill>
@@ -17129,12 +18881,12 @@
                 <a:spcPct val="100000"/>
               </a:lnSpc>
               <a:spcAft>
-                <a:spcPts val="900"/>
-              </a:spcAft>
-              <a:buNone/>
-            </a:pPr>
-            <a:r>
-              <a:rPr sz="1500" b="0" i="0">
+                <a:spcPts val="1200"/>
+              </a:spcAft>
+              <a:buNone/>
+            </a:pPr>
+            <a:r>
+              <a:rPr sz="1700" b="0" i="0">
                 <a:solidFill>
                   <a:srgbClr val="1F2433"/>
                 </a:solidFill>
@@ -17149,12 +18901,12 @@
                 <a:spcPct val="100000"/>
               </a:lnSpc>
               <a:spcAft>
-                <a:spcPts val="900"/>
-              </a:spcAft>
-              <a:buNone/>
-            </a:pPr>
-            <a:r>
-              <a:rPr sz="1500" b="0" i="0">
+                <a:spcPts val="1200"/>
+              </a:spcAft>
+              <a:buNone/>
+            </a:pPr>
+            <a:r>
+              <a:rPr sz="1700" b="0" i="0">
                 <a:solidFill>
                   <a:srgbClr val="1F2433"/>
                 </a:solidFill>
@@ -17169,12 +18921,12 @@
                 <a:spcPct val="100000"/>
               </a:lnSpc>
               <a:spcAft>
-                <a:spcPts val="900"/>
-              </a:spcAft>
-              <a:buNone/>
-            </a:pPr>
-            <a:r>
-              <a:rPr sz="1500" b="0" i="0">
+                <a:spcPts val="1200"/>
+              </a:spcAft>
+              <a:buNone/>
+            </a:pPr>
+            <a:r>
+              <a:rPr sz="1700" b="0" i="0">
                 <a:solidFill>
                   <a:srgbClr val="1F2433"/>
                 </a:solidFill>
@@ -17189,12 +18941,12 @@
                 <a:spcPct val="100000"/>
               </a:lnSpc>
               <a:spcAft>
-                <a:spcPts val="900"/>
-              </a:spcAft>
-              <a:buNone/>
-            </a:pPr>
-            <a:r>
-              <a:rPr sz="1500" b="0" i="0">
+                <a:spcPts val="1200"/>
+              </a:spcAft>
+              <a:buNone/>
+            </a:pPr>
+            <a:r>
+              <a:rPr sz="1700" b="0" i="0">
                 <a:solidFill>
                   <a:srgbClr val="1F2433"/>
                 </a:solidFill>
@@ -17209,12 +18961,12 @@
                 <a:spcPct val="100000"/>
               </a:lnSpc>
               <a:spcAft>
-                <a:spcPts val="900"/>
-              </a:spcAft>
-              <a:buNone/>
-            </a:pPr>
-            <a:r>
-              <a:rPr sz="1500" b="0" i="0">
+                <a:spcPts val="1200"/>
+              </a:spcAft>
+              <a:buNone/>
+            </a:pPr>
+            <a:r>
+              <a:rPr sz="1700" b="0" i="0">
                 <a:solidFill>
                   <a:srgbClr val="1F2433"/>
                 </a:solidFill>
@@ -17229,12 +18981,12 @@
                 <a:spcPct val="100000"/>
               </a:lnSpc>
               <a:spcAft>
-                <a:spcPts val="900"/>
-              </a:spcAft>
-              <a:buNone/>
-            </a:pPr>
-            <a:r>
-              <a:rPr sz="1500" b="0" i="0">
+                <a:spcPts val="1200"/>
+              </a:spcAft>
+              <a:buNone/>
+            </a:pPr>
+            <a:r>
+              <a:rPr sz="1700" b="0" i="0">
                 <a:solidFill>
                   <a:srgbClr val="1F2433"/>
                 </a:solidFill>
@@ -17249,12 +19001,12 @@
                 <a:spcPct val="100000"/>
               </a:lnSpc>
               <a:spcAft>
-                <a:spcPts val="900"/>
-              </a:spcAft>
-              <a:buNone/>
-            </a:pPr>
-            <a:r>
-              <a:rPr sz="1500" b="0" i="0">
+                <a:spcPts val="1200"/>
+              </a:spcAft>
+              <a:buNone/>
+            </a:pPr>
+            <a:r>
+              <a:rPr sz="1700" b="0" i="0">
                 <a:solidFill>
                   <a:srgbClr val="1F2433"/>
                 </a:solidFill>
@@ -20465,7 +22217,7 @@
                 </a:solidFill>
                 <a:latin typeface="Arial"/>
               </a:rPr>
-              <a:t>Não expostos, minimamente expostos ou com medidas de proteção.</a:t>
+              <a:t>Não expostos, minimamente expostos ou com medidas de proteção (exaustão local, máscaras de alta filtração).</a:t>
             </a:r>
           </a:p>
         </p:txBody>
@@ -21651,7 +23403,7 @@
               <a:buNone/>
             </a:pPr>
             <a:r>
-              <a:rPr sz="1600" b="0" i="0">
+              <a:rPr sz="1700" b="0" i="0">
                 <a:solidFill>
                   <a:srgbClr val="1F2433"/>
                 </a:solidFill>
@@ -21671,7 +23423,7 @@
               <a:buNone/>
             </a:pPr>
             <a:r>
-              <a:rPr sz="1600" b="0" i="0">
+              <a:rPr sz="1700" b="0" i="0">
                 <a:solidFill>
                   <a:srgbClr val="1F2433"/>
                 </a:solidFill>
@@ -21691,7 +23443,7 @@
               <a:buNone/>
             </a:pPr>
             <a:r>
-              <a:rPr sz="1600" b="0" i="0">
+              <a:rPr sz="1700" b="0" i="0">
                 <a:solidFill>
                   <a:srgbClr val="1F2433"/>
                 </a:solidFill>
@@ -21711,7 +23463,7 @@
               <a:buNone/>
             </a:pPr>
             <a:r>
-              <a:rPr sz="1600" b="0" i="0">
+              <a:rPr sz="1700" b="0" i="0">
                 <a:solidFill>
                   <a:srgbClr val="1F2433"/>
                 </a:solidFill>
@@ -21876,7 +23628,7 @@
               <a:buNone/>
             </a:pPr>
             <a:r>
-              <a:rPr sz="1600" b="0" i="0">
+              <a:rPr sz="1700" b="0" i="0">
                 <a:solidFill>
                   <a:srgbClr val="1F2433"/>
                 </a:solidFill>
@@ -21896,7 +23648,7 @@
               <a:buNone/>
             </a:pPr>
             <a:r>
-              <a:rPr sz="1600" b="0" i="0">
+              <a:rPr sz="1700" b="0" i="0">
                 <a:solidFill>
                   <a:srgbClr val="1F2433"/>
                 </a:solidFill>
@@ -21916,7 +23668,7 @@
               <a:buNone/>
             </a:pPr>
             <a:r>
-              <a:rPr sz="1600" b="0" i="0">
+              <a:rPr sz="1700" b="0" i="0">
                 <a:solidFill>
                   <a:srgbClr val="1F2433"/>
                 </a:solidFill>
@@ -22081,7 +23833,7 @@
               <a:buNone/>
             </a:pPr>
             <a:r>
-              <a:rPr sz="1600" b="0" i="0">
+              <a:rPr sz="1700" b="0" i="0">
                 <a:solidFill>
                   <a:srgbClr val="1F2433"/>
                 </a:solidFill>
@@ -22101,7 +23853,7 @@
               <a:buNone/>
             </a:pPr>
             <a:r>
-              <a:rPr sz="1600" b="0" i="0">
+              <a:rPr sz="1700" b="0" i="0">
                 <a:solidFill>
                   <a:srgbClr val="1F2433"/>
                 </a:solidFill>
@@ -22121,7 +23873,7 @@
               <a:buNone/>
             </a:pPr>
             <a:r>
-              <a:rPr sz="1600" b="0" i="0">
+              <a:rPr sz="1700" b="0" i="0">
                 <a:solidFill>
                   <a:srgbClr val="1F2433"/>
                 </a:solidFill>
@@ -22141,7 +23893,7 @@
               <a:buNone/>
             </a:pPr>
             <a:r>
-              <a:rPr sz="1600" b="0" i="0">
+              <a:rPr sz="1700" b="0" i="0">
                 <a:solidFill>
                   <a:srgbClr val="1F2433"/>
                 </a:solidFill>
@@ -22306,7 +24058,7 @@
               <a:buNone/>
             </a:pPr>
             <a:r>
-              <a:rPr sz="1600" b="0" i="0">
+              <a:rPr sz="1700" b="0" i="0">
                 <a:solidFill>
                   <a:srgbClr val="1F2433"/>
                 </a:solidFill>
@@ -22326,7 +24078,7 @@
               <a:buNone/>
             </a:pPr>
             <a:r>
-              <a:rPr sz="1600" b="0" i="0">
+              <a:rPr sz="1700" b="0" i="0">
                 <a:solidFill>
                   <a:srgbClr val="1F2433"/>
                 </a:solidFill>
@@ -22346,7 +24098,7 @@
               <a:buNone/>
             </a:pPr>
             <a:r>
-              <a:rPr sz="1600" b="0" i="0">
+              <a:rPr sz="1700" b="0" i="0">
                 <a:solidFill>
                   <a:srgbClr val="1F2433"/>
                 </a:solidFill>
@@ -22511,7 +24263,7 @@
               <a:buNone/>
             </a:pPr>
             <a:r>
-              <a:rPr sz="1600" b="0" i="0">
+              <a:rPr sz="1700" b="0" i="0">
                 <a:solidFill>
                   <a:srgbClr val="1F2433"/>
                 </a:solidFill>
@@ -22531,7 +24283,7 @@
               <a:buNone/>
             </a:pPr>
             <a:r>
-              <a:rPr sz="1600" b="0" i="0">
+              <a:rPr sz="1700" b="0" i="0">
                 <a:solidFill>
                   <a:srgbClr val="1F2433"/>
                 </a:solidFill>
@@ -22696,7 +24448,7 @@
               <a:buNone/>
             </a:pPr>
             <a:r>
-              <a:rPr sz="1600" b="0" i="0">
+              <a:rPr sz="1700" b="0" i="0">
                 <a:solidFill>
                   <a:srgbClr val="1F2433"/>
                 </a:solidFill>
@@ -22716,7 +24468,7 @@
               <a:buNone/>
             </a:pPr>
             <a:r>
-              <a:rPr sz="1600" b="0" i="0">
+              <a:rPr sz="1700" b="0" i="0">
                 <a:solidFill>
                   <a:srgbClr val="1F2433"/>
                 </a:solidFill>
@@ -22736,7 +24488,7 @@
               <a:buNone/>
             </a:pPr>
             <a:r>
-              <a:rPr sz="1600" b="0" i="0">
+              <a:rPr sz="1700" b="0" i="0">
                 <a:solidFill>
                   <a:srgbClr val="1F2433"/>
                 </a:solidFill>
@@ -22901,7 +24653,7 @@
               <a:buNone/>
             </a:pPr>
             <a:r>
-              <a:rPr sz="1600" b="0" i="0">
+              <a:rPr sz="1700" b="0" i="0">
                 <a:solidFill>
                   <a:srgbClr val="1F2433"/>
                 </a:solidFill>
@@ -22921,7 +24673,7 @@
               <a:buNone/>
             </a:pPr>
             <a:r>
-              <a:rPr sz="1600" b="0" i="0">
+              <a:rPr sz="1700" b="0" i="0">
                 <a:solidFill>
                   <a:srgbClr val="1F2433"/>
                 </a:solidFill>
@@ -22941,7 +24693,7 @@
               <a:buNone/>
             </a:pPr>
             <a:r>
-              <a:rPr sz="1600" b="0" i="0">
+              <a:rPr sz="1700" b="0" i="0">
                 <a:solidFill>
                   <a:srgbClr val="1F2433"/>
                 </a:solidFill>
@@ -23077,7 +24829,7 @@
         </p:nvSpPr>
         <p:spPr>
           <a:xfrm>
-            <a:off x="4709160" y="6967728"/>
+            <a:off x="4709160" y="6949440"/>
             <a:ext cx="2011680" cy="411480"/>
           </a:xfrm>
           <a:prstGeom prst="rect">
@@ -23101,7 +24853,7 @@
               <a:buNone/>
             </a:pPr>
             <a:r>
-              <a:rPr sz="1600" b="1" i="0">
+              <a:rPr sz="1700" b="1" i="0">
                 <a:solidFill>
                   <a:srgbClr val="002060"/>
                 </a:solidFill>
@@ -23120,8 +24872,8 @@
         </p:nvSpPr>
         <p:spPr>
           <a:xfrm>
-            <a:off x="4709160" y="7360920"/>
-            <a:ext cx="2011680" cy="868680"/>
+            <a:off x="4709160" y="7342631"/>
+            <a:ext cx="2011680" cy="896112"/>
           </a:xfrm>
           <a:prstGeom prst="rect">
             <a:avLst/>
@@ -23144,7 +24896,7 @@
               <a:buNone/>
             </a:pPr>
             <a:r>
-              <a:rPr sz="1400" b="0" i="0">
+              <a:rPr sz="1500" b="0" i="0">
                 <a:solidFill>
                   <a:srgbClr val="1F2433"/>
                 </a:solidFill>
@@ -23187,7 +24939,7 @@
         </p:nvSpPr>
         <p:spPr>
           <a:xfrm>
-            <a:off x="7452360" y="6967728"/>
+            <a:off x="7452360" y="6949440"/>
             <a:ext cx="2011680" cy="411480"/>
           </a:xfrm>
           <a:prstGeom prst="rect">
@@ -23211,7 +24963,7 @@
               <a:buNone/>
             </a:pPr>
             <a:r>
-              <a:rPr sz="1600" b="1" i="0">
+              <a:rPr sz="1700" b="1" i="0">
                 <a:solidFill>
                   <a:srgbClr val="002060"/>
                 </a:solidFill>
@@ -23230,8 +24982,8 @@
         </p:nvSpPr>
         <p:spPr>
           <a:xfrm>
-            <a:off x="7452360" y="7360920"/>
-            <a:ext cx="2011680" cy="868680"/>
+            <a:off x="7452360" y="7342631"/>
+            <a:ext cx="2011680" cy="896112"/>
           </a:xfrm>
           <a:prstGeom prst="rect">
             <a:avLst/>
@@ -23254,7 +25006,7 @@
               <a:buNone/>
             </a:pPr>
             <a:r>
-              <a:rPr sz="1400" b="0" i="0">
+              <a:rPr sz="1500" b="0" i="0">
                 <a:solidFill>
                   <a:srgbClr val="1F2433"/>
                 </a:solidFill>
@@ -23297,7 +25049,7 @@
         </p:nvSpPr>
         <p:spPr>
           <a:xfrm>
-            <a:off x="10195559" y="6967728"/>
+            <a:off x="10195559" y="6949440"/>
             <a:ext cx="2011680" cy="411480"/>
           </a:xfrm>
           <a:prstGeom prst="rect">
@@ -23321,7 +25073,7 @@
               <a:buNone/>
             </a:pPr>
             <a:r>
-              <a:rPr sz="1600" b="1" i="0">
+              <a:rPr sz="1700" b="1" i="0">
                 <a:solidFill>
                   <a:srgbClr val="002060"/>
                 </a:solidFill>
@@ -23340,8 +25092,8 @@
         </p:nvSpPr>
         <p:spPr>
           <a:xfrm>
-            <a:off x="10195559" y="7360920"/>
-            <a:ext cx="2011680" cy="868680"/>
+            <a:off x="10195559" y="7342631"/>
+            <a:ext cx="2011680" cy="896112"/>
           </a:xfrm>
           <a:prstGeom prst="rect">
             <a:avLst/>
@@ -23364,7 +25116,7 @@
               <a:buNone/>
             </a:pPr>
             <a:r>
-              <a:rPr sz="1400" b="0" i="0">
+              <a:rPr sz="1500" b="0" i="0">
                 <a:solidFill>
                   <a:srgbClr val="1F2433"/>
                 </a:solidFill>
@@ -23407,7 +25159,7 @@
         </p:nvSpPr>
         <p:spPr>
           <a:xfrm>
-            <a:off x="12938759" y="6967728"/>
+            <a:off x="12938759" y="6949440"/>
             <a:ext cx="2011680" cy="411480"/>
           </a:xfrm>
           <a:prstGeom prst="rect">
@@ -23431,7 +25183,7 @@
               <a:buNone/>
             </a:pPr>
             <a:r>
-              <a:rPr sz="1600" b="1" i="0">
+              <a:rPr sz="1700" b="1" i="0">
                 <a:solidFill>
                   <a:srgbClr val="002060"/>
                 </a:solidFill>
@@ -23450,8 +25202,8 @@
         </p:nvSpPr>
         <p:spPr>
           <a:xfrm>
-            <a:off x="12938759" y="7360920"/>
-            <a:ext cx="2011680" cy="868680"/>
+            <a:off x="12938759" y="7342631"/>
+            <a:ext cx="2011680" cy="896112"/>
           </a:xfrm>
           <a:prstGeom prst="rect">
             <a:avLst/>
@@ -23474,7 +25226,7 @@
               <a:buNone/>
             </a:pPr>
             <a:r>
-              <a:rPr sz="1400" b="0" i="0">
+              <a:rPr sz="1500" b="0" i="0">
                 <a:solidFill>
                   <a:srgbClr val="1F2433"/>
                 </a:solidFill>
@@ -23517,7 +25269,7 @@
         </p:nvSpPr>
         <p:spPr>
           <a:xfrm>
-            <a:off x="15681959" y="6967728"/>
+            <a:off x="15681959" y="6949440"/>
             <a:ext cx="2011680" cy="411480"/>
           </a:xfrm>
           <a:prstGeom prst="rect">
@@ -23541,7 +25293,7 @@
               <a:buNone/>
             </a:pPr>
             <a:r>
-              <a:rPr sz="1600" b="1" i="0">
+              <a:rPr sz="1700" b="1" i="0">
                 <a:solidFill>
                   <a:srgbClr val="002060"/>
                 </a:solidFill>
@@ -23560,8 +25312,8 @@
         </p:nvSpPr>
         <p:spPr>
           <a:xfrm>
-            <a:off x="15681959" y="7360920"/>
-            <a:ext cx="2011680" cy="868680"/>
+            <a:off x="15681959" y="7342631"/>
+            <a:ext cx="2011680" cy="896112"/>
           </a:xfrm>
           <a:prstGeom prst="rect">
             <a:avLst/>
@@ -23584,7 +25336,7 @@
               <a:buNone/>
             </a:pPr>
             <a:r>
-              <a:rPr sz="1400" b="0" i="0">
+              <a:rPr sz="1500" b="0" i="0">
                 <a:solidFill>
                   <a:srgbClr val="1F2433"/>
                 </a:solidFill>
@@ -23604,7 +25356,7 @@
         <p:spPr>
           <a:xfrm>
             <a:off x="1143000" y="8503920"/>
-            <a:ext cx="16642080" cy="1097280"/>
+            <a:ext cx="16642080" cy="1188720"/>
           </a:xfrm>
           <a:prstGeom prst="rect">
             <a:avLst/>
@@ -23627,7 +25379,7 @@
               <a:buNone/>
             </a:pPr>
             <a:r>
-              <a:rPr sz="1500" b="1" i="0">
+              <a:rPr sz="1600" b="1" i="0">
                 <a:solidFill>
                   <a:srgbClr val="002060"/>
                 </a:solidFill>
@@ -23636,7 +25388,7 @@
               <a:t>Transparência e reprodutibilidade: </a:t>
             </a:r>
             <a:r>
-              <a:rPr sz="1500" b="0" i="0">
+              <a:rPr sz="1600" b="0" i="0">
                 <a:solidFill>
                   <a:srgbClr val="1F2433"/>
                 </a:solidFill>
@@ -23645,7 +25397,7 @@
               <a:t>checklist PRISMA 2020 com 27 itens preenchido; estratégias completas por base (Anexo A); extração, risco de viés e perfil GRADE em anexos; códigos de análise, figuras e planilhas abertos no OSF (osf.io/jktmn). </a:t>
             </a:r>
             <a:r>
-              <a:rPr sz="1500" b="0" i="0">
+              <a:rPr sz="1600" b="0" i="0">
                 <a:solidFill>
                   <a:srgbClr val="5A6270"/>
                 </a:solidFill>
@@ -23845,7 +25597,7 @@
         </p:nvCxnSpPr>
         <p:spPr>
           <a:xfrm>
-            <a:off x="2410097" y="9601200"/>
+            <a:off x="2410097" y="9454896"/>
             <a:ext cx="14107885" cy="0"/>
           </a:xfrm>
           <a:prstGeom prst="line">
@@ -23866,7 +25618,7 @@
         </p:nvSpPr>
         <p:spPr>
           <a:xfrm>
-            <a:off x="2208929" y="9400032"/>
+            <a:off x="2208929" y="9253728"/>
             <a:ext cx="402336" cy="402336"/>
           </a:xfrm>
           <a:prstGeom prst="ellipse">
@@ -23915,7 +25667,7 @@
         </p:nvSpPr>
         <p:spPr>
           <a:xfrm>
-            <a:off x="1234439" y="9857232"/>
+            <a:off x="1234439" y="9710928"/>
             <a:ext cx="2351314" cy="365760"/>
           </a:xfrm>
           <a:prstGeom prst="rect">
@@ -23958,7 +25710,7 @@
         </p:nvSpPr>
         <p:spPr>
           <a:xfrm>
-            <a:off x="4560243" y="9400032"/>
+            <a:off x="4560243" y="9253728"/>
             <a:ext cx="402336" cy="402336"/>
           </a:xfrm>
           <a:prstGeom prst="ellipse">
@@ -24007,7 +25759,7 @@
         </p:nvSpPr>
         <p:spPr>
           <a:xfrm>
-            <a:off x="3585754" y="9857232"/>
+            <a:off x="3585754" y="9710928"/>
             <a:ext cx="2351314" cy="365760"/>
           </a:xfrm>
           <a:prstGeom prst="rect">
@@ -24050,7 +25802,7 @@
         </p:nvSpPr>
         <p:spPr>
           <a:xfrm>
-            <a:off x="6948133" y="9436608"/>
+            <a:off x="6948133" y="9290304"/>
             <a:ext cx="329184" cy="329184"/>
           </a:xfrm>
           <a:prstGeom prst="ellipse">
@@ -24099,7 +25851,7 @@
         </p:nvSpPr>
         <p:spPr>
           <a:xfrm>
-            <a:off x="5937068" y="9857232"/>
+            <a:off x="5937068" y="9710928"/>
             <a:ext cx="2351314" cy="365760"/>
           </a:xfrm>
           <a:prstGeom prst="rect">
@@ -24142,7 +25894,7 @@
         </p:nvSpPr>
         <p:spPr>
           <a:xfrm>
-            <a:off x="9299447" y="9436608"/>
+            <a:off x="9299447" y="9290304"/>
             <a:ext cx="329184" cy="329184"/>
           </a:xfrm>
           <a:prstGeom prst="ellipse">
@@ -24191,7 +25943,7 @@
         </p:nvSpPr>
         <p:spPr>
           <a:xfrm>
-            <a:off x="8288382" y="9857232"/>
+            <a:off x="8288382" y="9710928"/>
             <a:ext cx="2351314" cy="365760"/>
           </a:xfrm>
           <a:prstGeom prst="rect">
@@ -24234,7 +25986,7 @@
         </p:nvSpPr>
         <p:spPr>
           <a:xfrm>
-            <a:off x="11650762" y="9436608"/>
+            <a:off x="11650762" y="9290304"/>
             <a:ext cx="329184" cy="329184"/>
           </a:xfrm>
           <a:prstGeom prst="ellipse">
@@ -24283,7 +26035,7 @@
         </p:nvSpPr>
         <p:spPr>
           <a:xfrm>
-            <a:off x="10639697" y="9857232"/>
+            <a:off x="10639697" y="9710928"/>
             <a:ext cx="2351314" cy="365760"/>
           </a:xfrm>
           <a:prstGeom prst="rect">
@@ -24326,7 +26078,7 @@
         </p:nvSpPr>
         <p:spPr>
           <a:xfrm>
-            <a:off x="14002076" y="9436608"/>
+            <a:off x="14002076" y="9290304"/>
             <a:ext cx="329184" cy="329184"/>
           </a:xfrm>
           <a:prstGeom prst="ellipse">
@@ -24375,7 +26127,7 @@
         </p:nvSpPr>
         <p:spPr>
           <a:xfrm>
-            <a:off x="12991011" y="9857232"/>
+            <a:off x="12991011" y="9710928"/>
             <a:ext cx="2351314" cy="365760"/>
           </a:xfrm>
           <a:prstGeom prst="rect">
@@ -24418,7 +26170,7 @@
         </p:nvSpPr>
         <p:spPr>
           <a:xfrm>
-            <a:off x="16353390" y="9436608"/>
+            <a:off x="16353390" y="9290304"/>
             <a:ext cx="329184" cy="329184"/>
           </a:xfrm>
           <a:prstGeom prst="ellipse">
@@ -24467,7 +26219,7 @@
         </p:nvSpPr>
         <p:spPr>
           <a:xfrm>
-            <a:off x="15342325" y="9857232"/>
+            <a:off x="15342325" y="9710928"/>
             <a:ext cx="2351314" cy="365760"/>
           </a:xfrm>
           <a:prstGeom prst="rect">
@@ -24801,7 +26553,7 @@
         </p:blipFill>
         <p:spPr>
           <a:xfrm>
-            <a:off x="1417320" y="5760720"/>
+            <a:off x="1417320" y="5486400"/>
             <a:ext cx="365760" cy="365760"/>
           </a:xfrm>
           <a:prstGeom prst="rect">
@@ -24817,7 +26569,7 @@
         </p:nvSpPr>
         <p:spPr>
           <a:xfrm>
-            <a:off x="1920240" y="5715000"/>
+            <a:off x="1920240" y="5440680"/>
             <a:ext cx="6675120" cy="411480"/>
           </a:xfrm>
           <a:prstGeom prst="rect">
@@ -24860,8 +26612,8 @@
         </p:nvSpPr>
         <p:spPr>
           <a:xfrm>
-            <a:off x="1417320" y="6153912"/>
-            <a:ext cx="7132320" cy="2834640"/>
+            <a:off x="1417320" y="5879592"/>
+            <a:ext cx="7132320" cy="3017520"/>
           </a:xfrm>
           <a:prstGeom prst="rect">
             <a:avLst/>
@@ -25293,7 +27045,7 @@
         <p:spPr>
           <a:xfrm>
             <a:off x="15407640" y="5440680"/>
-            <a:ext cx="2286000" cy="731520"/>
+            <a:ext cx="2286000" cy="777240"/>
           </a:xfrm>
           <a:prstGeom prst="rect">
             <a:avLst/>
@@ -25316,7 +27068,7 @@
               <a:buNone/>
             </a:pPr>
             <a:r>
-              <a:rPr sz="1200" b="0" i="0">
+              <a:rPr sz="1300" b="0" i="0">
                 <a:solidFill>
                   <a:srgbClr val="5A6270"/>
                 </a:solidFill>
@@ -25711,7 +27463,7 @@
         </p:nvCxnSpPr>
         <p:spPr>
           <a:xfrm>
-            <a:off x="2410097" y="9601200"/>
+            <a:off x="2410097" y="9454896"/>
             <a:ext cx="14107885" cy="0"/>
           </a:xfrm>
           <a:prstGeom prst="line">
@@ -25732,7 +27484,7 @@
         </p:nvSpPr>
         <p:spPr>
           <a:xfrm>
-            <a:off x="2245505" y="9436608"/>
+            <a:off x="2245505" y="9290304"/>
             <a:ext cx="329184" cy="329184"/>
           </a:xfrm>
           <a:prstGeom prst="ellipse">
@@ -25781,7 +27533,7 @@
         </p:nvSpPr>
         <p:spPr>
           <a:xfrm>
-            <a:off x="1234439" y="9857232"/>
+            <a:off x="1234439" y="9710928"/>
             <a:ext cx="2351314" cy="365760"/>
           </a:xfrm>
           <a:prstGeom prst="rect">
@@ -25824,7 +27576,7 @@
         </p:nvSpPr>
         <p:spPr>
           <a:xfrm>
-            <a:off x="4596819" y="9436608"/>
+            <a:off x="4596819" y="9290304"/>
             <a:ext cx="329184" cy="329184"/>
           </a:xfrm>
           <a:prstGeom prst="ellipse">
@@ -25873,7 +27625,7 @@
         </p:nvSpPr>
         <p:spPr>
           <a:xfrm>
-            <a:off x="3585754" y="9857232"/>
+            <a:off x="3585754" y="9710928"/>
             <a:ext cx="2351314" cy="365760"/>
           </a:xfrm>
           <a:prstGeom prst="rect">
@@ -25916,7 +27668,7 @@
         </p:nvSpPr>
         <p:spPr>
           <a:xfrm>
-            <a:off x="6911557" y="9400032"/>
+            <a:off x="6911557" y="9253728"/>
             <a:ext cx="402336" cy="402336"/>
           </a:xfrm>
           <a:prstGeom prst="ellipse">
@@ -25965,7 +27717,7 @@
         </p:nvSpPr>
         <p:spPr>
           <a:xfrm>
-            <a:off x="5937068" y="9857232"/>
+            <a:off x="5937068" y="9710928"/>
             <a:ext cx="2351314" cy="365760"/>
           </a:xfrm>
           <a:prstGeom prst="rect">
@@ -26008,7 +27760,7 @@
         </p:nvSpPr>
         <p:spPr>
           <a:xfrm>
-            <a:off x="9299447" y="9436608"/>
+            <a:off x="9299447" y="9290304"/>
             <a:ext cx="329184" cy="329184"/>
           </a:xfrm>
           <a:prstGeom prst="ellipse">
@@ -26057,7 +27809,7 @@
         </p:nvSpPr>
         <p:spPr>
           <a:xfrm>
-            <a:off x="8288382" y="9857232"/>
+            <a:off x="8288382" y="9710928"/>
             <a:ext cx="2351314" cy="365760"/>
           </a:xfrm>
           <a:prstGeom prst="rect">
@@ -26100,7 +27852,7 @@
         </p:nvSpPr>
         <p:spPr>
           <a:xfrm>
-            <a:off x="11650762" y="9436608"/>
+            <a:off x="11650762" y="9290304"/>
             <a:ext cx="329184" cy="329184"/>
           </a:xfrm>
           <a:prstGeom prst="ellipse">
@@ -26149,7 +27901,7 @@
         </p:nvSpPr>
         <p:spPr>
           <a:xfrm>
-            <a:off x="10639697" y="9857232"/>
+            <a:off x="10639697" y="9710928"/>
             <a:ext cx="2351314" cy="365760"/>
           </a:xfrm>
           <a:prstGeom prst="rect">
@@ -26192,7 +27944,7 @@
         </p:nvSpPr>
         <p:spPr>
           <a:xfrm>
-            <a:off x="14002076" y="9436608"/>
+            <a:off x="14002076" y="9290304"/>
             <a:ext cx="329184" cy="329184"/>
           </a:xfrm>
           <a:prstGeom prst="ellipse">
@@ -26241,7 +27993,7 @@
         </p:nvSpPr>
         <p:spPr>
           <a:xfrm>
-            <a:off x="12991011" y="9857232"/>
+            <a:off x="12991011" y="9710928"/>
             <a:ext cx="2351314" cy="365760"/>
           </a:xfrm>
           <a:prstGeom prst="rect">
@@ -26284,7 +28036,7 @@
         </p:nvSpPr>
         <p:spPr>
           <a:xfrm>
-            <a:off x="16353390" y="9436608"/>
+            <a:off x="16353390" y="9290304"/>
             <a:ext cx="329184" cy="329184"/>
           </a:xfrm>
           <a:prstGeom prst="ellipse">
@@ -26333,7 +28085,7 @@
         </p:nvSpPr>
         <p:spPr>
           <a:xfrm>
-            <a:off x="15342325" y="9857232"/>
+            <a:off x="15342325" y="9710928"/>
             <a:ext cx="2351314" cy="365760"/>
           </a:xfrm>
           <a:prstGeom prst="rect">
@@ -26377,7 +28129,7 @@
         <p:spPr>
           <a:xfrm>
             <a:off x="1143000" y="1828800"/>
-            <a:ext cx="2743200" cy="1965960"/>
+            <a:ext cx="2468880" cy="1965960"/>
           </a:xfrm>
           <a:prstGeom prst="roundRect">
             <a:avLst>
@@ -26406,8 +28158,8 @@
         </p:nvSpPr>
         <p:spPr>
           <a:xfrm>
-            <a:off x="1325880" y="1901952"/>
-            <a:ext cx="2377440" cy="731520"/>
+            <a:off x="1280160" y="1901952"/>
+            <a:ext cx="2194560" cy="731520"/>
           </a:xfrm>
           <a:prstGeom prst="rect">
             <a:avLst/>
@@ -26449,8 +28201,8 @@
         </p:nvSpPr>
         <p:spPr>
           <a:xfrm>
-            <a:off x="1325880" y="2651760"/>
-            <a:ext cx="2377440" cy="1097280"/>
+            <a:off x="1280160" y="2651760"/>
+            <a:ext cx="2194560" cy="1097280"/>
           </a:xfrm>
           <a:prstGeom prst="rect">
             <a:avLst/>
@@ -26512,8 +28264,8 @@
         </p:nvCxnSpPr>
         <p:spPr>
           <a:xfrm>
-            <a:off x="3959352" y="2788920"/>
-            <a:ext cx="585216" cy="0"/>
+            <a:off x="3685032" y="2514600"/>
+            <a:ext cx="928116" cy="0"/>
           </a:xfrm>
           <a:prstGeom prst="line">
             <a:avLst/>
@@ -26534,8 +28286,8 @@
         </p:nvSpPr>
         <p:spPr>
           <a:xfrm>
-            <a:off x="4617720" y="1828800"/>
-            <a:ext cx="2743200" cy="1965960"/>
+            <a:off x="4686300" y="1828800"/>
+            <a:ext cx="2468880" cy="1965960"/>
           </a:xfrm>
           <a:prstGeom prst="roundRect">
             <a:avLst>
@@ -26564,8 +28316,8 @@
         </p:nvSpPr>
         <p:spPr>
           <a:xfrm>
-            <a:off x="4800600" y="1901952"/>
-            <a:ext cx="2377440" cy="731520"/>
+            <a:off x="4823460" y="1901952"/>
+            <a:ext cx="2194560" cy="731520"/>
           </a:xfrm>
           <a:prstGeom prst="rect">
             <a:avLst/>
@@ -26607,8 +28359,8 @@
         </p:nvSpPr>
         <p:spPr>
           <a:xfrm>
-            <a:off x="4800600" y="2651760"/>
-            <a:ext cx="2377440" cy="1097280"/>
+            <a:off x="4823460" y="2651760"/>
+            <a:ext cx="2194560" cy="1097280"/>
           </a:xfrm>
           <a:prstGeom prst="rect">
             <a:avLst/>
@@ -26670,8 +28422,8 @@
         </p:nvCxnSpPr>
         <p:spPr>
           <a:xfrm>
-            <a:off x="7434072" y="2788920"/>
-            <a:ext cx="585216" cy="0"/>
+            <a:off x="7228332" y="2514600"/>
+            <a:ext cx="928116" cy="0"/>
           </a:xfrm>
           <a:prstGeom prst="line">
             <a:avLst/>
@@ -26692,8 +28444,8 @@
         </p:nvSpPr>
         <p:spPr>
           <a:xfrm>
-            <a:off x="7178040" y="3063240"/>
-            <a:ext cx="1097280" cy="731520"/>
+            <a:off x="7173468" y="2697480"/>
+            <a:ext cx="1037844" cy="1097280"/>
           </a:xfrm>
           <a:prstGeom prst="rect">
             <a:avLst/>
@@ -26708,7 +28460,7 @@
           <a:p>
             <a:pPr algn="ctr">
               <a:lnSpc>
-                <a:spcPct val="100000"/>
+                <a:spcPct val="95000"/>
               </a:lnSpc>
               <a:spcAft>
                 <a:spcPts val="0"/>
@@ -26722,13 +28474,33 @@
                 </a:solidFill>
                 <a:latin typeface="Arial"/>
               </a:rPr>
-              <a:t>10.882 excluídos</a:t>
+              <a:t>10.882</a:t>
             </a:r>
           </a:p>
           <a:p>
             <a:pPr algn="ctr">
               <a:lnSpc>
-                <a:spcPct val="100000"/>
+                <a:spcPct val="95000"/>
+              </a:lnSpc>
+              <a:spcAft>
+                <a:spcPts val="0"/>
+              </a:spcAft>
+              <a:buNone/>
+            </a:pPr>
+            <a:r>
+              <a:rPr sz="1200" b="0" i="0">
+                <a:solidFill>
+                  <a:srgbClr val="5A6270"/>
+                </a:solidFill>
+                <a:latin typeface="Arial"/>
+              </a:rPr>
+              <a:t>excluídos</a:t>
+            </a:r>
+          </a:p>
+          <a:p>
+            <a:pPr algn="ctr">
+              <a:lnSpc>
+                <a:spcPct val="95000"/>
               </a:lnSpc>
               <a:spcAft>
                 <a:spcPts val="0"/>
@@ -26755,8 +28527,8 @@
         </p:nvSpPr>
         <p:spPr>
           <a:xfrm>
-            <a:off x="8092440" y="1828800"/>
-            <a:ext cx="2743200" cy="1965960"/>
+            <a:off x="8229600" y="1828800"/>
+            <a:ext cx="2468880" cy="1965960"/>
           </a:xfrm>
           <a:prstGeom prst="roundRect">
             <a:avLst>
@@ -26785,8 +28557,8 @@
         </p:nvSpPr>
         <p:spPr>
           <a:xfrm>
-            <a:off x="8275319" y="1901952"/>
-            <a:ext cx="2377440" cy="731520"/>
+            <a:off x="8366760" y="1901952"/>
+            <a:ext cx="2194560" cy="731520"/>
           </a:xfrm>
           <a:prstGeom prst="rect">
             <a:avLst/>
@@ -26828,8 +28600,8 @@
         </p:nvSpPr>
         <p:spPr>
           <a:xfrm>
-            <a:off x="8275319" y="2651760"/>
-            <a:ext cx="2377440" cy="1097280"/>
+            <a:off x="8366760" y="2651760"/>
+            <a:ext cx="2194560" cy="1097280"/>
           </a:xfrm>
           <a:prstGeom prst="rect">
             <a:avLst/>
@@ -26891,8 +28663,8 @@
         </p:nvCxnSpPr>
         <p:spPr>
           <a:xfrm>
-            <a:off x="10908792" y="2788920"/>
-            <a:ext cx="585216" cy="0"/>
+            <a:off x="10771632" y="2514600"/>
+            <a:ext cx="928116" cy="0"/>
           </a:xfrm>
           <a:prstGeom prst="line">
             <a:avLst/>
@@ -26913,8 +28685,8 @@
         </p:nvSpPr>
         <p:spPr>
           <a:xfrm>
-            <a:off x="10652760" y="3063240"/>
-            <a:ext cx="1097280" cy="731520"/>
+            <a:off x="10716767" y="2697480"/>
+            <a:ext cx="1037844" cy="1097280"/>
           </a:xfrm>
           <a:prstGeom prst="rect">
             <a:avLst/>
@@ -26929,7 +28701,7 @@
           <a:p>
             <a:pPr algn="ctr">
               <a:lnSpc>
-                <a:spcPct val="100000"/>
+                <a:spcPct val="95000"/>
               </a:lnSpc>
               <a:spcAft>
                 <a:spcPts val="0"/>
@@ -26949,7 +28721,7 @@
           <a:p>
             <a:pPr algn="ctr">
               <a:lnSpc>
-                <a:spcPct val="100000"/>
+                <a:spcPct val="95000"/>
               </a:lnSpc>
               <a:spcAft>
                 <a:spcPts val="0"/>
@@ -26976,8 +28748,8 @@
         </p:nvSpPr>
         <p:spPr>
           <a:xfrm>
-            <a:off x="11567159" y="1828800"/>
-            <a:ext cx="2743200" cy="1965960"/>
+            <a:off x="11772900" y="1828800"/>
+            <a:ext cx="2468880" cy="1965960"/>
           </a:xfrm>
           <a:prstGeom prst="roundRect">
             <a:avLst>
@@ -27006,8 +28778,8 @@
         </p:nvSpPr>
         <p:spPr>
           <a:xfrm>
-            <a:off x="11750039" y="1901952"/>
-            <a:ext cx="2377440" cy="731520"/>
+            <a:off x="11910060" y="1901952"/>
+            <a:ext cx="2194560" cy="731520"/>
           </a:xfrm>
           <a:prstGeom prst="rect">
             <a:avLst/>
@@ -27049,8 +28821,8 @@
         </p:nvSpPr>
         <p:spPr>
           <a:xfrm>
-            <a:off x="11750039" y="2651760"/>
-            <a:ext cx="2377440" cy="1097280"/>
+            <a:off x="11910060" y="2651760"/>
+            <a:ext cx="2194560" cy="1097280"/>
           </a:xfrm>
           <a:prstGeom prst="rect">
             <a:avLst/>
@@ -27112,8 +28884,8 @@
         </p:nvCxnSpPr>
         <p:spPr>
           <a:xfrm>
-            <a:off x="14383511" y="2788920"/>
-            <a:ext cx="585217" cy="0"/>
+            <a:off x="14314932" y="2514600"/>
+            <a:ext cx="928116" cy="0"/>
           </a:xfrm>
           <a:prstGeom prst="line">
             <a:avLst/>
@@ -27134,8 +28906,8 @@
         </p:nvSpPr>
         <p:spPr>
           <a:xfrm>
-            <a:off x="14127480" y="3063240"/>
-            <a:ext cx="1097280" cy="731520"/>
+            <a:off x="14260067" y="2697480"/>
+            <a:ext cx="1037844" cy="1097280"/>
           </a:xfrm>
           <a:prstGeom prst="rect">
             <a:avLst/>
@@ -27150,7 +28922,7 @@
           <a:p>
             <a:pPr algn="ctr">
               <a:lnSpc>
-                <a:spcPct val="100000"/>
+                <a:spcPct val="95000"/>
               </a:lnSpc>
               <a:spcAft>
                 <a:spcPts val="0"/>
@@ -27170,7 +28942,7 @@
           <a:p>
             <a:pPr algn="ctr">
               <a:lnSpc>
-                <a:spcPct val="100000"/>
+                <a:spcPct val="95000"/>
               </a:lnSpc>
               <a:spcAft>
                 <a:spcPts val="0"/>
@@ -27197,8 +28969,8 @@
         </p:nvSpPr>
         <p:spPr>
           <a:xfrm>
-            <a:off x="15041880" y="1828800"/>
-            <a:ext cx="2743200" cy="1965960"/>
+            <a:off x="15316200" y="1828800"/>
+            <a:ext cx="2468880" cy="1965960"/>
           </a:xfrm>
           <a:prstGeom prst="roundRect">
             <a:avLst>
@@ -27227,8 +28999,8 @@
         </p:nvSpPr>
         <p:spPr>
           <a:xfrm>
-            <a:off x="15224759" y="1901952"/>
-            <a:ext cx="2377440" cy="731520"/>
+            <a:off x="15453359" y="1901952"/>
+            <a:ext cx="2194560" cy="731520"/>
           </a:xfrm>
           <a:prstGeom prst="rect">
             <a:avLst/>
@@ -27270,8 +29042,8 @@
         </p:nvSpPr>
         <p:spPr>
           <a:xfrm>
-            <a:off x="15224759" y="2651760"/>
-            <a:ext cx="2377440" cy="1097280"/>
+            <a:off x="15453359" y="2651760"/>
+            <a:ext cx="2194560" cy="1097280"/>
           </a:xfrm>
           <a:prstGeom prst="rect">
             <a:avLst/>
@@ -28253,7 +30025,7 @@
         </p:nvCxnSpPr>
         <p:spPr>
           <a:xfrm>
-            <a:off x="2410097" y="9601200"/>
+            <a:off x="2410097" y="9454896"/>
             <a:ext cx="14107885" cy="0"/>
           </a:xfrm>
           <a:prstGeom prst="line">
@@ -28274,7 +30046,7 @@
         </p:nvSpPr>
         <p:spPr>
           <a:xfrm>
-            <a:off x="2245505" y="9436608"/>
+            <a:off x="2245505" y="9290304"/>
             <a:ext cx="329184" cy="329184"/>
           </a:xfrm>
           <a:prstGeom prst="ellipse">
@@ -28323,7 +30095,7 @@
         </p:nvSpPr>
         <p:spPr>
           <a:xfrm>
-            <a:off x="1234439" y="9857232"/>
+            <a:off x="1234439" y="9710928"/>
             <a:ext cx="2351314" cy="365760"/>
           </a:xfrm>
           <a:prstGeom prst="rect">
@@ -28366,7 +30138,7 @@
         </p:nvSpPr>
         <p:spPr>
           <a:xfrm>
-            <a:off x="4596819" y="9436608"/>
+            <a:off x="4596819" y="9290304"/>
             <a:ext cx="329184" cy="329184"/>
           </a:xfrm>
           <a:prstGeom prst="ellipse">
@@ -28415,7 +30187,7 @@
         </p:nvSpPr>
         <p:spPr>
           <a:xfrm>
-            <a:off x="3585754" y="9857232"/>
+            <a:off x="3585754" y="9710928"/>
             <a:ext cx="2351314" cy="365760"/>
           </a:xfrm>
           <a:prstGeom prst="rect">
@@ -28458,7 +30230,7 @@
         </p:nvSpPr>
         <p:spPr>
           <a:xfrm>
-            <a:off x="6948133" y="9436608"/>
+            <a:off x="6948133" y="9290304"/>
             <a:ext cx="329184" cy="329184"/>
           </a:xfrm>
           <a:prstGeom prst="ellipse">
@@ -28507,7 +30279,7 @@
         </p:nvSpPr>
         <p:spPr>
           <a:xfrm>
-            <a:off x="5937068" y="9857232"/>
+            <a:off x="5937068" y="9710928"/>
             <a:ext cx="2351314" cy="365760"/>
           </a:xfrm>
           <a:prstGeom prst="rect">
@@ -28550,7 +30322,7 @@
         </p:nvSpPr>
         <p:spPr>
           <a:xfrm>
-            <a:off x="9262871" y="9400032"/>
+            <a:off x="9262871" y="9253728"/>
             <a:ext cx="402336" cy="402336"/>
           </a:xfrm>
           <a:prstGeom prst="ellipse">
@@ -28599,7 +30371,7 @@
         </p:nvSpPr>
         <p:spPr>
           <a:xfrm>
-            <a:off x="8288382" y="9857232"/>
+            <a:off x="8288382" y="9710928"/>
             <a:ext cx="2351314" cy="365760"/>
           </a:xfrm>
           <a:prstGeom prst="rect">
@@ -28642,7 +30414,7 @@
         </p:nvSpPr>
         <p:spPr>
           <a:xfrm>
-            <a:off x="11614186" y="9400032"/>
+            <a:off x="11614186" y="9253728"/>
             <a:ext cx="402336" cy="402336"/>
           </a:xfrm>
           <a:prstGeom prst="ellipse">
@@ -28691,7 +30463,7 @@
         </p:nvSpPr>
         <p:spPr>
           <a:xfrm>
-            <a:off x="10639697" y="9857232"/>
+            <a:off x="10639697" y="9710928"/>
             <a:ext cx="2351314" cy="365760"/>
           </a:xfrm>
           <a:prstGeom prst="rect">
@@ -28734,7 +30506,7 @@
         </p:nvSpPr>
         <p:spPr>
           <a:xfrm>
-            <a:off x="14002076" y="9436608"/>
+            <a:off x="14002076" y="9290304"/>
             <a:ext cx="329184" cy="329184"/>
           </a:xfrm>
           <a:prstGeom prst="ellipse">
@@ -28783,7 +30555,7 @@
         </p:nvSpPr>
         <p:spPr>
           <a:xfrm>
-            <a:off x="12991011" y="9857232"/>
+            <a:off x="12991011" y="9710928"/>
             <a:ext cx="2351314" cy="365760"/>
           </a:xfrm>
           <a:prstGeom prst="rect">
@@ -28826,7 +30598,7 @@
         </p:nvSpPr>
         <p:spPr>
           <a:xfrm>
-            <a:off x="16353390" y="9436608"/>
+            <a:off x="16353390" y="9290304"/>
             <a:ext cx="329184" cy="329184"/>
           </a:xfrm>
           <a:prstGeom prst="ellipse">
@@ -28875,7 +30647,7 @@
         </p:nvSpPr>
         <p:spPr>
           <a:xfrm>
-            <a:off x="15342325" y="9857232"/>
+            <a:off x="15342325" y="9710928"/>
             <a:ext cx="2351314" cy="365760"/>
           </a:xfrm>
           <a:prstGeom prst="rect">
@@ -29268,11 +31040,11 @@
             <a:tbl>
               <a:tblPr firstRow="0" bandRow="0"/>
               <a:tblGrid>
-                <a:gridCol w="2331720"/>
-                <a:gridCol w="731520"/>
+                <a:gridCol w="2240280"/>
+                <a:gridCol w="868680"/>
                 <a:gridCol w="548640"/>
-                <a:gridCol w="731520"/>
-                <a:gridCol w="1783080"/>
+                <a:gridCol w="777240"/>
+                <a:gridCol w="1691640"/>
               </a:tblGrid>
               <a:tr h="365760">
                 <a:tc>
@@ -29799,7 +31571,7 @@
                           </a:solidFill>
                           <a:latin typeface="Arial"/>
                         </a:rPr>
-                        <a:t>Mohd Fikri Rosely; Titi R., 2019</a:t>
+                        <a:t>Mohd Fikri Rosely; Titi Rahmawati, 2019</a:t>
                       </a:r>
                     </a:p>
                   </a:txBody>
@@ -30701,8 +32473,8 @@
         </p:blipFill>
         <p:spPr>
           <a:xfrm>
-            <a:off x="8092440" y="4767559"/>
-            <a:ext cx="7863840" cy="3586520"/>
+            <a:off x="8828668" y="4663440"/>
+            <a:ext cx="8220182" cy="3749039"/>
           </a:xfrm>
           <a:prstGeom prst="rect">
             <a:avLst/>
@@ -30717,8 +32489,8 @@
         </p:nvSpPr>
         <p:spPr>
           <a:xfrm>
-            <a:off x="16093440" y="4846320"/>
-            <a:ext cx="1737360" cy="3474720"/>
+            <a:off x="8092440" y="8430768"/>
+            <a:ext cx="9692640" cy="685800"/>
           </a:xfrm>
           <a:prstGeom prst="rect">
             <a:avLst/>
@@ -30736,286 +32508,92 @@
                 <a:spcPct val="100000"/>
               </a:lnSpc>
               <a:spcAft>
-                <a:spcPts val="400"/>
-              </a:spcAft>
-              <a:buNone/>
-            </a:pPr>
-            <a:r>
-              <a:rPr sz="1100" b="1" i="0">
+                <a:spcPts val="200"/>
+              </a:spcAft>
+              <a:buNone/>
+            </a:pPr>
+            <a:r>
+              <a:rPr sz="1300" b="1" i="0">
+                <a:solidFill>
+                  <a:srgbClr val="1F2433"/>
+                </a:solidFill>
+                <a:latin typeface="Arial"/>
+              </a:rPr>
+              <a:t>Figura E1. </a:t>
+            </a:r>
+            <a:r>
+              <a:rPr sz="1300" b="0" i="0">
+                <a:solidFill>
+                  <a:srgbClr val="1F2433"/>
+                </a:solidFill>
+                <a:latin typeface="Arial"/>
+              </a:rPr>
+              <a:t>Sete estudos das metanálises. </a:t>
+            </a:r>
+            <a:r>
+              <a:rPr sz="1300" b="1" i="0">
+                <a:solidFill>
+                  <a:srgbClr val="2E7D32"/>
+                </a:solidFill>
+                <a:latin typeface="Arial"/>
+              </a:rPr>
+              <a:t>+ sim  </a:t>
+            </a:r>
+            <a:r>
+              <a:rPr sz="1300" b="1" i="0">
+                <a:solidFill>
+                  <a:srgbClr val="E08A1E"/>
+                </a:solidFill>
+                <a:latin typeface="Arial"/>
+              </a:rPr>
+              <a:t>? incerto  </a:t>
+            </a:r>
+            <a:r>
+              <a:rPr sz="1300" b="1" i="0">
+                <a:solidFill>
+                  <a:srgbClr val="8B0000"/>
+                </a:solidFill>
+                <a:latin typeface="Arial"/>
+              </a:rPr>
+              <a:t>− não.  </a:t>
+            </a:r>
+            <a:r>
+              <a:rPr sz="1300" b="0" i="0">
+                <a:solidFill>
+                  <a:srgbClr val="1F2433"/>
+                </a:solidFill>
+                <a:latin typeface="Arial"/>
+              </a:rPr>
+              <a:t>Preocupação global: moderada ou alta em todos; nenhum com preocupação baixa.</a:t>
+            </a:r>
+          </a:p>
+          <a:p>
+            <a:pPr algn="l">
+              <a:lnSpc>
+                <a:spcPct val="100000"/>
+              </a:lnSpc>
+              <a:spcAft>
+                <a:spcPts val="200"/>
+              </a:spcAft>
+              <a:buNone/>
+            </a:pPr>
+            <a:r>
+              <a:rPr sz="1300" b="1" i="0">
                 <a:solidFill>
                   <a:srgbClr val="002060"/>
                 </a:solidFill>
                 <a:latin typeface="Arial"/>
               </a:rPr>
-              <a:t>Itens JBI (prevalência)</a:t>
-            </a:r>
-          </a:p>
-          <a:p>
-            <a:pPr algn="l">
-              <a:lnSpc>
-                <a:spcPct val="100000"/>
-              </a:lnSpc>
-              <a:spcAft>
-                <a:spcPts val="100"/>
-              </a:spcAft>
-              <a:buNone/>
-            </a:pPr>
-            <a:r>
-              <a:rPr sz="1100" b="0" i="0">
+              <a:t>Itens: </a:t>
+            </a:r>
+            <a:r>
+              <a:rPr sz="1300" b="0" i="0">
                 <a:solidFill>
                   <a:srgbClr val="1F2433"/>
                 </a:solidFill>
                 <a:latin typeface="Arial"/>
               </a:rPr>
-              <a:t>1 marco amostral</a:t>
-            </a:r>
-          </a:p>
-          <a:p>
-            <a:pPr algn="l">
-              <a:lnSpc>
-                <a:spcPct val="100000"/>
-              </a:lnSpc>
-              <a:spcAft>
-                <a:spcPts val="100"/>
-              </a:spcAft>
-              <a:buNone/>
-            </a:pPr>
-            <a:r>
-              <a:rPr sz="1100" b="0" i="0">
-                <a:solidFill>
-                  <a:srgbClr val="1F2433"/>
-                </a:solidFill>
-                <a:latin typeface="Arial"/>
-              </a:rPr>
-              <a:t>2 amostragem</a:t>
-            </a:r>
-          </a:p>
-          <a:p>
-            <a:pPr algn="l">
-              <a:lnSpc>
-                <a:spcPct val="100000"/>
-              </a:lnSpc>
-              <a:spcAft>
-                <a:spcPts val="100"/>
-              </a:spcAft>
-              <a:buNone/>
-            </a:pPr>
-            <a:r>
-              <a:rPr sz="1100" b="0" i="0">
-                <a:solidFill>
-                  <a:srgbClr val="1F2433"/>
-                </a:solidFill>
-                <a:latin typeface="Arial"/>
-              </a:rPr>
-              <a:t>3 tamanho amostral</a:t>
-            </a:r>
-          </a:p>
-          <a:p>
-            <a:pPr algn="l">
-              <a:lnSpc>
-                <a:spcPct val="100000"/>
-              </a:lnSpc>
-              <a:spcAft>
-                <a:spcPts val="100"/>
-              </a:spcAft>
-              <a:buNone/>
-            </a:pPr>
-            <a:r>
-              <a:rPr sz="1100" b="0" i="0">
-                <a:solidFill>
-                  <a:srgbClr val="1F2433"/>
-                </a:solidFill>
-                <a:latin typeface="Arial"/>
-              </a:rPr>
-              <a:t>4 sujeitos e cenário</a:t>
-            </a:r>
-          </a:p>
-          <a:p>
-            <a:pPr algn="l">
-              <a:lnSpc>
-                <a:spcPct val="100000"/>
-              </a:lnSpc>
-              <a:spcAft>
-                <a:spcPts val="100"/>
-              </a:spcAft>
-              <a:buNone/>
-            </a:pPr>
-            <a:r>
-              <a:rPr sz="1100" b="0" i="0">
-                <a:solidFill>
-                  <a:srgbClr val="1F2433"/>
-                </a:solidFill>
-                <a:latin typeface="Arial"/>
-              </a:rPr>
-              <a:t>5 cobertura</a:t>
-            </a:r>
-          </a:p>
-          <a:p>
-            <a:pPr algn="l">
-              <a:lnSpc>
-                <a:spcPct val="100000"/>
-              </a:lnSpc>
-              <a:spcAft>
-                <a:spcPts val="100"/>
-              </a:spcAft>
-              <a:buNone/>
-            </a:pPr>
-            <a:r>
-              <a:rPr sz="1100" b="0" i="0">
-                <a:solidFill>
-                  <a:srgbClr val="1F2433"/>
-                </a:solidFill>
-                <a:latin typeface="Arial"/>
-              </a:rPr>
-              <a:t>6 validade do desfecho</a:t>
-            </a:r>
-          </a:p>
-          <a:p>
-            <a:pPr algn="l">
-              <a:lnSpc>
-                <a:spcPct val="100000"/>
-              </a:lnSpc>
-              <a:spcAft>
-                <a:spcPts val="100"/>
-              </a:spcAft>
-              <a:buNone/>
-            </a:pPr>
-            <a:r>
-              <a:rPr sz="1100" b="0" i="0">
-                <a:solidFill>
-                  <a:srgbClr val="1F2433"/>
-                </a:solidFill>
-                <a:latin typeface="Arial"/>
-              </a:rPr>
-              <a:t>7 padronização</a:t>
-            </a:r>
-          </a:p>
-          <a:p>
-            <a:pPr algn="l">
-              <a:lnSpc>
-                <a:spcPct val="100000"/>
-              </a:lnSpc>
-              <a:spcAft>
-                <a:spcPts val="100"/>
-              </a:spcAft>
-              <a:buNone/>
-            </a:pPr>
-            <a:r>
-              <a:rPr sz="1100" b="0" i="0">
-                <a:solidFill>
-                  <a:srgbClr val="1F2433"/>
-                </a:solidFill>
-                <a:latin typeface="Arial"/>
-              </a:rPr>
-              <a:t>8 análise</a:t>
-            </a:r>
-          </a:p>
-          <a:p>
-            <a:pPr algn="l">
-              <a:lnSpc>
-                <a:spcPct val="100000"/>
-              </a:lnSpc>
-              <a:spcAft>
-                <a:spcPts val="100"/>
-              </a:spcAft>
-              <a:buNone/>
-            </a:pPr>
-            <a:r>
-              <a:rPr sz="1100" b="0" i="0">
-                <a:solidFill>
-                  <a:srgbClr val="1F2433"/>
-                </a:solidFill>
-                <a:latin typeface="Arial"/>
-              </a:rPr>
-              <a:t>9 taxa de resposta</a:t>
-            </a:r>
-          </a:p>
-        </p:txBody>
-      </p:sp>
-      <p:sp>
-        <p:nvSpPr>
-          <p:cNvPr id="45" name="TextBox 44"/>
-          <p:cNvSpPr txBox="1"/>
-          <p:nvPr/>
-        </p:nvSpPr>
-        <p:spPr>
-          <a:xfrm>
-            <a:off x="8092440" y="8412480"/>
-            <a:ext cx="7863840" cy="640080"/>
-          </a:xfrm>
-          <a:prstGeom prst="rect">
-            <a:avLst/>
-          </a:prstGeom>
-          <a:noFill/>
-        </p:spPr>
-        <p:txBody>
-          <a:bodyPr wrap="square" lIns="0" rIns="0" tIns="0" bIns="0" anchor="t">
-            <a:noAutofit/>
-          </a:bodyPr>
-          <a:lstStyle/>
-          <a:p>
-            <a:pPr algn="l">
-              <a:lnSpc>
-                <a:spcPct val="100000"/>
-              </a:lnSpc>
-              <a:spcAft>
-                <a:spcPts val="0"/>
-              </a:spcAft>
-              <a:buNone/>
-            </a:pPr>
-            <a:r>
-              <a:rPr sz="1300" b="1" i="0">
-                <a:solidFill>
-                  <a:srgbClr val="1F2433"/>
-                </a:solidFill>
-                <a:latin typeface="Arial"/>
-              </a:rPr>
-              <a:t>Figura E1. </a:t>
-            </a:r>
-            <a:r>
-              <a:rPr sz="1300" b="0" i="0">
-                <a:solidFill>
-                  <a:srgbClr val="1F2433"/>
-                </a:solidFill>
-                <a:latin typeface="Arial"/>
-              </a:rPr>
-              <a:t>Sete estudos das metanálises. </a:t>
-            </a:r>
-            <a:r>
-              <a:rPr sz="1300" b="1" i="0">
-                <a:solidFill>
-                  <a:srgbClr val="2E7D32"/>
-                </a:solidFill>
-                <a:latin typeface="Arial"/>
-              </a:rPr>
-              <a:t>+ sim  </a:t>
-            </a:r>
-            <a:r>
-              <a:rPr sz="1300" b="1" i="0">
-                <a:solidFill>
-                  <a:srgbClr val="E08A1E"/>
-                </a:solidFill>
-                <a:latin typeface="Arial"/>
-              </a:rPr>
-              <a:t>? incerto  </a:t>
-            </a:r>
-            <a:r>
-              <a:rPr sz="1300" b="1" i="0">
-                <a:solidFill>
-                  <a:srgbClr val="8B0000"/>
-                </a:solidFill>
-                <a:latin typeface="Arial"/>
-              </a:rPr>
-              <a:t>− não.  </a:t>
-            </a:r>
-            <a:r>
-              <a:rPr sz="1300" b="0" i="0">
-                <a:solidFill>
-                  <a:srgbClr val="1F2433"/>
-                </a:solidFill>
-                <a:latin typeface="Arial"/>
-              </a:rPr>
-              <a:t>Preocupação global: moderada ou alta em todos; nenhum com preocupação baixa.</a:t>
+              <a:t>1 marco amostral · 2 amostragem · 3 tamanho amostral · 4 sujeitos e cenário · 5 cobertura · 6 validade do desfecho · 7 padronização · 8 análise · 9 taxa de resposta</a:t>
             </a:r>
           </a:p>
         </p:txBody>
@@ -31209,7 +32787,7 @@
         </p:nvCxnSpPr>
         <p:spPr>
           <a:xfrm>
-            <a:off x="2410097" y="9601200"/>
+            <a:off x="2410097" y="9454896"/>
             <a:ext cx="14107885" cy="0"/>
           </a:xfrm>
           <a:prstGeom prst="line">
@@ -31230,7 +32808,7 @@
         </p:nvSpPr>
         <p:spPr>
           <a:xfrm>
-            <a:off x="2245505" y="9436608"/>
+            <a:off x="2245505" y="9290304"/>
             <a:ext cx="329184" cy="329184"/>
           </a:xfrm>
           <a:prstGeom prst="ellipse">
@@ -31279,7 +32857,7 @@
         </p:nvSpPr>
         <p:spPr>
           <a:xfrm>
-            <a:off x="1234439" y="9857232"/>
+            <a:off x="1234439" y="9710928"/>
             <a:ext cx="2351314" cy="365760"/>
           </a:xfrm>
           <a:prstGeom prst="rect">
@@ -31322,7 +32900,7 @@
         </p:nvSpPr>
         <p:spPr>
           <a:xfrm>
-            <a:off x="4596819" y="9436608"/>
+            <a:off x="4596819" y="9290304"/>
             <a:ext cx="329184" cy="329184"/>
           </a:xfrm>
           <a:prstGeom prst="ellipse">
@@ -31371,7 +32949,7 @@
         </p:nvSpPr>
         <p:spPr>
           <a:xfrm>
-            <a:off x="3585754" y="9857232"/>
+            <a:off x="3585754" y="9710928"/>
             <a:ext cx="2351314" cy="365760"/>
           </a:xfrm>
           <a:prstGeom prst="rect">
@@ -31414,7 +32992,7 @@
         </p:nvSpPr>
         <p:spPr>
           <a:xfrm>
-            <a:off x="6948133" y="9436608"/>
+            <a:off x="6948133" y="9290304"/>
             <a:ext cx="329184" cy="329184"/>
           </a:xfrm>
           <a:prstGeom prst="ellipse">
@@ -31463,7 +33041,7 @@
         </p:nvSpPr>
         <p:spPr>
           <a:xfrm>
-            <a:off x="5937068" y="9857232"/>
+            <a:off x="5937068" y="9710928"/>
             <a:ext cx="2351314" cy="365760"/>
           </a:xfrm>
           <a:prstGeom prst="rect">
@@ -31506,7 +33084,7 @@
         </p:nvSpPr>
         <p:spPr>
           <a:xfrm>
-            <a:off x="9299447" y="9436608"/>
+            <a:off x="9299447" y="9290304"/>
             <a:ext cx="329184" cy="329184"/>
           </a:xfrm>
           <a:prstGeom prst="ellipse">
@@ -31555,7 +33133,7 @@
         </p:nvSpPr>
         <p:spPr>
           <a:xfrm>
-            <a:off x="8288382" y="9857232"/>
+            <a:off x="8288382" y="9710928"/>
             <a:ext cx="2351314" cy="365760"/>
           </a:xfrm>
           <a:prstGeom prst="rect">
@@ -31598,7 +33176,7 @@
         </p:nvSpPr>
         <p:spPr>
           <a:xfrm>
-            <a:off x="11650762" y="9436608"/>
+            <a:off x="11650762" y="9290304"/>
             <a:ext cx="329184" cy="329184"/>
           </a:xfrm>
           <a:prstGeom prst="ellipse">
@@ -31647,7 +33225,7 @@
         </p:nvSpPr>
         <p:spPr>
           <a:xfrm>
-            <a:off x="10639697" y="9857232"/>
+            <a:off x="10639697" y="9710928"/>
             <a:ext cx="2351314" cy="365760"/>
           </a:xfrm>
           <a:prstGeom prst="rect">
@@ -31690,7 +33268,7 @@
         </p:nvSpPr>
         <p:spPr>
           <a:xfrm>
-            <a:off x="13965500" y="9400032"/>
+            <a:off x="13965500" y="9253728"/>
             <a:ext cx="402336" cy="402336"/>
           </a:xfrm>
           <a:prstGeom prst="ellipse">
@@ -31739,7 +33317,7 @@
         </p:nvSpPr>
         <p:spPr>
           <a:xfrm>
-            <a:off x="12991011" y="9857232"/>
+            <a:off x="12991011" y="9710928"/>
             <a:ext cx="2351314" cy="365760"/>
           </a:xfrm>
           <a:prstGeom prst="rect">
@@ -31782,7 +33360,7 @@
         </p:nvSpPr>
         <p:spPr>
           <a:xfrm>
-            <a:off x="16353390" y="9436608"/>
+            <a:off x="16353390" y="9290304"/>
             <a:ext cx="329184" cy="329184"/>
           </a:xfrm>
           <a:prstGeom prst="ellipse">
@@ -31831,7 +33409,7 @@
         </p:nvSpPr>
         <p:spPr>
           <a:xfrm>
-            <a:off x="15342325" y="9857232"/>
+            <a:off x="15342325" y="9710928"/>
             <a:ext cx="2351314" cy="365760"/>
           </a:xfrm>
           <a:prstGeom prst="rect">
@@ -32052,7 +33630,7 @@
               <a:buNone/>
             </a:pPr>
             <a:r>
-              <a:rPr sz="1700" b="1" i="0">
+              <a:rPr sz="1600" b="1" i="0">
                 <a:solidFill>
                   <a:srgbClr val="8B0000"/>
                 </a:solidFill>
@@ -32342,7 +33920,7 @@
               <a:buNone/>
             </a:pPr>
             <a:r>
-              <a:rPr sz="1700" b="1" i="0">
+              <a:rPr sz="1600" b="1" i="0">
                 <a:solidFill>
                   <a:srgbClr val="8B0000"/>
                 </a:solidFill>
@@ -32656,7 +34234,7 @@
               <a:buNone/>
             </a:pPr>
             <a:r>
-              <a:rPr sz="1700" b="1" i="0">
+              <a:rPr sz="1600" b="1" i="0">
                 <a:solidFill>
                   <a:srgbClr val="8B0000"/>
                 </a:solidFill>
@@ -32970,13 +34548,13 @@
               <a:buNone/>
             </a:pPr>
             <a:r>
-              <a:rPr sz="1700" b="1" i="0">
+              <a:rPr sz="1600" b="1" i="0">
                 <a:solidFill>
                   <a:srgbClr val="8B0000"/>
                 </a:solidFill>
                 <a:latin typeface="Arial"/>
               </a:rPr>
-              <a:t>IC com distribuição t (k − 1 gl)</a:t>
+              <a:t>IC pela distribuição t</a:t>
             </a:r>
           </a:p>
         </p:txBody>
@@ -33023,7 +34601,7 @@
                 </a:solidFill>
                 <a:latin typeface="Arial"/>
               </a:rPr>
-              <a:t>Corrige o IC da estimativa combinada quando há poucos estudos e heterogeneidade alta.</a:t>
+              <a:t>Usa k − 1 graus de liberdade e corrige o IC da estimativa combinada quando há poucos estudos e heterogeneidade alta.</a:t>
             </a:r>
           </a:p>
           <a:p>
@@ -33260,13 +34838,13 @@
               <a:buNone/>
             </a:pPr>
             <a:r>
-              <a:rPr sz="1700" b="1" i="0">
+              <a:rPr sz="1600" b="1" i="0">
                 <a:solidFill>
                   <a:srgbClr val="8B0000"/>
                 </a:solidFill>
                 <a:latin typeface="Arial"/>
               </a:rPr>
-              <a:t>I² e intervalo de predição</a:t>
+              <a:t>I²  +  intervalo de predição</a:t>
             </a:r>
           </a:p>
         </p:txBody>
@@ -34200,7 +35778,7 @@
               <a:buNone/>
             </a:pPr>
             <a:r>
-              <a:rPr sz="1400" b="1" i="0">
+              <a:rPr sz="1500" b="1" i="0">
                 <a:solidFill>
                   <a:srgbClr val="002060"/>
                 </a:solidFill>
@@ -34209,7 +35787,7 @@
               <a:t>Por que não fizemos gráfico de funil nem teste de Egger? </a:t>
             </a:r>
             <a:r>
-              <a:rPr sz="1400" b="0" i="0">
+              <a:rPr sz="1500" b="0" i="0">
                 <a:solidFill>
                   <a:srgbClr val="1F2433"/>
                 </a:solidFill>
@@ -34218,7 +35796,7 @@
               <a:t>Em metanálise de proporção o erro-padrão depende da própria proporção, o que gera assimetria espúria, e os testes exigem ≥ 10 estudos. O viés de relato foi apreciado qualitativamente. </a:t>
             </a:r>
             <a:r>
-              <a:rPr sz="1400" b="1" i="0">
+              <a:rPr sz="1500" b="1" i="0">
                 <a:solidFill>
                   <a:srgbClr val="1F2433"/>
                 </a:solidFill>
@@ -34227,7 +35805,7 @@
               <a:t>Sem metarregressão </a:t>
             </a:r>
             <a:r>
-              <a:rPr sz="1400" b="0" i="0">
+              <a:rPr sz="1500" b="0" i="0">
                 <a:solidFill>
                   <a:srgbClr val="1F2433"/>
                 </a:solidFill>
@@ -34236,7 +35814,7 @@
               <a:t>(poucos estudos por covariável). </a:t>
             </a:r>
             <a:r>
-              <a:rPr sz="1400" b="1" i="0">
+              <a:rPr sz="1500" b="1" i="0">
                 <a:solidFill>
                   <a:srgbClr val="1F2433"/>
                 </a:solidFill>
@@ -34245,7 +35823,7 @@
               <a:t>Riscos relativos </a:t>
             </a:r>
             <a:r>
-              <a:rPr sz="1400" b="0" i="0">
+              <a:rPr sz="1500" b="0" i="0">
                 <a:solidFill>
                   <a:srgbClr val="1F2433"/>
                 </a:solidFill>

--- a/apresentacao/SEMICA_Fumaca_Cirurgica_Baccaro.pptx
+++ b/apresentacao/SEMICA_Fumaca_Cirurgica_Baccaro.pptx
@@ -254,7 +254,7 @@
                   <a:lstStyle/>
                   <a:p>
                     <a:r>
-                      <a:rPr sz="1300">
+                      <a:rPr sz="1400">
                         <a:solidFill>
                           <a:srgbClr val="1F2433"/>
                         </a:solidFill>
@@ -281,7 +281,7 @@
                   <a:lstStyle/>
                   <a:p>
                     <a:r>
-                      <a:rPr sz="1300">
+                      <a:rPr sz="1400">
                         <a:solidFill>
                           <a:srgbClr val="1F2433"/>
                         </a:solidFill>
@@ -308,7 +308,7 @@
                   <a:lstStyle/>
                   <a:p>
                     <a:r>
-                      <a:rPr sz="1300">
+                      <a:rPr sz="1400">
                         <a:solidFill>
                           <a:srgbClr val="1F2433"/>
                         </a:solidFill>
@@ -335,7 +335,7 @@
                   <a:lstStyle/>
                   <a:p>
                     <a:r>
-                      <a:rPr sz="1300">
+                      <a:rPr sz="1400">
                         <a:solidFill>
                           <a:srgbClr val="1F2433"/>
                         </a:solidFill>
@@ -362,7 +362,7 @@
                   <a:lstStyle/>
                   <a:p>
                     <a:r>
-                      <a:rPr sz="1300">
+                      <a:rPr sz="1400">
                         <a:solidFill>
                           <a:srgbClr val="1F2433"/>
                         </a:solidFill>
@@ -389,7 +389,7 @@
                   <a:lstStyle/>
                   <a:p>
                     <a:r>
-                      <a:rPr sz="1300">
+                      <a:rPr sz="1400">
                         <a:solidFill>
                           <a:srgbClr val="1F2433"/>
                         </a:solidFill>
@@ -416,7 +416,7 @@
                   <a:lstStyle/>
                   <a:p>
                     <a:r>
-                      <a:rPr sz="1300">
+                      <a:rPr sz="1400">
                         <a:solidFill>
                           <a:srgbClr val="1F2433"/>
                         </a:solidFill>
@@ -443,7 +443,7 @@
                   <a:lstStyle/>
                   <a:p>
                     <a:r>
-                      <a:rPr sz="1300">
+                      <a:rPr sz="1400">
                         <a:solidFill>
                           <a:srgbClr val="1F2433"/>
                         </a:solidFill>
@@ -470,7 +470,7 @@
                   <a:lstStyle/>
                   <a:p>
                     <a:r>
-                      <a:rPr sz="1300">
+                      <a:rPr sz="1400">
                         <a:solidFill>
                           <a:srgbClr val="1F2433"/>
                         </a:solidFill>
@@ -576,7 +576,7 @@
             <a:lstStyle/>
             <a:p>
               <a:pPr>
-                <a:defRPr sz="1300">
+                <a:defRPr sz="1400">
                   <a:solidFill>
                     <a:srgbClr val="1F2433"/>
                   </a:solidFill>
@@ -620,7 +620,7 @@
           <a:lstStyle/>
           <a:p>
             <a:pPr>
-              <a:defRPr sz="1300">
+              <a:defRPr sz="1400">
                 <a:latin typeface="Arial"/>
               </a:defRPr>
             </a:pPr>
@@ -654,7 +654,7 @@
     <a:lstStyle/>
     <a:p>
       <a:pPr>
-        <a:defRPr sz="1300">
+        <a:defRPr sz="1400">
           <a:solidFill>
             <a:srgbClr val="1F2433"/>
           </a:solidFill>
@@ -1151,7 +1151,7 @@
           <a:lstStyle/>
           <a:p>
             <a:r>
-              <a:t>[5:05–5:30] RESULTADOS – SELEÇÃO E CARACTERÍSTICAS (~25 s)</a:t>
+              <a:t>[5:05–5:25] RESULTADOS – SELEÇÃO E CARACTERÍSTICAS (~20 s)</a:t>
             </a:r>
           </a:p>
           <a:p>
@@ -1236,7 +1236,7 @@
           <a:lstStyle/>
           <a:p>
             <a:r>
-              <a:t>[5:30–6:10] RESULTADO PRINCIPAL – OCULAR (~40 s)</a:t>
+              <a:t>[5:25–6:15] RESULTADO PRINCIPAL – OCULAR (~50 s)  ← dê tempo a este slide; é o que mais mostra análise crítica</a:t>
             </a:r>
           </a:p>
           <a:p>
@@ -1246,12 +1246,17 @@
           </a:p>
           <a:p>
             <a:r>
-              <a:t>No gráfico de floresta, cada quadrado é a prevalência de um estudo, com o tamanho proporcional ao peso; a linha é o intervalo de confiança; o losango vermelho é a estimativa combinada e a linha vermelha mais longa é o intervalo de predição, de 7 a 83%. Essa linha longa é a mensagem honesta: a heterogeneidade é de 93%, os estudos vão de 19% na Malásia a 56% na Turquia, e um novo estudo poderia cair em quase qualquer valor.</a:t>
-            </a:r>
-          </a:p>
-          <a:p>
-            <a:r>
-              <a:t>Reforço: isto é a proporção de profissionais que relataram o sintoma, conforme a definição de cada estudo, e não uma prevalência com período de recordatório homogêneo.</a:t>
+              <a:t>No gráfico de floresta, cada quadrado é a prevalência de um estudo, com o tamanho proporcional ao peso; a linha preta é o intervalo de confiança de Wilson; o losango vermelho é a estimativa combinada e a linha vermelha mais longa é o intervalo de predição, de 7 a 83%.</a:t>
+            </a:r>
+          </a:p>
+          <a:p>
+            <a:r>
+              <a:t>Essa linha longa é a mensagem honesta do trabalho. A heterogeneidade é de 93%, os estudos vão de 19% na Malásia a 56% na Turquia, e um novo estudo, em outro hospital, poderia encontrar quase qualquer valor. Por isso eu não apresento o 37,6% como "a prevalência", e sim como a média de uma distribuição ampla, que o intervalo de predição descreve melhor do que o intervalo de confiança.</a:t>
+            </a:r>
+          </a:p>
+          <a:p>
+            <a:r>
+              <a:t>Dois cuidados de interpretação: isto é a proporção de profissionais que relataram o sintoma e o atribuíram à fumaça, conforme a definição de cada estudo, não uma prevalência com período de recordatório homogêneo; e não há grupo não exposto no agrupamento, então o número descreve a carga de sintomas, não um excesso atribuível.</a:t>
             </a:r>
           </a:p>
           <a:p/>
@@ -1327,7 +1332,7 @@
           <a:lstStyle/>
           <a:p>
             <a:r>
-              <a:t>[6:10–6:40] RESPIRATÓRIO E ROBUSTEZ (~30 s)</a:t>
+              <a:t>[6:15–6:40] RESPIRATÓRIO E ROBUSTEZ (~25 s)  ← aponte a tabela, não leia linha por linha</a:t>
             </a:r>
           </a:p>
           <a:p>
@@ -1337,17 +1342,18 @@
           </a:p>
           <a:p>
             <a:r>
-              <a:t>A tabela mostra por que confio nas estimativas: os três modelos, logito com Hartung-Knapp, Freeman-Tukey e o modelo logístico misto, deram praticamente o mesmo número; retirar um estudo por vez movimenta a estimativa ocular só entre 34 e 42%; e excluir o resumo de congresso não muda a leitura.</a:t>
-            </a:r>
-          </a:p>
-          <a:p>
-            <a:r>
-              <a:t>Um achado interessante: quando restringimos a definições específicas de sintoma respiratório, o I² caiu de 91 para 61%. Ou seja, boa parte da heterogeneidade vem de como cada estudo definiu o sintoma.</a:t>
-            </a:r>
-          </a:p>
-          <a:p>
-            <a:r>
-              <a:t>Na análise por país, a Turquia ficou em 50% e a Malásia em 20%, com diferença significativa, mas com dois ou três estudos por país isso é hipótese, não conclusão.</a:t>
+              <a:t>A tabela resume a robustez, e a mensagem é uma só: três modelos diferentes, retirar um estudo por vez ou excluir o resumo de congresso não mudam a leitura. O achado mais interessante é que, restringindo a definições específicas de sintoma respiratório, o I² cai de 91 para 61%: boa parte da heterogeneidade vem de como cada estudo definiu o sintoma.</a:t>
+            </a:r>
+          </a:p>
+          <a:p>
+            <a:r>
+              <a:t>Na análise por país, Turquia e Malásia diferem bastante, mas com dois ou três estudos por país isso é hipótese, não conclusão.</a:t>
+            </a:r>
+          </a:p>
+          <a:p/>
+          <a:p>
+            <a:r>
+              <a:t>SE PEDIREM DETALHE DA TABELA: logito-HK 37,6/41,7; Freeman-Tukey 38,1/41,7; GLMM 37,5/42,0; leave-one-out 34,3–42,1 e 38,9–45,5; sem resumo de congresso 42,1/42,4; definições específicas 36,5 (I² 94%)/35,8 (I² 61%).</a:t>
             </a:r>
           </a:p>
         </p:txBody>
@@ -1427,7 +1433,7 @@
           </a:p>
           <a:p>
             <a:r>
-              <a:t>Espirometria no Sudão: VEF1, CVF e pico de fluxo menores nos expostos, com gradiente pelo tempo de atuação; mas a relação VEF1/CVF foi normal e o pico de fluxo depende de esforço, então lemos com cautela. Biomarcadores urinários no Brasil: metabólitos de benzeno e xileno e malondialdeído muito mais altos nos expostos. Biópsia nasal numa coorte mexicana de quatro anos: metaplasia em 70% dos expostos contra 5%, risco relativo de 13,9, com intervalo muito amplo. E DNA de HPV na mucosa nasal de ginecologistas chineses: 9% contra 1,7%, risco relativo de 5,2.</a:t>
+              <a:t>Espirometria no Sudão: VEF1, CVF e pico de fluxo menores nos expostos, com gradiente pelo tempo de atuação; mas a relação VEF1/CVF foi normal e o pico de fluxo depende de esforço, então lemos com cautela. Biomarcadores urinários no Brasil: metabólitos de benzeno e xileno e malondialdeído muito mais altos nos expostos; note que os denominadores diferem: 52 expostos contra 49 controles para os metabólitos, porque três amostras do grupo controle se perderam, e 52 contra 52 para o perfil oxidativo. Biópsia nasal numa coorte mexicana de quatro anos: metaplasia em 70% dos expostos contra 5%, risco relativo de 13,9, com intervalo muito amplo. E DNA de HPV na mucosa nasal de ginecologistas chineses: 9% contra 1,7%, risco relativo de 5,2.</a:t>
             </a:r>
           </a:p>
           <a:p>
@@ -1989,7 +1995,12 @@
           </a:p>
           <a:p>
             <a:r>
-              <a:t>Fumaça cirúrgica é o subproduto da destruição térmica dos tecidos pelo eletrocautério, pelo laser e pelo bisturi ultrassônico. Ela não é só "fumaça": contém hidrocarbonetos aromáticos policíclicos, compostos orgânicos voláteis como benzeno, tolueno e xileno, partículas ultrafinas que chegam às vias aéreas inferiores e até material genético viral, como o HPV.</a:t>
+              <a:t>Fumaça cirúrgica é o subproduto da destruição térmica dos tecidos pelo eletrocautério, pelo laser e pelo bisturi ultrassônico. Ela não é só "fumaça": contém hidrocarbonetos aromáticos policíclicos, compostos orgânicos voláteis como benzeno, tolueno e xileno, material particulado fino, o PM2,5, e partículas ultrafinas, que chegam às vias aéreas inferiores, e até material genético viral, como o HPV.</a:t>
+            </a:r>
+          </a:p>
+          <a:p>
+            <a:r>
+              <a:t>(Se perguntarem: PM2,5 é a fração fina, com diâmetro aerodinâmico abaixo de 2,5 µm; "ultrafina" é abaixo de 0,1 µm. O manuscrito cita as duas.)</a:t>
             </a:r>
           </a:p>
           <a:p>
@@ -2256,7 +2267,7 @@
           </a:p>
           <a:p>
             <a:r>
-              <a:t>Tudo foi feito com ferramentas abertas: Zotero, Rayyan, OpenAlex e análise em Python. Um assistente de IA foi usado apenas para priorizar a ordem de leitura; nenhuma decisão de elegibilidade ou extração foi delegada. O código e as planilhas estão públicos no OSF.</a:t>
+              <a:t>Tudo foi feito com ferramentas abertas: Zotero, Rayyan, OpenAlex e análise em Python. Um assistente de IA teve função só operacional: ajudou a priorizar a ordem de leitura na triagem, na leitura assistida de resumos e na organização do fluxo de trabalho. Toda decisão de elegibilidade, a extração, a interpretação e a redação foram minhas, e nada gerado por IA entrou sem verificação humana; isso está declarado conforme a Portaria do CNPq. O código e as planilhas estão públicos no OSF.</a:t>
             </a:r>
           </a:p>
           <a:p/>
@@ -2337,7 +2348,7 @@
           </a:p>
           <a:p>
             <a:r>
-              <a:t>Os critérios de elegibilidade foram fixados no protocolo. Incluímos estudos observacionais primários com profissionais de centro cirúrgico expostos, com qualquer efeito à saúde ou marcador de exposição como desfecho, em português, inglês ou espanhol, sem restrição de data. Excluímos estudos em animais, populações fora do centro cirúrgico, desfechos só no paciente, medições de ar sem desfecho humano e exposições não atribuíveis à fumaça.</a:t>
+              <a:t>Os critérios de elegibilidade foram definidos no protocolo, e os ajustes feitos depois do registro estão declarados no manuscrito. Incluímos estudos observacionais primários com profissionais de centro cirúrgico expostos, com qualquer efeito à saúde ou marcador de exposição como desfecho, em português, inglês ou espanhol, sem restrição de data. Resumos de congresso só entraram quando traziam população, cenário, definição do desfecho, eventos e denominador; essa admissão foi uma decisão posterior ao registro, declarada, e esses resumos receberam preocupação alta com viés e análise de sensibilidade. Excluímos estudos em animais, populações fora do centro cirúrgico, desfechos só no paciente, medições de ar sem desfecho humano e exposições não atribuíveis à fumaça.</a:t>
             </a:r>
           </a:p>
           <a:p>
@@ -2428,7 +2439,7 @@
           </a:p>
           <a:p>
             <a:r>
-              <a:t>Da esquerda para a direita: 16.757 registros entraram no Zotero e foram importados no Rayyan, que removeu 5.839 duplicatas por DOI, PMID e similaridade de título. Sobraram 10.910 registros únicos, e eu li o título e o resumo de todos eles. Um script em Python e um assistente de IA só reordenaram a fila de leitura; quem decidia era eu, com os critérios.</a:t>
+              <a:t>Da esquerda para a direita: 16.757 registros entraram no Zotero e foram importados no Rayyan, que removeu 5.839 duplicatas por DOI, PMID e similaridade de título. Sobraram 10.910 registros únicos, e eu li o título e o resumo de todos eles. Um script em Python com regras por palavras-chave e um assistente de IA tiveram papel operacional: reordenaram a fila de leitura, apoiaram a leitura assistida de resumos e a organização do fluxo. Quem decidia a elegibilidade era eu, com os critérios.</a:t>
             </a:r>
           </a:p>
           <a:p>
@@ -2444,7 +2455,7 @@
           <a:p/>
           <a:p>
             <a:r>
-              <a:t>HONESTIDADE METODOLÓGICA: a triagem foi feita por um único revisor. Isso está declarado como limitação; o PRISMA pede dupla revisão independente. Se perguntarem, diga que a decisão foi registrada com justificativa e que a replicação em duplicata está nas perspectivas.</a:t>
+              <a:t>HONESTIDADE METODOLÓGICA: a triagem foi feita por um único revisor. Isso está declarado como limitação. Cuidado com a terminologia: o PRISMA 2020 é um guia de RELATO (diz o que deve constar no texto); a seleção independente por dois revisores é uma recomendação METODOLÓGICA importante (manuais do JBI e da Cochrane; Diretrizes do MS). Se perguntarem, diga que as decisões foram registradas com justificativa e que a replicação em duplicata está nas perspectivas.</a:t>
             </a:r>
           </a:p>
         </p:txBody>
@@ -5740,8 +5751,8 @@
         </p:nvSpPr>
         <p:spPr>
           <a:xfrm>
-            <a:off x="3657600" y="6629400"/>
-            <a:ext cx="10972800" cy="1554480"/>
+            <a:off x="3657600" y="6675120"/>
+            <a:ext cx="10972800" cy="1280160"/>
           </a:xfrm>
           <a:prstGeom prst="rect">
             <a:avLst/>
@@ -5759,12 +5770,12 @@
                 <a:spcPct val="100000"/>
               </a:lnSpc>
               <a:spcAft>
-                <a:spcPts val="400"/>
-              </a:spcAft>
-              <a:buNone/>
-            </a:pPr>
-            <a:r>
-              <a:rPr sz="2400" b="1" i="0">
+                <a:spcPts val="300"/>
+              </a:spcAft>
+              <a:buNone/>
+            </a:pPr>
+            <a:r>
+              <a:rPr sz="1800" b="1" i="0">
                 <a:solidFill>
                   <a:srgbClr val="1F2433"/>
                 </a:solidFill>
@@ -5773,7 +5784,7 @@
               <a:t>Autor: </a:t>
             </a:r>
             <a:r>
-              <a:rPr sz="2400" b="0" i="0">
+              <a:rPr sz="1800" b="0" i="0">
                 <a:solidFill>
                   <a:srgbClr val="1F2433"/>
                 </a:solidFill>
@@ -5792,44 +5803,44 @@
                 <a:spcPct val="100000"/>
               </a:lnSpc>
               <a:spcAft>
+                <a:spcPts val="300"/>
+              </a:spcAft>
+              <a:buNone/>
+            </a:pPr>
+            <a:r>
+              <a:rPr sz="1800" b="1" i="0">
+                <a:solidFill>
+                  <a:srgbClr val="1F2433"/>
+                </a:solidFill>
+                <a:latin typeface="Tahoma"/>
+              </a:rPr>
+              <a:t>Orientadora: </a:t>
+            </a:r>
+            <a:r>
+              <a:rPr sz="1800" b="0" i="0">
+                <a:solidFill>
+                  <a:srgbClr val="1F2433"/>
+                </a:solidFill>
+                <a:latin typeface="Tahoma"/>
+              </a:rPr>
+              <a:t>Profa. Lisie Tocci Justo</a:t>
+            </a:r>
+          </a:p>
+          <a:p>
+            <a:pPr algn="ctr">
+              <a:lnSpc>
+                <a:spcPct val="100000"/>
+              </a:lnSpc>
+              <a:spcBef>
                 <a:spcPts val="400"/>
-              </a:spcAft>
-              <a:buNone/>
-            </a:pPr>
-            <a:r>
-              <a:rPr sz="2400" b="1" i="0">
-                <a:solidFill>
-                  <a:srgbClr val="1F2433"/>
-                </a:solidFill>
-                <a:latin typeface="Tahoma"/>
-              </a:rPr>
-              <a:t>Orientadora: </a:t>
-            </a:r>
-            <a:r>
-              <a:rPr sz="2400" b="0" i="0">
-                <a:solidFill>
-                  <a:srgbClr val="1F2433"/>
-                </a:solidFill>
-                <a:latin typeface="Tahoma"/>
-              </a:rPr>
-              <a:t>Profa. Lisie Tocci Justo</a:t>
-            </a:r>
-          </a:p>
-          <a:p>
-            <a:pPr algn="ctr">
-              <a:lnSpc>
-                <a:spcPct val="100000"/>
-              </a:lnSpc>
-              <a:spcBef>
-                <a:spcPts val="600"/>
               </a:spcBef>
               <a:spcAft>
-                <a:spcPts val="400"/>
-              </a:spcAft>
-              <a:buNone/>
-            </a:pPr>
-            <a:r>
-              <a:rPr sz="1800" b="0" i="0">
+                <a:spcPts val="300"/>
+              </a:spcAft>
+              <a:buNone/>
+            </a:pPr>
+            <a:r>
+              <a:rPr sz="1600" b="0" i="0">
                 <a:solidFill>
                   <a:srgbClr val="5A6270"/>
                 </a:solidFill>
@@ -7045,13 +7056,13 @@
               <a:buNone/>
             </a:pPr>
             <a:r>
-              <a:rPr sz="1500" b="0" i="0">
+              <a:rPr sz="1600" b="0" i="0">
                 <a:solidFill>
                   <a:srgbClr val="1F2433"/>
                 </a:solidFill>
                 <a:latin typeface="Arial"/>
               </a:rPr>
-              <a:t>Do JBI: amostragem não probabilística, tamanho amostral não justificado, taxa de resposta não relatada, desfecho autorrelatado; nos objetivos, ausência de ajuste para confundidores.</a:t>
+              <a:t>Do JBI: amostragem não probabilística, taxa de resposta não relatada, desfecho autorrelatado; nos objetivos, sem ajuste para confundidores.</a:t>
             </a:r>
           </a:p>
         </p:txBody>
@@ -7213,13 +7224,13 @@
               <a:buNone/>
             </a:pPr>
             <a:r>
-              <a:rPr sz="1500" b="0" i="0">
+              <a:rPr sz="1600" b="0" i="0">
                 <a:solidFill>
                   <a:srgbClr val="1F2433"/>
                 </a:solidFill>
                 <a:latin typeface="Arial"/>
               </a:rPr>
-              <a:t>I² acima de 90%, prevalências individuais de 19% a 56% e intervalo de predição amplo → muito grave nos desfechos de prevalência.</a:t>
+              <a:t>I² acima de 90%, prevalências de 19% a 56% e intervalo de predição amplo → muito grave na prevalência.</a:t>
             </a:r>
           </a:p>
         </p:txBody>
@@ -7381,13 +7392,13 @@
               <a:buNone/>
             </a:pPr>
             <a:r>
-              <a:rPr sz="1500" b="0" i="0">
+              <a:rPr sz="1600" b="0" i="0">
                 <a:solidFill>
                   <a:srgbClr val="1F2433"/>
                 </a:solidFill>
                 <a:latin typeface="Arial"/>
               </a:rPr>
-              <a:t>Não rebaixada na prevalência: o sintoma autorrelatado É o desfecho da pergunta. Rebaixada nos biomarcadores: coexposições e desfechos substitutos.</a:t>
+              <a:t>Não rebaixada na prevalência: o sintoma autorrelatado é o próprio desfecho. Rebaixada nos biomarcadores: coexposições e desfechos substitutos.</a:t>
             </a:r>
           </a:p>
         </p:txBody>
@@ -7549,13 +7560,13 @@
               <a:buNone/>
             </a:pPr>
             <a:r>
-              <a:rPr sz="1500" b="0" i="0">
+              <a:rPr sz="1600" b="0" i="0">
                 <a:solidFill>
                   <a:srgbClr val="1F2433"/>
                 </a:solidFill>
                 <a:latin typeface="Arial"/>
               </a:rPr>
-              <a:t>Amplitude do IC95% (ex.: 21,9–56,5) ou ausência de IC no estudo original; poucos eventos nos desfechos objetivos.</a:t>
+              <a:t>IC95% amplo (ex.: 21,9–56,5) ou ausente no estudo original; poucos eventos nos desfechos objetivos.</a:t>
             </a:r>
           </a:p>
         </p:txBody>
@@ -7717,13 +7728,13 @@
               <a:buNone/>
             </a:pPr>
             <a:r>
-              <a:rPr sz="1500" b="0" i="0">
+              <a:rPr sz="1600" b="0" i="0">
                 <a:solidFill>
                   <a:srgbClr val="1F2433"/>
                 </a:solidFill>
                 <a:latin typeface="Arial"/>
               </a:rPr>
-              <a:t>Apreciação qualitativa: busca ampla, mas poucos estudos, amostras pequenas e 6 relatórios não recuperados → não excluível, sem base formal para rebaixar.</a:t>
+              <a:t>Apreciação qualitativa: busca ampla, mas poucos estudos pequenos e 6 relatórios não recuperados → não excluível, sem base formal para rebaixar.</a:t>
             </a:r>
           </a:p>
         </p:txBody>
@@ -8089,7 +8100,7 @@
               <a:buChar char="•"/>
             </a:pPr>
             <a:r>
-              <a:rPr sz="1500" b="0" i="0">
+              <a:rPr sz="1600" b="0" i="0">
                 <a:solidFill>
                   <a:srgbClr val="1F2433"/>
                 </a:solidFill>
@@ -8113,7 +8124,7 @@
               <a:buChar char="•"/>
             </a:pPr>
             <a:r>
-              <a:rPr sz="1500" b="0" i="0">
+              <a:rPr sz="1600" b="0" i="0">
                 <a:solidFill>
                   <a:srgbClr val="1F2433"/>
                 </a:solidFill>
@@ -8137,7 +8148,7 @@
               <a:buChar char="•"/>
             </a:pPr>
             <a:r>
-              <a:rPr sz="1500" b="0" i="0">
+              <a:rPr sz="1600" b="0" i="0">
                 <a:solidFill>
                   <a:srgbClr val="1F2433"/>
                 </a:solidFill>
@@ -8161,7 +8172,7 @@
               <a:buChar char="•"/>
             </a:pPr>
             <a:r>
-              <a:rPr sz="1500" b="0" i="0">
+              <a:rPr sz="1600" b="0" i="0">
                 <a:solidFill>
                   <a:srgbClr val="1F2433"/>
                 </a:solidFill>
@@ -8185,7 +8196,7 @@
               <a:buChar char="•"/>
             </a:pPr>
             <a:r>
-              <a:rPr sz="1500" b="0" i="0">
+              <a:rPr sz="1600" b="0" i="0">
                 <a:solidFill>
                   <a:srgbClr val="1F2433"/>
                 </a:solidFill>
@@ -8439,7 +8450,7 @@
               <a:buNone/>
             </a:pPr>
             <a:r>
-              <a:rPr sz="1400" b="1" i="0">
+              <a:rPr sz="1500" b="1" i="0">
                 <a:solidFill>
                   <a:srgbClr val="1F2433"/>
                 </a:solidFill>
@@ -8459,13 +8470,13 @@
               <a:buNone/>
             </a:pPr>
             <a:r>
-              <a:rPr sz="1400" b="0" i="0">
+              <a:rPr sz="1500" b="0" i="0">
                 <a:solidFill>
                   <a:srgbClr val="1F2433"/>
                 </a:solidFill>
                 <a:latin typeface="Arial"/>
               </a:rPr>
-              <a:t>Bases eletrônicas: 16.707 · Literatura cinzenta: 50</a:t>
+              <a:t>Bases eletrônicas: 16.707 · Cinzenta: 50</a:t>
             </a:r>
           </a:p>
         </p:txBody>
@@ -8532,7 +8543,7 @@
               <a:buNone/>
             </a:pPr>
             <a:r>
-              <a:rPr sz="1300" b="1" i="0">
+              <a:rPr sz="1400" b="1" i="0">
                 <a:solidFill>
                   <a:srgbClr val="1F2433"/>
                 </a:solidFill>
@@ -8552,7 +8563,7 @@
               <a:buNone/>
             </a:pPr>
             <a:r>
-              <a:rPr sz="1300" b="0" i="0">
+              <a:rPr sz="1400" b="0" i="0">
                 <a:solidFill>
                   <a:srgbClr val="1F2433"/>
                 </a:solidFill>
@@ -8669,7 +8680,7 @@
               <a:buNone/>
             </a:pPr>
             <a:r>
-              <a:rPr sz="1400" b="0" i="0">
+              <a:rPr sz="1500" b="0" i="0">
                 <a:solidFill>
                   <a:srgbClr val="1F2433"/>
                 </a:solidFill>
@@ -8689,7 +8700,7 @@
               <a:buNone/>
             </a:pPr>
             <a:r>
-              <a:rPr sz="1400" b="1" i="0">
+              <a:rPr sz="1500" b="1" i="0">
                 <a:solidFill>
                   <a:srgbClr val="1F2433"/>
                 </a:solidFill>
@@ -8784,7 +8795,7 @@
               <a:buNone/>
             </a:pPr>
             <a:r>
-              <a:rPr sz="1400" b="1" i="0">
+              <a:rPr sz="1500" b="1" i="0">
                 <a:solidFill>
                   <a:srgbClr val="1F2433"/>
                 </a:solidFill>
@@ -8804,13 +8815,13 @@
               <a:buNone/>
             </a:pPr>
             <a:r>
-              <a:rPr sz="1400" b="0" i="0">
+              <a:rPr sz="1500" b="0" i="0">
                 <a:solidFill>
                   <a:srgbClr val="1F2433"/>
                 </a:solidFill>
                 <a:latin typeface="Arial"/>
               </a:rPr>
-              <a:t>revisor único; IA só ordenou a leitura</a:t>
+              <a:t>revisor único; IA como apoio operacional</a:t>
             </a:r>
           </a:p>
         </p:txBody>
@@ -8877,7 +8888,7 @@
               <a:buNone/>
             </a:pPr>
             <a:r>
-              <a:rPr sz="1300" b="1" i="0">
+              <a:rPr sz="1400" b="1" i="0">
                 <a:solidFill>
                   <a:srgbClr val="1F2433"/>
                 </a:solidFill>
@@ -8897,7 +8908,7 @@
               <a:buNone/>
             </a:pPr>
             <a:r>
-              <a:rPr sz="1300" b="0" i="0">
+              <a:rPr sz="1400" b="0" i="0">
                 <a:solidFill>
                   <a:srgbClr val="1F2433"/>
                 </a:solidFill>
@@ -9014,7 +9025,7 @@
               <a:buNone/>
             </a:pPr>
             <a:r>
-              <a:rPr sz="1400" b="1" i="0">
+              <a:rPr sz="1500" b="1" i="0">
                 <a:solidFill>
                   <a:srgbClr val="1F2433"/>
                 </a:solidFill>
@@ -9034,7 +9045,7 @@
               <a:buNone/>
             </a:pPr>
             <a:r>
-              <a:rPr sz="1400" b="0" i="0">
+              <a:rPr sz="1500" b="0" i="0">
                 <a:solidFill>
                   <a:srgbClr val="1F2433"/>
                 </a:solidFill>
@@ -9107,7 +9118,7 @@
               <a:buNone/>
             </a:pPr>
             <a:r>
-              <a:rPr sz="1300" b="1" i="0">
+              <a:rPr sz="1400" b="1" i="0">
                 <a:solidFill>
                   <a:srgbClr val="1F2433"/>
                 </a:solidFill>
@@ -9127,7 +9138,7 @@
               <a:buNone/>
             </a:pPr>
             <a:r>
-              <a:rPr sz="1300" b="0" i="0">
+              <a:rPr sz="1400" b="0" i="0">
                 <a:solidFill>
                   <a:srgbClr val="1F2433"/>
                 </a:solidFill>
@@ -9244,7 +9255,7 @@
               <a:buNone/>
             </a:pPr>
             <a:r>
-              <a:rPr sz="1400" b="1" i="0">
+              <a:rPr sz="1500" b="1" i="0">
                 <a:solidFill>
                   <a:srgbClr val="1F2433"/>
                 </a:solidFill>
@@ -9317,7 +9328,7 @@
               <a:buNone/>
             </a:pPr>
             <a:r>
-              <a:rPr sz="1300" b="1" i="0">
+              <a:rPr sz="1400" b="1" i="0">
                 <a:solidFill>
                   <a:srgbClr val="1F2433"/>
                 </a:solidFill>
@@ -9337,7 +9348,7 @@
               <a:buNone/>
             </a:pPr>
             <a:r>
-              <a:rPr sz="1300" b="0" i="0">
+              <a:rPr sz="1400" b="0" i="0">
                 <a:solidFill>
                   <a:srgbClr val="1F2433"/>
                 </a:solidFill>
@@ -9474,7 +9485,7 @@
               <a:buNone/>
             </a:pPr>
             <a:r>
-              <a:rPr sz="1400" b="0" i="0">
+              <a:rPr sz="1500" b="0" i="0">
                 <a:solidFill>
                   <a:srgbClr val="1F2433"/>
                 </a:solidFill>
@@ -9494,7 +9505,7 @@
               <a:buNone/>
             </a:pPr>
             <a:r>
-              <a:rPr sz="1400" b="0" i="0">
+              <a:rPr sz="1500" b="0" i="0">
                 <a:solidFill>
                   <a:srgbClr val="1F2433"/>
                 </a:solidFill>
@@ -9709,13 +9720,13 @@
               <a:buNone/>
             </a:pPr>
             <a:r>
-              <a:rPr sz="1200" b="0" i="0">
+              <a:rPr sz="1300" b="0" i="0">
                 <a:solidFill>
                   <a:srgbClr val="5A6270"/>
                 </a:solidFill>
                 <a:latin typeface="Arial"/>
               </a:rPr>
-              <a:t>Fluxograma PRISMA 2020 (Figura 1 do manuscrito); lista dos não recuperados e dos excluídos no Anexo C.</a:t>
+              <a:t>Fluxograma PRISMA 2020 (Figura 1 do manuscrito); não recuperados e excluídos listados no Anexo C.</a:t>
             </a:r>
           </a:p>
         </p:txBody>
@@ -9825,7 +9836,7 @@
               <a:buNone/>
             </a:pPr>
             <a:r>
-              <a:rPr sz="1400" b="0" i="0">
+              <a:rPr sz="1500" b="0" i="0">
                 <a:solidFill>
                   <a:srgbClr val="5A6270"/>
                 </a:solidFill>
@@ -9941,7 +9952,7 @@
               <a:buNone/>
             </a:pPr>
             <a:r>
-              <a:rPr sz="1300" b="0" i="0">
+              <a:rPr sz="1400" b="0" i="0">
                 <a:solidFill>
                   <a:srgbClr val="5A6270"/>
                 </a:solidFill>
@@ -10057,7 +10068,7 @@
               <a:buNone/>
             </a:pPr>
             <a:r>
-              <a:rPr sz="1300" b="0" i="0">
+              <a:rPr sz="1400" b="0" i="0">
                 <a:solidFill>
                   <a:srgbClr val="5A6270"/>
                 </a:solidFill>
@@ -10173,7 +10184,7 @@
               <a:buNone/>
             </a:pPr>
             <a:r>
-              <a:rPr sz="1300" b="0" i="0">
+              <a:rPr sz="1400" b="0" i="0">
                 <a:solidFill>
                   <a:srgbClr val="5A6270"/>
                 </a:solidFill>
@@ -10336,28 +10347,28 @@
                 <a:spcPct val="100000"/>
               </a:lnSpc>
               <a:spcAft>
-                <a:spcPts val="500"/>
+                <a:spcPts val="600"/>
               </a:spcAft>
               <a:buFont typeface="Arial"/>
               <a:buChar char="•"/>
             </a:pPr>
             <a:r>
-              <a:rPr sz="1400" b="1" i="0">
+              <a:rPr sz="1500" b="1" i="0">
                 <a:solidFill>
                   <a:srgbClr val="1F2433"/>
                 </a:solidFill>
                 <a:latin typeface="Arial"/>
               </a:rPr>
-              <a:t>Estimativas de prevalência: </a:t>
-            </a:r>
-            <a:r>
-              <a:rPr sz="1400" b="0" i="0">
+              <a:t>Prevalência: </a:t>
+            </a:r>
+            <a:r>
+              <a:rPr sz="1500" b="0" i="0">
                 <a:solidFill>
                   <a:srgbClr val="1F2433"/>
                 </a:solidFill>
                 <a:latin typeface="Arial"/>
               </a:rPr>
-              <a:t>preocupação moderada a alta: amostragem não probabilística, tamanho amostral não justificado, taxa de resposta não informada, sintomas autorrelatados. Só Mohd Fikri Rosely e Titi Rahmawati (2019) usaram amostragem aleatória estratificada.</a:t>
+              <a:t>preocupação moderada a alta (amostragem não probabilística, tamanho amostral não justificado, taxa de resposta não informada, autorrelato). Só Mohd Fikri Rosely e Titi Rahmawati (2019) usaram amostragem aleatória estratificada.</a:t>
             </a:r>
           </a:p>
           <a:p>
@@ -10366,22 +10377,22 @@
                 <a:spcPct val="100000"/>
               </a:lnSpc>
               <a:spcAft>
-                <a:spcPts val="500"/>
+                <a:spcPts val="600"/>
               </a:spcAft>
               <a:buFont typeface="Arial"/>
               <a:buChar char="•"/>
             </a:pPr>
             <a:r>
-              <a:rPr sz="1400" b="1" i="0">
+              <a:rPr sz="1500" b="1" i="0">
                 <a:solidFill>
                   <a:srgbClr val="1F2433"/>
                 </a:solidFill>
                 <a:latin typeface="Arial"/>
               </a:rPr>
-              <a:t>Resumo de congresso (Mohd Fikri Rosely, 2022): </a:t>
-            </a:r>
-            <a:r>
-              <a:rPr sz="1400" b="0" i="0">
+              <a:t>Resumo de congresso (2022): </a:t>
+            </a:r>
+            <a:r>
+              <a:rPr sz="1500" b="0" i="0">
                 <a:solidFill>
                   <a:srgbClr val="1F2433"/>
                 </a:solidFill>
@@ -10396,28 +10407,28 @@
                 <a:spcPct val="100000"/>
               </a:lnSpc>
               <a:spcAft>
-                <a:spcPts val="500"/>
+                <a:spcPts val="600"/>
               </a:spcAft>
               <a:buFont typeface="Arial"/>
               <a:buChar char="•"/>
             </a:pPr>
             <a:r>
-              <a:rPr sz="1400" b="1" i="0">
+              <a:rPr sz="1500" b="1" i="0">
                 <a:solidFill>
                   <a:srgbClr val="1F2433"/>
                 </a:solidFill>
                 <a:latin typeface="Arial"/>
               </a:rPr>
-              <a:t>Comparativos e desfechos objetivos (HPV-DNA, biópsia, biomarcadores, espirometria): </a:t>
-            </a:r>
-            <a:r>
-              <a:rPr sz="1400" b="0" i="0">
+              <a:t>Comparativos e desfechos objetivos: </a:t>
+            </a:r>
+            <a:r>
+              <a:rPr sz="1500" b="0" i="0">
                 <a:solidFill>
                   <a:srgbClr val="1F2433"/>
                 </a:solidFill>
                 <a:latin typeface="Arial"/>
               </a:rPr>
-              <a:t>preocupação moderada: mensuração da exposição por ocupação, sem estimativas ajustadas, controle insuficiente de confundidores.</a:t>
+              <a:t>preocupação moderada: exposição medida pela ocupação, sem estimativas ajustadas, confundidores pouco controlados.</a:t>
             </a:r>
           </a:p>
           <a:p>
@@ -10426,22 +10437,22 @@
                 <a:spcPct val="100000"/>
               </a:lnSpc>
               <a:spcAft>
-                <a:spcPts val="500"/>
+                <a:spcPts val="600"/>
               </a:spcAft>
               <a:buFont typeface="Arial"/>
               <a:buChar char="•"/>
             </a:pPr>
             <a:r>
-              <a:rPr sz="1400" b="1" i="0">
+              <a:rPr sz="1500" b="1" i="0">
                 <a:solidFill>
                   <a:srgbClr val="8B0000"/>
                 </a:solidFill>
                 <a:latin typeface="Arial"/>
               </a:rPr>
-              <a:t>Nenhum estudo alcançou preocupação baixa </a:t>
-            </a:r>
-            <a:r>
-              <a:rPr sz="1400" b="0" i="0">
+              <a:t>Nenhum estudo com preocupação baixa </a:t>
+            </a:r>
+            <a:r>
+              <a:rPr sz="1500" b="0" i="0">
                 <a:solidFill>
                   <a:srgbClr val="1F2433"/>
                 </a:solidFill>
@@ -10689,7 +10700,7 @@
               <a:buNone/>
             </a:pPr>
             <a:r>
-              <a:rPr sz="1300" b="1" i="0">
+              <a:rPr sz="1400" b="1" i="0">
                 <a:solidFill>
                   <a:srgbClr val="5A6270"/>
                 </a:solidFill>
@@ -10698,13 +10709,13 @@
               <a:t>Figura 2. </a:t>
             </a:r>
             <a:r>
-              <a:rPr sz="1300" b="0" i="0">
+              <a:rPr sz="1400" b="0" i="0">
                 <a:solidFill>
                   <a:srgbClr val="5A6270"/>
                 </a:solidFill>
                 <a:latin typeface="Arial"/>
               </a:rPr>
-              <a:t>Modelo logito com Paule-Mandel e ajuste de Hartung-Knapp. Quadrado = prevalência do estudo (tamanho ∝ peso); linha preta = IC95% de Wilson; losango = estimativa combinada; linha vermelha = intervalo de predição; tracejado = estimativa combinada.</a:t>
+              <a:t>Modelo logito, Paule-Mandel e Hartung-Knapp. Quadrado = prevalência do estudo (tamanho ∝ peso); linha preta = IC95% de Wilson; losango = estimativa combinada; linha vermelha = intervalo de predição.</a:t>
             </a:r>
           </a:p>
         </p:txBody>
@@ -10771,7 +10782,7 @@
               <a:buNone/>
             </a:pPr>
             <a:r>
-              <a:rPr sz="1500" b="1" i="0">
+              <a:rPr sz="1600" b="1" i="0">
                 <a:solidFill>
                   <a:srgbClr val="002060"/>
                 </a:solidFill>
@@ -10780,22 +10791,22 @@
               <a:t>Como ler: </a:t>
             </a:r>
             <a:r>
-              <a:rPr sz="1500" b="0" i="0">
+              <a:rPr sz="1600" b="0" i="0">
                 <a:solidFill>
                   <a:srgbClr val="1F2433"/>
                 </a:solidFill>
                 <a:latin typeface="Arial"/>
               </a:rPr>
-              <a:t>cerca de 4 em cada 10 profissionais relataram irritação ou lacrimejamento ocular; mas os estudos variam de 19% (Malásia) a 56% (Turquia), e um novo estudo poderia encontrar qualquer valor entre 7% e 83%. </a:t>
-            </a:r>
-            <a:r>
-              <a:rPr sz="1500" b="0" i="0">
+              <a:t>cerca de 4 em cada 10 profissionais relataram irritação ou lacrimejamento ocular; os estudos variam de 19% (Malásia) a 56% (Turquia), e um novo estudo poderia encontrar qualquer valor entre 7% e 83%. </a:t>
+            </a:r>
+            <a:r>
+              <a:rPr sz="1600" b="0" i="0">
                 <a:solidFill>
                   <a:srgbClr val="5A6270"/>
                 </a:solidFill>
                 <a:latin typeface="Arial"/>
               </a:rPr>
-              <a:t>A estimativa é a proporção que relatou o sintoma segundo a definição de cada estudo, não uma prevalência temporalmente homogênea.</a:t>
+              <a:t>É a proporção que relatou o sintoma segundo a definição de cada estudo, não uma prevalência com recordatório homogêneo.</a:t>
             </a:r>
           </a:p>
         </p:txBody>
@@ -10838,8 +10849,8 @@
         </p:nvSpPr>
         <p:spPr>
           <a:xfrm>
-            <a:off x="12893040" y="1874519"/>
-            <a:ext cx="4663440" cy="1097280"/>
+            <a:off x="12893040" y="1828800"/>
+            <a:ext cx="4663440" cy="1188720"/>
           </a:xfrm>
           <a:prstGeom prst="rect">
             <a:avLst/>
@@ -10862,7 +10873,7 @@
               <a:buNone/>
             </a:pPr>
             <a:r>
-              <a:rPr sz="6600" b="1" i="0">
+              <a:rPr sz="7200" b="1" i="0">
                 <a:solidFill>
                   <a:srgbClr val="8B0000"/>
                 </a:solidFill>
@@ -10881,8 +10892,8 @@
         </p:nvSpPr>
         <p:spPr>
           <a:xfrm>
-            <a:off x="12893040" y="2990088"/>
-            <a:ext cx="4663440" cy="731520"/>
+            <a:off x="12893040" y="3035808"/>
+            <a:ext cx="4663440" cy="640080"/>
           </a:xfrm>
           <a:prstGeom prst="rect">
             <a:avLst/>
@@ -10924,8 +10935,8 @@
         </p:nvSpPr>
         <p:spPr>
           <a:xfrm>
-            <a:off x="12893040" y="3657600"/>
-            <a:ext cx="4663440" cy="1737360"/>
+            <a:off x="12893040" y="3703320"/>
+            <a:ext cx="4663440" cy="1691640"/>
           </a:xfrm>
           <a:prstGeom prst="rect">
             <a:avLst/>
@@ -11117,13 +11128,13 @@
                 <a:spcPct val="100000"/>
               </a:lnSpc>
               <a:spcAft>
-                <a:spcPts val="500"/>
+                <a:spcPts val="600"/>
               </a:spcAft>
               <a:buFont typeface="Arial"/>
               <a:buChar char="•"/>
             </a:pPr>
             <a:r>
-              <a:rPr sz="1400" b="0" i="0">
+              <a:rPr sz="1500" b="0" i="0">
                 <a:solidFill>
                   <a:srgbClr val="1F2433"/>
                 </a:solidFill>
@@ -11138,19 +11149,19 @@
                 <a:spcPct val="100000"/>
               </a:lnSpc>
               <a:spcAft>
-                <a:spcPts val="500"/>
+                <a:spcPts val="600"/>
               </a:spcAft>
               <a:buFont typeface="Arial"/>
               <a:buChar char="•"/>
             </a:pPr>
             <a:r>
-              <a:rPr sz="1400" b="0" i="0">
+              <a:rPr sz="1500" b="0" i="0">
                 <a:solidFill>
                   <a:srgbClr val="1F2433"/>
                 </a:solidFill>
                 <a:latin typeface="Arial"/>
               </a:rPr>
-              <a:t>Preocupação com viés moderada ou alta em todos; nenhum com preocupação baixa.</a:t>
+              <a:t>Preocupação com viés moderada ou alta em todos.</a:t>
             </a:r>
           </a:p>
           <a:p>
@@ -11159,19 +11170,19 @@
                 <a:spcPct val="100000"/>
               </a:lnSpc>
               <a:spcAft>
-                <a:spcPts val="500"/>
+                <a:spcPts val="600"/>
               </a:spcAft>
               <a:buFont typeface="Arial"/>
               <a:buChar char="•"/>
             </a:pPr>
             <a:r>
-              <a:rPr sz="1400" b="0" i="0">
+              <a:rPr sz="1500" b="0" i="0">
                 <a:solidFill>
                   <a:srgbClr val="1F2433"/>
                 </a:solidFill>
                 <a:latin typeface="Arial"/>
               </a:rPr>
-              <a:t>Definições: lacrimejamento, irritação ocular ou escala de sintomas do sistema ocular.</a:t>
+              <a:t>Definições: lacrimejamento, irritação ocular ou escala do sistema ocular.</a:t>
             </a:r>
           </a:p>
           <a:p>
@@ -11180,19 +11191,19 @@
                 <a:spcPct val="100000"/>
               </a:lnSpc>
               <a:spcAft>
-                <a:spcPts val="500"/>
+                <a:spcPts val="600"/>
               </a:spcAft>
               <a:buFont typeface="Arial"/>
               <a:buChar char="•"/>
             </a:pPr>
             <a:r>
-              <a:rPr sz="1400" b="0" i="0">
+              <a:rPr sz="1500" b="0" i="0">
                 <a:solidFill>
                   <a:srgbClr val="1F2433"/>
                 </a:solidFill>
                 <a:latin typeface="Arial"/>
               </a:rPr>
-              <a:t>Maior inquérito elegível (Van Giersbergen 2019, n = 672) não entrou: sem numerador/denominador ocular extraível.</a:t>
+              <a:t>O maior inquérito (Van Giersbergen 2019, n = 672) não entrou: sem numerador e denominador ocular extraíveis.</a:t>
             </a:r>
           </a:p>
         </p:txBody>
@@ -11434,7 +11445,7 @@
               <a:buNone/>
             </a:pPr>
             <a:r>
-              <a:rPr sz="1300" b="1" i="0">
+              <a:rPr sz="1400" b="1" i="0">
                 <a:solidFill>
                   <a:srgbClr val="5A6270"/>
                 </a:solidFill>
@@ -11443,7 +11454,7 @@
               <a:t>Figura 3. </a:t>
             </a:r>
             <a:r>
-              <a:rPr sz="1300" b="0" i="0">
+              <a:rPr sz="1400" b="0" i="0">
                 <a:solidFill>
                   <a:srgbClr val="5A6270"/>
                 </a:solidFill>
@@ -11516,7 +11527,7 @@
               <a:buNone/>
             </a:pPr>
             <a:r>
-              <a:rPr sz="1400" b="1" i="0">
+              <a:rPr sz="1500" b="1" i="0">
                 <a:solidFill>
                   <a:srgbClr val="002060"/>
                 </a:solidFill>
@@ -11536,7 +11547,7 @@
               <a:buNone/>
             </a:pPr>
             <a:r>
-              <a:rPr sz="1400" b="1" i="0">
+              <a:rPr sz="1500" b="1" i="0">
                 <a:solidFill>
                   <a:srgbClr val="8B0000"/>
                 </a:solidFill>
@@ -11545,7 +11556,7 @@
               <a:t>Turquia 50,5% </a:t>
             </a:r>
             <a:r>
-              <a:rPr sz="1400" b="0" i="0">
+              <a:rPr sz="1500" b="0" i="0">
                 <a:solidFill>
                   <a:srgbClr val="1F2433"/>
                 </a:solidFill>
@@ -11554,7 +11565,7 @@
               <a:t>(k = 3; n = 268; I² = 57%)   ·   </a:t>
             </a:r>
             <a:r>
-              <a:rPr sz="1400" b="1" i="0">
+              <a:rPr sz="1500" b="1" i="0">
                 <a:solidFill>
                   <a:srgbClr val="8B0000"/>
                 </a:solidFill>
@@ -11563,7 +11574,7 @@
               <a:t>Malásia 19,8% </a:t>
             </a:r>
             <a:r>
-              <a:rPr sz="1400" b="0" i="0">
+              <a:rPr sz="1500" b="0" i="0">
                 <a:solidFill>
                   <a:srgbClr val="1F2433"/>
                 </a:solidFill>
@@ -11583,7 +11594,7 @@
               <a:buNone/>
             </a:pPr>
             <a:r>
-              <a:rPr sz="1400" b="1" i="0">
+              <a:rPr sz="1500" b="1" i="0">
                 <a:solidFill>
                   <a:srgbClr val="1F2433"/>
                 </a:solidFill>
@@ -11592,7 +11603,7 @@
               <a:t>Brasil 43,2% </a:t>
             </a:r>
             <a:r>
-              <a:rPr sz="1400" b="0" i="0">
+              <a:rPr sz="1500" b="0" i="0">
                 <a:solidFill>
                   <a:srgbClr val="1F2433"/>
                 </a:solidFill>
@@ -11612,7 +11623,7 @@
               <a:buNone/>
             </a:pPr>
             <a:r>
-              <a:rPr sz="1400" b="1" i="0">
+              <a:rPr sz="1500" b="1" i="0">
                 <a:solidFill>
                   <a:srgbClr val="1F2433"/>
                 </a:solidFill>
@@ -11621,7 +11632,7 @@
               <a:t>Teste entre subgrupos p &lt; 0,001, mas: </a:t>
             </a:r>
             <a:r>
-              <a:rPr sz="1400" b="0" i="0">
+              <a:rPr sz="1500" b="0" i="0">
                 <a:solidFill>
                   <a:srgbClr val="1F2433"/>
                 </a:solidFill>
@@ -11891,7 +11902,7 @@
         </p:nvGraphicFramePr>
         <p:xfrm>
           <a:off x="10835640" y="4526280"/>
-          <a:ext cx="6949440" cy="2688336"/>
+          <a:ext cx="6949440" cy="2816352"/>
         </p:xfrm>
         <a:graphic>
           <a:graphicData uri="http://schemas.openxmlformats.org/drawingml/2006/table">
@@ -11902,7 +11913,7 @@
                 <a:gridCol w="1417320"/>
                 <a:gridCol w="1600200"/>
               </a:tblGrid>
-              <a:tr h="384048">
+              <a:tr h="402336">
                 <a:tc>
                   <a:txBody>
                     <a:bodyPr wrap="square">
@@ -11920,7 +11931,7 @@
                         <a:buNone/>
                       </a:pPr>
                       <a:r>
-                        <a:rPr sz="1300" b="1" i="0">
+                        <a:rPr sz="1400" b="1" i="0">
                           <a:solidFill>
                             <a:srgbClr val="FFFFFF"/>
                           </a:solidFill>
@@ -11953,7 +11964,7 @@
                         <a:buNone/>
                       </a:pPr>
                       <a:r>
-                        <a:rPr sz="1300" b="1" i="0">
+                        <a:rPr sz="1400" b="1" i="0">
                           <a:solidFill>
                             <a:srgbClr val="FFFFFF"/>
                           </a:solidFill>
@@ -11986,7 +11997,7 @@
                         <a:buNone/>
                       </a:pPr>
                       <a:r>
-                        <a:rPr sz="1300" b="1" i="0">
+                        <a:rPr sz="1400" b="1" i="0">
                           <a:solidFill>
                             <a:srgbClr val="FFFFFF"/>
                           </a:solidFill>
@@ -12003,7 +12014,7 @@
                   </a:tcPr>
                 </a:tc>
               </a:tr>
-              <a:tr h="384048">
+              <a:tr h="402336">
                 <a:tc>
                   <a:txBody>
                     <a:bodyPr wrap="square">
@@ -12021,7 +12032,7 @@
                         <a:buNone/>
                       </a:pPr>
                       <a:r>
-                        <a:rPr sz="1300" b="1" i="0">
+                        <a:rPr sz="1400" b="1" i="0">
                           <a:solidFill>
                             <a:srgbClr val="1F2433"/>
                           </a:solidFill>
@@ -12054,7 +12065,7 @@
                         <a:buNone/>
                       </a:pPr>
                       <a:r>
-                        <a:rPr sz="1300" b="1" i="0">
+                        <a:rPr sz="1400" b="1" i="0">
                           <a:solidFill>
                             <a:srgbClr val="1F2433"/>
                           </a:solidFill>
@@ -12087,7 +12098,7 @@
                         <a:buNone/>
                       </a:pPr>
                       <a:r>
-                        <a:rPr sz="1300" b="1" i="0">
+                        <a:rPr sz="1400" b="1" i="0">
                           <a:solidFill>
                             <a:srgbClr val="1F2433"/>
                           </a:solidFill>
@@ -12104,7 +12115,7 @@
                   </a:tcPr>
                 </a:tc>
               </a:tr>
-              <a:tr h="384048">
+              <a:tr h="402336">
                 <a:tc>
                   <a:txBody>
                     <a:bodyPr wrap="square">
@@ -12122,7 +12133,7 @@
                         <a:buNone/>
                       </a:pPr>
                       <a:r>
-                        <a:rPr sz="1300" b="0" i="0">
+                        <a:rPr sz="1400" b="0" i="0">
                           <a:solidFill>
                             <a:srgbClr val="1F2433"/>
                           </a:solidFill>
@@ -12155,7 +12166,7 @@
                         <a:buNone/>
                       </a:pPr>
                       <a:r>
-                        <a:rPr sz="1300" b="0" i="0">
+                        <a:rPr sz="1400" b="0" i="0">
                           <a:solidFill>
                             <a:srgbClr val="1F2433"/>
                           </a:solidFill>
@@ -12188,7 +12199,7 @@
                         <a:buNone/>
                       </a:pPr>
                       <a:r>
-                        <a:rPr sz="1300" b="0" i="0">
+                        <a:rPr sz="1400" b="0" i="0">
                           <a:solidFill>
                             <a:srgbClr val="1F2433"/>
                           </a:solidFill>
@@ -12205,7 +12216,7 @@
                   </a:tcPr>
                 </a:tc>
               </a:tr>
-              <a:tr h="384048">
+              <a:tr h="402336">
                 <a:tc>
                   <a:txBody>
                     <a:bodyPr wrap="square">
@@ -12223,7 +12234,7 @@
                         <a:buNone/>
                       </a:pPr>
                       <a:r>
-                        <a:rPr sz="1300" b="0" i="0">
+                        <a:rPr sz="1400" b="0" i="0">
                           <a:solidFill>
                             <a:srgbClr val="1F2433"/>
                           </a:solidFill>
@@ -12256,7 +12267,7 @@
                         <a:buNone/>
                       </a:pPr>
                       <a:r>
-                        <a:rPr sz="1300" b="0" i="0">
+                        <a:rPr sz="1400" b="0" i="0">
                           <a:solidFill>
                             <a:srgbClr val="1F2433"/>
                           </a:solidFill>
@@ -12289,7 +12300,7 @@
                         <a:buNone/>
                       </a:pPr>
                       <a:r>
-                        <a:rPr sz="1300" b="0" i="0">
+                        <a:rPr sz="1400" b="0" i="0">
                           <a:solidFill>
                             <a:srgbClr val="1F2433"/>
                           </a:solidFill>
@@ -12306,7 +12317,7 @@
                   </a:tcPr>
                 </a:tc>
               </a:tr>
-              <a:tr h="384048">
+              <a:tr h="402336">
                 <a:tc>
                   <a:txBody>
                     <a:bodyPr wrap="square">
@@ -12324,7 +12335,7 @@
                         <a:buNone/>
                       </a:pPr>
                       <a:r>
-                        <a:rPr sz="1300" b="0" i="0">
+                        <a:rPr sz="1400" b="0" i="0">
                           <a:solidFill>
                             <a:srgbClr val="1F2433"/>
                           </a:solidFill>
@@ -12357,7 +12368,7 @@
                         <a:buNone/>
                       </a:pPr>
                       <a:r>
-                        <a:rPr sz="1300" b="0" i="0">
+                        <a:rPr sz="1400" b="0" i="0">
                           <a:solidFill>
                             <a:srgbClr val="1F2433"/>
                           </a:solidFill>
@@ -12390,7 +12401,7 @@
                         <a:buNone/>
                       </a:pPr>
                       <a:r>
-                        <a:rPr sz="1300" b="0" i="0">
+                        <a:rPr sz="1400" b="0" i="0">
                           <a:solidFill>
                             <a:srgbClr val="1F2433"/>
                           </a:solidFill>
@@ -12407,7 +12418,7 @@
                   </a:tcPr>
                 </a:tc>
               </a:tr>
-              <a:tr h="384048">
+              <a:tr h="402336">
                 <a:tc>
                   <a:txBody>
                     <a:bodyPr wrap="square">
@@ -12425,7 +12436,7 @@
                         <a:buNone/>
                       </a:pPr>
                       <a:r>
-                        <a:rPr sz="1300" b="0" i="0">
+                        <a:rPr sz="1400" b="0" i="0">
                           <a:solidFill>
                             <a:srgbClr val="1F2433"/>
                           </a:solidFill>
@@ -12458,7 +12469,7 @@
                         <a:buNone/>
                       </a:pPr>
                       <a:r>
-                        <a:rPr sz="1300" b="0" i="0">
+                        <a:rPr sz="1400" b="0" i="0">
                           <a:solidFill>
                             <a:srgbClr val="1F2433"/>
                           </a:solidFill>
@@ -12491,7 +12502,7 @@
                         <a:buNone/>
                       </a:pPr>
                       <a:r>
-                        <a:rPr sz="1300" b="0" i="0">
+                        <a:rPr sz="1400" b="0" i="0">
                           <a:solidFill>
                             <a:srgbClr val="1F2433"/>
                           </a:solidFill>
@@ -12508,7 +12519,7 @@
                   </a:tcPr>
                 </a:tc>
               </a:tr>
-              <a:tr h="384048">
+              <a:tr h="402336">
                 <a:tc>
                   <a:txBody>
                     <a:bodyPr wrap="square">
@@ -12526,7 +12537,7 @@
                         <a:buNone/>
                       </a:pPr>
                       <a:r>
-                        <a:rPr sz="1300" b="0" i="0">
+                        <a:rPr sz="1400" b="0" i="0">
                           <a:solidFill>
                             <a:srgbClr val="1F2433"/>
                           </a:solidFill>
@@ -12559,7 +12570,7 @@
                         <a:buNone/>
                       </a:pPr>
                       <a:r>
-                        <a:rPr sz="1300" b="0" i="0">
+                        <a:rPr sz="1400" b="0" i="0">
                           <a:solidFill>
                             <a:srgbClr val="1F2433"/>
                           </a:solidFill>
@@ -12592,7 +12603,7 @@
                         <a:buNone/>
                       </a:pPr>
                       <a:r>
-                        <a:rPr sz="1300" b="0" i="0">
+                        <a:rPr sz="1400" b="0" i="0">
                           <a:solidFill>
                             <a:srgbClr val="1F2433"/>
                           </a:solidFill>
@@ -12621,8 +12632,8 @@
         </p:nvSpPr>
         <p:spPr>
           <a:xfrm>
-            <a:off x="10835640" y="7269480"/>
-            <a:ext cx="6949440" cy="457200"/>
+            <a:off x="10835640" y="7388352"/>
+            <a:ext cx="6949440" cy="411480"/>
           </a:xfrm>
           <a:prstGeom prst="rect">
             <a:avLst/>
@@ -12645,7 +12656,7 @@
               <a:buNone/>
             </a:pPr>
             <a:r>
-              <a:rPr sz="1300" b="1" i="0">
+              <a:rPr sz="1400" b="1" i="0">
                 <a:solidFill>
                   <a:srgbClr val="1F2433"/>
                 </a:solidFill>
@@ -12654,7 +12665,7 @@
               <a:t>Sem o estudo de definição mais divergente (Van Giersbergen 2019): </a:t>
             </a:r>
             <a:r>
-              <a:rPr sz="1300" b="0" i="0">
+              <a:rPr sz="1400" b="0" i="0">
                 <a:solidFill>
                   <a:srgbClr val="1F2433"/>
                 </a:solidFill>
@@ -12673,8 +12684,8 @@
         </p:nvSpPr>
         <p:spPr>
           <a:xfrm>
-            <a:off x="10835640" y="7772400"/>
-            <a:ext cx="6949440" cy="1965960"/>
+            <a:off x="10835640" y="7863840"/>
+            <a:ext cx="6949440" cy="1874519"/>
           </a:xfrm>
           <a:prstGeom prst="roundRect">
             <a:avLst>
@@ -12703,7 +12714,7 @@
         </p:nvSpPr>
         <p:spPr>
           <a:xfrm>
-            <a:off x="11018519" y="7955279"/>
+            <a:off x="11018519" y="8046719"/>
             <a:ext cx="731520" cy="731520"/>
           </a:xfrm>
           <a:prstGeom prst="ellipse">
@@ -12739,7 +12750,7 @@
         </p:blipFill>
         <p:spPr>
           <a:xfrm>
-            <a:off x="11201400" y="8138160"/>
+            <a:off x="11201400" y="8229600"/>
             <a:ext cx="365760" cy="365760"/>
           </a:xfrm>
           <a:prstGeom prst="rect">
@@ -12755,7 +12766,7 @@
         </p:nvSpPr>
         <p:spPr>
           <a:xfrm>
-            <a:off x="11978640" y="7955279"/>
+            <a:off x="11978640" y="8046719"/>
             <a:ext cx="5623559" cy="731520"/>
           </a:xfrm>
           <a:prstGeom prst="rect">
@@ -12798,8 +12809,8 @@
         </p:nvSpPr>
         <p:spPr>
           <a:xfrm>
-            <a:off x="11018519" y="8823959"/>
-            <a:ext cx="6583679" cy="768096"/>
+            <a:off x="11018519" y="8915399"/>
+            <a:ext cx="6583679" cy="676656"/>
           </a:xfrm>
           <a:prstGeom prst="rect">
             <a:avLst/>
@@ -12823,13 +12834,13 @@
               <a:buChar char="•"/>
             </a:pPr>
             <a:r>
-              <a:rPr sz="1400" b="0" i="0">
+              <a:rPr sz="1500" b="0" i="0">
                 <a:solidFill>
                   <a:srgbClr val="1F2433"/>
                 </a:solidFill>
                 <a:latin typeface="Arial"/>
               </a:rPr>
-              <a:t>Restringir a definições específicas reduziu o I² respiratório de 91% para 61%: a definição do desfecho explica parte relevante da heterogeneidade.</a:t>
+              <a:t>Definições específicas: I² respiratório cai de 91% para 61%; a definição do desfecho explica parte da heterogeneidade.</a:t>
             </a:r>
           </a:p>
           <a:p>
@@ -12844,13 +12855,13 @@
               <a:buChar char="•"/>
             </a:pPr>
             <a:r>
-              <a:rPr sz="1400" b="0" i="0">
+              <a:rPr sz="1500" b="0" i="0">
                 <a:solidFill>
                   <a:srgbClr val="1F2433"/>
                 </a:solidFill>
                 <a:latin typeface="Arial"/>
               </a:rPr>
-              <a:t>No ocular, a heterogeneidade não depende de um único estudo (Baujat: Mohd Fikri Rosely 2022 é o mais influente).</a:t>
+              <a:t>No ocular, nenhum estudo sozinho explica a heterogeneidade (Baujat: Mohd Fikri Rosely 2022 é o mais influente).</a:t>
             </a:r>
           </a:p>
         </p:txBody>
@@ -13193,7 +13204,7 @@
               <a:buNone/>
             </a:pPr>
             <a:r>
-              <a:rPr sz="1300" b="0" i="0">
+              <a:rPr sz="1400" b="0" i="0">
                 <a:solidFill>
                   <a:srgbClr val="5A6270"/>
                 </a:solidFill>
@@ -13240,7 +13251,7 @@
               <a:buChar char="•"/>
             </a:pPr>
             <a:r>
-              <a:rPr sz="1500" b="1" i="0">
+              <a:rPr sz="1600" b="1" i="0">
                 <a:solidFill>
                   <a:srgbClr val="1F2433"/>
                 </a:solidFill>
@@ -13249,13 +13260,13 @@
               <a:t>VEF1 2,78 vs 3,14 L · CVF 3,02 vs 3,45 L · PFE 327,5 vs 483,5 L/min </a:t>
             </a:r>
             <a:r>
-              <a:rPr sz="1500" b="0" i="0">
+              <a:rPr sz="1600" b="0" i="0">
                 <a:solidFill>
                   <a:srgbClr val="1F2433"/>
                 </a:solidFill>
                 <a:latin typeface="Arial"/>
               </a:rPr>
-              <a:t>(p = 0,001, Mann-Whitney)</a:t>
+              <a:t>(p = 0,001)</a:t>
             </a:r>
           </a:p>
           <a:p>
@@ -13273,13 +13284,13 @@
               <a:buChar char="•"/>
             </a:pPr>
             <a:r>
-              <a:rPr sz="1500" b="0" i="0">
+              <a:rPr sz="1600" b="0" i="0">
                 <a:solidFill>
                   <a:srgbClr val="1F2433"/>
                 </a:solidFill>
                 <a:latin typeface="Arial"/>
               </a:rPr>
-              <a:t>Mais tempo em centro cirúrgico → menores valores (ajuste por idade e IMC).</a:t>
+              <a:t>Gradiente: mais tempo em centro cirúrgico → menores valores (ajuste por idade e IMC).</a:t>
             </a:r>
           </a:p>
           <a:p>
@@ -13297,7 +13308,7 @@
               <a:buChar char="•"/>
             </a:pPr>
             <a:r>
-              <a:rPr sz="1500" b="1" i="0">
+              <a:rPr sz="1600" b="1" i="0">
                 <a:solidFill>
                   <a:srgbClr val="8B0000"/>
                 </a:solidFill>
@@ -13306,13 +13317,13 @@
               <a:t>Cautela: </a:t>
             </a:r>
             <a:r>
-              <a:rPr sz="1500" b="0" i="0">
+              <a:rPr sz="1600" b="0" i="0">
                 <a:solidFill>
                   <a:srgbClr val="1F2433"/>
                 </a:solidFill>
                 <a:latin typeface="Arial"/>
               </a:rPr>
-              <a:t>VEF1/CVF ≈ 91% nos dois grupos (não obstrutivo); PFE depende do esforço; manobras de qualidade B/C em 44 de 184.</a:t>
+              <a:t>VEF1/CVF ≈ 91% nos dois grupos; PFE depende do esforço do participante.</a:t>
             </a:r>
           </a:p>
         </p:txBody>
@@ -13474,13 +13485,13 @@
               <a:buNone/>
             </a:pPr>
             <a:r>
-              <a:rPr sz="1300" b="0" i="0">
+              <a:rPr sz="1400" b="0" i="0">
                 <a:solidFill>
                   <a:srgbClr val="5A6270"/>
                 </a:solidFill>
                 <a:latin typeface="Arial"/>
               </a:rPr>
-              <a:t>Canicoba, 2025 · Brasil · 52 expostos vs 49 controles</a:t>
+              <a:t>Canicoba, 2025 · Brasil · 52 vs 49 (metabólitos); 52 vs 52 (oxidativo)</a:t>
             </a:r>
           </a:p>
         </p:txBody>
@@ -13521,22 +13532,40 @@
               <a:buChar char="•"/>
             </a:pPr>
             <a:r>
-              <a:rPr sz="1500" b="1" i="0">
+              <a:rPr sz="1600" b="1" i="0">
                 <a:solidFill>
                   <a:srgbClr val="1F2433"/>
                 </a:solidFill>
                 <a:latin typeface="Arial"/>
               </a:rPr>
-              <a:t>Ác. trans,trans-mucônico 202,9 vs 46,1 µg/L </a:t>
-            </a:r>
-            <a:r>
-              <a:rPr sz="1500" b="0" i="0">
+              <a:t>Ác. t,t-mucônico 202,9 vs 46,1 µg/L </a:t>
+            </a:r>
+            <a:r>
+              <a:rPr sz="1600" b="0" i="0">
                 <a:solidFill>
                   <a:srgbClr val="1F2433"/>
                 </a:solidFill>
                 <a:latin typeface="Arial"/>
               </a:rPr>
-              <a:t>(metabólito do benzeno)</a:t>
+              <a:t>(benzeno) · </a:t>
+            </a:r>
+            <a:r>
+              <a:rPr sz="1600" b="1" i="0">
+                <a:solidFill>
+                  <a:srgbClr val="1F2433"/>
+                </a:solidFill>
+                <a:latin typeface="Arial"/>
+              </a:rPr>
+              <a:t>ác. metil-hipúrico 468,2 vs 184,4 µg/L </a:t>
+            </a:r>
+            <a:r>
+              <a:rPr sz="1600" b="0" i="0">
+                <a:solidFill>
+                  <a:srgbClr val="1F2433"/>
+                </a:solidFill>
+                <a:latin typeface="Arial"/>
+              </a:rPr>
+              <a:t>(xileno)</a:t>
             </a:r>
           </a:p>
           <a:p>
@@ -13554,34 +13583,16 @@
               <a:buChar char="•"/>
             </a:pPr>
             <a:r>
-              <a:rPr sz="1500" b="1" i="0">
+              <a:rPr sz="1600" b="1" i="0">
                 <a:solidFill>
                   <a:srgbClr val="1F2433"/>
                 </a:solidFill>
                 <a:latin typeface="Arial"/>
               </a:rPr>
-              <a:t>Ác. metil-hipúrico 468,2 vs 184,4 µg/L </a:t>
-            </a:r>
-            <a:r>
-              <a:rPr sz="1500" b="0" i="0">
-                <a:solidFill>
-                  <a:srgbClr val="1F2433"/>
-                </a:solidFill>
-                <a:latin typeface="Arial"/>
-              </a:rPr>
-              <a:t>(xileno) · </a:t>
-            </a:r>
-            <a:r>
-              <a:rPr sz="1500" b="1" i="0">
-                <a:solidFill>
-                  <a:srgbClr val="1F2433"/>
-                </a:solidFill>
-                <a:latin typeface="Arial"/>
-              </a:rPr>
-              <a:t>malondialdeído 9,33 vs 3,22 nmol/mg </a:t>
-            </a:r>
-            <a:r>
-              <a:rPr sz="1500" b="0" i="0">
+              <a:t>Malondialdeído 9,33 vs 3,22 nmol/mg </a:t>
+            </a:r>
+            <a:r>
+              <a:rPr sz="1600" b="0" i="0">
                 <a:solidFill>
                   <a:srgbClr val="1F2433"/>
                 </a:solidFill>
@@ -13605,7 +13616,7 @@
               <a:buChar char="•"/>
             </a:pPr>
             <a:r>
-              <a:rPr sz="1500" b="1" i="0">
+              <a:rPr sz="1600" b="1" i="0">
                 <a:solidFill>
                   <a:srgbClr val="8B0000"/>
                 </a:solidFill>
@@ -13614,13 +13625,13 @@
               <a:t>Cautela: </a:t>
             </a:r>
             <a:r>
-              <a:rPr sz="1500" b="0" i="0">
+              <a:rPr sz="1600" b="0" i="0">
                 <a:solidFill>
                   <a:srgbClr val="1F2433"/>
                 </a:solidFill>
                 <a:latin typeface="Arial"/>
               </a:rPr>
-              <a:t>sem IC95%; t,t-mucônico não é específico (ácido sórbico, tabagismo).</a:t>
+              <a:t>sem IC95%; t,t-mucônico não é específico (dieta, tabagismo).</a:t>
             </a:r>
           </a:p>
         </p:txBody>
@@ -13782,7 +13793,7 @@
               <a:buNone/>
             </a:pPr>
             <a:r>
-              <a:rPr sz="1300" b="0" i="0">
+              <a:rPr sz="1400" b="0" i="0">
                 <a:solidFill>
                   <a:srgbClr val="5A6270"/>
                 </a:solidFill>
@@ -13829,7 +13840,7 @@
               <a:buChar char="•"/>
             </a:pPr>
             <a:r>
-              <a:rPr sz="1500" b="1" i="0">
+              <a:rPr sz="1600" b="1" i="0">
                 <a:solidFill>
                   <a:srgbClr val="1F2433"/>
                 </a:solidFill>
@@ -13853,7 +13864,7 @@
               <a:buChar char="•"/>
             </a:pPr>
             <a:r>
-              <a:rPr sz="1500" b="1" i="0">
+              <a:rPr sz="1600" b="1" i="0">
                 <a:solidFill>
                   <a:srgbClr val="8B0000"/>
                 </a:solidFill>
@@ -13862,13 +13873,13 @@
               <a:t>RR 13,9 (IC95% 2,0 – 95,8)</a:t>
             </a:r>
             <a:r>
-              <a:rPr sz="1500" b="0" i="0">
+              <a:rPr sz="1600" b="0" i="0">
                 <a:solidFill>
                   <a:srgbClr val="1F2433"/>
                 </a:solidFill>
                 <a:latin typeface="Arial"/>
               </a:rPr>
-              <a:t> · IC amplo: 1 evento no grupo não exposto</a:t>
+              <a:t>: 1 evento no grupo não exposto → IC amplo</a:t>
             </a:r>
           </a:p>
           <a:p>
@@ -13886,7 +13897,7 @@
               <a:buChar char="•"/>
             </a:pPr>
             <a:r>
-              <a:rPr sz="1500" b="1" i="0">
+              <a:rPr sz="1600" b="1" i="0">
                 <a:solidFill>
                   <a:srgbClr val="8B0000"/>
                 </a:solidFill>
@@ -13895,13 +13906,13 @@
               <a:t>Cautela: </a:t>
             </a:r>
             <a:r>
-              <a:rPr sz="1500" b="0" i="0">
+              <a:rPr sz="1600" b="0" i="0">
                 <a:solidFill>
                   <a:srgbClr val="1F2433"/>
                 </a:solidFill>
                 <a:latin typeface="Arial"/>
               </a:rPr>
-              <a:t>resposta inespecífica da mucosa a irritantes inalados; exposição por proxy.</a:t>
+              <a:t>resposta inespecífica a irritantes inalados; exposição por proxy.</a:t>
             </a:r>
           </a:p>
         </p:txBody>
@@ -14063,13 +14074,13 @@
               <a:buNone/>
             </a:pPr>
             <a:r>
-              <a:rPr sz="1300" b="0" i="0">
+              <a:rPr sz="1400" b="0" i="0">
                 <a:solidFill>
                   <a:srgbClr val="5A6270"/>
                 </a:solidFill>
                 <a:latin typeface="Arial"/>
               </a:rPr>
-              <a:t>Hu et al., 2021 · China · 700 ginecologistas</a:t>
+              <a:t>Hu et al., 2021 · China · 700 ginecologistas (469 com eletrocirurgia vs 231 sem)</a:t>
             </a:r>
           </a:p>
         </p:txBody>
@@ -14110,7 +14121,7 @@
               <a:buChar char="•"/>
             </a:pPr>
             <a:r>
-              <a:rPr sz="1500" b="1" i="0">
+              <a:rPr sz="1600" b="1" i="0">
                 <a:solidFill>
                   <a:srgbClr val="1F2433"/>
                 </a:solidFill>
@@ -14134,7 +14145,7 @@
               <a:buChar char="•"/>
             </a:pPr>
             <a:r>
-              <a:rPr sz="1500" b="1" i="0">
+              <a:rPr sz="1600" b="1" i="0">
                 <a:solidFill>
                   <a:srgbClr val="8B0000"/>
                 </a:solidFill>
@@ -14143,7 +14154,7 @@
               <a:t>RR 5,2 (IC95% 1,9 – 14,2)</a:t>
             </a:r>
             <a:r>
-              <a:rPr sz="1500" b="0" i="0">
+              <a:rPr sz="1600" b="0" i="0">
                 <a:solidFill>
                   <a:srgbClr val="1F2433"/>
                 </a:solidFill>
@@ -14167,7 +14178,7 @@
               <a:buChar char="•"/>
             </a:pPr>
             <a:r>
-              <a:rPr sz="1500" b="1" i="0">
+              <a:rPr sz="1600" b="1" i="0">
                 <a:solidFill>
                   <a:srgbClr val="8B0000"/>
                 </a:solidFill>
@@ -14176,13 +14187,13 @@
               <a:t>Cautela: </a:t>
             </a:r>
             <a:r>
-              <a:rPr sz="1500" b="0" i="0">
+              <a:rPr sz="1600" b="0" i="0">
                 <a:solidFill>
                   <a:srgbClr val="1F2433"/>
                 </a:solidFill>
                 <a:latin typeface="Arial"/>
               </a:rPr>
-              <a:t>detecção de DNA ≠ infecção ou doença; 0/196 com N95 vs 13,98% com máscara comum é comparação de subgrupo sem ajuste.</a:t>
+              <a:t>DNA detectado ≠ infecção ou doença; N95 (0/196) é subgrupo sem ajuste.</a:t>
             </a:r>
           </a:p>
         </p:txBody>
@@ -14292,7 +14303,7 @@
               <a:buNone/>
             </a:pPr>
             <a:r>
-              <a:rPr sz="1500" b="0" i="0">
+              <a:rPr sz="1600" b="0" i="0">
                 <a:solidFill>
                   <a:srgbClr val="FFFFFF"/>
                 </a:solidFill>
@@ -14378,7 +14389,7 @@
               <a:buNone/>
             </a:pPr>
             <a:r>
-              <a:rPr sz="1500" b="0" i="0">
+              <a:rPr sz="1600" b="0" i="0">
                 <a:solidFill>
                   <a:srgbClr val="FFFFFF"/>
                 </a:solidFill>
@@ -14464,7 +14475,7 @@
               <a:buNone/>
             </a:pPr>
             <a:r>
-              <a:rPr sz="1500" b="0" i="0">
+              <a:rPr sz="1600" b="0" i="0">
                 <a:solidFill>
                   <a:srgbClr val="FFFFFF"/>
                 </a:solidFill>
@@ -16514,7 +16525,7 @@
               <a:buNone/>
             </a:pPr>
             <a:r>
-              <a:rPr sz="1300" b="0" i="0">
+              <a:rPr sz="1400" b="0" i="0">
                 <a:solidFill>
                   <a:srgbClr val="5A6270"/>
                 </a:solidFill>
@@ -16587,7 +16598,7 @@
               <a:buNone/>
             </a:pPr>
             <a:r>
-              <a:rPr sz="1500" b="1" i="0">
+              <a:rPr sz="1600" b="1" i="0">
                 <a:solidFill>
                   <a:srgbClr val="002060"/>
                 </a:solidFill>
@@ -16611,7 +16622,7 @@
               <a:buChar char="•"/>
             </a:pPr>
             <a:r>
-              <a:rPr sz="1500" b="0" i="0">
+              <a:rPr sz="1600" b="0" i="0">
                 <a:solidFill>
                   <a:srgbClr val="1F2433"/>
                 </a:solidFill>
@@ -16635,7 +16646,7 @@
               <a:buChar char="•"/>
             </a:pPr>
             <a:r>
-              <a:rPr sz="1500" b="0" i="0">
+              <a:rPr sz="1600" b="0" i="0">
                 <a:solidFill>
                   <a:srgbClr val="1F2433"/>
                 </a:solidFill>
@@ -16659,7 +16670,7 @@
               <a:buChar char="•"/>
             </a:pPr>
             <a:r>
-              <a:rPr sz="1500" b="0" i="0">
+              <a:rPr sz="1600" b="0" i="0">
                 <a:solidFill>
                   <a:srgbClr val="1F2433"/>
                 </a:solidFill>
@@ -16819,7 +16830,7 @@
           <a:p>
             <a:pPr algn="l">
               <a:lnSpc>
-                <a:spcPct val="105000"/>
+                <a:spcPct val="102000"/>
               </a:lnSpc>
               <a:spcAft>
                 <a:spcPts val="0"/>
@@ -16827,7 +16838,7 @@
               <a:buNone/>
             </a:pPr>
             <a:r>
-              <a:rPr sz="1500" b="0" i="0">
+              <a:rPr sz="1600" b="0" i="0">
                 <a:solidFill>
                   <a:srgbClr val="1F2433"/>
                 </a:solidFill>
@@ -16987,7 +16998,7 @@
           <a:p>
             <a:pPr algn="l">
               <a:lnSpc>
-                <a:spcPct val="105000"/>
+                <a:spcPct val="102000"/>
               </a:lnSpc>
               <a:spcAft>
                 <a:spcPts val="0"/>
@@ -16995,7 +17006,7 @@
               <a:buNone/>
             </a:pPr>
             <a:r>
-              <a:rPr sz="1500" b="0" i="0">
+              <a:rPr sz="1600" b="0" i="0">
                 <a:solidFill>
                   <a:srgbClr val="1F2433"/>
                 </a:solidFill>
@@ -17155,7 +17166,7 @@
           <a:p>
             <a:pPr algn="l">
               <a:lnSpc>
-                <a:spcPct val="105000"/>
+                <a:spcPct val="102000"/>
               </a:lnSpc>
               <a:spcAft>
                 <a:spcPts val="0"/>
@@ -17163,7 +17174,7 @@
               <a:buNone/>
             </a:pPr>
             <a:r>
-              <a:rPr sz="1500" b="0" i="0">
+              <a:rPr sz="1600" b="0" i="0">
                 <a:solidFill>
                   <a:srgbClr val="1F2433"/>
                 </a:solidFill>
@@ -17637,7 +17648,7 @@
               <a:buNone/>
             </a:pPr>
             <a:r>
-              <a:rPr sz="1500" b="0" i="0">
+              <a:rPr sz="1600" b="0" i="0">
                 <a:solidFill>
                   <a:srgbClr val="1F2433"/>
                 </a:solidFill>
@@ -17775,7 +17786,7 @@
               <a:buNone/>
             </a:pPr>
             <a:r>
-              <a:rPr sz="1500" b="0" i="0">
+              <a:rPr sz="1600" b="0" i="0">
                 <a:solidFill>
                   <a:srgbClr val="1F2433"/>
                 </a:solidFill>
@@ -17913,7 +17924,7 @@
               <a:buNone/>
             </a:pPr>
             <a:r>
-              <a:rPr sz="1500" b="0" i="0">
+              <a:rPr sz="1600" b="0" i="0">
                 <a:solidFill>
                   <a:srgbClr val="1F2433"/>
                 </a:solidFill>
@@ -18051,7 +18062,7 @@
               <a:buNone/>
             </a:pPr>
             <a:r>
-              <a:rPr sz="1500" b="0" i="0">
+              <a:rPr sz="1600" b="0" i="0">
                 <a:solidFill>
                   <a:srgbClr val="1F2433"/>
                 </a:solidFill>
@@ -18191,7 +18202,7 @@
               <a:buNone/>
             </a:pPr>
             <a:r>
-              <a:rPr sz="1500" b="0" i="0">
+              <a:rPr sz="1600" b="0" i="0">
                 <a:solidFill>
                   <a:srgbClr val="1F2433"/>
                 </a:solidFill>
@@ -18258,7 +18269,7 @@
               <a:buNone/>
             </a:pPr>
             <a:r>
-              <a:rPr sz="1500" b="0" i="0">
+              <a:rPr sz="1600" b="0" i="0">
                 <a:solidFill>
                   <a:srgbClr val="1F2433"/>
                 </a:solidFill>
@@ -18325,7 +18336,7 @@
               <a:buNone/>
             </a:pPr>
             <a:r>
-              <a:rPr sz="1500" b="0" i="0">
+              <a:rPr sz="1600" b="0" i="0">
                 <a:solidFill>
                   <a:srgbClr val="1F2433"/>
                 </a:solidFill>
@@ -18392,7 +18403,7 @@
               <a:buNone/>
             </a:pPr>
             <a:r>
-              <a:rPr sz="1500" b="0" i="0">
+              <a:rPr sz="1600" b="0" i="0">
                 <a:solidFill>
                   <a:srgbClr val="1F2433"/>
                 </a:solidFill>
@@ -18459,7 +18470,7 @@
               <a:buNone/>
             </a:pPr>
             <a:r>
-              <a:rPr sz="1500" b="0" i="0">
+              <a:rPr sz="1600" b="0" i="0">
                 <a:solidFill>
                   <a:srgbClr val="1F2433"/>
                 </a:solidFill>
@@ -20536,7 +20547,7 @@
               <a:buNone/>
             </a:pPr>
             <a:r>
-              <a:rPr sz="1300" b="0" i="0">
+              <a:rPr sz="1400" b="0" i="0">
                 <a:solidFill>
                   <a:srgbClr val="5A6270"/>
                 </a:solidFill>
@@ -20925,7 +20936,7 @@
         <p:spPr>
           <a:xfrm>
             <a:off x="10241280" y="2148840"/>
-            <a:ext cx="7543800" cy="1280160"/>
+            <a:ext cx="7543800" cy="1325880"/>
           </a:xfrm>
           <a:prstGeom prst="rect">
             <a:avLst/>
@@ -20940,7 +20951,7 @@
           <a:p>
             <a:pPr algn="l">
               <a:lnSpc>
-                <a:spcPct val="105000"/>
+                <a:spcPct val="102000"/>
               </a:lnSpc>
               <a:spcAft>
                 <a:spcPts val="0"/>
@@ -20948,7 +20959,7 @@
               <a:buNone/>
             </a:pPr>
             <a:r>
-              <a:rPr sz="1700" b="0" i="0">
+              <a:rPr sz="1800" b="0" i="0">
                 <a:solidFill>
                   <a:srgbClr val="1F2433"/>
                 </a:solidFill>
@@ -21063,7 +21074,7 @@
         <p:spPr>
           <a:xfrm>
             <a:off x="10241280" y="3904487"/>
-            <a:ext cx="7543800" cy="1280160"/>
+            <a:ext cx="7543800" cy="1325880"/>
           </a:xfrm>
           <a:prstGeom prst="rect">
             <a:avLst/>
@@ -21078,7 +21089,7 @@
           <a:p>
             <a:pPr algn="l">
               <a:lnSpc>
-                <a:spcPct val="105000"/>
+                <a:spcPct val="102000"/>
               </a:lnSpc>
               <a:spcAft>
                 <a:spcPts val="0"/>
@@ -21086,13 +21097,13 @@
               <a:buNone/>
             </a:pPr>
             <a:r>
-              <a:rPr sz="1700" b="0" i="0">
+              <a:rPr sz="1800" b="0" i="0">
                 <a:solidFill>
                   <a:srgbClr val="1F2433"/>
                 </a:solidFill>
                 <a:latin typeface="Arial"/>
               </a:rPr>
-              <a:t>Hidrocarbonetos aromáticos policíclicos, compostos orgânicos voláteis (benzeno, tolueno, xileno), material particulado ultrafino (PM2,5) e material genético viral, como o HPV.</a:t>
+              <a:t>Hidrocarbonetos aromáticos policíclicos, compostos orgânicos voláteis (benzeno, tolueno, xileno), material particulado fino (PM2,5) e ultrafino, e material genético viral, como o HPV.</a:t>
             </a:r>
           </a:p>
         </p:txBody>
@@ -21201,7 +21212,7 @@
         <p:spPr>
           <a:xfrm>
             <a:off x="10241280" y="5660136"/>
-            <a:ext cx="7543800" cy="1280160"/>
+            <a:ext cx="7543800" cy="1325880"/>
           </a:xfrm>
           <a:prstGeom prst="rect">
             <a:avLst/>
@@ -21216,7 +21227,7 @@
           <a:p>
             <a:pPr algn="l">
               <a:lnSpc>
-                <a:spcPct val="105000"/>
+                <a:spcPct val="102000"/>
               </a:lnSpc>
               <a:spcAft>
                 <a:spcPts val="0"/>
@@ -21224,7 +21235,7 @@
               <a:buNone/>
             </a:pPr>
             <a:r>
-              <a:rPr sz="1700" b="0" i="0">
+              <a:rPr sz="1800" b="0" i="0">
                 <a:solidFill>
                   <a:srgbClr val="1F2433"/>
                 </a:solidFill>
@@ -21339,7 +21350,7 @@
         <p:spPr>
           <a:xfrm>
             <a:off x="10241280" y="7415783"/>
-            <a:ext cx="7543800" cy="1280160"/>
+            <a:ext cx="7543800" cy="1325880"/>
           </a:xfrm>
           <a:prstGeom prst="rect">
             <a:avLst/>
@@ -21354,7 +21365,7 @@
           <a:p>
             <a:pPr algn="l">
               <a:lnSpc>
-                <a:spcPct val="105000"/>
+                <a:spcPct val="102000"/>
               </a:lnSpc>
               <a:spcAft>
                 <a:spcPts val="0"/>
@@ -21362,7 +21373,7 @@
               <a:buNone/>
             </a:pPr>
             <a:r>
-              <a:rPr sz="1700" b="0" i="0">
+              <a:rPr sz="1800" b="0" i="0">
                 <a:solidFill>
                   <a:srgbClr val="1F2433"/>
                 </a:solidFill>
@@ -23350,7 +23361,7 @@
         <p:spPr>
           <a:xfrm>
             <a:off x="1216151" y="3611880"/>
-            <a:ext cx="2231136" cy="2880360"/>
+            <a:ext cx="2231136" cy="2788920"/>
           </a:xfrm>
           <a:prstGeom prst="roundRect">
             <a:avLst>
@@ -23379,8 +23390,8 @@
         </p:nvSpPr>
         <p:spPr>
           <a:xfrm>
-            <a:off x="1344167" y="3703320"/>
-            <a:ext cx="1975104" cy="2743200"/>
+            <a:off x="1325879" y="3703320"/>
+            <a:ext cx="2011680" cy="2651760"/>
           </a:xfrm>
           <a:prstGeom prst="rect">
             <a:avLst/>
@@ -23449,7 +23460,7 @@
                 </a:solidFill>
                 <a:latin typeface="Arial"/>
               </a:rPr>
-              <a:t>Registro PROSPERO CRD420251238727 antes da extração</a:t>
+              <a:t>PROSPERO CRD420251238727</a:t>
             </a:r>
           </a:p>
           <a:p>
@@ -23469,7 +23480,7 @@
                 </a:solidFill>
                 <a:latin typeface="Arial"/>
               </a:rPr>
-              <a:t>Dispensa do CEP (prot. 2025/0743)</a:t>
+              <a:t>Dispensa do CEP 2025/0743</a:t>
             </a:r>
           </a:p>
         </p:txBody>
@@ -23575,7 +23586,7 @@
         <p:spPr>
           <a:xfrm>
             <a:off x="3593592" y="3611880"/>
-            <a:ext cx="2231136" cy="2880360"/>
+            <a:ext cx="2231136" cy="2788920"/>
           </a:xfrm>
           <a:prstGeom prst="roundRect">
             <a:avLst>
@@ -23604,8 +23615,8 @@
         </p:nvSpPr>
         <p:spPr>
           <a:xfrm>
-            <a:off x="3721608" y="3703320"/>
-            <a:ext cx="1975104" cy="2743200"/>
+            <a:off x="3703320" y="3703320"/>
+            <a:ext cx="2011680" cy="2651760"/>
           </a:xfrm>
           <a:prstGeom prst="rect">
             <a:avLst/>
@@ -23634,7 +23645,27 @@
                 </a:solidFill>
                 <a:latin typeface="Arial"/>
               </a:rPr>
-              <a:t>7 bases eletrônicas + literatura cinzenta + busca por citação</a:t>
+              <a:t>7 bases + literatura cinzenta</a:t>
+            </a:r>
+          </a:p>
+          <a:p>
+            <a:pPr algn="l">
+              <a:lnSpc>
+                <a:spcPct val="102000"/>
+              </a:lnSpc>
+              <a:spcAft>
+                <a:spcPts val="500"/>
+              </a:spcAft>
+              <a:buNone/>
+            </a:pPr>
+            <a:r>
+              <a:rPr sz="1700" b="0" i="0">
+                <a:solidFill>
+                  <a:srgbClr val="1F2433"/>
+                </a:solidFill>
+                <a:latin typeface="Arial"/>
+              </a:rPr>
+              <a:t>Busca por citação (OpenAlex)</a:t>
             </a:r>
           </a:p>
           <a:p>
@@ -23780,7 +23811,7 @@
         <p:spPr>
           <a:xfrm>
             <a:off x="5971032" y="3611880"/>
-            <a:ext cx="2231136" cy="2880360"/>
+            <a:ext cx="2231136" cy="2788920"/>
           </a:xfrm>
           <a:prstGeom prst="roundRect">
             <a:avLst>
@@ -23809,8 +23840,8 @@
         </p:nvSpPr>
         <p:spPr>
           <a:xfrm>
-            <a:off x="6099048" y="3703320"/>
-            <a:ext cx="1975104" cy="2743200"/>
+            <a:off x="6080760" y="3703320"/>
+            <a:ext cx="2011680" cy="2651760"/>
           </a:xfrm>
           <a:prstGeom prst="rect">
             <a:avLst/>
@@ -23879,7 +23910,7 @@
                 </a:solidFill>
                 <a:latin typeface="Arial"/>
               </a:rPr>
-              <a:t>Triagem de título/resumo e leitura na íntegra</a:t>
+              <a:t>Triagem e leitura na íntegra</a:t>
             </a:r>
           </a:p>
           <a:p>
@@ -23899,7 +23930,7 @@
                 </a:solidFill>
                 <a:latin typeface="Arial"/>
               </a:rPr>
-              <a:t>Controle de sobreposição amostral</a:t>
+              <a:t>Controle de sobreposição</a:t>
             </a:r>
           </a:p>
         </p:txBody>
@@ -24005,7 +24036,7 @@
         <p:spPr>
           <a:xfrm>
             <a:off x="8348471" y="3611880"/>
-            <a:ext cx="2231136" cy="2880360"/>
+            <a:ext cx="2231136" cy="2788920"/>
           </a:xfrm>
           <a:prstGeom prst="roundRect">
             <a:avLst>
@@ -24034,8 +24065,8 @@
         </p:nvSpPr>
         <p:spPr>
           <a:xfrm>
-            <a:off x="8476488" y="3703320"/>
-            <a:ext cx="1975104" cy="2743200"/>
+            <a:off x="8458199" y="3703320"/>
+            <a:ext cx="2011680" cy="2651760"/>
           </a:xfrm>
           <a:prstGeom prst="rect">
             <a:avLst/>
@@ -24084,7 +24115,7 @@
                 </a:solidFill>
                 <a:latin typeface="Arial"/>
               </a:rPr>
-              <a:t>Eventos e denominadores por desfecho</a:t>
+              <a:t>Eventos e denominadores</a:t>
             </a:r>
           </a:p>
           <a:p>
@@ -24104,7 +24135,27 @@
                 </a:solidFill>
                 <a:latin typeface="Arial"/>
               </a:rPr>
-              <a:t>Definição operacional e taxa de resposta</a:t>
+              <a:t>Definição do desfecho</a:t>
+            </a:r>
+          </a:p>
+          <a:p>
+            <a:pPr algn="l">
+              <a:lnSpc>
+                <a:spcPct val="102000"/>
+              </a:lnSpc>
+              <a:spcAft>
+                <a:spcPts val="500"/>
+              </a:spcAft>
+              <a:buNone/>
+            </a:pPr>
+            <a:r>
+              <a:rPr sz="1700" b="0" i="0">
+                <a:solidFill>
+                  <a:srgbClr val="1F2433"/>
+                </a:solidFill>
+                <a:latin typeface="Arial"/>
+              </a:rPr>
+              <a:t>Taxa de resposta</a:t>
             </a:r>
           </a:p>
         </p:txBody>
@@ -24210,7 +24261,7 @@
         <p:spPr>
           <a:xfrm>
             <a:off x="10725912" y="3611880"/>
-            <a:ext cx="2231136" cy="2880360"/>
+            <a:ext cx="2231136" cy="2788920"/>
           </a:xfrm>
           <a:prstGeom prst="roundRect">
             <a:avLst>
@@ -24239,8 +24290,8 @@
         </p:nvSpPr>
         <p:spPr>
           <a:xfrm>
-            <a:off x="10853928" y="3703320"/>
-            <a:ext cx="1975104" cy="2743200"/>
+            <a:off x="10835640" y="3703320"/>
+            <a:ext cx="2011680" cy="2651760"/>
           </a:xfrm>
           <a:prstGeom prst="rect">
             <a:avLst/>
@@ -24269,7 +24320,7 @@
                 </a:solidFill>
                 <a:latin typeface="Arial"/>
               </a:rPr>
-              <a:t>Ferramentas JBI: prevalência (9 itens), transversal analítico (8) e coorte (11)</a:t>
+              <a:t>Ferramentas JBI</a:t>
             </a:r>
           </a:p>
           <a:p>
@@ -24289,7 +24340,47 @@
                 </a:solidFill>
                 <a:latin typeface="Arial"/>
               </a:rPr>
-              <a:t>Julgamento por domínios críticos</a:t>
+              <a:t>Prevalência (9 itens)</a:t>
+            </a:r>
+          </a:p>
+          <a:p>
+            <a:pPr algn="l">
+              <a:lnSpc>
+                <a:spcPct val="102000"/>
+              </a:lnSpc>
+              <a:spcAft>
+                <a:spcPts val="500"/>
+              </a:spcAft>
+              <a:buNone/>
+            </a:pPr>
+            <a:r>
+              <a:rPr sz="1700" b="0" i="0">
+                <a:solidFill>
+                  <a:srgbClr val="1F2433"/>
+                </a:solidFill>
+                <a:latin typeface="Arial"/>
+              </a:rPr>
+              <a:t>Transversal (8) e coorte (11)</a:t>
+            </a:r>
+          </a:p>
+          <a:p>
+            <a:pPr algn="l">
+              <a:lnSpc>
+                <a:spcPct val="102000"/>
+              </a:lnSpc>
+              <a:spcAft>
+                <a:spcPts val="500"/>
+              </a:spcAft>
+              <a:buNone/>
+            </a:pPr>
+            <a:r>
+              <a:rPr sz="1700" b="0" i="0">
+                <a:solidFill>
+                  <a:srgbClr val="1F2433"/>
+                </a:solidFill>
+                <a:latin typeface="Arial"/>
+              </a:rPr>
+              <a:t>Domínios críticos</a:t>
             </a:r>
           </a:p>
         </p:txBody>
@@ -24395,7 +24486,7 @@
         <p:spPr>
           <a:xfrm>
             <a:off x="13103352" y="3611880"/>
-            <a:ext cx="2231136" cy="2880360"/>
+            <a:ext cx="2231136" cy="2788920"/>
           </a:xfrm>
           <a:prstGeom prst="roundRect">
             <a:avLst>
@@ -24424,8 +24515,8 @@
         </p:nvSpPr>
         <p:spPr>
           <a:xfrm>
-            <a:off x="13231368" y="3703320"/>
-            <a:ext cx="1975104" cy="2743200"/>
+            <a:off x="13213080" y="3703320"/>
+            <a:ext cx="2011680" cy="2651760"/>
           </a:xfrm>
           <a:prstGeom prst="rect">
             <a:avLst/>
@@ -24454,7 +24545,7 @@
                 </a:solidFill>
                 <a:latin typeface="Arial"/>
               </a:rPr>
-              <a:t>Metanálise de proporções: logito, efeitos aleatórios, Hartung-Knapp</a:t>
+              <a:t>Metanálise de proporções</a:t>
             </a:r>
           </a:p>
           <a:p>
@@ -24474,7 +24565,7 @@
                 </a:solidFill>
                 <a:latin typeface="Arial"/>
               </a:rPr>
-              <a:t>Intervalo de predição e sensibilidade</a:t>
+              <a:t>Logito + efeitos aleatórios</a:t>
             </a:r>
           </a:p>
           <a:p>
@@ -24494,7 +24585,27 @@
                 </a:solidFill>
                 <a:latin typeface="Arial"/>
               </a:rPr>
-              <a:t>Narrativa para desfechos objetivos</a:t>
+              <a:t>Hartung-Knapp</a:t>
+            </a:r>
+          </a:p>
+          <a:p>
+            <a:pPr algn="l">
+              <a:lnSpc>
+                <a:spcPct val="102000"/>
+              </a:lnSpc>
+              <a:spcAft>
+                <a:spcPts val="500"/>
+              </a:spcAft>
+              <a:buNone/>
+            </a:pPr>
+            <a:r>
+              <a:rPr sz="1700" b="0" i="0">
+                <a:solidFill>
+                  <a:srgbClr val="1F2433"/>
+                </a:solidFill>
+                <a:latin typeface="Arial"/>
+              </a:rPr>
+              <a:t>IP e sensibilidade</a:t>
             </a:r>
           </a:p>
         </p:txBody>
@@ -24600,7 +24711,7 @@
         <p:spPr>
           <a:xfrm>
             <a:off x="15480792" y="3611880"/>
-            <a:ext cx="2231136" cy="2880360"/>
+            <a:ext cx="2231136" cy="2788920"/>
           </a:xfrm>
           <a:prstGeom prst="roundRect">
             <a:avLst>
@@ -24629,8 +24740,8 @@
         </p:nvSpPr>
         <p:spPr>
           <a:xfrm>
-            <a:off x="15608808" y="3703320"/>
-            <a:ext cx="1975104" cy="2743200"/>
+            <a:off x="15590520" y="3703320"/>
+            <a:ext cx="2011680" cy="2651760"/>
           </a:xfrm>
           <a:prstGeom prst="rect">
             <a:avLst/>
@@ -24659,7 +24770,7 @@
                 </a:solidFill>
                 <a:latin typeface="Arial"/>
               </a:rPr>
-              <a:t>5 domínios, adaptados à prevalência</a:t>
+              <a:t>GRADE adaptado</a:t>
             </a:r>
           </a:p>
           <a:p>
@@ -24679,7 +24790,7 @@
                 </a:solidFill>
                 <a:latin typeface="Arial"/>
               </a:rPr>
-              <a:t>Ponto de partida: certeza baixa</a:t>
+              <a:t>à prevalência</a:t>
             </a:r>
           </a:p>
           <a:p>
@@ -24699,7 +24810,27 @@
                 </a:solidFill>
                 <a:latin typeface="Arial"/>
               </a:rPr>
-              <a:t>Justificativa por domínio (Anexo F)</a:t>
+              <a:t>5 domínios</a:t>
+            </a:r>
+          </a:p>
+          <a:p>
+            <a:pPr algn="l">
+              <a:lnSpc>
+                <a:spcPct val="102000"/>
+              </a:lnSpc>
+              <a:spcAft>
+                <a:spcPts val="500"/>
+              </a:spcAft>
+              <a:buNone/>
+            </a:pPr>
+            <a:r>
+              <a:rPr sz="1700" b="0" i="0">
+                <a:solidFill>
+                  <a:srgbClr val="1F2433"/>
+                </a:solidFill>
+                <a:latin typeface="Arial"/>
+              </a:rPr>
+              <a:t>Ponto de partida: baixa</a:t>
             </a:r>
           </a:p>
         </p:txBody>
@@ -24712,8 +24843,8 @@
         </p:nvSpPr>
         <p:spPr>
           <a:xfrm>
-            <a:off x="1143000" y="6766560"/>
-            <a:ext cx="16642080" cy="1508760"/>
+            <a:off x="1143000" y="6629400"/>
+            <a:ext cx="16642080" cy="1280160"/>
           </a:xfrm>
           <a:prstGeom prst="roundRect">
             <a:avLst>
@@ -24742,8 +24873,8 @@
         </p:nvSpPr>
         <p:spPr>
           <a:xfrm>
-            <a:off x="1417320" y="6858000"/>
-            <a:ext cx="2651760" cy="1325880"/>
+            <a:off x="1417320" y="6720840"/>
+            <a:ext cx="2651760" cy="1097280"/>
           </a:xfrm>
           <a:prstGeom prst="rect">
             <a:avLst/>
@@ -24813,7 +24944,7 @@
         </p:blipFill>
         <p:spPr>
           <a:xfrm>
-            <a:off x="4069080" y="7178040"/>
+            <a:off x="4069080" y="6995160"/>
             <a:ext cx="502920" cy="502920"/>
           </a:xfrm>
           <a:prstGeom prst="rect">
@@ -24829,7 +24960,7 @@
         </p:nvSpPr>
         <p:spPr>
           <a:xfrm>
-            <a:off x="4709160" y="6949440"/>
+            <a:off x="4709160" y="6784848"/>
             <a:ext cx="2011680" cy="411480"/>
           </a:xfrm>
           <a:prstGeom prst="rect">
@@ -24872,8 +25003,8 @@
         </p:nvSpPr>
         <p:spPr>
           <a:xfrm>
-            <a:off x="4709160" y="7342631"/>
-            <a:ext cx="2011680" cy="896112"/>
+            <a:off x="4709160" y="7178040"/>
+            <a:ext cx="2011680" cy="640080"/>
           </a:xfrm>
           <a:prstGeom prst="rect">
             <a:avLst/>
@@ -24896,7 +25027,7 @@
               <a:buNone/>
             </a:pPr>
             <a:r>
-              <a:rPr sz="1500" b="0" i="0">
+              <a:rPr sz="1600" b="0" i="0">
                 <a:solidFill>
                   <a:srgbClr val="1F2433"/>
                 </a:solidFill>
@@ -24923,7 +25054,7 @@
         </p:blipFill>
         <p:spPr>
           <a:xfrm>
-            <a:off x="6812280" y="7178040"/>
+            <a:off x="6812280" y="6995160"/>
             <a:ext cx="502920" cy="502920"/>
           </a:xfrm>
           <a:prstGeom prst="rect">
@@ -24939,7 +25070,7 @@
         </p:nvSpPr>
         <p:spPr>
           <a:xfrm>
-            <a:off x="7452360" y="6949440"/>
+            <a:off x="7452360" y="6784848"/>
             <a:ext cx="2011680" cy="411480"/>
           </a:xfrm>
           <a:prstGeom prst="rect">
@@ -24982,8 +25113,8 @@
         </p:nvSpPr>
         <p:spPr>
           <a:xfrm>
-            <a:off x="7452360" y="7342631"/>
-            <a:ext cx="2011680" cy="896112"/>
+            <a:off x="7452360" y="7178040"/>
+            <a:ext cx="2011680" cy="640080"/>
           </a:xfrm>
           <a:prstGeom prst="rect">
             <a:avLst/>
@@ -25006,7 +25137,7 @@
               <a:buNone/>
             </a:pPr>
             <a:r>
-              <a:rPr sz="1500" b="0" i="0">
+              <a:rPr sz="1600" b="0" i="0">
                 <a:solidFill>
                   <a:srgbClr val="1F2433"/>
                 </a:solidFill>
@@ -25033,7 +25164,7 @@
         </p:blipFill>
         <p:spPr>
           <a:xfrm>
-            <a:off x="9555480" y="7178040"/>
+            <a:off x="9555480" y="6995160"/>
             <a:ext cx="502920" cy="502920"/>
           </a:xfrm>
           <a:prstGeom prst="rect">
@@ -25049,7 +25180,7 @@
         </p:nvSpPr>
         <p:spPr>
           <a:xfrm>
-            <a:off x="10195559" y="6949440"/>
+            <a:off x="10195559" y="6784848"/>
             <a:ext cx="2011680" cy="411480"/>
           </a:xfrm>
           <a:prstGeom prst="rect">
@@ -25092,8 +25223,8 @@
         </p:nvSpPr>
         <p:spPr>
           <a:xfrm>
-            <a:off x="10195559" y="7342631"/>
-            <a:ext cx="2011680" cy="896112"/>
+            <a:off x="10195559" y="7178040"/>
+            <a:ext cx="2011680" cy="640080"/>
           </a:xfrm>
           <a:prstGeom prst="rect">
             <a:avLst/>
@@ -25116,13 +25247,13 @@
               <a:buNone/>
             </a:pPr>
             <a:r>
-              <a:rPr sz="1500" b="0" i="0">
+              <a:rPr sz="1600" b="0" i="0">
                 <a:solidFill>
                   <a:srgbClr val="1F2433"/>
                 </a:solidFill>
                 <a:latin typeface="Arial"/>
               </a:rPr>
-              <a:t>metadados e busca por citação</a:t>
+              <a:t>metadados e citações</a:t>
             </a:r>
           </a:p>
         </p:txBody>
@@ -25143,7 +25274,7 @@
         </p:blipFill>
         <p:spPr>
           <a:xfrm>
-            <a:off x="12298680" y="7178040"/>
+            <a:off x="12298680" y="6995160"/>
             <a:ext cx="502920" cy="502920"/>
           </a:xfrm>
           <a:prstGeom prst="rect">
@@ -25159,7 +25290,7 @@
         </p:nvSpPr>
         <p:spPr>
           <a:xfrm>
-            <a:off x="12938759" y="6949440"/>
+            <a:off x="12938759" y="6784848"/>
             <a:ext cx="2011680" cy="411480"/>
           </a:xfrm>
           <a:prstGeom prst="rect">
@@ -25202,8 +25333,8 @@
         </p:nvSpPr>
         <p:spPr>
           <a:xfrm>
-            <a:off x="12938759" y="7342631"/>
-            <a:ext cx="2011680" cy="896112"/>
+            <a:off x="12938759" y="7178040"/>
+            <a:ext cx="2011680" cy="640080"/>
           </a:xfrm>
           <a:prstGeom prst="rect">
             <a:avLst/>
@@ -25226,7 +25357,7 @@
               <a:buNone/>
             </a:pPr>
             <a:r>
-              <a:rPr sz="1500" b="0" i="0">
+              <a:rPr sz="1600" b="0" i="0">
                 <a:solidFill>
                   <a:srgbClr val="1F2433"/>
                 </a:solidFill>
@@ -25253,7 +25384,7 @@
         </p:blipFill>
         <p:spPr>
           <a:xfrm>
-            <a:off x="15041880" y="7178040"/>
+            <a:off x="15041880" y="6995160"/>
             <a:ext cx="502920" cy="502920"/>
           </a:xfrm>
           <a:prstGeom prst="rect">
@@ -25269,7 +25400,7 @@
         </p:nvSpPr>
         <p:spPr>
           <a:xfrm>
-            <a:off x="15681959" y="6949440"/>
+            <a:off x="15681959" y="6784848"/>
             <a:ext cx="2011680" cy="411480"/>
           </a:xfrm>
           <a:prstGeom prst="rect">
@@ -25312,8 +25443,8 @@
         </p:nvSpPr>
         <p:spPr>
           <a:xfrm>
-            <a:off x="15681959" y="7342631"/>
-            <a:ext cx="2011680" cy="896112"/>
+            <a:off x="15681959" y="7178040"/>
+            <a:ext cx="2011680" cy="640080"/>
           </a:xfrm>
           <a:prstGeom prst="rect">
             <a:avLst/>
@@ -25336,13 +25467,13 @@
               <a:buNone/>
             </a:pPr>
             <a:r>
-              <a:rPr sz="1500" b="0" i="0">
+              <a:rPr sz="1600" b="0" i="0">
                 <a:solidFill>
                   <a:srgbClr val="1F2433"/>
                 </a:solidFill>
                 <a:latin typeface="Arial"/>
               </a:rPr>
-              <a:t>só priorizou a ordem de leitura; decisões 100% humanas</a:t>
+              <a:t>apoio operacional (abaixo)</a:t>
             </a:r>
           </a:p>
         </p:txBody>
@@ -25355,8 +25486,8 @@
         </p:nvSpPr>
         <p:spPr>
           <a:xfrm>
-            <a:off x="1143000" y="8503920"/>
-            <a:ext cx="16642080" cy="1188720"/>
+            <a:off x="1143000" y="8092440"/>
+            <a:ext cx="16642080" cy="1691640"/>
           </a:xfrm>
           <a:prstGeom prst="rect">
             <a:avLst/>
@@ -25374,7 +25505,7 @@
                 <a:spcPct val="100000"/>
               </a:lnSpc>
               <a:spcAft>
-                <a:spcPts val="0"/>
+                <a:spcPts val="600"/>
               </a:spcAft>
               <a:buNone/>
             </a:pPr>
@@ -25385,6 +25516,35 @@
                 </a:solidFill>
                 <a:latin typeface="Arial"/>
               </a:rPr>
+              <a:t>Uso de IA (declarado, Portaria CNPq nº 2.664/2026): </a:t>
+            </a:r>
+            <a:r>
+              <a:rPr sz="1600" b="0" i="0">
+                <a:solidFill>
+                  <a:srgbClr val="1F2433"/>
+                </a:solidFill>
+                <a:latin typeface="Arial"/>
+              </a:rPr>
+              <a:t>apoio operacional na priorização da ordem de leitura, na leitura assistida de resumos e na organização do fluxo de trabalho. Elegibilidade, extração, interpretação e redação: decisões humanas, nada incorporado sem verificação.</a:t>
+            </a:r>
+          </a:p>
+          <a:p>
+            <a:pPr algn="l">
+              <a:lnSpc>
+                <a:spcPct val="100000"/>
+              </a:lnSpc>
+              <a:spcAft>
+                <a:spcPts val="600"/>
+              </a:spcAft>
+              <a:buNone/>
+            </a:pPr>
+            <a:r>
+              <a:rPr sz="1600" b="1" i="0">
+                <a:solidFill>
+                  <a:srgbClr val="002060"/>
+                </a:solidFill>
+                <a:latin typeface="Arial"/>
+              </a:rPr>
               <a:t>Transparência e reprodutibilidade: </a:t>
             </a:r>
             <a:r>
@@ -25394,16 +25554,7 @@
                 </a:solidFill>
                 <a:latin typeface="Arial"/>
               </a:rPr>
-              <a:t>checklist PRISMA 2020 com 27 itens preenchido; estratégias completas por base (Anexo A); extração, risco de viés e perfil GRADE em anexos; códigos de análise, figuras e planilhas abertos no OSF (osf.io/jktmn). </a:t>
-            </a:r>
-            <a:r>
-              <a:rPr sz="1600" b="0" i="0">
-                <a:solidFill>
-                  <a:srgbClr val="5A6270"/>
-                </a:solidFill>
-                <a:latin typeface="Arial"/>
-              </a:rPr>
-              <a:t>Uso de IA declarado conforme a Portaria CNPq nº 2.664/2026.</a:t>
+              <a:t>checklist PRISMA 2020 (27 itens) preenchido; estratégias completas por base (Anexo A); extração, risco de viés e perfil GRADE em anexos; códigos, figuras e planilhas abertos no OSF (osf.io/jktmn).</a:t>
             </a:r>
           </a:p>
         </p:txBody>
@@ -26322,7 +26473,7 @@
                 </a:solidFill>
                 <a:latin typeface="Arial"/>
               </a:rPr>
-              <a:t>Critérios de elegibilidade (definidos no protocolo)</a:t>
+              <a:t>Critérios de elegibilidade e ajustes posteriores declarados</a:t>
             </a:r>
           </a:p>
         </p:txBody>
@@ -26403,7 +26554,7 @@
         <p:spPr>
           <a:xfrm>
             <a:off x="1417320" y="2788920"/>
-            <a:ext cx="7132320" cy="2834640"/>
+            <a:ext cx="7132320" cy="2926080"/>
           </a:xfrm>
           <a:prstGeom prst="rect">
             <a:avLst/>
@@ -26430,13 +26581,13 @@
               <a:buChar char="•"/>
             </a:pPr>
             <a:r>
-              <a:rPr sz="1700" b="0" i="0">
+              <a:rPr sz="1800" b="0" i="0">
                 <a:solidFill>
                   <a:srgbClr val="1F2433"/>
                 </a:solidFill>
                 <a:latin typeface="Arial"/>
               </a:rPr>
-              <a:t>Estudos observacionais primários: transversais, caso-controle e coorte;</a:t>
+              <a:t>Estudos observacionais primários (transversais, caso-controle, coorte);</a:t>
             </a:r>
           </a:p>
           <a:p>
@@ -26454,7 +26605,7 @@
               <a:buChar char="•"/>
             </a:pPr>
             <a:r>
-              <a:rPr sz="1700" b="0" i="0">
+              <a:rPr sz="1800" b="0" i="0">
                 <a:solidFill>
                   <a:srgbClr val="1F2433"/>
                 </a:solidFill>
@@ -26478,7 +26629,7 @@
               <a:buChar char="•"/>
             </a:pPr>
             <a:r>
-              <a:rPr sz="1700" b="0" i="0">
+              <a:rPr sz="1800" b="0" i="0">
                 <a:solidFill>
                   <a:srgbClr val="1F2433"/>
                 </a:solidFill>
@@ -26502,7 +26653,7 @@
               <a:buChar char="•"/>
             </a:pPr>
             <a:r>
-              <a:rPr sz="1700" b="0" i="0">
+              <a:rPr sz="1800" b="0" i="0">
                 <a:solidFill>
                   <a:srgbClr val="1F2433"/>
                 </a:solidFill>
@@ -26526,13 +26677,22 @@
               <a:buChar char="•"/>
             </a:pPr>
             <a:r>
-              <a:rPr sz="1700" b="0" i="0">
+              <a:rPr sz="1800" b="0" i="0">
                 <a:solidFill>
                   <a:srgbClr val="1F2433"/>
                 </a:solidFill>
                 <a:latin typeface="Arial"/>
               </a:rPr>
-              <a:t>Resumos de congresso só com população, cenário, definição do desfecho, eventos e denominador (classificados como preocupação alta e testados em análise de sensibilidade).</a:t>
+              <a:t>Resumos de congresso com dados completos: admitidos com preocupação alta </a:t>
+            </a:r>
+            <a:r>
+              <a:rPr sz="1800" b="1" i="0">
+                <a:solidFill>
+                  <a:srgbClr val="8A6D1F"/>
+                </a:solidFill>
+                <a:latin typeface="Arial"/>
+              </a:rPr>
+              <a:t>(ajuste posterior ao registro, declarado no manuscrito).</a:t>
             </a:r>
           </a:p>
         </p:txBody>
@@ -26553,7 +26713,7 @@
         </p:blipFill>
         <p:spPr>
           <a:xfrm>
-            <a:off x="1417320" y="5486400"/>
+            <a:off x="1417320" y="5715000"/>
             <a:ext cx="365760" cy="365760"/>
           </a:xfrm>
           <a:prstGeom prst="rect">
@@ -26569,7 +26729,7 @@
         </p:nvSpPr>
         <p:spPr>
           <a:xfrm>
-            <a:off x="1920240" y="5440680"/>
+            <a:off x="1920240" y="5669280"/>
             <a:ext cx="6675120" cy="411480"/>
           </a:xfrm>
           <a:prstGeom prst="rect">
@@ -26612,8 +26772,8 @@
         </p:nvSpPr>
         <p:spPr>
           <a:xfrm>
-            <a:off x="1417320" y="5879592"/>
-            <a:ext cx="7132320" cy="3017520"/>
+            <a:off x="1417320" y="6108192"/>
+            <a:ext cx="7132320" cy="2834640"/>
           </a:xfrm>
           <a:prstGeom prst="rect">
             <a:avLst/>
@@ -26640,7 +26800,7 @@
               <a:buChar char="•"/>
             </a:pPr>
             <a:r>
-              <a:rPr sz="1700" b="0" i="0">
+              <a:rPr sz="1800" b="0" i="0">
                 <a:solidFill>
                   <a:srgbClr val="1F2433"/>
                 </a:solidFill>
@@ -26664,13 +26824,13 @@
               <a:buChar char="•"/>
             </a:pPr>
             <a:r>
-              <a:rPr sz="1700" b="0" i="0">
+              <a:rPr sz="1800" b="0" i="0">
                 <a:solidFill>
                   <a:srgbClr val="1F2433"/>
                 </a:solidFill>
                 <a:latin typeface="Arial"/>
               </a:rPr>
-              <a:t>População fora do centro cirúrgico (ex.: ambulatórios de dermatologia ou ginecologia);</a:t>
+              <a:t>População fora do centro cirúrgico (ex.: ambulatórios);</a:t>
             </a:r>
           </a:p>
           <a:p>
@@ -26688,7 +26848,7 @@
               <a:buChar char="•"/>
             </a:pPr>
             <a:r>
-              <a:rPr sz="1700" b="0" i="0">
+              <a:rPr sz="1800" b="0" i="0">
                 <a:solidFill>
                   <a:srgbClr val="1F2433"/>
                 </a:solidFill>
@@ -26712,13 +26872,13 @@
               <a:buChar char="•"/>
             </a:pPr>
             <a:r>
-              <a:rPr sz="1700" b="0" i="0">
+              <a:rPr sz="1800" b="0" i="0">
                 <a:solidFill>
                   <a:srgbClr val="1F2433"/>
                 </a:solidFill>
                 <a:latin typeface="Arial"/>
               </a:rPr>
-              <a:t>Caracterização físico-química do ar sem desfecho humano;</a:t>
+              <a:t>Medição físico-química do ar sem desfecho humano;</a:t>
             </a:r>
           </a:p>
           <a:p>
@@ -26736,7 +26896,7 @@
               <a:buChar char="•"/>
             </a:pPr>
             <a:r>
-              <a:rPr sz="1700" b="0" i="0">
+              <a:rPr sz="1800" b="0" i="0">
                 <a:solidFill>
                   <a:srgbClr val="1F2433"/>
                 </a:solidFill>
@@ -26760,13 +26920,13 @@
               <a:buChar char="•"/>
             </a:pPr>
             <a:r>
-              <a:rPr sz="1700" b="0" i="0">
+              <a:rPr sz="1800" b="0" i="0">
                 <a:solidFill>
                   <a:srgbClr val="1F2433"/>
                 </a:solidFill>
                 <a:latin typeface="Arial"/>
               </a:rPr>
-              <a:t>Exposição não atribuível à fumaça (ex.: só gases anestésicos ou radiação).</a:t>
+              <a:t>Exposição não atribuível à fumaça (só gases anestésicos ou radiação).</a:t>
             </a:r>
           </a:p>
         </p:txBody>
@@ -26939,7 +27099,7 @@
               <a:buNone/>
             </a:pPr>
             <a:r>
-              <a:rPr sz="1500" b="0" i="0">
+              <a:rPr sz="1600" b="0" i="0">
                 <a:solidFill>
                   <a:srgbClr val="5A6270"/>
                 </a:solidFill>
@@ -27025,7 +27185,7 @@
               <a:buNone/>
             </a:pPr>
             <a:r>
-              <a:rPr sz="1400" b="0" i="0">
+              <a:rPr sz="1500" b="0" i="0">
                 <a:solidFill>
                   <a:srgbClr val="5A6270"/>
                 </a:solidFill>
@@ -27068,13 +27228,13 @@
               <a:buNone/>
             </a:pPr>
             <a:r>
-              <a:rPr sz="1300" b="0" i="0">
+              <a:rPr sz="1400" b="0" i="0">
                 <a:solidFill>
                   <a:srgbClr val="5A6270"/>
                 </a:solidFill>
                 <a:latin typeface="Arial"/>
               </a:rPr>
-              <a:t>Cinzenta: 4 estratégias no Google Scholar (50 primeiros resultados cada) e Catálogo CAPES</a:t>
+              <a:t>Cinzenta: Google Scholar (4 estratégias × 50 resultados) e Catálogo CAPES</a:t>
             </a:r>
           </a:p>
         </p:txBody>
@@ -27179,7 +27339,7 @@
                 <a:spcPct val="100000"/>
               </a:lnSpc>
               <a:spcAft>
-                <a:spcPts val="400"/>
+                <a:spcPts val="500"/>
               </a:spcAft>
               <a:buClr>
                 <a:srgbClr val="C8A951"/>
@@ -27188,7 +27348,7 @@
               <a:buChar char="•"/>
             </a:pPr>
             <a:r>
-              <a:rPr sz="1500" b="1" i="0">
+              <a:rPr sz="1600" b="1" i="0">
                 <a:solidFill>
                   <a:srgbClr val="1F2433"/>
                 </a:solidFill>
@@ -27197,13 +27357,13 @@
               <a:t>Dois blocos: </a:t>
             </a:r>
             <a:r>
-              <a:rPr sz="1500" b="0" i="0">
+              <a:rPr sz="1600" b="0" i="0">
                 <a:solidFill>
                   <a:srgbClr val="1F2433"/>
                 </a:solidFill>
                 <a:latin typeface="Arial"/>
               </a:rPr>
-              <a:t>(equipe cirúrgica) AND (fumaça OU dispositivos de energia), com termos MeSH/Emtree e texto livre; sem bloco de desfecho, para não perder estudos.</a:t>
+              <a:t>(equipe cirúrgica) AND (fumaça OU dispositivos de energia); termos MeSH/Emtree e texto livre; sem bloco de desfecho.</a:t>
             </a:r>
           </a:p>
           <a:p>
@@ -27212,7 +27372,7 @@
                 <a:spcPct val="100000"/>
               </a:lnSpc>
               <a:spcAft>
-                <a:spcPts val="400"/>
+                <a:spcPts val="500"/>
               </a:spcAft>
               <a:buClr>
                 <a:srgbClr val="C8A951"/>
@@ -27221,16 +27381,16 @@
               <a:buChar char="•"/>
             </a:pPr>
             <a:r>
-              <a:rPr sz="1500" b="1" i="0">
+              <a:rPr sz="1600" b="1" i="0">
                 <a:solidFill>
                   <a:srgbClr val="1F2433"/>
                 </a:solidFill>
                 <a:latin typeface="Arial"/>
               </a:rPr>
-              <a:t>Sem filtro de idioma ou data na busca </a:t>
-            </a:r>
-            <a:r>
-              <a:rPr sz="1500" b="0" i="0">
+              <a:t>Sem filtro de idioma ou data </a:t>
+            </a:r>
+            <a:r>
+              <a:rPr sz="1600" b="0" i="0">
                 <a:solidFill>
                   <a:srgbClr val="1F2433"/>
                 </a:solidFill>
@@ -27245,7 +27405,7 @@
                 <a:spcPct val="100000"/>
               </a:lnSpc>
               <a:spcAft>
-                <a:spcPts val="400"/>
+                <a:spcPts val="500"/>
               </a:spcAft>
               <a:buClr>
                 <a:srgbClr val="C8A951"/>
@@ -27254,22 +27414,22 @@
               <a:buChar char="•"/>
             </a:pPr>
             <a:r>
-              <a:rPr sz="1500" b="1" i="0">
+              <a:rPr sz="1600" b="1" i="0">
                 <a:solidFill>
                   <a:srgbClr val="1F2433"/>
                 </a:solidFill>
                 <a:latin typeface="Arial"/>
               </a:rPr>
-              <a:t>Busca por citação (snowballing) automatizada no OpenAlex: </a:t>
-            </a:r>
-            <a:r>
-              <a:rPr sz="1500" b="0" i="0">
+              <a:t>Busca por citação automatizada (OpenAlex): </a:t>
+            </a:r>
+            <a:r>
+              <a:rPr sz="1600" b="0" i="0">
                 <a:solidFill>
                   <a:srgbClr val="1F2433"/>
                 </a:solidFill>
                 <a:latin typeface="Arial"/>
               </a:rPr>
-              <a:t>referências dos incluídos (reversa) e artigos que os citam (direta).</a:t>
+              <a:t>referências dos incluídos e artigos que os citam.</a:t>
             </a:r>
           </a:p>
         </p:txBody>
@@ -28225,7 +28385,7 @@
               <a:buNone/>
             </a:pPr>
             <a:r>
-              <a:rPr sz="1400" b="0" i="0">
+              <a:rPr sz="1500" b="0" i="0">
                 <a:solidFill>
                   <a:srgbClr val="1F2433"/>
                 </a:solidFill>
@@ -28245,7 +28405,7 @@
               <a:buNone/>
             </a:pPr>
             <a:r>
-              <a:rPr sz="1400" b="0" i="0">
+              <a:rPr sz="1500" b="0" i="0">
                 <a:solidFill>
                   <a:srgbClr val="1F2433"/>
                 </a:solidFill>
@@ -28383,7 +28543,7 @@
               <a:buNone/>
             </a:pPr>
             <a:r>
-              <a:rPr sz="1400" b="0" i="0">
+              <a:rPr sz="1500" b="0" i="0">
                 <a:solidFill>
                   <a:srgbClr val="1F2433"/>
                 </a:solidFill>
@@ -28403,7 +28563,7 @@
               <a:buNone/>
             </a:pPr>
             <a:r>
-              <a:rPr sz="1400" b="0" i="0">
+              <a:rPr sz="1500" b="0" i="0">
                 <a:solidFill>
                   <a:srgbClr val="1F2433"/>
                 </a:solidFill>
@@ -28468,7 +28628,7 @@
               <a:buNone/>
             </a:pPr>
             <a:r>
-              <a:rPr sz="1200" b="0" i="0">
+              <a:rPr sz="1300" b="0" i="0">
                 <a:solidFill>
                   <a:srgbClr val="5A6270"/>
                 </a:solidFill>
@@ -28488,7 +28648,7 @@
               <a:buNone/>
             </a:pPr>
             <a:r>
-              <a:rPr sz="1200" b="0" i="0">
+              <a:rPr sz="1300" b="0" i="0">
                 <a:solidFill>
                   <a:srgbClr val="5A6270"/>
                 </a:solidFill>
@@ -28508,7 +28668,7 @@
               <a:buNone/>
             </a:pPr>
             <a:r>
-              <a:rPr sz="1200" b="0" i="0">
+              <a:rPr sz="1300" b="0" i="0">
                 <a:solidFill>
                   <a:srgbClr val="5A6270"/>
                 </a:solidFill>
@@ -28624,7 +28784,7 @@
               <a:buNone/>
             </a:pPr>
             <a:r>
-              <a:rPr sz="1400" b="0" i="0">
+              <a:rPr sz="1500" b="0" i="0">
                 <a:solidFill>
                   <a:srgbClr val="1F2433"/>
                 </a:solidFill>
@@ -28644,7 +28804,7 @@
               <a:buNone/>
             </a:pPr>
             <a:r>
-              <a:rPr sz="1400" b="0" i="0">
+              <a:rPr sz="1500" b="0" i="0">
                 <a:solidFill>
                   <a:srgbClr val="1F2433"/>
                 </a:solidFill>
@@ -28709,7 +28869,7 @@
               <a:buNone/>
             </a:pPr>
             <a:r>
-              <a:rPr sz="1200" b="0" i="0">
+              <a:rPr sz="1300" b="0" i="0">
                 <a:solidFill>
                   <a:srgbClr val="5A6270"/>
                 </a:solidFill>
@@ -28729,7 +28889,7 @@
               <a:buNone/>
             </a:pPr>
             <a:r>
-              <a:rPr sz="1200" b="0" i="0">
+              <a:rPr sz="1300" b="0" i="0">
                 <a:solidFill>
                   <a:srgbClr val="5A6270"/>
                 </a:solidFill>
@@ -28845,7 +29005,7 @@
               <a:buNone/>
             </a:pPr>
             <a:r>
-              <a:rPr sz="1400" b="0" i="0">
+              <a:rPr sz="1500" b="0" i="0">
                 <a:solidFill>
                   <a:srgbClr val="1F2433"/>
                 </a:solidFill>
@@ -28865,7 +29025,7 @@
               <a:buNone/>
             </a:pPr>
             <a:r>
-              <a:rPr sz="1400" b="0" i="0">
+              <a:rPr sz="1500" b="0" i="0">
                 <a:solidFill>
                   <a:srgbClr val="1F2433"/>
                 </a:solidFill>
@@ -28930,7 +29090,7 @@
               <a:buNone/>
             </a:pPr>
             <a:r>
-              <a:rPr sz="1200" b="0" i="0">
+              <a:rPr sz="1300" b="0" i="0">
                 <a:solidFill>
                   <a:srgbClr val="5A6270"/>
                 </a:solidFill>
@@ -28950,7 +29110,7 @@
               <a:buNone/>
             </a:pPr>
             <a:r>
-              <a:rPr sz="1200" b="0" i="0">
+              <a:rPr sz="1300" b="0" i="0">
                 <a:solidFill>
                   <a:srgbClr val="5A6270"/>
                 </a:solidFill>
@@ -29066,7 +29226,7 @@
               <a:buNone/>
             </a:pPr>
             <a:r>
-              <a:rPr sz="1400" b="0" i="0">
+              <a:rPr sz="1500" b="0" i="0">
                 <a:solidFill>
                   <a:srgbClr val="1F2433"/>
                 </a:solidFill>
@@ -29086,7 +29246,7 @@
               <a:buNone/>
             </a:pPr>
             <a:r>
-              <a:rPr sz="1400" b="0" i="0">
+              <a:rPr sz="1500" b="0" i="0">
                 <a:solidFill>
                   <a:srgbClr val="1F2433"/>
                 </a:solidFill>
@@ -29249,13 +29409,13 @@
                 <a:spcPct val="100000"/>
               </a:lnSpc>
               <a:spcAft>
-                <a:spcPts val="500"/>
+                <a:spcPts val="600"/>
               </a:spcAft>
               <a:buFont typeface="Arial"/>
               <a:buChar char="•"/>
             </a:pPr>
             <a:r>
-              <a:rPr sz="1500" b="0" i="0">
+              <a:rPr sz="1600" b="0" i="0">
                 <a:solidFill>
                   <a:srgbClr val="1F2433"/>
                 </a:solidFill>
@@ -29270,19 +29430,19 @@
                 <a:spcPct val="100000"/>
               </a:lnSpc>
               <a:spcAft>
-                <a:spcPts val="500"/>
+                <a:spcPts val="600"/>
               </a:spcAft>
               <a:buFont typeface="Arial"/>
               <a:buChar char="•"/>
             </a:pPr>
             <a:r>
-              <a:rPr sz="1500" b="0" i="0">
+              <a:rPr sz="1600" b="0" i="0">
                 <a:solidFill>
                   <a:srgbClr val="1F2433"/>
                 </a:solidFill>
                 <a:latin typeface="Arial"/>
               </a:rPr>
-              <a:t>Triagem de título e resumo de todos os 10.910 registros por um único revisor (o primeiro autor).</a:t>
+              <a:t>Título e resumo dos 10.910 registros lidos por um único revisor.</a:t>
             </a:r>
           </a:p>
           <a:p>
@@ -29291,19 +29451,19 @@
                 <a:spcPct val="100000"/>
               </a:lnSpc>
               <a:spcAft>
-                <a:spcPts val="500"/>
+                <a:spcPts val="600"/>
               </a:spcAft>
               <a:buFont typeface="Arial"/>
               <a:buChar char="•"/>
             </a:pPr>
             <a:r>
-              <a:rPr sz="1500" b="0" i="0">
+              <a:rPr sz="1600" b="0" i="0">
                 <a:solidFill>
                   <a:srgbClr val="1F2433"/>
                 </a:solidFill>
                 <a:latin typeface="Arial"/>
               </a:rPr>
-              <a:t>Script em Python (regras por palavras-chave) e IA só priorizaram a ordem de leitura; nunca decidiram elegibilidade.</a:t>
+              <a:t>Script em Python e assistente de IA: apoio operacional (ordem de leitura, leitura assistida de resumos, fluxo). Elegibilidade decidida por humano.</a:t>
             </a:r>
           </a:p>
         </p:txBody>
@@ -29460,19 +29620,19 @@
                 <a:spcPct val="100000"/>
               </a:lnSpc>
               <a:spcAft>
-                <a:spcPts val="500"/>
+                <a:spcPts val="600"/>
               </a:spcAft>
               <a:buFont typeface="Arial"/>
               <a:buChar char="•"/>
             </a:pPr>
             <a:r>
-              <a:rPr sz="1500" b="0" i="0">
+              <a:rPr sz="1600" b="0" i="0">
                 <a:solidFill>
                   <a:srgbClr val="1F2433"/>
                 </a:solidFill>
                 <a:latin typeface="Arial"/>
               </a:rPr>
-              <a:t>Critérios definitivos aplicados; motivo de exclusão registrado para cada relatório (Anexo C).</a:t>
+              <a:t>Critérios definitivos; motivo de exclusão registrado (Anexo C).</a:t>
             </a:r>
           </a:p>
           <a:p>
@@ -29481,19 +29641,19 @@
                 <a:spcPct val="100000"/>
               </a:lnSpc>
               <a:spcAft>
-                <a:spcPts val="500"/>
+                <a:spcPts val="600"/>
               </a:spcAft>
               <a:buFont typeface="Arial"/>
               <a:buChar char="•"/>
             </a:pPr>
             <a:r>
-              <a:rPr sz="1500" b="0" i="0">
+              <a:rPr sz="1600" b="0" i="0">
                 <a:solidFill>
                   <a:srgbClr val="1F2433"/>
                 </a:solidFill>
                 <a:latin typeface="Arial"/>
               </a:rPr>
-              <a:t>Excluídos: 1 resumo de congresso sem dados extraíveis e 3 por população ou contexto inelegível.</a:t>
+              <a:t>Excluídos: 1 resumo sem dados e 3 por população ou contexto.</a:t>
             </a:r>
           </a:p>
           <a:p>
@@ -29502,19 +29662,19 @@
                 <a:spcPct val="100000"/>
               </a:lnSpc>
               <a:spcAft>
-                <a:spcPts val="500"/>
+                <a:spcPts val="600"/>
               </a:spcAft>
               <a:buFont typeface="Arial"/>
               <a:buChar char="•"/>
             </a:pPr>
             <a:r>
-              <a:rPr sz="1500" b="0" i="0">
+              <a:rPr sz="1600" b="0" i="0">
                 <a:solidFill>
                   <a:srgbClr val="1F2433"/>
                 </a:solidFill>
                 <a:latin typeface="Arial"/>
               </a:rPr>
-              <a:t>Regra do sintoma-índice: se &gt;1 sintoma elegível por via, adotou-se o mais específico (lacrimejamento ou irritação ocular; tosse ou irritação de vias aéreas).</a:t>
+              <a:t>Sintoma-índice: o mais específico de cada via (lacrimejamento ou irritação ocular; tosse ou irritação de vias aéreas).</a:t>
             </a:r>
           </a:p>
         </p:txBody>
@@ -29671,19 +29831,19 @@
                 <a:spcPct val="100000"/>
               </a:lnSpc>
               <a:spcAft>
-                <a:spcPts val="500"/>
+                <a:spcPts val="600"/>
               </a:spcAft>
               <a:buFont typeface="Arial"/>
               <a:buChar char="•"/>
             </a:pPr>
             <a:r>
-              <a:rPr sz="1500" b="0" i="0">
+              <a:rPr sz="1600" b="0" i="0">
                 <a:solidFill>
                   <a:srgbClr val="1F2433"/>
                 </a:solidFill>
                 <a:latin typeface="Arial"/>
               </a:rPr>
-              <a:t>7 publicações do mesmo grupo brasileiro (Paraná) vêm de coortes com sobreposição parcial.</a:t>
+              <a:t>7 publicações do mesmo grupo (Paraná) com amostras sobrepostas.</a:t>
             </a:r>
           </a:p>
           <a:p>
@@ -29692,19 +29852,19 @@
                 <a:spcPct val="100000"/>
               </a:lnSpc>
               <a:spcAft>
-                <a:spcPts val="500"/>
+                <a:spcPts val="600"/>
               </a:spcAft>
               <a:buFont typeface="Arial"/>
               <a:buChar char="•"/>
             </a:pPr>
             <a:r>
-              <a:rPr sz="1500" b="0" i="0">
+              <a:rPr sz="1600" b="0" i="0">
                 <a:solidFill>
                   <a:srgbClr val="1F2433"/>
                 </a:solidFill>
                 <a:latin typeface="Arial"/>
               </a:rPr>
-              <a:t>Regra (definida antes da síntese): 1 representante por desfecho combinado, com numerador e denominador: Bieniek et al., 2022.</a:t>
+              <a:t>1 representante por desfecho, definido antes da síntese: Bieniek et al., 2022.</a:t>
             </a:r>
           </a:p>
           <a:p>
@@ -29713,19 +29873,19 @@
                 <a:spcPct val="100000"/>
               </a:lnSpc>
               <a:spcAft>
-                <a:spcPts val="500"/>
+                <a:spcPts val="600"/>
               </a:spcAft>
               <a:buFont typeface="Arial"/>
               <a:buChar char="•"/>
             </a:pPr>
             <a:r>
-              <a:rPr sz="1500" b="0" i="0">
+              <a:rPr sz="1600" b="0" i="0">
                 <a:solidFill>
                   <a:srgbClr val="1F2433"/>
                 </a:solidFill>
                 <a:latin typeface="Arial"/>
               </a:rPr>
-              <a:t>Resultado: nenhum participante contado duas vezes em qualquer agrupamento.</a:t>
+              <a:t>Nenhum participante contado duas vezes.</a:t>
             </a:r>
           </a:p>
         </p:txBody>
@@ -29816,22 +29976,22 @@
               <a:buNone/>
             </a:pPr>
             <a:r>
-              <a:rPr sz="1400" b="1" i="0">
+              <a:rPr sz="1500" b="1" i="0">
                 <a:solidFill>
                   <a:srgbClr val="002060"/>
                 </a:solidFill>
                 <a:latin typeface="Arial"/>
               </a:rPr>
-              <a:t>Relatórios não recuperados (n = 6): </a:t>
-            </a:r>
-            <a:r>
-              <a:rPr sz="1400" b="0" i="0">
+              <a:t>6 relatórios não recuperados </a:t>
+            </a:r>
+            <a:r>
+              <a:rPr sz="1500" b="0" i="0">
                 <a:solidFill>
                   <a:srgbClr val="1F2433"/>
                 </a:solidFill>
                 <a:latin typeface="Arial"/>
               </a:rPr>
-              <a:t>tentativas por acesso institucional, repositórios e preprints, páginas dos autores, comutação bibliográfica e contato com autores correspondentes. Entre eles, dois inquéritos de sintomas (Navarro-Meza 2013; Gjini 2025) e um estudo de olho seco → possível impacto na prevalência, registrado como limitação (Anexo C).</a:t>
+              <a:t>apesar de acesso institucional, repositórios, páginas dos autores, comutação e contato com autores. Entre eles, 2 inquéritos de sintomas e 1 estudo de olho seco → possível impacto na prevalência, declarado como limitação.</a:t>
             </a:r>
           </a:p>
         </p:txBody>
@@ -30834,13 +30994,13 @@
                 <a:spcPct val="100000"/>
               </a:lnSpc>
               <a:spcAft>
-                <a:spcPts val="500"/>
+                <a:spcPts val="600"/>
               </a:spcAft>
               <a:buFont typeface="Arial"/>
               <a:buChar char="•"/>
             </a:pPr>
             <a:r>
-              <a:rPr sz="1600" b="1" i="0">
+              <a:rPr sz="1700" b="1" i="0">
                 <a:solidFill>
                   <a:srgbClr val="1F2433"/>
                 </a:solidFill>
@@ -30849,13 +31009,13 @@
               <a:t>Planilha padronizada: </a:t>
             </a:r>
             <a:r>
-              <a:rPr sz="1600" b="0" i="0">
+              <a:rPr sz="1700" b="0" i="0">
                 <a:solidFill>
                   <a:srgbClr val="1F2433"/>
                 </a:solidFill>
                 <a:latin typeface="Arial"/>
               </a:rPr>
-              <a:t>autor, ano, país; desenho; população; dispositivo gerador; comparador; instrumento e definição operacional do desfecho; taxa de resposta; medidas de resultado.</a:t>
+              <a:t>autor, ano, país; desenho; população; dispositivo; comparador; instrumento e definição do desfecho; taxa de resposta; resultados.</a:t>
             </a:r>
           </a:p>
           <a:p>
@@ -30864,13 +31024,13 @@
                 <a:spcPct val="100000"/>
               </a:lnSpc>
               <a:spcAft>
-                <a:spcPts val="500"/>
+                <a:spcPts val="600"/>
               </a:spcAft>
               <a:buFont typeface="Arial"/>
               <a:buChar char="•"/>
             </a:pPr>
             <a:r>
-              <a:rPr sz="1600" b="1" i="0">
+              <a:rPr sz="1700" b="1" i="0">
                 <a:solidFill>
                   <a:srgbClr val="1F2433"/>
                 </a:solidFill>
@@ -30879,13 +31039,13 @@
               <a:t>Para a metanálise: </a:t>
             </a:r>
             <a:r>
-              <a:rPr sz="1600" b="0" i="0">
+              <a:rPr sz="1700" b="0" i="0">
                 <a:solidFill>
                   <a:srgbClr val="1F2433"/>
                 </a:solidFill>
                 <a:latin typeface="Arial"/>
               </a:rPr>
-              <a:t>número de eventos e denominador de cada grupo (Anexo D). Ex.: İlçe 2017, lacrimejamento: 33/81 = 40,7%.</a:t>
+              <a:t>eventos e denominador de cada grupo (Anexo D). Ex.: İlçe 2017, lacrimejamento: 33/81 = 40,7%.</a:t>
             </a:r>
           </a:p>
           <a:p>
@@ -30894,28 +31054,28 @@
                 <a:spcPct val="100000"/>
               </a:lnSpc>
               <a:spcAft>
-                <a:spcPts val="500"/>
+                <a:spcPts val="600"/>
               </a:spcAft>
               <a:buFont typeface="Arial"/>
               <a:buChar char="•"/>
             </a:pPr>
             <a:r>
-              <a:rPr sz="1600" b="1" i="0">
+              <a:rPr sz="1700" b="1" i="0">
                 <a:solidFill>
                   <a:srgbClr val="1F2433"/>
                 </a:solidFill>
                 <a:latin typeface="Arial"/>
               </a:rPr>
-              <a:t>Período de recordatório e validação do instrumento </a:t>
-            </a:r>
-            <a:r>
-              <a:rPr sz="1600" b="0" i="0">
+              <a:t>Recordatório, validação do instrumento e taxa de resposta </a:t>
+            </a:r>
+            <a:r>
+              <a:rPr sz="1700" b="0" i="0">
                 <a:solidFill>
                   <a:srgbClr val="1F2433"/>
                 </a:solidFill>
                 <a:latin typeface="Arial"/>
               </a:rPr>
-              <a:t>raramente informados → registrados como “não relatado”.</a:t>
+              <a:t>raramente informados → “não relatado” (limitação dos inquéritos).</a:t>
             </a:r>
           </a:p>
           <a:p>
@@ -30924,58 +31084,28 @@
                 <a:spcPct val="100000"/>
               </a:lnSpc>
               <a:spcAft>
-                <a:spcPts val="500"/>
+                <a:spcPts val="600"/>
               </a:spcAft>
               <a:buFont typeface="Arial"/>
               <a:buChar char="•"/>
             </a:pPr>
             <a:r>
-              <a:rPr sz="1600" b="1" i="0">
+              <a:rPr sz="1700" b="1" i="0">
                 <a:solidFill>
                   <a:srgbClr val="1F2433"/>
                 </a:solidFill>
                 <a:latin typeface="Arial"/>
               </a:rPr>
-              <a:t>Taxa de resposta </a:t>
-            </a:r>
-            <a:r>
-              <a:rPr sz="1600" b="0" i="0">
+              <a:t>Sem contato com autores; </a:t>
+            </a:r>
+            <a:r>
+              <a:rPr sz="1700" b="0" i="0">
                 <a:solidFill>
                   <a:srgbClr val="1F2433"/>
                 </a:solidFill>
                 <a:latin typeface="Arial"/>
               </a:rPr>
-              <a:t>extraída quando disponível; quase nunca relatada (limitação dos inquéritos).</a:t>
-            </a:r>
-          </a:p>
-          <a:p>
-            <a:pPr algn="l" marL="274320" indent="-274320">
-              <a:lnSpc>
-                <a:spcPct val="100000"/>
-              </a:lnSpc>
-              <a:spcAft>
-                <a:spcPts val="500"/>
-              </a:spcAft>
-              <a:buFont typeface="Arial"/>
-              <a:buChar char="•"/>
-            </a:pPr>
-            <a:r>
-              <a:rPr sz="1600" b="1" i="0">
-                <a:solidFill>
-                  <a:srgbClr val="1F2433"/>
-                </a:solidFill>
-                <a:latin typeface="Arial"/>
-              </a:rPr>
-              <a:t>Sem contato com autores </a:t>
-            </a:r>
-            <a:r>
-              <a:rPr sz="1600" b="0" i="0">
-                <a:solidFill>
-                  <a:srgbClr val="1F2433"/>
-                </a:solidFill>
-                <a:latin typeface="Arial"/>
-              </a:rPr>
-              <a:t>para dados adicionais; planilha completa pública no OSF.</a:t>
+              <a:t>planilha completa pública no OSF.</a:t>
             </a:r>
           </a:p>
         </p:txBody>
@@ -30988,7 +31118,7 @@
         </p:nvSpPr>
         <p:spPr>
           <a:xfrm>
-            <a:off x="1417320" y="6355080"/>
+            <a:off x="1417320" y="6263640"/>
             <a:ext cx="6126480" cy="365760"/>
           </a:xfrm>
           <a:prstGeom prst="rect">
@@ -31012,7 +31142,7 @@
               <a:buNone/>
             </a:pPr>
             <a:r>
-              <a:rPr sz="1400" b="1" i="0">
+              <a:rPr sz="1500" b="1" i="0">
                 <a:solidFill>
                   <a:srgbClr val="002060"/>
                 </a:solidFill>
@@ -31032,8 +31162,8 @@
           <p:nvPr/>
         </p:nvGraphicFramePr>
         <p:xfrm>
-          <a:off x="1417320" y="6720840"/>
-          <a:ext cx="6126480" cy="1828800"/>
+          <a:off x="1417320" y="6675120"/>
+          <a:ext cx="6126480" cy="1920240"/>
         </p:xfrm>
         <a:graphic>
           <a:graphicData uri="http://schemas.openxmlformats.org/drawingml/2006/table">
@@ -31046,7 +31176,7 @@
                 <a:gridCol w="777240"/>
                 <a:gridCol w="1691640"/>
               </a:tblGrid>
-              <a:tr h="365760">
+              <a:tr h="384048">
                 <a:tc>
                   <a:txBody>
                     <a:bodyPr wrap="square">
@@ -31064,7 +31194,7 @@
                         <a:buNone/>
                       </a:pPr>
                       <a:r>
-                        <a:rPr sz="1200" b="1" i="0">
+                        <a:rPr sz="1300" b="1" i="0">
                           <a:solidFill>
                             <a:srgbClr val="FFFFFF"/>
                           </a:solidFill>
@@ -31097,7 +31227,7 @@
                         <a:buNone/>
                       </a:pPr>
                       <a:r>
-                        <a:rPr sz="1200" b="1" i="0">
+                        <a:rPr sz="1300" b="1" i="0">
                           <a:solidFill>
                             <a:srgbClr val="FFFFFF"/>
                           </a:solidFill>
@@ -31130,7 +31260,7 @@
                         <a:buNone/>
                       </a:pPr>
                       <a:r>
-                        <a:rPr sz="1200" b="1" i="0">
+                        <a:rPr sz="1300" b="1" i="0">
                           <a:solidFill>
                             <a:srgbClr val="FFFFFF"/>
                           </a:solidFill>
@@ -31163,7 +31293,7 @@
                         <a:buNone/>
                       </a:pPr>
                       <a:r>
-                        <a:rPr sz="1200" b="1" i="0">
+                        <a:rPr sz="1300" b="1" i="0">
                           <a:solidFill>
                             <a:srgbClr val="FFFFFF"/>
                           </a:solidFill>
@@ -31196,7 +31326,7 @@
                         <a:buNone/>
                       </a:pPr>
                       <a:r>
-                        <a:rPr sz="1200" b="1" i="0">
+                        <a:rPr sz="1300" b="1" i="0">
                           <a:solidFill>
                             <a:srgbClr val="FFFFFF"/>
                           </a:solidFill>
@@ -31213,7 +31343,7 @@
                   </a:tcPr>
                 </a:tc>
               </a:tr>
-              <a:tr h="365760">
+              <a:tr h="384048">
                 <a:tc>
                   <a:txBody>
                     <a:bodyPr wrap="square">
@@ -31231,7 +31361,7 @@
                         <a:buNone/>
                       </a:pPr>
                       <a:r>
-                        <a:rPr sz="1200" b="0" i="0">
+                        <a:rPr sz="1300" b="0" i="0">
                           <a:solidFill>
                             <a:srgbClr val="1F2433"/>
                           </a:solidFill>
@@ -31264,7 +31394,7 @@
                         <a:buNone/>
                       </a:pPr>
                       <a:r>
-                        <a:rPr sz="1200" b="0" i="0">
+                        <a:rPr sz="1300" b="0" i="0">
                           <a:solidFill>
                             <a:srgbClr val="1F2433"/>
                           </a:solidFill>
@@ -31297,7 +31427,7 @@
                         <a:buNone/>
                       </a:pPr>
                       <a:r>
-                        <a:rPr sz="1200" b="0" i="0">
+                        <a:rPr sz="1300" b="0" i="0">
                           <a:solidFill>
                             <a:srgbClr val="1F2433"/>
                           </a:solidFill>
@@ -31330,7 +31460,7 @@
                         <a:buNone/>
                       </a:pPr>
                       <a:r>
-                        <a:rPr sz="1200" b="0" i="0">
+                        <a:rPr sz="1300" b="0" i="0">
                           <a:solidFill>
                             <a:srgbClr val="1F2433"/>
                           </a:solidFill>
@@ -31363,7 +31493,7 @@
                         <a:buNone/>
                       </a:pPr>
                       <a:r>
-                        <a:rPr sz="1200" b="0" i="0">
+                        <a:rPr sz="1300" b="0" i="0">
                           <a:solidFill>
                             <a:srgbClr val="1F2433"/>
                           </a:solidFill>
@@ -31380,7 +31510,7 @@
                   </a:tcPr>
                 </a:tc>
               </a:tr>
-              <a:tr h="365760">
+              <a:tr h="384048">
                 <a:tc>
                   <a:txBody>
                     <a:bodyPr wrap="square">
@@ -31398,7 +31528,7 @@
                         <a:buNone/>
                       </a:pPr>
                       <a:r>
-                        <a:rPr sz="1200" b="0" i="0">
+                        <a:rPr sz="1300" b="0" i="0">
                           <a:solidFill>
                             <a:srgbClr val="1F2433"/>
                           </a:solidFill>
@@ -31431,7 +31561,7 @@
                         <a:buNone/>
                       </a:pPr>
                       <a:r>
-                        <a:rPr sz="1200" b="0" i="0">
+                        <a:rPr sz="1300" b="0" i="0">
                           <a:solidFill>
                             <a:srgbClr val="1F2433"/>
                           </a:solidFill>
@@ -31464,7 +31594,7 @@
                         <a:buNone/>
                       </a:pPr>
                       <a:r>
-                        <a:rPr sz="1200" b="0" i="0">
+                        <a:rPr sz="1300" b="0" i="0">
                           <a:solidFill>
                             <a:srgbClr val="1F2433"/>
                           </a:solidFill>
@@ -31497,7 +31627,7 @@
                         <a:buNone/>
                       </a:pPr>
                       <a:r>
-                        <a:rPr sz="1200" b="0" i="0">
+                        <a:rPr sz="1300" b="0" i="0">
                           <a:solidFill>
                             <a:srgbClr val="1F2433"/>
                           </a:solidFill>
@@ -31530,7 +31660,7 @@
                         <a:buNone/>
                       </a:pPr>
                       <a:r>
-                        <a:rPr sz="1200" b="0" i="0">
+                        <a:rPr sz="1300" b="0" i="0">
                           <a:solidFill>
                             <a:srgbClr val="1F2433"/>
                           </a:solidFill>
@@ -31547,7 +31677,7 @@
                   </a:tcPr>
                 </a:tc>
               </a:tr>
-              <a:tr h="365760">
+              <a:tr h="384048">
                 <a:tc>
                   <a:txBody>
                     <a:bodyPr wrap="square">
@@ -31565,7 +31695,7 @@
                         <a:buNone/>
                       </a:pPr>
                       <a:r>
-                        <a:rPr sz="1200" b="0" i="0">
+                        <a:rPr sz="1300" b="0" i="0">
                           <a:solidFill>
                             <a:srgbClr val="1F2433"/>
                           </a:solidFill>
@@ -31598,7 +31728,7 @@
                         <a:buNone/>
                       </a:pPr>
                       <a:r>
-                        <a:rPr sz="1200" b="0" i="0">
+                        <a:rPr sz="1300" b="0" i="0">
                           <a:solidFill>
                             <a:srgbClr val="1F2433"/>
                           </a:solidFill>
@@ -31631,7 +31761,7 @@
                         <a:buNone/>
                       </a:pPr>
                       <a:r>
-                        <a:rPr sz="1200" b="0" i="0">
+                        <a:rPr sz="1300" b="0" i="0">
                           <a:solidFill>
                             <a:srgbClr val="1F2433"/>
                           </a:solidFill>
@@ -31664,7 +31794,7 @@
                         <a:buNone/>
                       </a:pPr>
                       <a:r>
-                        <a:rPr sz="1200" b="0" i="0">
+                        <a:rPr sz="1300" b="0" i="0">
                           <a:solidFill>
                             <a:srgbClr val="1F2433"/>
                           </a:solidFill>
@@ -31697,7 +31827,7 @@
                         <a:buNone/>
                       </a:pPr>
                       <a:r>
-                        <a:rPr sz="1200" b="0" i="0">
+                        <a:rPr sz="1300" b="0" i="0">
                           <a:solidFill>
                             <a:srgbClr val="1F2433"/>
                           </a:solidFill>
@@ -31714,7 +31844,7 @@
                   </a:tcPr>
                 </a:tc>
               </a:tr>
-              <a:tr h="365760">
+              <a:tr h="384048">
                 <a:tc>
                   <a:txBody>
                     <a:bodyPr wrap="square">
@@ -31732,7 +31862,7 @@
                         <a:buNone/>
                       </a:pPr>
                       <a:r>
-                        <a:rPr sz="1200" b="0" i="0">
+                        <a:rPr sz="1300" b="0" i="0">
                           <a:solidFill>
                             <a:srgbClr val="1F2433"/>
                           </a:solidFill>
@@ -31765,7 +31895,7 @@
                         <a:buNone/>
                       </a:pPr>
                       <a:r>
-                        <a:rPr sz="1200" b="0" i="0">
+                        <a:rPr sz="1300" b="0" i="0">
                           <a:solidFill>
                             <a:srgbClr val="1F2433"/>
                           </a:solidFill>
@@ -31798,7 +31928,7 @@
                         <a:buNone/>
                       </a:pPr>
                       <a:r>
-                        <a:rPr sz="1200" b="0" i="0">
+                        <a:rPr sz="1300" b="0" i="0">
                           <a:solidFill>
                             <a:srgbClr val="1F2433"/>
                           </a:solidFill>
@@ -31831,7 +31961,7 @@
                         <a:buNone/>
                       </a:pPr>
                       <a:r>
-                        <a:rPr sz="1200" b="0" i="0">
+                        <a:rPr sz="1300" b="0" i="0">
                           <a:solidFill>
                             <a:srgbClr val="1F2433"/>
                           </a:solidFill>
@@ -31864,7 +31994,7 @@
                         <a:buNone/>
                       </a:pPr>
                       <a:r>
-                        <a:rPr sz="1200" b="0" i="0">
+                        <a:rPr sz="1300" b="0" i="0">
                           <a:solidFill>
                             <a:srgbClr val="1F2433"/>
                           </a:solidFill>
@@ -32076,7 +32206,7 @@
               <a:buNone/>
             </a:pPr>
             <a:r>
-              <a:rPr sz="1300" b="0" i="0">
+              <a:rPr sz="1400" b="0" i="0">
                 <a:solidFill>
                   <a:srgbClr val="5A6270"/>
                 </a:solidFill>
@@ -32235,7 +32365,7 @@
               <a:buNone/>
             </a:pPr>
             <a:r>
-              <a:rPr sz="1300" b="0" i="0">
+              <a:rPr sz="1400" b="0" i="0">
                 <a:solidFill>
                   <a:srgbClr val="5A6270"/>
                 </a:solidFill>
@@ -32394,7 +32524,7 @@
               <a:buNone/>
             </a:pPr>
             <a:r>
-              <a:rPr sz="1300" b="0" i="0">
+              <a:rPr sz="1400" b="0" i="0">
                 <a:solidFill>
                   <a:srgbClr val="5A6270"/>
                 </a:solidFill>
@@ -32437,22 +32567,22 @@
               <a:buNone/>
             </a:pPr>
             <a:r>
-              <a:rPr sz="1400" b="1" i="0">
+              <a:rPr sz="1500" b="1" i="0">
                 <a:solidFill>
                   <a:srgbClr val="002060"/>
                 </a:solidFill>
                 <a:latin typeface="Arial"/>
               </a:rPr>
-              <a:t>Regra do julgamento global: </a:t>
-            </a:r>
-            <a:r>
-              <a:rPr sz="1400" b="0" i="0">
+              <a:t>Julgamento global: </a:t>
+            </a:r>
+            <a:r>
+              <a:rPr sz="1500" b="0" i="0">
                 <a:solidFill>
                   <a:srgbClr val="1F2433"/>
                 </a:solidFill>
                 <a:latin typeface="Arial"/>
               </a:rPr>
-              <a:t>qualitativo, orientado pelos domínios críticos (amostragem, tamanho amostral, validade da mensuração e taxa de resposta), não por corte percentual. “Não” pesou mais do que “incerto”. Nenhuma pontuação foi combinada entre instrumentos. Todos os estudos foram mantidos; a classificação alimentou o GRADE.</a:t>
+              <a:t>qualitativo, pelos domínios críticos (amostragem, tamanho amostral, validade da mensuração, taxa de resposta), não por corte percentual; “não” pesou mais que “incerto”; pontuações não combinadas entre instrumentos. Todos os estudos foram mantidos e a classificação alimentou o GRADE.</a:t>
             </a:r>
           </a:p>
         </p:txBody>
@@ -32473,8 +32603,8 @@
         </p:blipFill>
         <p:spPr>
           <a:xfrm>
-            <a:off x="8828668" y="4663440"/>
-            <a:ext cx="8220182" cy="3749039"/>
+            <a:off x="9129406" y="4663440"/>
+            <a:ext cx="7618706" cy="3474720"/>
           </a:xfrm>
           <a:prstGeom prst="rect">
             <a:avLst/>
@@ -32489,8 +32619,8 @@
         </p:nvSpPr>
         <p:spPr>
           <a:xfrm>
-            <a:off x="8092440" y="8430768"/>
-            <a:ext cx="9692640" cy="685800"/>
+            <a:off x="8092440" y="8211312"/>
+            <a:ext cx="9692640" cy="868680"/>
           </a:xfrm>
           <a:prstGeom prst="rect">
             <a:avLst/>
@@ -32513,7 +32643,7 @@
               <a:buNone/>
             </a:pPr>
             <a:r>
-              <a:rPr sz="1300" b="1" i="0">
+              <a:rPr sz="1400" b="1" i="0">
                 <a:solidFill>
                   <a:srgbClr val="1F2433"/>
                 </a:solidFill>
@@ -32522,7 +32652,7 @@
               <a:t>Figura E1. </a:t>
             </a:r>
             <a:r>
-              <a:rPr sz="1300" b="0" i="0">
+              <a:rPr sz="1400" b="0" i="0">
                 <a:solidFill>
                   <a:srgbClr val="1F2433"/>
                 </a:solidFill>
@@ -32531,7 +32661,7 @@
               <a:t>Sete estudos das metanálises. </a:t>
             </a:r>
             <a:r>
-              <a:rPr sz="1300" b="1" i="0">
+              <a:rPr sz="1400" b="1" i="0">
                 <a:solidFill>
                   <a:srgbClr val="2E7D32"/>
                 </a:solidFill>
@@ -32540,7 +32670,7 @@
               <a:t>+ sim  </a:t>
             </a:r>
             <a:r>
-              <a:rPr sz="1300" b="1" i="0">
+              <a:rPr sz="1400" b="1" i="0">
                 <a:solidFill>
                   <a:srgbClr val="E08A1E"/>
                 </a:solidFill>
@@ -32549,7 +32679,7 @@
               <a:t>? incerto  </a:t>
             </a:r>
             <a:r>
-              <a:rPr sz="1300" b="1" i="0">
+              <a:rPr sz="1400" b="1" i="0">
                 <a:solidFill>
                   <a:srgbClr val="8B0000"/>
                 </a:solidFill>
@@ -32558,7 +32688,7 @@
               <a:t>− não.  </a:t>
             </a:r>
             <a:r>
-              <a:rPr sz="1300" b="0" i="0">
+              <a:rPr sz="1400" b="0" i="0">
                 <a:solidFill>
                   <a:srgbClr val="1F2433"/>
                 </a:solidFill>
@@ -32578,7 +32708,7 @@
               <a:buNone/>
             </a:pPr>
             <a:r>
-              <a:rPr sz="1300" b="1" i="0">
+              <a:rPr sz="1400" b="1" i="0">
                 <a:solidFill>
                   <a:srgbClr val="002060"/>
                 </a:solidFill>
@@ -32587,7 +32717,7 @@
               <a:t>Itens: </a:t>
             </a:r>
             <a:r>
-              <a:rPr sz="1300" b="0" i="0">
+              <a:rPr sz="1400" b="0" i="0">
                 <a:solidFill>
                   <a:srgbClr val="1F2433"/>
                 </a:solidFill>
@@ -33668,7 +33798,7 @@
                 <a:spcPct val="100000"/>
               </a:lnSpc>
               <a:spcAft>
-                <a:spcPts val="500"/>
+                <a:spcPts val="600"/>
               </a:spcAft>
               <a:buClr>
                 <a:srgbClr val="002060"/>
@@ -33677,7 +33807,7 @@
               <a:buChar char="•"/>
             </a:pPr>
             <a:r>
-              <a:rPr sz="1500" b="0" i="0">
+              <a:rPr sz="1600" b="0" i="0">
                 <a:solidFill>
                   <a:srgbClr val="1F2433"/>
                 </a:solidFill>
@@ -33692,7 +33822,7 @@
                 <a:spcPct val="100000"/>
               </a:lnSpc>
               <a:spcAft>
-                <a:spcPts val="500"/>
+                <a:spcPts val="600"/>
               </a:spcAft>
               <a:buClr>
                 <a:srgbClr val="002060"/>
@@ -33701,13 +33831,13 @@
               <a:buChar char="•"/>
             </a:pPr>
             <a:r>
-              <a:rPr sz="1500" b="0" i="0">
+              <a:rPr sz="1600" b="0" i="0">
                 <a:solidFill>
                   <a:srgbClr val="1F2433"/>
                 </a:solidFill>
                 <a:latin typeface="Arial"/>
               </a:rPr>
-              <a:t>IC95% individual pelo método de Wilson (melhor que o normal para proporções).</a:t>
+              <a:t>IC95% de cada estudo pelo método de Wilson.</a:t>
             </a:r>
           </a:p>
         </p:txBody>
@@ -33958,7 +34088,7 @@
                 <a:spcPct val="100000"/>
               </a:lnSpc>
               <a:spcAft>
-                <a:spcPts val="500"/>
+                <a:spcPts val="600"/>
               </a:spcAft>
               <a:buClr>
                 <a:srgbClr val="002060"/>
@@ -33967,13 +34097,13 @@
               <a:buChar char="•"/>
             </a:pPr>
             <a:r>
-              <a:rPr sz="1500" b="0" i="0">
+              <a:rPr sz="1600" b="0" i="0">
                 <a:solidFill>
                   <a:srgbClr val="1F2433"/>
                 </a:solidFill>
                 <a:latin typeface="Arial"/>
               </a:rPr>
-              <a:t>Leva a proporção (0 a 1) para a escala de −∞ a +∞.</a:t>
+              <a:t>Leva a proporção (0 a 1) para a escala −∞ a +∞.</a:t>
             </a:r>
           </a:p>
           <a:p>
@@ -33982,7 +34112,7 @@
                 <a:spcPct val="100000"/>
               </a:lnSpc>
               <a:spcAft>
-                <a:spcPts val="500"/>
+                <a:spcPts val="600"/>
               </a:spcAft>
               <a:buClr>
                 <a:srgbClr val="002060"/>
@@ -33991,13 +34121,13 @@
               <a:buChar char="•"/>
             </a:pPr>
             <a:r>
-              <a:rPr sz="1500" b="0" i="0">
+              <a:rPr sz="1600" b="0" i="0">
                 <a:solidFill>
                   <a:srgbClr val="1F2433"/>
                 </a:solidFill>
                 <a:latin typeface="Arial"/>
               </a:rPr>
-              <a:t>Aproxima a distribuição da normal e garante que a estimativa e os IC fiquem entre 0 e 100%.</a:t>
+              <a:t>Aproxima da normal e mantém estimativa e IC entre 0 e 100%.</a:t>
             </a:r>
           </a:p>
           <a:p>
@@ -34006,7 +34136,7 @@
                 <a:spcPct val="100000"/>
               </a:lnSpc>
               <a:spcAft>
-                <a:spcPts val="500"/>
+                <a:spcPts val="600"/>
               </a:spcAft>
               <a:buClr>
                 <a:srgbClr val="002060"/>
@@ -34015,7 +34145,7 @@
               <a:buChar char="•"/>
             </a:pPr>
             <a:r>
-              <a:rPr sz="1500" b="0" i="0">
+              <a:rPr sz="1600" b="0" i="0">
                 <a:solidFill>
                   <a:srgbClr val="1F2433"/>
                 </a:solidFill>
@@ -34272,7 +34402,7 @@
                 <a:spcPct val="100000"/>
               </a:lnSpc>
               <a:spcAft>
-                <a:spcPts val="500"/>
+                <a:spcPts val="600"/>
               </a:spcAft>
               <a:buClr>
                 <a:srgbClr val="002060"/>
@@ -34281,13 +34411,13 @@
               <a:buChar char="•"/>
             </a:pPr>
             <a:r>
-              <a:rPr sz="1500" b="0" i="0">
+              <a:rPr sz="1600" b="0" i="0">
                 <a:solidFill>
                   <a:srgbClr val="1F2433"/>
                 </a:solidFill>
                 <a:latin typeface="Arial"/>
               </a:rPr>
-              <a:t>Assume que a prevalência verdadeira varia entre estudos.</a:t>
+              <a:t>A prevalência verdadeira varia entre estudos.</a:t>
             </a:r>
           </a:p>
           <a:p>
@@ -34296,7 +34426,7 @@
                 <a:spcPct val="100000"/>
               </a:lnSpc>
               <a:spcAft>
-                <a:spcPts val="500"/>
+                <a:spcPts val="600"/>
               </a:spcAft>
               <a:buClr>
                 <a:srgbClr val="002060"/>
@@ -34305,13 +34435,13 @@
               <a:buChar char="•"/>
             </a:pPr>
             <a:r>
-              <a:rPr sz="1500" b="0" i="0">
+              <a:rPr sz="1600" b="0" i="0">
                 <a:solidFill>
                   <a:srgbClr val="1F2433"/>
                 </a:solidFill>
                 <a:latin typeface="Arial"/>
               </a:rPr>
-              <a:t>τ² = variância entre estudos; peso de cada estudo = 1 ÷ (variância interna + τ²).</a:t>
+              <a:t>τ² = variância entre estudos; peso = 1 ÷ (variância + τ²).</a:t>
             </a:r>
           </a:p>
           <a:p>
@@ -34320,7 +34450,7 @@
                 <a:spcPct val="100000"/>
               </a:lnSpc>
               <a:spcAft>
-                <a:spcPts val="500"/>
+                <a:spcPts val="600"/>
               </a:spcAft>
               <a:buClr>
                 <a:srgbClr val="002060"/>
@@ -34329,13 +34459,13 @@
               <a:buChar char="•"/>
             </a:pPr>
             <a:r>
-              <a:rPr sz="1500" b="0" i="0">
+              <a:rPr sz="1600" b="0" i="0">
                 <a:solidFill>
                   <a:srgbClr val="1F2433"/>
                 </a:solidFill>
                 <a:latin typeface="Arial"/>
               </a:rPr>
-              <a:t>Paule-Mandel é mais estável que DerSimonian-Laird com poucos estudos.</a:t>
+              <a:t>Paule-Mandel: mais estável que DerSimonian-Laird com poucos estudos.</a:t>
             </a:r>
           </a:p>
         </p:txBody>
@@ -34586,7 +34716,7 @@
                 <a:spcPct val="100000"/>
               </a:lnSpc>
               <a:spcAft>
-                <a:spcPts val="500"/>
+                <a:spcPts val="600"/>
               </a:spcAft>
               <a:buClr>
                 <a:srgbClr val="002060"/>
@@ -34595,13 +34725,13 @@
               <a:buChar char="•"/>
             </a:pPr>
             <a:r>
-              <a:rPr sz="1500" b="0" i="0">
+              <a:rPr sz="1600" b="0" i="0">
                 <a:solidFill>
                   <a:srgbClr val="1F2433"/>
                 </a:solidFill>
                 <a:latin typeface="Arial"/>
               </a:rPr>
-              <a:t>Usa k − 1 graus de liberdade e corrige o IC da estimativa combinada quando há poucos estudos e heterogeneidade alta.</a:t>
+              <a:t>Usa t com k − 1 graus de liberdade.</a:t>
             </a:r>
           </a:p>
           <a:p>
@@ -34610,7 +34740,7 @@
                 <a:spcPct val="100000"/>
               </a:lnSpc>
               <a:spcAft>
-                <a:spcPts val="500"/>
+                <a:spcPts val="600"/>
               </a:spcAft>
               <a:buClr>
                 <a:srgbClr val="002060"/>
@@ -34619,13 +34749,13 @@
               <a:buChar char="•"/>
             </a:pPr>
             <a:r>
-              <a:rPr sz="1500" b="0" i="0">
+              <a:rPr sz="1600" b="0" i="0">
                 <a:solidFill>
                   <a:srgbClr val="1F2433"/>
                 </a:solidFill>
                 <a:latin typeface="Arial"/>
               </a:rPr>
-              <a:t>Produz intervalos mais honestos (geralmente mais largos) do que o método clássico (IntHout et al., 2014).</a:t>
+              <a:t>IC mais honesto (em geral mais largo) com poucos estudos e alta heterogeneidade (IntHout et al., 2014).</a:t>
             </a:r>
           </a:p>
         </p:txBody>
@@ -34876,7 +35006,7 @@
                 <a:spcPct val="100000"/>
               </a:lnSpc>
               <a:spcAft>
-                <a:spcPts val="500"/>
+                <a:spcPts val="600"/>
               </a:spcAft>
               <a:buClr>
                 <a:srgbClr val="002060"/>
@@ -34885,13 +35015,13 @@
               <a:buChar char="•"/>
             </a:pPr>
             <a:r>
-              <a:rPr sz="1500" b="0" i="0">
+              <a:rPr sz="1600" b="0" i="0">
                 <a:solidFill>
                   <a:srgbClr val="1F2433"/>
                 </a:solidFill>
                 <a:latin typeface="Arial"/>
               </a:rPr>
-              <a:t>Retrotransformação do logito para porcentagem.</a:t>
+              <a:t>Retrotransformação para porcentagem.</a:t>
             </a:r>
           </a:p>
           <a:p>
@@ -34900,7 +35030,7 @@
                 <a:spcPct val="100000"/>
               </a:lnSpc>
               <a:spcAft>
-                <a:spcPts val="500"/>
+                <a:spcPts val="600"/>
               </a:spcAft>
               <a:buClr>
                 <a:srgbClr val="002060"/>
@@ -34909,13 +35039,13 @@
               <a:buChar char="•"/>
             </a:pPr>
             <a:r>
-              <a:rPr sz="1500" b="0" i="0">
+              <a:rPr sz="1600" b="0" i="0">
                 <a:solidFill>
                   <a:srgbClr val="1F2433"/>
                 </a:solidFill>
                 <a:latin typeface="Arial"/>
               </a:rPr>
-              <a:t>I² = % da variação total devida à heterogeneidade.</a:t>
+              <a:t>I² = % da variação devida à heterogeneidade.</a:t>
             </a:r>
           </a:p>
           <a:p>
@@ -34924,7 +35054,7 @@
                 <a:spcPct val="100000"/>
               </a:lnSpc>
               <a:spcAft>
-                <a:spcPts val="500"/>
+                <a:spcPts val="600"/>
               </a:spcAft>
               <a:buClr>
                 <a:srgbClr val="002060"/>
@@ -34933,13 +35063,13 @@
               <a:buChar char="•"/>
             </a:pPr>
             <a:r>
-              <a:rPr sz="1500" b="0" i="0">
+              <a:rPr sz="1600" b="0" i="0">
                 <a:solidFill>
                   <a:srgbClr val="1F2433"/>
                 </a:solidFill>
                 <a:latin typeface="Arial"/>
               </a:rPr>
-              <a:t>Intervalo de predição = faixa esperada para um novo estudo (Riley et al., 2011); instável com k &lt; 10.</a:t>
+              <a:t>Intervalo de predição: faixa esperada para um novo estudo; instável com k &lt; 10.</a:t>
             </a:r>
           </a:p>
         </p:txBody>
@@ -35005,7 +35135,7 @@
         <p:spPr>
           <a:xfrm>
             <a:off x="1143000" y="6720840"/>
-            <a:ext cx="2651760" cy="1005840"/>
+            <a:ext cx="2651760" cy="1051560"/>
           </a:xfrm>
           <a:prstGeom prst="roundRect">
             <a:avLst>
@@ -35058,7 +35188,7 @@
               <a:buNone/>
             </a:pPr>
             <a:r>
-              <a:rPr sz="1500" b="1" i="0">
+              <a:rPr sz="1600" b="1" i="0">
                 <a:solidFill>
                   <a:srgbClr val="0E7C86"/>
                 </a:solidFill>
@@ -35077,8 +35207,8 @@
         </p:nvSpPr>
         <p:spPr>
           <a:xfrm>
-            <a:off x="1280160" y="7114032"/>
-            <a:ext cx="2377440" cy="594360"/>
+            <a:off x="1280160" y="7132320"/>
+            <a:ext cx="2377440" cy="640080"/>
           </a:xfrm>
           <a:prstGeom prst="rect">
             <a:avLst/>
@@ -35101,13 +35231,13 @@
               <a:buNone/>
             </a:pPr>
             <a:r>
-              <a:rPr sz="1300" b="0" i="0">
+              <a:rPr sz="1400" b="0" i="0">
                 <a:solidFill>
                   <a:srgbClr val="1F2433"/>
                 </a:solidFill>
                 <a:latin typeface="Arial"/>
               </a:rPr>
-              <a:t>duplo-arcoseno, DerSimonian-Laird</a:t>
+              <a:t>duplo-arcoseno (DerSimonian-Laird)</a:t>
             </a:r>
           </a:p>
         </p:txBody>
@@ -35121,7 +35251,7 @@
         <p:spPr>
           <a:xfrm>
             <a:off x="3941064" y="6720840"/>
-            <a:ext cx="2651760" cy="1005840"/>
+            <a:ext cx="2651760" cy="1051560"/>
           </a:xfrm>
           <a:prstGeom prst="roundRect">
             <a:avLst>
@@ -35174,7 +35304,7 @@
               <a:buNone/>
             </a:pPr>
             <a:r>
-              <a:rPr sz="1500" b="1" i="0">
+              <a:rPr sz="1600" b="1" i="0">
                 <a:solidFill>
                   <a:srgbClr val="0E7C86"/>
                 </a:solidFill>
@@ -35193,8 +35323,8 @@
         </p:nvSpPr>
         <p:spPr>
           <a:xfrm>
-            <a:off x="4078224" y="7114032"/>
-            <a:ext cx="2377440" cy="594360"/>
+            <a:off x="4078224" y="7132320"/>
+            <a:ext cx="2377440" cy="640080"/>
           </a:xfrm>
           <a:prstGeom prst="rect">
             <a:avLst/>
@@ -35217,7 +35347,7 @@
               <a:buNone/>
             </a:pPr>
             <a:r>
-              <a:rPr sz="1300" b="0" i="0">
+              <a:rPr sz="1400" b="0" i="0">
                 <a:solidFill>
                   <a:srgbClr val="1F2433"/>
                 </a:solidFill>
@@ -35237,7 +35367,7 @@
         <p:spPr>
           <a:xfrm>
             <a:off x="6739128" y="6720840"/>
-            <a:ext cx="2651760" cy="1005840"/>
+            <a:ext cx="2651760" cy="1051560"/>
           </a:xfrm>
           <a:prstGeom prst="roundRect">
             <a:avLst>
@@ -35290,7 +35420,7 @@
               <a:buNone/>
             </a:pPr>
             <a:r>
-              <a:rPr sz="1500" b="1" i="0">
+              <a:rPr sz="1600" b="1" i="0">
                 <a:solidFill>
                   <a:srgbClr val="0E7C86"/>
                 </a:solidFill>
@@ -35309,8 +35439,8 @@
         </p:nvSpPr>
         <p:spPr>
           <a:xfrm>
-            <a:off x="6876288" y="7114032"/>
-            <a:ext cx="2377440" cy="594360"/>
+            <a:off x="6876288" y="7132320"/>
+            <a:ext cx="2377440" cy="640080"/>
           </a:xfrm>
           <a:prstGeom prst="rect">
             <a:avLst/>
@@ -35333,7 +35463,7 @@
               <a:buNone/>
             </a:pPr>
             <a:r>
-              <a:rPr sz="1300" b="0" i="0">
+              <a:rPr sz="1400" b="0" i="0">
                 <a:solidFill>
                   <a:srgbClr val="1F2433"/>
                 </a:solidFill>
@@ -35353,7 +35483,7 @@
         <p:spPr>
           <a:xfrm>
             <a:off x="9537192" y="6720840"/>
-            <a:ext cx="2651760" cy="1005840"/>
+            <a:ext cx="2651760" cy="1051560"/>
           </a:xfrm>
           <a:prstGeom prst="roundRect">
             <a:avLst>
@@ -35406,7 +35536,7 @@
               <a:buNone/>
             </a:pPr>
             <a:r>
-              <a:rPr sz="1500" b="1" i="0">
+              <a:rPr sz="1600" b="1" i="0">
                 <a:solidFill>
                   <a:srgbClr val="0E7C86"/>
                 </a:solidFill>
@@ -35425,8 +35555,8 @@
         </p:nvSpPr>
         <p:spPr>
           <a:xfrm>
-            <a:off x="9674352" y="7114032"/>
-            <a:ext cx="2377440" cy="594360"/>
+            <a:off x="9674352" y="7132320"/>
+            <a:ext cx="2377440" cy="640080"/>
           </a:xfrm>
           <a:prstGeom prst="rect">
             <a:avLst/>
@@ -35449,7 +35579,7 @@
               <a:buNone/>
             </a:pPr>
             <a:r>
-              <a:rPr sz="1300" b="0" i="0">
+              <a:rPr sz="1400" b="0" i="0">
                 <a:solidFill>
                   <a:srgbClr val="1F2433"/>
                 </a:solidFill>
@@ -35469,7 +35599,7 @@
         <p:spPr>
           <a:xfrm>
             <a:off x="12335256" y="6720840"/>
-            <a:ext cx="2651760" cy="1005840"/>
+            <a:ext cx="2651760" cy="1051560"/>
           </a:xfrm>
           <a:prstGeom prst="roundRect">
             <a:avLst>
@@ -35522,7 +35652,7 @@
               <a:buNone/>
             </a:pPr>
             <a:r>
-              <a:rPr sz="1500" b="1" i="0">
+              <a:rPr sz="1600" b="1" i="0">
                 <a:solidFill>
                   <a:srgbClr val="0E7C86"/>
                 </a:solidFill>
@@ -35541,8 +35671,8 @@
         </p:nvSpPr>
         <p:spPr>
           <a:xfrm>
-            <a:off x="12472416" y="7114032"/>
-            <a:ext cx="2377440" cy="594360"/>
+            <a:off x="12472416" y="7132320"/>
+            <a:ext cx="2377440" cy="640080"/>
           </a:xfrm>
           <a:prstGeom prst="rect">
             <a:avLst/>
@@ -35565,7 +35695,7 @@
               <a:buNone/>
             </a:pPr>
             <a:r>
-              <a:rPr sz="1300" b="0" i="0">
+              <a:rPr sz="1400" b="0" i="0">
                 <a:solidFill>
                   <a:srgbClr val="1F2433"/>
                 </a:solidFill>
@@ -35585,7 +35715,7 @@
         <p:spPr>
           <a:xfrm>
             <a:off x="15133320" y="6720840"/>
-            <a:ext cx="2651760" cy="1005840"/>
+            <a:ext cx="2651760" cy="1051560"/>
           </a:xfrm>
           <a:prstGeom prst="roundRect">
             <a:avLst>
@@ -35638,7 +35768,7 @@
               <a:buNone/>
             </a:pPr>
             <a:r>
-              <a:rPr sz="1500" b="1" i="0">
+              <a:rPr sz="1600" b="1" i="0">
                 <a:solidFill>
                   <a:srgbClr val="0E7C86"/>
                 </a:solidFill>
@@ -35657,8 +35787,8 @@
         </p:nvSpPr>
         <p:spPr>
           <a:xfrm>
-            <a:off x="15270480" y="7114032"/>
-            <a:ext cx="2377440" cy="594360"/>
+            <a:off x="15270480" y="7132320"/>
+            <a:ext cx="2377440" cy="640080"/>
           </a:xfrm>
           <a:prstGeom prst="rect">
             <a:avLst/>
@@ -35681,7 +35811,7 @@
               <a:buNone/>
             </a:pPr>
             <a:r>
-              <a:rPr sz="1300" b="0" i="0">
+              <a:rPr sz="1400" b="0" i="0">
                 <a:solidFill>
                   <a:srgbClr val="1F2433"/>
                 </a:solidFill>
@@ -35700,8 +35830,8 @@
         </p:nvSpPr>
         <p:spPr>
           <a:xfrm>
-            <a:off x="1143000" y="7909560"/>
-            <a:ext cx="16642080" cy="1097280"/>
+            <a:off x="1143000" y="7955279"/>
+            <a:ext cx="16642080" cy="1051560"/>
           </a:xfrm>
           <a:prstGeom prst="roundRect">
             <a:avLst>
@@ -35738,7 +35868,7 @@
         </p:blipFill>
         <p:spPr>
           <a:xfrm>
-            <a:off x="1371600" y="8183879"/>
+            <a:off x="1371600" y="8211312"/>
             <a:ext cx="548640" cy="548640"/>
           </a:xfrm>
           <a:prstGeom prst="rect">
@@ -35754,8 +35884,8 @@
         </p:nvSpPr>
         <p:spPr>
           <a:xfrm>
-            <a:off x="2103120" y="7973568"/>
-            <a:ext cx="15636240" cy="1005840"/>
+            <a:off x="2103120" y="8001000"/>
+            <a:ext cx="15636240" cy="960120"/>
           </a:xfrm>
           <a:prstGeom prst="rect">
             <a:avLst/>
@@ -35778,25 +35908,25 @@
               <a:buNone/>
             </a:pPr>
             <a:r>
-              <a:rPr sz="1500" b="1" i="0">
+              <a:rPr sz="1600" b="1" i="0">
                 <a:solidFill>
                   <a:srgbClr val="002060"/>
                 </a:solidFill>
                 <a:latin typeface="Arial"/>
               </a:rPr>
-              <a:t>Por que não fizemos gráfico de funil nem teste de Egger? </a:t>
-            </a:r>
-            <a:r>
-              <a:rPr sz="1500" b="0" i="0">
+              <a:t>Sem gráfico de funil nem teste de Egger: </a:t>
+            </a:r>
+            <a:r>
+              <a:rPr sz="1600" b="0" i="0">
                 <a:solidFill>
                   <a:srgbClr val="1F2433"/>
                 </a:solidFill>
                 <a:latin typeface="Arial"/>
               </a:rPr>
-              <a:t>Em metanálise de proporção o erro-padrão depende da própria proporção, o que gera assimetria espúria, e os testes exigem ≥ 10 estudos. O viés de relato foi apreciado qualitativamente. </a:t>
-            </a:r>
-            <a:r>
-              <a:rPr sz="1500" b="1" i="0">
+              <a:t>em proporções o erro-padrão depende da própria proporção (assimetria espúria) e os testes exigem ≥ 10 estudos; viés de relato apreciado qualitativamente. </a:t>
+            </a:r>
+            <a:r>
+              <a:rPr sz="1600" b="1" i="0">
                 <a:solidFill>
                   <a:srgbClr val="1F2433"/>
                 </a:solidFill>
@@ -35805,7 +35935,7 @@
               <a:t>Sem metarregressão </a:t>
             </a:r>
             <a:r>
-              <a:rPr sz="1500" b="0" i="0">
+              <a:rPr sz="1600" b="0" i="0">
                 <a:solidFill>
                   <a:srgbClr val="1F2433"/>
                 </a:solidFill>
@@ -35814,7 +35944,7 @@
               <a:t>(poucos estudos por covariável). </a:t>
             </a:r>
             <a:r>
-              <a:rPr sz="1500" b="1" i="0">
+              <a:rPr sz="1600" b="1" i="0">
                 <a:solidFill>
                   <a:srgbClr val="1F2433"/>
                 </a:solidFill>
@@ -35823,13 +35953,13 @@
               <a:t>Riscos relativos </a:t>
             </a:r>
             <a:r>
-              <a:rPr sz="1500" b="0" i="0">
+              <a:rPr sz="1600" b="0" i="0">
                 <a:solidFill>
                   <a:srgbClr val="1F2433"/>
                 </a:solidFill>
                 <a:latin typeface="Arial"/>
               </a:rPr>
-              <a:t>dos desfechos objetivos: escala log, método de Wald.</a:t>
+              <a:t>na escala log pelo método de Wald.</a:t>
             </a:r>
           </a:p>
         </p:txBody>
